--- a/4PatronesdeDiseño/Desarrollo de Software Científico Colaborativo.pptx
+++ b/4PatronesdeDiseño/Desarrollo de Software Científico Colaborativo.pptx
@@ -12,6 +12,22 @@
     <p:sldId id="260" r:id="rId6"/>
     <p:sldId id="261" r:id="rId7"/>
     <p:sldId id="262" r:id="rId8"/>
+    <p:sldId id="263" r:id="rId9"/>
+    <p:sldId id="272" r:id="rId10"/>
+    <p:sldId id="264" r:id="rId11"/>
+    <p:sldId id="273" r:id="rId12"/>
+    <p:sldId id="265" r:id="rId13"/>
+    <p:sldId id="274" r:id="rId14"/>
+    <p:sldId id="266" r:id="rId15"/>
+    <p:sldId id="275" r:id="rId16"/>
+    <p:sldId id="267" r:id="rId17"/>
+    <p:sldId id="276" r:id="rId18"/>
+    <p:sldId id="268" r:id="rId19"/>
+    <p:sldId id="277" r:id="rId20"/>
+    <p:sldId id="269" r:id="rId21"/>
+    <p:sldId id="278" r:id="rId22"/>
+    <p:sldId id="270" r:id="rId23"/>
+    <p:sldId id="271" r:id="rId24"/>
   </p:sldIdLst>
   <p:sldSz cx="12192000" cy="6858000"/>
   <p:notesSz cx="6858000" cy="9144000"/>
@@ -110,6 +126,11 @@
       </a:defRPr>
     </a:lvl9pPr>
   </p:defaultTextStyle>
+  <p:extLst>
+    <p:ext uri="{EFAFB233-063F-42B5-8137-9DF3F51BA10A}">
+      <p15:sldGuideLst xmlns:p15="http://schemas.microsoft.com/office/powerpoint/2012/main"/>
+    </p:ext>
+  </p:extLst>
 </p:presentation>
 </file>
 
@@ -262,7 +283,7 @@
           <a:p>
             <a:fld id="{16DB10F9-DDC1-41B7-9DF5-1EE482492C92}" type="datetimeFigureOut">
               <a:rPr lang="es-CO" smtClean="0"/>
-              <a:t>16/09/2025</a:t>
+              <a:t>21/09/2025</a:t>
             </a:fld>
             <a:endParaRPr lang="es-CO"/>
           </a:p>
@@ -462,7 +483,7 @@
           <a:p>
             <a:fld id="{16DB10F9-DDC1-41B7-9DF5-1EE482492C92}" type="datetimeFigureOut">
               <a:rPr lang="es-CO" smtClean="0"/>
-              <a:t>16/09/2025</a:t>
+              <a:t>21/09/2025</a:t>
             </a:fld>
             <a:endParaRPr lang="es-CO"/>
           </a:p>
@@ -672,7 +693,7 @@
           <a:p>
             <a:fld id="{16DB10F9-DDC1-41B7-9DF5-1EE482492C92}" type="datetimeFigureOut">
               <a:rPr lang="es-CO" smtClean="0"/>
-              <a:t>16/09/2025</a:t>
+              <a:t>21/09/2025</a:t>
             </a:fld>
             <a:endParaRPr lang="es-CO"/>
           </a:p>
@@ -872,7 +893,7 @@
           <a:p>
             <a:fld id="{16DB10F9-DDC1-41B7-9DF5-1EE482492C92}" type="datetimeFigureOut">
               <a:rPr lang="es-CO" smtClean="0"/>
-              <a:t>16/09/2025</a:t>
+              <a:t>21/09/2025</a:t>
             </a:fld>
             <a:endParaRPr lang="es-CO"/>
           </a:p>
@@ -1148,7 +1169,7 @@
           <a:p>
             <a:fld id="{16DB10F9-DDC1-41B7-9DF5-1EE482492C92}" type="datetimeFigureOut">
               <a:rPr lang="es-CO" smtClean="0"/>
-              <a:t>16/09/2025</a:t>
+              <a:t>21/09/2025</a:t>
             </a:fld>
             <a:endParaRPr lang="es-CO"/>
           </a:p>
@@ -1416,7 +1437,7 @@
           <a:p>
             <a:fld id="{16DB10F9-DDC1-41B7-9DF5-1EE482492C92}" type="datetimeFigureOut">
               <a:rPr lang="es-CO" smtClean="0"/>
-              <a:t>16/09/2025</a:t>
+              <a:t>21/09/2025</a:t>
             </a:fld>
             <a:endParaRPr lang="es-CO"/>
           </a:p>
@@ -1831,7 +1852,7 @@
           <a:p>
             <a:fld id="{16DB10F9-DDC1-41B7-9DF5-1EE482492C92}" type="datetimeFigureOut">
               <a:rPr lang="es-CO" smtClean="0"/>
-              <a:t>16/09/2025</a:t>
+              <a:t>21/09/2025</a:t>
             </a:fld>
             <a:endParaRPr lang="es-CO"/>
           </a:p>
@@ -1973,7 +1994,7 @@
           <a:p>
             <a:fld id="{16DB10F9-DDC1-41B7-9DF5-1EE482492C92}" type="datetimeFigureOut">
               <a:rPr lang="es-CO" smtClean="0"/>
-              <a:t>16/09/2025</a:t>
+              <a:t>21/09/2025</a:t>
             </a:fld>
             <a:endParaRPr lang="es-CO"/>
           </a:p>
@@ -2086,7 +2107,7 @@
           <a:p>
             <a:fld id="{16DB10F9-DDC1-41B7-9DF5-1EE482492C92}" type="datetimeFigureOut">
               <a:rPr lang="es-CO" smtClean="0"/>
-              <a:t>16/09/2025</a:t>
+              <a:t>21/09/2025</a:t>
             </a:fld>
             <a:endParaRPr lang="es-CO"/>
           </a:p>
@@ -2399,7 +2420,7 @@
           <a:p>
             <a:fld id="{16DB10F9-DDC1-41B7-9DF5-1EE482492C92}" type="datetimeFigureOut">
               <a:rPr lang="es-CO" smtClean="0"/>
-              <a:t>16/09/2025</a:t>
+              <a:t>21/09/2025</a:t>
             </a:fld>
             <a:endParaRPr lang="es-CO"/>
           </a:p>
@@ -2688,7 +2709,7 @@
           <a:p>
             <a:fld id="{16DB10F9-DDC1-41B7-9DF5-1EE482492C92}" type="datetimeFigureOut">
               <a:rPr lang="es-CO" smtClean="0"/>
-              <a:t>16/09/2025</a:t>
+              <a:t>21/09/2025</a:t>
             </a:fld>
             <a:endParaRPr lang="es-CO"/>
           </a:p>
@@ -2931,7 +2952,7 @@
           <a:p>
             <a:fld id="{16DB10F9-DDC1-41B7-9DF5-1EE482492C92}" type="datetimeFigureOut">
               <a:rPr lang="es-CO" smtClean="0"/>
-              <a:t>16/09/2025</a:t>
+              <a:t>21/09/2025</a:t>
             </a:fld>
             <a:endParaRPr lang="es-CO"/>
           </a:p>
@@ -3413,6 +3434,5892 @@
 </p:sld>
 </file>
 
+<file path=ppt/slides/slide10.xml><?xml version="1.0" encoding="utf-8"?>
+<p:sld xmlns:a="http://schemas.openxmlformats.org/drawingml/2006/main" xmlns:r="http://schemas.openxmlformats.org/officeDocument/2006/relationships" xmlns:p="http://schemas.openxmlformats.org/presentationml/2006/main">
+  <p:cSld>
+    <p:spTree>
+      <p:nvGrpSpPr>
+        <p:cNvPr id="1" name=""/>
+        <p:cNvGrpSpPr/>
+        <p:nvPr/>
+      </p:nvGrpSpPr>
+      <p:grpSpPr>
+        <a:xfrm>
+          <a:off x="0" y="0"/>
+          <a:ext cx="0" cy="0"/>
+          <a:chOff x="0" y="0"/>
+          <a:chExt cx="0" cy="0"/>
+        </a:xfrm>
+      </p:grpSpPr>
+      <p:pic>
+        <p:nvPicPr>
+          <p:cNvPr id="5" name="Imagen 4">
+            <a:extLst>
+              <a:ext uri="{FF2B5EF4-FFF2-40B4-BE49-F238E27FC236}">
+                <a16:creationId xmlns:a16="http://schemas.microsoft.com/office/drawing/2014/main" id="{09847E53-0289-437F-999D-59C51EEAF09E}"/>
+              </a:ext>
+            </a:extLst>
+          </p:cNvPr>
+          <p:cNvPicPr>
+            <a:picLocks noChangeAspect="1"/>
+          </p:cNvPicPr>
+          <p:nvPr/>
+        </p:nvPicPr>
+        <p:blipFill rotWithShape="1">
+          <a:blip r:embed="rId2"/>
+          <a:srcRect l="13261" t="22982" r="58261" b="13025"/>
+          <a:stretch/>
+        </p:blipFill>
+        <p:spPr>
+          <a:xfrm>
+            <a:off x="0" y="809035"/>
+            <a:ext cx="4386947" cy="5542287"/>
+          </a:xfrm>
+          <a:prstGeom prst="rect">
+            <a:avLst/>
+          </a:prstGeom>
+        </p:spPr>
+      </p:pic>
+      <p:sp>
+        <p:nvSpPr>
+          <p:cNvPr id="6" name="Rectangle 1">
+            <a:extLst>
+              <a:ext uri="{FF2B5EF4-FFF2-40B4-BE49-F238E27FC236}">
+                <a16:creationId xmlns:a16="http://schemas.microsoft.com/office/drawing/2014/main" id="{0D1C17F5-144D-4B51-AF4F-1D60FC6C6541}"/>
+              </a:ext>
+            </a:extLst>
+          </p:cNvPr>
+          <p:cNvSpPr>
+            <a:spLocks noChangeArrowheads="1"/>
+          </p:cNvSpPr>
+          <p:nvPr/>
+        </p:nvSpPr>
+        <p:spPr bwMode="auto">
+          <a:xfrm>
+            <a:off x="4810539" y="456246"/>
+            <a:ext cx="7381461" cy="6247864"/>
+          </a:xfrm>
+          <a:prstGeom prst="rect">
+            <a:avLst/>
+          </a:prstGeom>
+          <a:noFill/>
+          <a:ln>
+            <a:noFill/>
+          </a:ln>
+          <a:effectLst/>
+          <a:extLst>
+            <a:ext uri="{909E8E84-426E-40DD-AFC4-6F175D3DCCD1}">
+              <a14:hiddenFill xmlns:a14="http://schemas.microsoft.com/office/drawing/2010/main">
+                <a:solidFill>
+                  <a:schemeClr val="accent1"/>
+                </a:solidFill>
+              </a14:hiddenFill>
+            </a:ext>
+            <a:ext uri="{91240B29-F687-4F45-9708-019B960494DF}">
+              <a14:hiddenLine xmlns:a14="http://schemas.microsoft.com/office/drawing/2010/main" w="9525">
+                <a:solidFill>
+                  <a:schemeClr val="tx1"/>
+                </a:solidFill>
+                <a:miter lim="800000"/>
+                <a:headEnd/>
+                <a:tailEnd/>
+              </a14:hiddenLine>
+            </a:ext>
+            <a:ext uri="{AF507438-7753-43E0-B8FC-AC1667EBCBE1}">
+              <a14:hiddenEffects xmlns:a14="http://schemas.microsoft.com/office/drawing/2010/main">
+                <a:effectLst>
+                  <a:outerShdw dist="35921" dir="2700000" algn="ctr" rotWithShape="0">
+                    <a:schemeClr val="bg2"/>
+                  </a:outerShdw>
+                </a:effectLst>
+              </a14:hiddenEffects>
+            </a:ext>
+          </a:extLst>
+        </p:spPr>
+        <p:txBody>
+          <a:bodyPr vert="horz" wrap="square" lIns="91440" tIns="45720" rIns="91440" bIns="45720" numCol="1" anchor="ctr" anchorCtr="0" compatLnSpc="1">
+            <a:prstTxWarp prst="textNoShape">
+              <a:avLst/>
+            </a:prstTxWarp>
+            <a:spAutoFit/>
+          </a:bodyPr>
+          <a:lstStyle/>
+          <a:p>
+            <a:r>
+              <a:rPr lang="es-CO" altLang="es-CO" sz="2000" b="1" dirty="0">
+                <a:latin typeface="Arial" panose="020B0604020202020204" pitchFamily="34" charset="0"/>
+                <a:cs typeface="Arial" panose="020B0604020202020204" pitchFamily="34" charset="0"/>
+              </a:rPr>
+              <a:t>Clase Calculadora y el Patrón Estado</a:t>
+            </a:r>
+          </a:p>
+          <a:p>
+            <a:r>
+              <a:rPr lang="es-CO" altLang="es-CO" sz="2000" dirty="0">
+                <a:latin typeface="Arial" panose="020B0604020202020204" pitchFamily="34" charset="0"/>
+                <a:cs typeface="Arial" panose="020B0604020202020204" pitchFamily="34" charset="0"/>
+              </a:rPr>
+              <a:t>La clase Calculadora parece vacía, porque delegamos los comportamientos en los estados.</a:t>
+            </a:r>
+          </a:p>
+          <a:p>
+            <a:r>
+              <a:rPr lang="es-CO" altLang="es-CO" sz="2000" dirty="0">
+                <a:latin typeface="Arial" panose="020B0604020202020204" pitchFamily="34" charset="0"/>
+                <a:cs typeface="Arial" panose="020B0604020202020204" pitchFamily="34" charset="0"/>
+              </a:rPr>
+              <a:t>Atributos:</a:t>
+            </a:r>
+          </a:p>
+          <a:p>
+            <a:pPr lvl="1" eaLnBrk="0" fontAlgn="base" hangingPunct="0">
+              <a:spcBef>
+                <a:spcPct val="0"/>
+              </a:spcBef>
+              <a:spcAft>
+                <a:spcPct val="0"/>
+              </a:spcAft>
+              <a:buFontTx/>
+              <a:buChar char="•"/>
+            </a:pPr>
+            <a:r>
+              <a:rPr lang="es-CO" altLang="es-CO" sz="2000" dirty="0">
+                <a:latin typeface="Arial" panose="020B0604020202020204" pitchFamily="34" charset="0"/>
+                <a:cs typeface="Arial" panose="020B0604020202020204" pitchFamily="34" charset="0"/>
+              </a:rPr>
+              <a:t>Solo tiene uno: _estado, que guarda la referencia al estado actual.</a:t>
+            </a:r>
+          </a:p>
+          <a:p>
+            <a:pPr lvl="1" eaLnBrk="0" fontAlgn="base" hangingPunct="0">
+              <a:spcBef>
+                <a:spcPct val="0"/>
+              </a:spcBef>
+              <a:spcAft>
+                <a:spcPct val="0"/>
+              </a:spcAft>
+              <a:buFontTx/>
+              <a:buChar char="•"/>
+            </a:pPr>
+            <a:r>
+              <a:rPr lang="es-CO" altLang="es-CO" sz="2000" dirty="0">
+                <a:latin typeface="Arial" panose="020B0604020202020204" pitchFamily="34" charset="0"/>
+                <a:cs typeface="Arial" panose="020B0604020202020204" pitchFamily="34" charset="0"/>
+              </a:rPr>
+              <a:t>Los demás datos se almacenan en los objetos estado.</a:t>
+            </a:r>
+          </a:p>
+          <a:p>
+            <a:r>
+              <a:rPr lang="es-CO" altLang="es-CO" sz="2000" dirty="0">
+                <a:latin typeface="Arial" panose="020B0604020202020204" pitchFamily="34" charset="0"/>
+                <a:cs typeface="Arial" panose="020B0604020202020204" pitchFamily="34" charset="0"/>
+              </a:rPr>
+              <a:t>Inicialización:</a:t>
+            </a:r>
+          </a:p>
+          <a:p>
+            <a:pPr lvl="1" eaLnBrk="0" fontAlgn="base" hangingPunct="0">
+              <a:spcBef>
+                <a:spcPct val="0"/>
+              </a:spcBef>
+              <a:spcAft>
+                <a:spcPct val="0"/>
+              </a:spcAft>
+              <a:buFontTx/>
+              <a:buChar char="•"/>
+            </a:pPr>
+            <a:r>
+              <a:rPr lang="es-CO" altLang="es-CO" sz="2000" dirty="0">
+                <a:latin typeface="Arial" panose="020B0604020202020204" pitchFamily="34" charset="0"/>
+                <a:cs typeface="Arial" panose="020B0604020202020204" pitchFamily="34" charset="0"/>
+              </a:rPr>
+              <a:t>Al crear un objeto Calculadora, se invoca </a:t>
+            </a:r>
+            <a:r>
+              <a:rPr lang="es-CO" altLang="es-CO" sz="2000" dirty="0" err="1">
+                <a:latin typeface="Arial" panose="020B0604020202020204" pitchFamily="34" charset="0"/>
+                <a:cs typeface="Arial" panose="020B0604020202020204" pitchFamily="34" charset="0"/>
+              </a:rPr>
+              <a:t>reset</a:t>
+            </a:r>
+            <a:r>
+              <a:rPr lang="es-CO" altLang="es-CO" sz="2000" dirty="0">
+                <a:latin typeface="Arial" panose="020B0604020202020204" pitchFamily="34" charset="0"/>
+                <a:cs typeface="Arial" panose="020B0604020202020204" pitchFamily="34" charset="0"/>
+              </a:rPr>
+              <a:t>(), que coloca la calculadora en el </a:t>
+            </a:r>
+            <a:r>
+              <a:rPr lang="es-CO" altLang="es-CO" sz="2000" dirty="0" err="1">
+                <a:latin typeface="Arial" panose="020B0604020202020204" pitchFamily="34" charset="0"/>
+                <a:cs typeface="Arial" panose="020B0604020202020204" pitchFamily="34" charset="0"/>
+              </a:rPr>
+              <a:t>EstadoInicial</a:t>
+            </a:r>
+            <a:r>
+              <a:rPr lang="es-CO" altLang="es-CO" sz="2000" dirty="0">
+                <a:latin typeface="Arial" panose="020B0604020202020204" pitchFamily="34" charset="0"/>
+                <a:cs typeface="Arial" panose="020B0604020202020204" pitchFamily="34" charset="0"/>
+              </a:rPr>
+              <a:t>.</a:t>
+            </a:r>
+          </a:p>
+          <a:p>
+            <a:r>
+              <a:rPr lang="es-CO" altLang="es-CO" sz="2000" dirty="0">
+                <a:latin typeface="Arial" panose="020B0604020202020204" pitchFamily="34" charset="0"/>
+                <a:cs typeface="Arial" panose="020B0604020202020204" pitchFamily="34" charset="0"/>
+              </a:rPr>
+              <a:t>Cambiar de estado:</a:t>
+            </a:r>
+          </a:p>
+          <a:p>
+            <a:pPr lvl="1" eaLnBrk="0" fontAlgn="base" hangingPunct="0">
+              <a:spcBef>
+                <a:spcPct val="0"/>
+              </a:spcBef>
+              <a:spcAft>
+                <a:spcPct val="0"/>
+              </a:spcAft>
+              <a:buFontTx/>
+              <a:buChar char="•"/>
+            </a:pPr>
+            <a:r>
+              <a:rPr lang="es-CO" altLang="es-CO" sz="2000" dirty="0">
+                <a:latin typeface="Arial" panose="020B0604020202020204" pitchFamily="34" charset="0"/>
+                <a:cs typeface="Arial" panose="020B0604020202020204" pitchFamily="34" charset="0"/>
+              </a:rPr>
+              <a:t>El método </a:t>
+            </a:r>
+            <a:r>
+              <a:rPr lang="es-CO" altLang="es-CO" sz="2000" dirty="0" err="1">
+                <a:latin typeface="Arial" panose="020B0604020202020204" pitchFamily="34" charset="0"/>
+                <a:cs typeface="Arial" panose="020B0604020202020204" pitchFamily="34" charset="0"/>
+              </a:rPr>
+              <a:t>cambiar_estado</a:t>
+            </a:r>
+            <a:r>
+              <a:rPr lang="es-CO" altLang="es-CO" sz="2000" dirty="0">
+                <a:latin typeface="Arial" panose="020B0604020202020204" pitchFamily="34" charset="0"/>
+                <a:cs typeface="Arial" panose="020B0604020202020204" pitchFamily="34" charset="0"/>
+              </a:rPr>
+              <a:t>() permite que los propios estados realicen las transiciones cuando sea necesario.</a:t>
+            </a:r>
+          </a:p>
+          <a:p>
+            <a:r>
+              <a:rPr lang="es-CO" altLang="es-CO" sz="2000" dirty="0">
+                <a:latin typeface="Arial" panose="020B0604020202020204" pitchFamily="34" charset="0"/>
+                <a:cs typeface="Arial" panose="020B0604020202020204" pitchFamily="34" charset="0"/>
+              </a:rPr>
+              <a:t>Delegación de operaciones:</a:t>
+            </a:r>
+          </a:p>
+          <a:p>
+            <a:pPr lvl="1" eaLnBrk="0" fontAlgn="base" hangingPunct="0">
+              <a:spcBef>
+                <a:spcPct val="0"/>
+              </a:spcBef>
+              <a:spcAft>
+                <a:spcPct val="0"/>
+              </a:spcAft>
+              <a:buFontTx/>
+              <a:buChar char="•"/>
+            </a:pPr>
+            <a:r>
+              <a:rPr lang="es-CO" altLang="es-CO" sz="2000" dirty="0">
+                <a:latin typeface="Arial" panose="020B0604020202020204" pitchFamily="34" charset="0"/>
+                <a:cs typeface="Arial" panose="020B0604020202020204" pitchFamily="34" charset="0"/>
+              </a:rPr>
+              <a:t>Todas las operaciones se ejecutan llamando al método del estado actual.</a:t>
+            </a:r>
+          </a:p>
+          <a:p>
+            <a:pPr lvl="1" eaLnBrk="0" fontAlgn="base" hangingPunct="0">
+              <a:spcBef>
+                <a:spcPct val="0"/>
+              </a:spcBef>
+              <a:spcAft>
+                <a:spcPct val="0"/>
+              </a:spcAft>
+              <a:buFontTx/>
+              <a:buChar char="•"/>
+            </a:pPr>
+            <a:r>
+              <a:rPr lang="es-CO" altLang="es-CO" sz="2000" dirty="0">
+                <a:latin typeface="Arial" panose="020B0604020202020204" pitchFamily="34" charset="0"/>
+                <a:cs typeface="Arial" panose="020B0604020202020204" pitchFamily="34" charset="0"/>
+              </a:rPr>
+              <a:t>Algunas funciones usan try/</a:t>
+            </a:r>
+            <a:r>
+              <a:rPr lang="es-CO" altLang="es-CO" sz="2000" dirty="0" err="1">
+                <a:latin typeface="Arial" panose="020B0604020202020204" pitchFamily="34" charset="0"/>
+                <a:cs typeface="Arial" panose="020B0604020202020204" pitchFamily="34" charset="0"/>
+              </a:rPr>
+              <a:t>except</a:t>
+            </a:r>
+            <a:r>
+              <a:rPr lang="es-CO" altLang="es-CO" sz="2000" dirty="0">
+                <a:latin typeface="Arial" panose="020B0604020202020204" pitchFamily="34" charset="0"/>
+                <a:cs typeface="Arial" panose="020B0604020202020204" pitchFamily="34" charset="0"/>
+              </a:rPr>
+              <a:t> para capturar errores (operador inválido, división entre cero, raíz negativa, etc.).</a:t>
+            </a:r>
+          </a:p>
+          <a:p>
+            <a:pPr lvl="1" eaLnBrk="0" fontAlgn="base" hangingPunct="0">
+              <a:spcBef>
+                <a:spcPct val="0"/>
+              </a:spcBef>
+              <a:spcAft>
+                <a:spcPct val="0"/>
+              </a:spcAft>
+              <a:buFontTx/>
+              <a:buChar char="•"/>
+            </a:pPr>
+            <a:r>
+              <a:rPr lang="es-CO" altLang="es-CO" sz="2000" dirty="0">
+                <a:latin typeface="Arial" panose="020B0604020202020204" pitchFamily="34" charset="0"/>
+                <a:cs typeface="Arial" panose="020B0604020202020204" pitchFamily="34" charset="0"/>
+              </a:rPr>
+              <a:t>Ante un error, la calculadora pasa automáticamente al </a:t>
+            </a:r>
+            <a:r>
+              <a:rPr lang="es-CO" altLang="es-CO" sz="2000" dirty="0" err="1">
+                <a:latin typeface="Arial" panose="020B0604020202020204" pitchFamily="34" charset="0"/>
+                <a:cs typeface="Arial" panose="020B0604020202020204" pitchFamily="34" charset="0"/>
+              </a:rPr>
+              <a:t>EstadoError</a:t>
+            </a:r>
+            <a:r>
+              <a:rPr lang="es-CO" altLang="es-CO" sz="2000" dirty="0">
+                <a:latin typeface="Arial" panose="020B0604020202020204" pitchFamily="34" charset="0"/>
+                <a:cs typeface="Arial" panose="020B0604020202020204" pitchFamily="34" charset="0"/>
+              </a:rPr>
+              <a:t>.</a:t>
+            </a:r>
+          </a:p>
+        </p:txBody>
+      </p:sp>
+      <p:sp>
+        <p:nvSpPr>
+          <p:cNvPr id="7" name="Rectangle 2">
+            <a:extLst>
+              <a:ext uri="{FF2B5EF4-FFF2-40B4-BE49-F238E27FC236}">
+                <a16:creationId xmlns:a16="http://schemas.microsoft.com/office/drawing/2014/main" id="{FF1E77B9-1A63-4404-9D02-1AADB8B8B3B2}"/>
+              </a:ext>
+            </a:extLst>
+          </p:cNvPr>
+          <p:cNvSpPr>
+            <a:spLocks noChangeArrowheads="1"/>
+          </p:cNvSpPr>
+          <p:nvPr/>
+        </p:nvSpPr>
+        <p:spPr bwMode="auto">
+          <a:xfrm>
+            <a:off x="0" y="0"/>
+            <a:ext cx="4386947" cy="584775"/>
+          </a:xfrm>
+          <a:prstGeom prst="rect">
+            <a:avLst/>
+          </a:prstGeom>
+          <a:solidFill>
+            <a:srgbClr val="DCF0EF"/>
+          </a:solidFill>
+          <a:ln>
+            <a:noFill/>
+          </a:ln>
+          <a:effectLst/>
+          <a:extLst>
+            <a:ext uri="{91240B29-F687-4F45-9708-019B960494DF}">
+              <a14:hiddenLine xmlns:a14="http://schemas.microsoft.com/office/drawing/2010/main" w="9525">
+                <a:solidFill>
+                  <a:schemeClr val="tx1"/>
+                </a:solidFill>
+                <a:miter lim="800000"/>
+                <a:headEnd/>
+                <a:tailEnd/>
+              </a14:hiddenLine>
+            </a:ext>
+            <a:ext uri="{AF507438-7753-43E0-B8FC-AC1667EBCBE1}">
+              <a14:hiddenEffects xmlns:a14="http://schemas.microsoft.com/office/drawing/2010/main">
+                <a:effectLst>
+                  <a:outerShdw dist="35921" dir="2700000" algn="ctr" rotWithShape="0">
+                    <a:schemeClr val="bg2"/>
+                  </a:outerShdw>
+                </a:effectLst>
+              </a14:hiddenEffects>
+            </a:ext>
+          </a:extLst>
+        </p:spPr>
+        <p:txBody>
+          <a:bodyPr vert="horz" wrap="square" lIns="91440" tIns="45720" rIns="91440" bIns="45720" numCol="1" anchor="ctr" anchorCtr="0" compatLnSpc="1">
+            <a:prstTxWarp prst="textNoShape">
+              <a:avLst/>
+            </a:prstTxWarp>
+            <a:spAutoFit/>
+          </a:bodyPr>
+          <a:lstStyle>
+            <a:lvl1pPr eaLnBrk="0" fontAlgn="base" hangingPunct="0">
+              <a:spcBef>
+                <a:spcPct val="0"/>
+              </a:spcBef>
+              <a:spcAft>
+                <a:spcPct val="0"/>
+              </a:spcAft>
+              <a:defRPr>
+                <a:solidFill>
+                  <a:schemeClr val="tx1"/>
+                </a:solidFill>
+                <a:latin typeface="Arial" panose="020B0604020202020204" pitchFamily="34" charset="0"/>
+              </a:defRPr>
+            </a:lvl1pPr>
+            <a:lvl2pPr eaLnBrk="0" fontAlgn="base" hangingPunct="0">
+              <a:spcBef>
+                <a:spcPct val="0"/>
+              </a:spcBef>
+              <a:spcAft>
+                <a:spcPct val="0"/>
+              </a:spcAft>
+              <a:defRPr>
+                <a:solidFill>
+                  <a:schemeClr val="tx1"/>
+                </a:solidFill>
+                <a:latin typeface="Arial" panose="020B0604020202020204" pitchFamily="34" charset="0"/>
+              </a:defRPr>
+            </a:lvl2pPr>
+            <a:lvl3pPr eaLnBrk="0" fontAlgn="base" hangingPunct="0">
+              <a:spcBef>
+                <a:spcPct val="0"/>
+              </a:spcBef>
+              <a:spcAft>
+                <a:spcPct val="0"/>
+              </a:spcAft>
+              <a:defRPr>
+                <a:solidFill>
+                  <a:schemeClr val="tx1"/>
+                </a:solidFill>
+                <a:latin typeface="Arial" panose="020B0604020202020204" pitchFamily="34" charset="0"/>
+              </a:defRPr>
+            </a:lvl3pPr>
+            <a:lvl4pPr eaLnBrk="0" fontAlgn="base" hangingPunct="0">
+              <a:spcBef>
+                <a:spcPct val="0"/>
+              </a:spcBef>
+              <a:spcAft>
+                <a:spcPct val="0"/>
+              </a:spcAft>
+              <a:defRPr>
+                <a:solidFill>
+                  <a:schemeClr val="tx1"/>
+                </a:solidFill>
+                <a:latin typeface="Arial" panose="020B0604020202020204" pitchFamily="34" charset="0"/>
+              </a:defRPr>
+            </a:lvl4pPr>
+            <a:lvl5pPr eaLnBrk="0" fontAlgn="base" hangingPunct="0">
+              <a:spcBef>
+                <a:spcPct val="0"/>
+              </a:spcBef>
+              <a:spcAft>
+                <a:spcPct val="0"/>
+              </a:spcAft>
+              <a:defRPr>
+                <a:solidFill>
+                  <a:schemeClr val="tx1"/>
+                </a:solidFill>
+                <a:latin typeface="Arial" panose="020B0604020202020204" pitchFamily="34" charset="0"/>
+              </a:defRPr>
+            </a:lvl5pPr>
+            <a:lvl6pPr eaLnBrk="0" fontAlgn="base" hangingPunct="0">
+              <a:spcBef>
+                <a:spcPct val="0"/>
+              </a:spcBef>
+              <a:spcAft>
+                <a:spcPct val="0"/>
+              </a:spcAft>
+              <a:defRPr>
+                <a:solidFill>
+                  <a:schemeClr val="tx1"/>
+                </a:solidFill>
+                <a:latin typeface="Arial" panose="020B0604020202020204" pitchFamily="34" charset="0"/>
+              </a:defRPr>
+            </a:lvl6pPr>
+            <a:lvl7pPr eaLnBrk="0" fontAlgn="base" hangingPunct="0">
+              <a:spcBef>
+                <a:spcPct val="0"/>
+              </a:spcBef>
+              <a:spcAft>
+                <a:spcPct val="0"/>
+              </a:spcAft>
+              <a:defRPr>
+                <a:solidFill>
+                  <a:schemeClr val="tx1"/>
+                </a:solidFill>
+                <a:latin typeface="Arial" panose="020B0604020202020204" pitchFamily="34" charset="0"/>
+              </a:defRPr>
+            </a:lvl7pPr>
+            <a:lvl8pPr eaLnBrk="0" fontAlgn="base" hangingPunct="0">
+              <a:spcBef>
+                <a:spcPct val="0"/>
+              </a:spcBef>
+              <a:spcAft>
+                <a:spcPct val="0"/>
+              </a:spcAft>
+              <a:defRPr>
+                <a:solidFill>
+                  <a:schemeClr val="tx1"/>
+                </a:solidFill>
+                <a:latin typeface="Arial" panose="020B0604020202020204" pitchFamily="34" charset="0"/>
+              </a:defRPr>
+            </a:lvl8pPr>
+            <a:lvl9pPr eaLnBrk="0" fontAlgn="base" hangingPunct="0">
+              <a:spcBef>
+                <a:spcPct val="0"/>
+              </a:spcBef>
+              <a:spcAft>
+                <a:spcPct val="0"/>
+              </a:spcAft>
+              <a:defRPr>
+                <a:solidFill>
+                  <a:schemeClr val="tx1"/>
+                </a:solidFill>
+                <a:latin typeface="Arial" panose="020B0604020202020204" pitchFamily="34" charset="0"/>
+              </a:defRPr>
+            </a:lvl9pPr>
+          </a:lstStyle>
+          <a:p>
+            <a:pPr marL="0" marR="0" lvl="0" indent="0" algn="l" defTabSz="914400" rtl="0" eaLnBrk="0" fontAlgn="base" latinLnBrk="0" hangingPunct="0">
+              <a:lnSpc>
+                <a:spcPct val="100000"/>
+              </a:lnSpc>
+              <a:spcBef>
+                <a:spcPct val="0"/>
+              </a:spcBef>
+              <a:spcAft>
+                <a:spcPct val="0"/>
+              </a:spcAft>
+              <a:buClrTx/>
+              <a:buSzTx/>
+              <a:buFontTx/>
+              <a:buNone/>
+              <a:tabLst/>
+            </a:pPr>
+            <a:r>
+              <a:rPr kumimoji="0" lang="es-CO" altLang="es-CO" sz="3200" b="1" i="0" u="none" strike="noStrike" cap="none" normalizeH="0" baseline="0" dirty="0">
+                <a:ln>
+                  <a:noFill/>
+                </a:ln>
+                <a:solidFill>
+                  <a:srgbClr val="2C2C2C"/>
+                </a:solidFill>
+                <a:effectLst/>
+                <a:latin typeface="opensans-regular"/>
+              </a:rPr>
+              <a:t>clase </a:t>
+            </a:r>
+            <a:r>
+              <a:rPr kumimoji="0" lang="es-CO" altLang="es-CO" sz="3200" b="1" i="0" u="none" strike="noStrike" cap="none" normalizeH="0" baseline="0" dirty="0">
+                <a:ln>
+                  <a:noFill/>
+                </a:ln>
+                <a:solidFill>
+                  <a:srgbClr val="333333"/>
+                </a:solidFill>
+                <a:effectLst/>
+                <a:latin typeface="Arial Unicode MS"/>
+              </a:rPr>
+              <a:t>Calculadora</a:t>
+            </a:r>
+            <a:r>
+              <a:rPr kumimoji="0" lang="es-CO" altLang="es-CO" sz="3200" b="1" i="0" u="none" strike="noStrike" cap="none" normalizeH="0" baseline="0" dirty="0">
+                <a:ln>
+                  <a:noFill/>
+                </a:ln>
+                <a:solidFill>
+                  <a:srgbClr val="2C2C2C"/>
+                </a:solidFill>
+                <a:effectLst/>
+                <a:latin typeface="opensans-regular"/>
+              </a:rPr>
+              <a:t>:</a:t>
+            </a:r>
+            <a:r>
+              <a:rPr kumimoji="0" lang="es-CO" altLang="es-CO" sz="2800" b="1" i="0" u="none" strike="noStrike" cap="none" normalizeH="0" baseline="0" dirty="0">
+                <a:ln>
+                  <a:noFill/>
+                </a:ln>
+                <a:solidFill>
+                  <a:schemeClr val="tx1"/>
+                </a:solidFill>
+                <a:effectLst/>
+              </a:rPr>
+              <a:t> </a:t>
+            </a:r>
+            <a:endParaRPr kumimoji="0" lang="es-CO" altLang="es-CO" sz="4400" b="1" i="0" u="none" strike="noStrike" cap="none" normalizeH="0" baseline="0" dirty="0">
+              <a:ln>
+                <a:noFill/>
+              </a:ln>
+              <a:solidFill>
+                <a:schemeClr val="tx1"/>
+              </a:solidFill>
+              <a:effectLst/>
+            </a:endParaRPr>
+          </a:p>
+        </p:txBody>
+      </p:sp>
+    </p:spTree>
+    <p:extLst>
+      <p:ext uri="{BB962C8B-B14F-4D97-AF65-F5344CB8AC3E}">
+        <p14:creationId xmlns:p14="http://schemas.microsoft.com/office/powerpoint/2010/main" val="2899304616"/>
+      </p:ext>
+    </p:extLst>
+  </p:cSld>
+  <p:clrMapOvr>
+    <a:masterClrMapping/>
+  </p:clrMapOvr>
+</p:sld>
+</file>
+
+<file path=ppt/slides/slide11.xml><?xml version="1.0" encoding="utf-8"?>
+<p:sld xmlns:a="http://schemas.openxmlformats.org/drawingml/2006/main" xmlns:r="http://schemas.openxmlformats.org/officeDocument/2006/relationships" xmlns:p="http://schemas.openxmlformats.org/presentationml/2006/main">
+  <p:cSld>
+    <p:spTree>
+      <p:nvGrpSpPr>
+        <p:cNvPr id="1" name=""/>
+        <p:cNvGrpSpPr/>
+        <p:nvPr/>
+      </p:nvGrpSpPr>
+      <p:grpSpPr>
+        <a:xfrm>
+          <a:off x="0" y="0"/>
+          <a:ext cx="0" cy="0"/>
+          <a:chOff x="0" y="0"/>
+          <a:chExt cx="0" cy="0"/>
+        </a:xfrm>
+      </p:grpSpPr>
+      <p:pic>
+        <p:nvPicPr>
+          <p:cNvPr id="5122" name="Picture 2" descr="Cómo hacer una calculadora en Python – Diagrama de Clases">
+            <a:extLst>
+              <a:ext uri="{FF2B5EF4-FFF2-40B4-BE49-F238E27FC236}">
+                <a16:creationId xmlns:a16="http://schemas.microsoft.com/office/drawing/2014/main" id="{538D7BB9-DE06-47A5-899D-55100EDEBDC8}"/>
+              </a:ext>
+            </a:extLst>
+          </p:cNvPr>
+          <p:cNvPicPr>
+            <a:picLocks noChangeAspect="1" noChangeArrowheads="1"/>
+          </p:cNvPicPr>
+          <p:nvPr/>
+        </p:nvPicPr>
+        <p:blipFill>
+          <a:blip r:embed="rId2">
+            <a:extLst>
+              <a:ext uri="{28A0092B-C50C-407E-A947-70E740481C1C}">
+                <a14:useLocalDpi xmlns:a14="http://schemas.microsoft.com/office/drawing/2010/main" val="0"/>
+              </a:ext>
+            </a:extLst>
+          </a:blip>
+          <a:srcRect/>
+          <a:stretch>
+            <a:fillRect/>
+          </a:stretch>
+        </p:blipFill>
+        <p:spPr bwMode="auto">
+          <a:xfrm>
+            <a:off x="793897" y="0"/>
+            <a:ext cx="10887431" cy="6847174"/>
+          </a:xfrm>
+          <a:prstGeom prst="rect">
+            <a:avLst/>
+          </a:prstGeom>
+          <a:noFill/>
+          <a:extLst>
+            <a:ext uri="{909E8E84-426E-40DD-AFC4-6F175D3DCCD1}">
+              <a14:hiddenFill xmlns:a14="http://schemas.microsoft.com/office/drawing/2010/main">
+                <a:solidFill>
+                  <a:srgbClr val="FFFFFF"/>
+                </a:solidFill>
+              </a14:hiddenFill>
+            </a:ext>
+          </a:extLst>
+        </p:spPr>
+      </p:pic>
+      <p:sp>
+        <p:nvSpPr>
+          <p:cNvPr id="4" name="CuadroTexto 3">
+            <a:extLst>
+              <a:ext uri="{FF2B5EF4-FFF2-40B4-BE49-F238E27FC236}">
+                <a16:creationId xmlns:a16="http://schemas.microsoft.com/office/drawing/2014/main" id="{20C4A5F7-8CAB-4D1C-9EA6-531B40E931FA}"/>
+              </a:ext>
+            </a:extLst>
+          </p:cNvPr>
+          <p:cNvSpPr txBox="1"/>
+          <p:nvPr/>
+        </p:nvSpPr>
+        <p:spPr>
+          <a:xfrm>
+            <a:off x="1285461" y="199647"/>
+            <a:ext cx="2252870" cy="2215991"/>
+          </a:xfrm>
+          <a:prstGeom prst="rect">
+            <a:avLst/>
+          </a:prstGeom>
+          <a:noFill/>
+        </p:spPr>
+        <p:txBody>
+          <a:bodyPr wrap="square">
+            <a:spAutoFit/>
+          </a:bodyPr>
+          <a:lstStyle/>
+          <a:p>
+            <a:r>
+              <a:rPr lang="es-CO" sz="13800" dirty="0"/>
+              <a:t>✔️</a:t>
+            </a:r>
+          </a:p>
+        </p:txBody>
+      </p:sp>
+      <p:sp>
+        <p:nvSpPr>
+          <p:cNvPr id="5" name="CuadroTexto 4">
+            <a:extLst>
+              <a:ext uri="{FF2B5EF4-FFF2-40B4-BE49-F238E27FC236}">
+                <a16:creationId xmlns:a16="http://schemas.microsoft.com/office/drawing/2014/main" id="{6446A4DE-9EF4-4A22-9312-C1863E1AD0CA}"/>
+              </a:ext>
+            </a:extLst>
+          </p:cNvPr>
+          <p:cNvSpPr txBox="1"/>
+          <p:nvPr/>
+        </p:nvSpPr>
+        <p:spPr>
+          <a:xfrm>
+            <a:off x="6483394" y="0"/>
+            <a:ext cx="2252870" cy="2215991"/>
+          </a:xfrm>
+          <a:prstGeom prst="rect">
+            <a:avLst/>
+          </a:prstGeom>
+          <a:noFill/>
+        </p:spPr>
+        <p:txBody>
+          <a:bodyPr wrap="square">
+            <a:spAutoFit/>
+          </a:bodyPr>
+          <a:lstStyle/>
+          <a:p>
+            <a:r>
+              <a:rPr lang="es-CO" sz="13800" dirty="0"/>
+              <a:t>✔️</a:t>
+            </a:r>
+          </a:p>
+        </p:txBody>
+      </p:sp>
+    </p:spTree>
+    <p:extLst>
+      <p:ext uri="{BB962C8B-B14F-4D97-AF65-F5344CB8AC3E}">
+        <p14:creationId xmlns:p14="http://schemas.microsoft.com/office/powerpoint/2010/main" val="4145834102"/>
+      </p:ext>
+    </p:extLst>
+  </p:cSld>
+  <p:clrMapOvr>
+    <a:masterClrMapping/>
+  </p:clrMapOvr>
+</p:sld>
+</file>
+
+<file path=ppt/slides/slide12.xml><?xml version="1.0" encoding="utf-8"?>
+<p:sld xmlns:a="http://schemas.openxmlformats.org/drawingml/2006/main" xmlns:r="http://schemas.openxmlformats.org/officeDocument/2006/relationships" xmlns:p="http://schemas.openxmlformats.org/presentationml/2006/main">
+  <p:cSld>
+    <p:spTree>
+      <p:nvGrpSpPr>
+        <p:cNvPr id="1" name=""/>
+        <p:cNvGrpSpPr/>
+        <p:nvPr/>
+      </p:nvGrpSpPr>
+      <p:grpSpPr>
+        <a:xfrm>
+          <a:off x="0" y="0"/>
+          <a:ext cx="0" cy="0"/>
+          <a:chOff x="0" y="0"/>
+          <a:chExt cx="0" cy="0"/>
+        </a:xfrm>
+      </p:grpSpPr>
+      <p:pic>
+        <p:nvPicPr>
+          <p:cNvPr id="5" name="Imagen 4">
+            <a:extLst>
+              <a:ext uri="{FF2B5EF4-FFF2-40B4-BE49-F238E27FC236}">
+                <a16:creationId xmlns:a16="http://schemas.microsoft.com/office/drawing/2014/main" id="{647785D0-5BB7-4399-B491-2BA1B43FD82D}"/>
+              </a:ext>
+            </a:extLst>
+          </p:cNvPr>
+          <p:cNvPicPr>
+            <a:picLocks noChangeAspect="1"/>
+          </p:cNvPicPr>
+          <p:nvPr/>
+        </p:nvPicPr>
+        <p:blipFill rotWithShape="1">
+          <a:blip r:embed="rId2"/>
+          <a:srcRect l="1956" t="30715" r="58697" b="5485"/>
+          <a:stretch/>
+        </p:blipFill>
+        <p:spPr>
+          <a:xfrm>
+            <a:off x="0" y="763656"/>
+            <a:ext cx="5847603" cy="5330687"/>
+          </a:xfrm>
+          <a:prstGeom prst="rect">
+            <a:avLst/>
+          </a:prstGeom>
+        </p:spPr>
+      </p:pic>
+      <p:sp>
+        <p:nvSpPr>
+          <p:cNvPr id="6" name="Rectangle 1">
+            <a:extLst>
+              <a:ext uri="{FF2B5EF4-FFF2-40B4-BE49-F238E27FC236}">
+                <a16:creationId xmlns:a16="http://schemas.microsoft.com/office/drawing/2014/main" id="{91304EB1-1A4C-445C-80FB-DB1E07C2C8C4}"/>
+              </a:ext>
+            </a:extLst>
+          </p:cNvPr>
+          <p:cNvSpPr>
+            <a:spLocks noChangeArrowheads="1"/>
+          </p:cNvSpPr>
+          <p:nvPr/>
+        </p:nvSpPr>
+        <p:spPr bwMode="auto">
+          <a:xfrm>
+            <a:off x="0" y="0"/>
+            <a:ext cx="6864380" cy="523220"/>
+          </a:xfrm>
+          <a:prstGeom prst="rect">
+            <a:avLst/>
+          </a:prstGeom>
+          <a:solidFill>
+            <a:srgbClr val="DCF0EF"/>
+          </a:solidFill>
+          <a:ln>
+            <a:noFill/>
+          </a:ln>
+          <a:effectLst/>
+          <a:extLst>
+            <a:ext uri="{91240B29-F687-4F45-9708-019B960494DF}">
+              <a14:hiddenLine xmlns:a14="http://schemas.microsoft.com/office/drawing/2010/main" w="9525">
+                <a:solidFill>
+                  <a:schemeClr val="tx1"/>
+                </a:solidFill>
+                <a:miter lim="800000"/>
+                <a:headEnd/>
+                <a:tailEnd/>
+              </a14:hiddenLine>
+            </a:ext>
+            <a:ext uri="{AF507438-7753-43E0-B8FC-AC1667EBCBE1}">
+              <a14:hiddenEffects xmlns:a14="http://schemas.microsoft.com/office/drawing/2010/main">
+                <a:effectLst>
+                  <a:outerShdw dist="35921" dir="2700000" algn="ctr" rotWithShape="0">
+                    <a:schemeClr val="bg2"/>
+                  </a:outerShdw>
+                </a:effectLst>
+              </a14:hiddenEffects>
+            </a:ext>
+          </a:extLst>
+        </p:spPr>
+        <p:txBody>
+          <a:bodyPr vert="horz" wrap="none" lIns="91440" tIns="45720" rIns="91440" bIns="45720" numCol="1" anchor="ctr" anchorCtr="0" compatLnSpc="1">
+            <a:prstTxWarp prst="textNoShape">
+              <a:avLst/>
+            </a:prstTxWarp>
+            <a:spAutoFit/>
+          </a:bodyPr>
+          <a:lstStyle/>
+          <a:p>
+            <a:pPr marL="0" marR="0" lvl="0" indent="0" algn="l" defTabSz="914400" rtl="0" eaLnBrk="0" fontAlgn="base" latinLnBrk="0" hangingPunct="0">
+              <a:lnSpc>
+                <a:spcPct val="100000"/>
+              </a:lnSpc>
+              <a:spcBef>
+                <a:spcPct val="0"/>
+              </a:spcBef>
+              <a:spcAft>
+                <a:spcPct val="0"/>
+              </a:spcAft>
+              <a:buClrTx/>
+              <a:buSzTx/>
+              <a:buFontTx/>
+              <a:buNone/>
+              <a:tabLst/>
+            </a:pPr>
+            <a:r>
+              <a:rPr kumimoji="0" lang="es-CO" altLang="es-CO" sz="2800" b="0" i="0" u="none" strike="noStrike" cap="none" normalizeH="0" baseline="0">
+                <a:ln>
+                  <a:noFill/>
+                </a:ln>
+                <a:solidFill>
+                  <a:srgbClr val="2C2C2C"/>
+                </a:solidFill>
+                <a:effectLst/>
+                <a:latin typeface="Arial" panose="020B0604020202020204" pitchFamily="34" charset="0"/>
+                <a:cs typeface="Arial" panose="020B0604020202020204" pitchFamily="34" charset="0"/>
+              </a:rPr>
+              <a:t>clase padre abstracta </a:t>
+            </a:r>
+            <a:r>
+              <a:rPr kumimoji="0" lang="es-CO" altLang="es-CO" sz="2800" b="0" i="0" u="none" strike="noStrike" cap="none" normalizeH="0" baseline="0">
+                <a:ln>
+                  <a:noFill/>
+                </a:ln>
+                <a:solidFill>
+                  <a:srgbClr val="333333"/>
+                </a:solidFill>
+                <a:effectLst/>
+                <a:latin typeface="Arial" panose="020B0604020202020204" pitchFamily="34" charset="0"/>
+                <a:cs typeface="Arial" panose="020B0604020202020204" pitchFamily="34" charset="0"/>
+              </a:rPr>
+              <a:t>EstadoCalculadora</a:t>
+            </a:r>
+            <a:r>
+              <a:rPr kumimoji="0" lang="es-CO" altLang="es-CO" sz="2800" b="0" i="0" u="none" strike="noStrike" cap="none" normalizeH="0" baseline="0">
+                <a:ln>
+                  <a:noFill/>
+                </a:ln>
+                <a:solidFill>
+                  <a:schemeClr val="tx1"/>
+                </a:solidFill>
+                <a:effectLst/>
+                <a:latin typeface="Arial" panose="020B0604020202020204" pitchFamily="34" charset="0"/>
+                <a:cs typeface="Arial" panose="020B0604020202020204" pitchFamily="34" charset="0"/>
+              </a:rPr>
+              <a:t> </a:t>
+            </a:r>
+          </a:p>
+        </p:txBody>
+      </p:sp>
+      <p:sp>
+        <p:nvSpPr>
+          <p:cNvPr id="7" name="Rectangle 2">
+            <a:extLst>
+              <a:ext uri="{FF2B5EF4-FFF2-40B4-BE49-F238E27FC236}">
+                <a16:creationId xmlns:a16="http://schemas.microsoft.com/office/drawing/2014/main" id="{089FB531-96F6-4627-9E6D-4BEE352BBF17}"/>
+              </a:ext>
+            </a:extLst>
+          </p:cNvPr>
+          <p:cNvSpPr>
+            <a:spLocks noChangeArrowheads="1"/>
+          </p:cNvSpPr>
+          <p:nvPr/>
+        </p:nvSpPr>
+        <p:spPr bwMode="auto">
+          <a:xfrm>
+            <a:off x="5963478" y="528002"/>
+            <a:ext cx="5950226" cy="6186309"/>
+          </a:xfrm>
+          <a:prstGeom prst="rect">
+            <a:avLst/>
+          </a:prstGeom>
+          <a:noFill/>
+          <a:ln>
+            <a:noFill/>
+          </a:ln>
+          <a:effectLst/>
+          <a:extLst>
+            <a:ext uri="{909E8E84-426E-40DD-AFC4-6F175D3DCCD1}">
+              <a14:hiddenFill xmlns:a14="http://schemas.microsoft.com/office/drawing/2010/main">
+                <a:solidFill>
+                  <a:schemeClr val="accent1"/>
+                </a:solidFill>
+              </a14:hiddenFill>
+            </a:ext>
+            <a:ext uri="{91240B29-F687-4F45-9708-019B960494DF}">
+              <a14:hiddenLine xmlns:a14="http://schemas.microsoft.com/office/drawing/2010/main" w="9525">
+                <a:solidFill>
+                  <a:schemeClr val="tx1"/>
+                </a:solidFill>
+                <a:miter lim="800000"/>
+                <a:headEnd/>
+                <a:tailEnd/>
+              </a14:hiddenLine>
+            </a:ext>
+            <a:ext uri="{AF507438-7753-43E0-B8FC-AC1667EBCBE1}">
+              <a14:hiddenEffects xmlns:a14="http://schemas.microsoft.com/office/drawing/2010/main">
+                <a:effectLst>
+                  <a:outerShdw dist="35921" dir="2700000" algn="ctr" rotWithShape="0">
+                    <a:schemeClr val="bg2"/>
+                  </a:outerShdw>
+                </a:effectLst>
+              </a14:hiddenEffects>
+            </a:ext>
+          </a:extLst>
+        </p:spPr>
+        <p:txBody>
+          <a:bodyPr vert="horz" wrap="square" lIns="91440" tIns="45720" rIns="91440" bIns="45720" numCol="1" anchor="ctr" anchorCtr="0" compatLnSpc="1">
+            <a:prstTxWarp prst="textNoShape">
+              <a:avLst/>
+            </a:prstTxWarp>
+            <a:spAutoFit/>
+          </a:bodyPr>
+          <a:lstStyle/>
+          <a:p>
+            <a:pPr marL="0" marR="0" lvl="0" indent="0" algn="l" defTabSz="914400" rtl="0" eaLnBrk="0" fontAlgn="base" latinLnBrk="0" hangingPunct="0">
+              <a:lnSpc>
+                <a:spcPct val="100000"/>
+              </a:lnSpc>
+              <a:spcBef>
+                <a:spcPct val="0"/>
+              </a:spcBef>
+              <a:spcAft>
+                <a:spcPct val="0"/>
+              </a:spcAft>
+              <a:buClrTx/>
+              <a:buSzTx/>
+              <a:buFontTx/>
+              <a:buNone/>
+              <a:tabLst/>
+            </a:pPr>
+            <a:r>
+              <a:rPr kumimoji="0" lang="es-CO" altLang="es-CO" b="1" i="0" u="none" strike="noStrike" cap="none" normalizeH="0" baseline="0" dirty="0">
+                <a:ln>
+                  <a:noFill/>
+                </a:ln>
+                <a:solidFill>
+                  <a:schemeClr val="tx1"/>
+                </a:solidFill>
+                <a:effectLst/>
+                <a:latin typeface="Arial" panose="020B0604020202020204" pitchFamily="34" charset="0"/>
+                <a:cs typeface="Arial" panose="020B0604020202020204" pitchFamily="34" charset="0"/>
+              </a:rPr>
+              <a:t>Clase </a:t>
+            </a:r>
+            <a:r>
+              <a:rPr kumimoji="0" lang="es-CO" altLang="es-CO" b="1" i="0" u="none" strike="noStrike" cap="none" normalizeH="0" baseline="0" dirty="0" err="1">
+                <a:ln>
+                  <a:noFill/>
+                </a:ln>
+                <a:solidFill>
+                  <a:schemeClr val="tx1"/>
+                </a:solidFill>
+                <a:effectLst/>
+                <a:latin typeface="Arial" panose="020B0604020202020204" pitchFamily="34" charset="0"/>
+                <a:cs typeface="Arial" panose="020B0604020202020204" pitchFamily="34" charset="0"/>
+              </a:rPr>
+              <a:t>EstadoCalculadora</a:t>
+            </a:r>
+            <a:r>
+              <a:rPr kumimoji="0" lang="es-CO" altLang="es-CO" b="1" i="0" u="none" strike="noStrike" cap="none" normalizeH="0" baseline="0" dirty="0">
+                <a:ln>
+                  <a:noFill/>
+                </a:ln>
+                <a:solidFill>
+                  <a:schemeClr val="tx1"/>
+                </a:solidFill>
+                <a:effectLst/>
+                <a:latin typeface="Arial" panose="020B0604020202020204" pitchFamily="34" charset="0"/>
+                <a:cs typeface="Arial" panose="020B0604020202020204" pitchFamily="34" charset="0"/>
+              </a:rPr>
+              <a:t> (Abstracta)</a:t>
+            </a:r>
+          </a:p>
+          <a:p>
+            <a:pPr marL="0" marR="0" lvl="0" indent="0" algn="l" defTabSz="914400" rtl="0" eaLnBrk="0" fontAlgn="base" latinLnBrk="0" hangingPunct="0">
+              <a:lnSpc>
+                <a:spcPct val="100000"/>
+              </a:lnSpc>
+              <a:spcBef>
+                <a:spcPct val="0"/>
+              </a:spcBef>
+              <a:spcAft>
+                <a:spcPct val="0"/>
+              </a:spcAft>
+              <a:buClrTx/>
+              <a:buSzTx/>
+              <a:buFontTx/>
+              <a:buChar char="•"/>
+              <a:tabLst/>
+            </a:pPr>
+            <a:r>
+              <a:rPr kumimoji="0" lang="es-CO" altLang="es-CO" b="1" i="0" u="none" strike="noStrike" cap="none" normalizeH="0" baseline="0" dirty="0">
+                <a:ln>
+                  <a:noFill/>
+                </a:ln>
+                <a:solidFill>
+                  <a:schemeClr val="tx1"/>
+                </a:solidFill>
+                <a:effectLst/>
+                <a:latin typeface="Arial" panose="020B0604020202020204" pitchFamily="34" charset="0"/>
+                <a:cs typeface="Arial" panose="020B0604020202020204" pitchFamily="34" charset="0"/>
+              </a:rPr>
+              <a:t>Herencia:</a:t>
+            </a:r>
+            <a:endParaRPr kumimoji="0" lang="es-CO" altLang="es-CO" b="0" i="0" u="none" strike="noStrike" cap="none" normalizeH="0" baseline="0" dirty="0">
+              <a:ln>
+                <a:noFill/>
+              </a:ln>
+              <a:solidFill>
+                <a:schemeClr val="tx1"/>
+              </a:solidFill>
+              <a:effectLst/>
+              <a:latin typeface="Arial" panose="020B0604020202020204" pitchFamily="34" charset="0"/>
+              <a:cs typeface="Arial" panose="020B0604020202020204" pitchFamily="34" charset="0"/>
+            </a:endParaRPr>
+          </a:p>
+          <a:p>
+            <a:pPr marL="457200" marR="0" lvl="1" indent="0" algn="l" defTabSz="914400" rtl="0" eaLnBrk="0" fontAlgn="base" latinLnBrk="0" hangingPunct="0">
+              <a:lnSpc>
+                <a:spcPct val="100000"/>
+              </a:lnSpc>
+              <a:spcBef>
+                <a:spcPct val="0"/>
+              </a:spcBef>
+              <a:spcAft>
+                <a:spcPct val="0"/>
+              </a:spcAft>
+              <a:buClrTx/>
+              <a:buSzTx/>
+              <a:buFontTx/>
+              <a:buChar char="•"/>
+              <a:tabLst/>
+            </a:pPr>
+            <a:r>
+              <a:rPr kumimoji="0" lang="es-CO" altLang="es-CO" b="0" i="0" u="none" strike="noStrike" cap="none" normalizeH="0" baseline="0" dirty="0">
+                <a:ln>
+                  <a:noFill/>
+                </a:ln>
+                <a:solidFill>
+                  <a:schemeClr val="tx1"/>
+                </a:solidFill>
+                <a:effectLst/>
+                <a:latin typeface="Arial" panose="020B0604020202020204" pitchFamily="34" charset="0"/>
+                <a:cs typeface="Arial" panose="020B0604020202020204" pitchFamily="34" charset="0"/>
+              </a:rPr>
+              <a:t>Extiende de ABC (librería </a:t>
+            </a:r>
+            <a:r>
+              <a:rPr kumimoji="0" lang="es-CO" altLang="es-CO" b="0" i="0" u="none" strike="noStrike" cap="none" normalizeH="0" baseline="0" dirty="0" err="1">
+                <a:ln>
+                  <a:noFill/>
+                </a:ln>
+                <a:solidFill>
+                  <a:schemeClr val="tx1"/>
+                </a:solidFill>
+                <a:effectLst/>
+                <a:latin typeface="Arial" panose="020B0604020202020204" pitchFamily="34" charset="0"/>
+                <a:cs typeface="Arial" panose="020B0604020202020204" pitchFamily="34" charset="0"/>
+              </a:rPr>
+              <a:t>abc</a:t>
+            </a:r>
+            <a:r>
+              <a:rPr kumimoji="0" lang="es-CO" altLang="es-CO" b="0" i="0" u="none" strike="noStrike" cap="none" normalizeH="0" baseline="0" dirty="0">
+                <a:ln>
+                  <a:noFill/>
+                </a:ln>
+                <a:solidFill>
+                  <a:schemeClr val="tx1"/>
+                </a:solidFill>
+                <a:effectLst/>
+                <a:latin typeface="Arial" panose="020B0604020202020204" pitchFamily="34" charset="0"/>
+                <a:cs typeface="Arial" panose="020B0604020202020204" pitchFamily="34" charset="0"/>
+              </a:rPr>
+              <a:t>) → no se puede instanciar directamente.</a:t>
+            </a:r>
+          </a:p>
+          <a:p>
+            <a:pPr marL="0" marR="0" lvl="0" indent="0" algn="l" defTabSz="914400" rtl="0" eaLnBrk="0" fontAlgn="base" latinLnBrk="0" hangingPunct="0">
+              <a:lnSpc>
+                <a:spcPct val="100000"/>
+              </a:lnSpc>
+              <a:spcBef>
+                <a:spcPct val="0"/>
+              </a:spcBef>
+              <a:spcAft>
+                <a:spcPct val="0"/>
+              </a:spcAft>
+              <a:buClrTx/>
+              <a:buSzTx/>
+              <a:buFontTx/>
+              <a:buChar char="•"/>
+              <a:tabLst/>
+            </a:pPr>
+            <a:r>
+              <a:rPr kumimoji="0" lang="es-CO" altLang="es-CO" b="1" i="0" u="none" strike="noStrike" cap="none" normalizeH="0" baseline="0" dirty="0">
+                <a:ln>
+                  <a:noFill/>
+                </a:ln>
+                <a:solidFill>
+                  <a:schemeClr val="tx1"/>
+                </a:solidFill>
+                <a:effectLst/>
+                <a:latin typeface="Arial" panose="020B0604020202020204" pitchFamily="34" charset="0"/>
+                <a:cs typeface="Arial" panose="020B0604020202020204" pitchFamily="34" charset="0"/>
+              </a:rPr>
+              <a:t>Inicialización (__</a:t>
+            </a:r>
+            <a:r>
+              <a:rPr kumimoji="0" lang="es-CO" altLang="es-CO" b="1" i="0" u="none" strike="noStrike" cap="none" normalizeH="0" baseline="0" dirty="0" err="1">
+                <a:ln>
+                  <a:noFill/>
+                </a:ln>
+                <a:solidFill>
+                  <a:schemeClr val="tx1"/>
+                </a:solidFill>
+                <a:effectLst/>
+                <a:latin typeface="Arial" panose="020B0604020202020204" pitchFamily="34" charset="0"/>
+                <a:cs typeface="Arial" panose="020B0604020202020204" pitchFamily="34" charset="0"/>
+              </a:rPr>
+              <a:t>init</a:t>
+            </a:r>
+            <a:r>
+              <a:rPr kumimoji="0" lang="es-CO" altLang="es-CO" b="1" i="0" u="none" strike="noStrike" cap="none" normalizeH="0" baseline="0" dirty="0">
+                <a:ln>
+                  <a:noFill/>
+                </a:ln>
+                <a:solidFill>
+                  <a:schemeClr val="tx1"/>
+                </a:solidFill>
+                <a:effectLst/>
+                <a:latin typeface="Arial" panose="020B0604020202020204" pitchFamily="34" charset="0"/>
+                <a:cs typeface="Arial" panose="020B0604020202020204" pitchFamily="34" charset="0"/>
+              </a:rPr>
+              <a:t>__):</a:t>
+            </a:r>
+            <a:endParaRPr kumimoji="0" lang="es-CO" altLang="es-CO" b="0" i="0" u="none" strike="noStrike" cap="none" normalizeH="0" baseline="0" dirty="0">
+              <a:ln>
+                <a:noFill/>
+              </a:ln>
+              <a:solidFill>
+                <a:schemeClr val="tx1"/>
+              </a:solidFill>
+              <a:effectLst/>
+              <a:latin typeface="Arial" panose="020B0604020202020204" pitchFamily="34" charset="0"/>
+              <a:cs typeface="Arial" panose="020B0604020202020204" pitchFamily="34" charset="0"/>
+            </a:endParaRPr>
+          </a:p>
+          <a:p>
+            <a:pPr marL="457200" marR="0" lvl="1" indent="0" algn="l" defTabSz="914400" rtl="0" eaLnBrk="0" fontAlgn="base" latinLnBrk="0" hangingPunct="0">
+              <a:lnSpc>
+                <a:spcPct val="100000"/>
+              </a:lnSpc>
+              <a:spcBef>
+                <a:spcPct val="0"/>
+              </a:spcBef>
+              <a:spcAft>
+                <a:spcPct val="0"/>
+              </a:spcAft>
+              <a:buClrTx/>
+              <a:buSzTx/>
+              <a:buFontTx/>
+              <a:buChar char="•"/>
+              <a:tabLst/>
+            </a:pPr>
+            <a:r>
+              <a:rPr kumimoji="0" lang="es-CO" altLang="es-CO" b="0" i="0" u="none" strike="noStrike" cap="none" normalizeH="0" baseline="0" dirty="0">
+                <a:ln>
+                  <a:noFill/>
+                </a:ln>
+                <a:solidFill>
+                  <a:schemeClr val="tx1"/>
+                </a:solidFill>
+                <a:effectLst/>
+                <a:latin typeface="Arial" panose="020B0604020202020204" pitchFamily="34" charset="0"/>
+                <a:cs typeface="Arial" panose="020B0604020202020204" pitchFamily="34" charset="0"/>
+              </a:rPr>
+              <a:t>Guarda en _calculadora la referencia al objeto Calculadora.</a:t>
+            </a:r>
+          </a:p>
+          <a:p>
+            <a:pPr marL="457200" marR="0" lvl="1" indent="0" algn="l" defTabSz="914400" rtl="0" eaLnBrk="0" fontAlgn="base" latinLnBrk="0" hangingPunct="0">
+              <a:lnSpc>
+                <a:spcPct val="100000"/>
+              </a:lnSpc>
+              <a:spcBef>
+                <a:spcPct val="0"/>
+              </a:spcBef>
+              <a:spcAft>
+                <a:spcPct val="0"/>
+              </a:spcAft>
+              <a:buClrTx/>
+              <a:buSzTx/>
+              <a:buFontTx/>
+              <a:buChar char="•"/>
+              <a:tabLst/>
+            </a:pPr>
+            <a:r>
+              <a:rPr kumimoji="0" lang="es-CO" altLang="es-CO" b="0" i="0" u="none" strike="noStrike" cap="none" normalizeH="0" baseline="0" dirty="0">
+                <a:ln>
+                  <a:noFill/>
+                </a:ln>
+                <a:solidFill>
+                  <a:schemeClr val="tx1"/>
+                </a:solidFill>
+                <a:effectLst/>
+                <a:latin typeface="Arial" panose="020B0604020202020204" pitchFamily="34" charset="0"/>
+                <a:cs typeface="Arial" panose="020B0604020202020204" pitchFamily="34" charset="0"/>
+              </a:rPr>
+              <a:t>Esto permite que los estados </a:t>
+            </a:r>
+            <a:r>
+              <a:rPr kumimoji="0" lang="es-CO" altLang="es-CO" b="1" i="0" u="none" strike="noStrike" cap="none" normalizeH="0" baseline="0" dirty="0">
+                <a:ln>
+                  <a:noFill/>
+                </a:ln>
+                <a:solidFill>
+                  <a:schemeClr val="tx1"/>
+                </a:solidFill>
+                <a:effectLst/>
+                <a:latin typeface="Arial" panose="020B0604020202020204" pitchFamily="34" charset="0"/>
+                <a:cs typeface="Arial" panose="020B0604020202020204" pitchFamily="34" charset="0"/>
+              </a:rPr>
+              <a:t>cambien el estado actual</a:t>
+            </a:r>
+            <a:r>
+              <a:rPr kumimoji="0" lang="es-CO" altLang="es-CO" b="0" i="0" u="none" strike="noStrike" cap="none" normalizeH="0" baseline="0" dirty="0">
+                <a:ln>
+                  <a:noFill/>
+                </a:ln>
+                <a:solidFill>
+                  <a:schemeClr val="tx1"/>
+                </a:solidFill>
+                <a:effectLst/>
+                <a:latin typeface="Arial" panose="020B0604020202020204" pitchFamily="34" charset="0"/>
+                <a:cs typeface="Arial" panose="020B0604020202020204" pitchFamily="34" charset="0"/>
+              </a:rPr>
+              <a:t> de la calculadora.</a:t>
+            </a:r>
+          </a:p>
+          <a:p>
+            <a:pPr marL="0" marR="0" lvl="0" indent="0" algn="l" defTabSz="914400" rtl="0" eaLnBrk="0" fontAlgn="base" latinLnBrk="0" hangingPunct="0">
+              <a:lnSpc>
+                <a:spcPct val="100000"/>
+              </a:lnSpc>
+              <a:spcBef>
+                <a:spcPct val="0"/>
+              </a:spcBef>
+              <a:spcAft>
+                <a:spcPct val="0"/>
+              </a:spcAft>
+              <a:buClrTx/>
+              <a:buSzTx/>
+              <a:buFontTx/>
+              <a:buChar char="•"/>
+              <a:tabLst/>
+            </a:pPr>
+            <a:r>
+              <a:rPr kumimoji="0" lang="es-CO" altLang="es-CO" b="1" i="0" u="none" strike="noStrike" cap="none" normalizeH="0" baseline="0" dirty="0">
+                <a:ln>
+                  <a:noFill/>
+                </a:ln>
+                <a:solidFill>
+                  <a:schemeClr val="tx1"/>
+                </a:solidFill>
+                <a:effectLst/>
+                <a:latin typeface="Arial" panose="020B0604020202020204" pitchFamily="34" charset="0"/>
+                <a:cs typeface="Arial" panose="020B0604020202020204" pitchFamily="34" charset="0"/>
+              </a:rPr>
+              <a:t>Métodos:</a:t>
+            </a:r>
+            <a:endParaRPr kumimoji="0" lang="es-CO" altLang="es-CO" b="0" i="0" u="none" strike="noStrike" cap="none" normalizeH="0" baseline="0" dirty="0">
+              <a:ln>
+                <a:noFill/>
+              </a:ln>
+              <a:solidFill>
+                <a:schemeClr val="tx1"/>
+              </a:solidFill>
+              <a:effectLst/>
+              <a:latin typeface="Arial" panose="020B0604020202020204" pitchFamily="34" charset="0"/>
+              <a:cs typeface="Arial" panose="020B0604020202020204" pitchFamily="34" charset="0"/>
+            </a:endParaRPr>
+          </a:p>
+          <a:p>
+            <a:pPr marL="457200" marR="0" lvl="1" indent="0" algn="l" defTabSz="914400" rtl="0" eaLnBrk="0" fontAlgn="base" latinLnBrk="0" hangingPunct="0">
+              <a:lnSpc>
+                <a:spcPct val="100000"/>
+              </a:lnSpc>
+              <a:spcBef>
+                <a:spcPct val="0"/>
+              </a:spcBef>
+              <a:spcAft>
+                <a:spcPct val="0"/>
+              </a:spcAft>
+              <a:buClrTx/>
+              <a:buSzTx/>
+              <a:buFontTx/>
+              <a:buChar char="•"/>
+              <a:tabLst/>
+            </a:pPr>
+            <a:r>
+              <a:rPr kumimoji="0" lang="es-CO" altLang="es-CO" b="0" i="0" u="none" strike="noStrike" cap="none" normalizeH="0" baseline="0" dirty="0" err="1">
+                <a:ln>
+                  <a:noFill/>
+                </a:ln>
+                <a:solidFill>
+                  <a:schemeClr val="tx1"/>
+                </a:solidFill>
+                <a:effectLst/>
+                <a:latin typeface="Arial" panose="020B0604020202020204" pitchFamily="34" charset="0"/>
+                <a:cs typeface="Arial" panose="020B0604020202020204" pitchFamily="34" charset="0"/>
+              </a:rPr>
+              <a:t>valor_actual</a:t>
+            </a:r>
+            <a:r>
+              <a:rPr kumimoji="0" lang="es-CO" altLang="es-CO" b="0" i="0" u="none" strike="noStrike" cap="none" normalizeH="0" baseline="0" dirty="0">
+                <a:ln>
+                  <a:noFill/>
+                </a:ln>
+                <a:solidFill>
+                  <a:schemeClr val="tx1"/>
+                </a:solidFill>
+                <a:effectLst/>
+                <a:latin typeface="Arial" panose="020B0604020202020204" pitchFamily="34" charset="0"/>
+                <a:cs typeface="Arial" panose="020B0604020202020204" pitchFamily="34" charset="0"/>
+              </a:rPr>
+              <a:t> → método </a:t>
+            </a:r>
+            <a:r>
+              <a:rPr kumimoji="0" lang="es-CO" altLang="es-CO" b="1" i="0" u="none" strike="noStrike" cap="none" normalizeH="0" baseline="0" dirty="0">
+                <a:ln>
+                  <a:noFill/>
+                </a:ln>
+                <a:solidFill>
+                  <a:schemeClr val="tx1"/>
+                </a:solidFill>
+                <a:effectLst/>
+                <a:latin typeface="Arial" panose="020B0604020202020204" pitchFamily="34" charset="0"/>
+                <a:cs typeface="Arial" panose="020B0604020202020204" pitchFamily="34" charset="0"/>
+              </a:rPr>
+              <a:t>abstracto</a:t>
+            </a:r>
+            <a:r>
+              <a:rPr kumimoji="0" lang="es-CO" altLang="es-CO" b="0" i="0" u="none" strike="noStrike" cap="none" normalizeH="0" baseline="0" dirty="0">
+                <a:ln>
+                  <a:noFill/>
+                </a:ln>
+                <a:solidFill>
+                  <a:schemeClr val="tx1"/>
+                </a:solidFill>
+                <a:effectLst/>
+                <a:latin typeface="Arial" panose="020B0604020202020204" pitchFamily="34" charset="0"/>
+                <a:cs typeface="Arial" panose="020B0604020202020204" pitchFamily="34" charset="0"/>
+              </a:rPr>
+              <a:t>, obliga a cada subclase a implementar cómo mostrar el valor en pantalla.</a:t>
+            </a:r>
+          </a:p>
+          <a:p>
+            <a:pPr marL="457200" marR="0" lvl="1" indent="0" algn="l" defTabSz="914400" rtl="0" eaLnBrk="0" fontAlgn="base" latinLnBrk="0" hangingPunct="0">
+              <a:lnSpc>
+                <a:spcPct val="100000"/>
+              </a:lnSpc>
+              <a:spcBef>
+                <a:spcPct val="0"/>
+              </a:spcBef>
+              <a:spcAft>
+                <a:spcPct val="0"/>
+              </a:spcAft>
+              <a:buClrTx/>
+              <a:buSzTx/>
+              <a:buFontTx/>
+              <a:buChar char="•"/>
+              <a:tabLst/>
+            </a:pPr>
+            <a:r>
+              <a:rPr kumimoji="0" lang="es-CO" altLang="es-CO" b="0" i="0" u="none" strike="noStrike" cap="none" normalizeH="0" baseline="0" dirty="0" err="1">
+                <a:ln>
+                  <a:noFill/>
+                </a:ln>
+                <a:solidFill>
+                  <a:schemeClr val="tx1"/>
+                </a:solidFill>
+                <a:effectLst/>
+                <a:latin typeface="Arial" panose="020B0604020202020204" pitchFamily="34" charset="0"/>
+                <a:cs typeface="Arial" panose="020B0604020202020204" pitchFamily="34" charset="0"/>
+              </a:rPr>
+              <a:t>introducir_digito</a:t>
+            </a:r>
+            <a:r>
+              <a:rPr kumimoji="0" lang="es-CO" altLang="es-CO" b="0" i="0" u="none" strike="noStrike" cap="none" normalizeH="0" baseline="0" dirty="0">
+                <a:ln>
+                  <a:noFill/>
+                </a:ln>
+                <a:solidFill>
+                  <a:schemeClr val="tx1"/>
+                </a:solidFill>
+                <a:effectLst/>
+                <a:latin typeface="Arial" panose="020B0604020202020204" pitchFamily="34" charset="0"/>
+                <a:cs typeface="Arial" panose="020B0604020202020204" pitchFamily="34" charset="0"/>
+              </a:rPr>
+              <a:t>, </a:t>
+            </a:r>
+            <a:r>
+              <a:rPr kumimoji="0" lang="es-CO" altLang="es-CO" b="0" i="0" u="none" strike="noStrike" cap="none" normalizeH="0" baseline="0" dirty="0" err="1">
+                <a:ln>
+                  <a:noFill/>
+                </a:ln>
+                <a:solidFill>
+                  <a:schemeClr val="tx1"/>
+                </a:solidFill>
+                <a:effectLst/>
+                <a:latin typeface="Arial" panose="020B0604020202020204" pitchFamily="34" charset="0"/>
+                <a:cs typeface="Arial" panose="020B0604020202020204" pitchFamily="34" charset="0"/>
+              </a:rPr>
+              <a:t>introducir_operador</a:t>
+            </a:r>
+            <a:r>
+              <a:rPr kumimoji="0" lang="es-CO" altLang="es-CO" b="0" i="0" u="none" strike="noStrike" cap="none" normalizeH="0" baseline="0" dirty="0">
+                <a:ln>
+                  <a:noFill/>
+                </a:ln>
+                <a:solidFill>
+                  <a:schemeClr val="tx1"/>
+                </a:solidFill>
+                <a:effectLst/>
+                <a:latin typeface="Arial" panose="020B0604020202020204" pitchFamily="34" charset="0"/>
+                <a:cs typeface="Arial" panose="020B0604020202020204" pitchFamily="34" charset="0"/>
+              </a:rPr>
+              <a:t>, calcular → no hacen nada en esta clase.</a:t>
+            </a:r>
+          </a:p>
+          <a:p>
+            <a:pPr marL="914400" marR="0" lvl="2" indent="0" algn="l" defTabSz="914400" rtl="0" eaLnBrk="0" fontAlgn="base" latinLnBrk="0" hangingPunct="0">
+              <a:lnSpc>
+                <a:spcPct val="100000"/>
+              </a:lnSpc>
+              <a:spcBef>
+                <a:spcPct val="0"/>
+              </a:spcBef>
+              <a:spcAft>
+                <a:spcPct val="0"/>
+              </a:spcAft>
+              <a:buClrTx/>
+              <a:buSzTx/>
+              <a:buFontTx/>
+              <a:buChar char="•"/>
+              <a:tabLst/>
+            </a:pPr>
+            <a:r>
+              <a:rPr kumimoji="0" lang="es-CO" altLang="es-CO" b="0" i="0" u="none" strike="noStrike" cap="none" normalizeH="0" baseline="0" dirty="0">
+                <a:ln>
+                  <a:noFill/>
+                </a:ln>
+                <a:solidFill>
+                  <a:schemeClr val="tx1"/>
+                </a:solidFill>
+                <a:effectLst/>
+                <a:latin typeface="Arial" panose="020B0604020202020204" pitchFamily="34" charset="0"/>
+                <a:cs typeface="Arial" panose="020B0604020202020204" pitchFamily="34" charset="0"/>
+              </a:rPr>
+              <a:t>Se redefinen en los </a:t>
+            </a:r>
+            <a:r>
+              <a:rPr kumimoji="0" lang="es-CO" altLang="es-CO" b="1" i="0" u="none" strike="noStrike" cap="none" normalizeH="0" baseline="0" dirty="0">
+                <a:ln>
+                  <a:noFill/>
+                </a:ln>
+                <a:solidFill>
+                  <a:schemeClr val="tx1"/>
+                </a:solidFill>
+                <a:effectLst/>
+                <a:latin typeface="Arial" panose="020B0604020202020204" pitchFamily="34" charset="0"/>
+                <a:cs typeface="Arial" panose="020B0604020202020204" pitchFamily="34" charset="0"/>
+              </a:rPr>
+              <a:t>estados concretos</a:t>
+            </a:r>
+            <a:r>
+              <a:rPr kumimoji="0" lang="es-CO" altLang="es-CO" b="0" i="0" u="none" strike="noStrike" cap="none" normalizeH="0" baseline="0" dirty="0">
+                <a:ln>
+                  <a:noFill/>
+                </a:ln>
+                <a:solidFill>
+                  <a:schemeClr val="tx1"/>
+                </a:solidFill>
+                <a:effectLst/>
+                <a:latin typeface="Arial" panose="020B0604020202020204" pitchFamily="34" charset="0"/>
+                <a:cs typeface="Arial" panose="020B0604020202020204" pitchFamily="34" charset="0"/>
+              </a:rPr>
+              <a:t>, ya que el comportamiento varía.</a:t>
+            </a:r>
+          </a:p>
+          <a:p>
+            <a:pPr marL="457200" marR="0" lvl="1" indent="0" algn="l" defTabSz="914400" rtl="0" eaLnBrk="0" fontAlgn="base" latinLnBrk="0" hangingPunct="0">
+              <a:lnSpc>
+                <a:spcPct val="100000"/>
+              </a:lnSpc>
+              <a:spcBef>
+                <a:spcPct val="0"/>
+              </a:spcBef>
+              <a:spcAft>
+                <a:spcPct val="0"/>
+              </a:spcAft>
+              <a:buClrTx/>
+              <a:buSzTx/>
+              <a:buFontTx/>
+              <a:buChar char="•"/>
+              <a:tabLst/>
+            </a:pPr>
+            <a:r>
+              <a:rPr kumimoji="0" lang="es-CO" altLang="es-CO" b="0" i="0" u="none" strike="noStrike" cap="none" normalizeH="0" baseline="0" dirty="0">
+                <a:ln>
+                  <a:noFill/>
+                </a:ln>
+                <a:solidFill>
+                  <a:schemeClr val="tx1"/>
+                </a:solidFill>
+                <a:effectLst/>
+                <a:latin typeface="Arial" panose="020B0604020202020204" pitchFamily="34" charset="0"/>
+                <a:cs typeface="Arial" panose="020B0604020202020204" pitchFamily="34" charset="0"/>
+              </a:rPr>
+              <a:t>El resto de operaciones tienen comportamiento por defecto = “</a:t>
+            </a:r>
+            <a:r>
+              <a:rPr kumimoji="0" lang="es-CO" altLang="es-CO" b="1" i="0" u="none" strike="noStrike" cap="none" normalizeH="0" baseline="0" dirty="0">
+                <a:ln>
+                  <a:noFill/>
+                </a:ln>
+                <a:solidFill>
+                  <a:schemeClr val="tx1"/>
+                </a:solidFill>
+                <a:effectLst/>
+                <a:latin typeface="Arial" panose="020B0604020202020204" pitchFamily="34" charset="0"/>
+                <a:cs typeface="Arial" panose="020B0604020202020204" pitchFamily="34" charset="0"/>
+              </a:rPr>
+              <a:t>no hacer nada</a:t>
+            </a:r>
+            <a:r>
+              <a:rPr kumimoji="0" lang="es-CO" altLang="es-CO" b="0" i="0" u="none" strike="noStrike" cap="none" normalizeH="0" baseline="0" dirty="0">
+                <a:ln>
+                  <a:noFill/>
+                </a:ln>
+                <a:solidFill>
+                  <a:schemeClr val="tx1"/>
+                </a:solidFill>
+                <a:effectLst/>
+                <a:latin typeface="Arial" panose="020B0604020202020204" pitchFamily="34" charset="0"/>
+                <a:cs typeface="Arial" panose="020B0604020202020204" pitchFamily="34" charset="0"/>
+              </a:rPr>
+              <a:t>”.</a:t>
+            </a:r>
+          </a:p>
+          <a:p>
+            <a:pPr marL="914400" marR="0" lvl="2" indent="0" algn="l" defTabSz="914400" rtl="0" eaLnBrk="0" fontAlgn="base" latinLnBrk="0" hangingPunct="0">
+              <a:lnSpc>
+                <a:spcPct val="100000"/>
+              </a:lnSpc>
+              <a:spcBef>
+                <a:spcPct val="0"/>
+              </a:spcBef>
+              <a:spcAft>
+                <a:spcPct val="0"/>
+              </a:spcAft>
+              <a:buClrTx/>
+              <a:buSzTx/>
+              <a:buFontTx/>
+              <a:buChar char="•"/>
+              <a:tabLst/>
+            </a:pPr>
+            <a:r>
+              <a:rPr kumimoji="0" lang="es-CO" altLang="es-CO" b="0" i="0" u="none" strike="noStrike" cap="none" normalizeH="0" baseline="0" dirty="0">
+                <a:ln>
+                  <a:noFill/>
+                </a:ln>
+                <a:solidFill>
+                  <a:schemeClr val="tx1"/>
+                </a:solidFill>
+                <a:effectLst/>
+                <a:latin typeface="Arial" panose="020B0604020202020204" pitchFamily="34" charset="0"/>
+                <a:cs typeface="Arial" panose="020B0604020202020204" pitchFamily="34" charset="0"/>
+              </a:rPr>
+              <a:t>Ejemplo: en el </a:t>
+            </a:r>
+            <a:r>
+              <a:rPr kumimoji="0" lang="es-CO" altLang="es-CO" b="1" i="0" u="none" strike="noStrike" cap="none" normalizeH="0" baseline="0" dirty="0" err="1">
+                <a:ln>
+                  <a:noFill/>
+                </a:ln>
+                <a:solidFill>
+                  <a:schemeClr val="tx1"/>
+                </a:solidFill>
+                <a:effectLst/>
+                <a:latin typeface="Arial" panose="020B0604020202020204" pitchFamily="34" charset="0"/>
+                <a:cs typeface="Arial" panose="020B0604020202020204" pitchFamily="34" charset="0"/>
+              </a:rPr>
+              <a:t>EstadoInicial</a:t>
+            </a:r>
+            <a:r>
+              <a:rPr kumimoji="0" lang="es-CO" altLang="es-CO" b="0" i="0" u="none" strike="noStrike" cap="none" normalizeH="0" baseline="0" dirty="0">
+                <a:ln>
+                  <a:noFill/>
+                </a:ln>
+                <a:solidFill>
+                  <a:schemeClr val="tx1"/>
+                </a:solidFill>
+                <a:effectLst/>
+                <a:latin typeface="Arial" panose="020B0604020202020204" pitchFamily="34" charset="0"/>
+                <a:cs typeface="Arial" panose="020B0604020202020204" pitchFamily="34" charset="0"/>
+              </a:rPr>
+              <a:t>, si presionamos =, no ocurre nada.</a:t>
+            </a:r>
+          </a:p>
+          <a:p>
+            <a:pPr marL="0" marR="0" lvl="0" indent="0" algn="l" defTabSz="914400" rtl="0" eaLnBrk="0" fontAlgn="base" latinLnBrk="0" hangingPunct="0">
+              <a:lnSpc>
+                <a:spcPct val="100000"/>
+              </a:lnSpc>
+              <a:spcBef>
+                <a:spcPct val="0"/>
+              </a:spcBef>
+              <a:spcAft>
+                <a:spcPct val="0"/>
+              </a:spcAft>
+              <a:buClrTx/>
+              <a:buSzTx/>
+              <a:buFontTx/>
+              <a:buNone/>
+              <a:tabLst/>
+            </a:pPr>
+            <a:endParaRPr kumimoji="0" lang="es-CO" altLang="es-CO" b="0" i="0" u="none" strike="noStrike" cap="none" normalizeH="0" baseline="0" dirty="0">
+              <a:ln>
+                <a:noFill/>
+              </a:ln>
+              <a:solidFill>
+                <a:schemeClr val="tx1"/>
+              </a:solidFill>
+              <a:effectLst/>
+              <a:latin typeface="Arial" panose="020B0604020202020204" pitchFamily="34" charset="0"/>
+              <a:cs typeface="Arial" panose="020B0604020202020204" pitchFamily="34" charset="0"/>
+            </a:endParaRPr>
+          </a:p>
+        </p:txBody>
+      </p:sp>
+    </p:spTree>
+    <p:extLst>
+      <p:ext uri="{BB962C8B-B14F-4D97-AF65-F5344CB8AC3E}">
+        <p14:creationId xmlns:p14="http://schemas.microsoft.com/office/powerpoint/2010/main" val="1608405639"/>
+      </p:ext>
+    </p:extLst>
+  </p:cSld>
+  <p:clrMapOvr>
+    <a:masterClrMapping/>
+  </p:clrMapOvr>
+</p:sld>
+</file>
+
+<file path=ppt/slides/slide13.xml><?xml version="1.0" encoding="utf-8"?>
+<p:sld xmlns:a="http://schemas.openxmlformats.org/drawingml/2006/main" xmlns:r="http://schemas.openxmlformats.org/officeDocument/2006/relationships" xmlns:p="http://schemas.openxmlformats.org/presentationml/2006/main">
+  <p:cSld>
+    <p:spTree>
+      <p:nvGrpSpPr>
+        <p:cNvPr id="1" name=""/>
+        <p:cNvGrpSpPr/>
+        <p:nvPr/>
+      </p:nvGrpSpPr>
+      <p:grpSpPr>
+        <a:xfrm>
+          <a:off x="0" y="0"/>
+          <a:ext cx="0" cy="0"/>
+          <a:chOff x="0" y="0"/>
+          <a:chExt cx="0" cy="0"/>
+        </a:xfrm>
+      </p:grpSpPr>
+      <p:pic>
+        <p:nvPicPr>
+          <p:cNvPr id="5122" name="Picture 2" descr="Cómo hacer una calculadora en Python – Diagrama de Clases">
+            <a:extLst>
+              <a:ext uri="{FF2B5EF4-FFF2-40B4-BE49-F238E27FC236}">
+                <a16:creationId xmlns:a16="http://schemas.microsoft.com/office/drawing/2014/main" id="{538D7BB9-DE06-47A5-899D-55100EDEBDC8}"/>
+              </a:ext>
+            </a:extLst>
+          </p:cNvPr>
+          <p:cNvPicPr>
+            <a:picLocks noChangeAspect="1" noChangeArrowheads="1"/>
+          </p:cNvPicPr>
+          <p:nvPr/>
+        </p:nvPicPr>
+        <p:blipFill>
+          <a:blip r:embed="rId2">
+            <a:extLst>
+              <a:ext uri="{28A0092B-C50C-407E-A947-70E740481C1C}">
+                <a14:useLocalDpi xmlns:a14="http://schemas.microsoft.com/office/drawing/2010/main" val="0"/>
+              </a:ext>
+            </a:extLst>
+          </a:blip>
+          <a:srcRect/>
+          <a:stretch>
+            <a:fillRect/>
+          </a:stretch>
+        </p:blipFill>
+        <p:spPr bwMode="auto">
+          <a:xfrm>
+            <a:off x="652284" y="142890"/>
+            <a:ext cx="10887431" cy="6847174"/>
+          </a:xfrm>
+          <a:prstGeom prst="rect">
+            <a:avLst/>
+          </a:prstGeom>
+          <a:noFill/>
+          <a:extLst>
+            <a:ext uri="{909E8E84-426E-40DD-AFC4-6F175D3DCCD1}">
+              <a14:hiddenFill xmlns:a14="http://schemas.microsoft.com/office/drawing/2010/main">
+                <a:solidFill>
+                  <a:srgbClr val="FFFFFF"/>
+                </a:solidFill>
+              </a14:hiddenFill>
+            </a:ext>
+          </a:extLst>
+        </p:spPr>
+      </p:pic>
+      <p:sp>
+        <p:nvSpPr>
+          <p:cNvPr id="4" name="CuadroTexto 3">
+            <a:extLst>
+              <a:ext uri="{FF2B5EF4-FFF2-40B4-BE49-F238E27FC236}">
+                <a16:creationId xmlns:a16="http://schemas.microsoft.com/office/drawing/2014/main" id="{20C4A5F7-8CAB-4D1C-9EA6-531B40E931FA}"/>
+              </a:ext>
+            </a:extLst>
+          </p:cNvPr>
+          <p:cNvSpPr txBox="1"/>
+          <p:nvPr/>
+        </p:nvSpPr>
+        <p:spPr>
+          <a:xfrm>
+            <a:off x="1285461" y="199647"/>
+            <a:ext cx="2252870" cy="2215991"/>
+          </a:xfrm>
+          <a:prstGeom prst="rect">
+            <a:avLst/>
+          </a:prstGeom>
+          <a:noFill/>
+        </p:spPr>
+        <p:txBody>
+          <a:bodyPr wrap="square">
+            <a:spAutoFit/>
+          </a:bodyPr>
+          <a:lstStyle/>
+          <a:p>
+            <a:r>
+              <a:rPr lang="es-CO" sz="13800" dirty="0"/>
+              <a:t>✔️</a:t>
+            </a:r>
+          </a:p>
+        </p:txBody>
+      </p:sp>
+      <p:sp>
+        <p:nvSpPr>
+          <p:cNvPr id="5" name="CuadroTexto 4">
+            <a:extLst>
+              <a:ext uri="{FF2B5EF4-FFF2-40B4-BE49-F238E27FC236}">
+                <a16:creationId xmlns:a16="http://schemas.microsoft.com/office/drawing/2014/main" id="{6446A4DE-9EF4-4A22-9312-C1863E1AD0CA}"/>
+              </a:ext>
+            </a:extLst>
+          </p:cNvPr>
+          <p:cNvSpPr txBox="1"/>
+          <p:nvPr/>
+        </p:nvSpPr>
+        <p:spPr>
+          <a:xfrm>
+            <a:off x="6483394" y="0"/>
+            <a:ext cx="2252870" cy="2215991"/>
+          </a:xfrm>
+          <a:prstGeom prst="rect">
+            <a:avLst/>
+          </a:prstGeom>
+          <a:noFill/>
+        </p:spPr>
+        <p:txBody>
+          <a:bodyPr wrap="square">
+            <a:spAutoFit/>
+          </a:bodyPr>
+          <a:lstStyle/>
+          <a:p>
+            <a:r>
+              <a:rPr lang="es-CO" sz="13800" dirty="0"/>
+              <a:t>✔️</a:t>
+            </a:r>
+          </a:p>
+        </p:txBody>
+      </p:sp>
+      <p:sp>
+        <p:nvSpPr>
+          <p:cNvPr id="6" name="CuadroTexto 5">
+            <a:extLst>
+              <a:ext uri="{FF2B5EF4-FFF2-40B4-BE49-F238E27FC236}">
+                <a16:creationId xmlns:a16="http://schemas.microsoft.com/office/drawing/2014/main" id="{72F05DB0-C695-4A5D-94E3-73C65B4EB8DC}"/>
+              </a:ext>
+            </a:extLst>
+          </p:cNvPr>
+          <p:cNvSpPr txBox="1"/>
+          <p:nvPr/>
+        </p:nvSpPr>
+        <p:spPr>
+          <a:xfrm>
+            <a:off x="639033" y="2816087"/>
+            <a:ext cx="2252870" cy="2215991"/>
+          </a:xfrm>
+          <a:prstGeom prst="rect">
+            <a:avLst/>
+          </a:prstGeom>
+          <a:noFill/>
+        </p:spPr>
+        <p:txBody>
+          <a:bodyPr wrap="square">
+            <a:spAutoFit/>
+          </a:bodyPr>
+          <a:lstStyle/>
+          <a:p>
+            <a:r>
+              <a:rPr lang="es-CO" sz="13800" dirty="0"/>
+              <a:t>✔️</a:t>
+            </a:r>
+          </a:p>
+        </p:txBody>
+      </p:sp>
+    </p:spTree>
+    <p:extLst>
+      <p:ext uri="{BB962C8B-B14F-4D97-AF65-F5344CB8AC3E}">
+        <p14:creationId xmlns:p14="http://schemas.microsoft.com/office/powerpoint/2010/main" val="1576225803"/>
+      </p:ext>
+    </p:extLst>
+  </p:cSld>
+  <p:clrMapOvr>
+    <a:masterClrMapping/>
+  </p:clrMapOvr>
+</p:sld>
+</file>
+
+<file path=ppt/slides/slide14.xml><?xml version="1.0" encoding="utf-8"?>
+<p:sld xmlns:a="http://schemas.openxmlformats.org/drawingml/2006/main" xmlns:r="http://schemas.openxmlformats.org/officeDocument/2006/relationships" xmlns:p="http://schemas.openxmlformats.org/presentationml/2006/main">
+  <p:cSld>
+    <p:spTree>
+      <p:nvGrpSpPr>
+        <p:cNvPr id="1" name=""/>
+        <p:cNvGrpSpPr/>
+        <p:nvPr/>
+      </p:nvGrpSpPr>
+      <p:grpSpPr>
+        <a:xfrm>
+          <a:off x="0" y="0"/>
+          <a:ext cx="0" cy="0"/>
+          <a:chOff x="0" y="0"/>
+          <a:chExt cx="0" cy="0"/>
+        </a:xfrm>
+      </p:grpSpPr>
+      <p:pic>
+        <p:nvPicPr>
+          <p:cNvPr id="5" name="Imagen 4">
+            <a:extLst>
+              <a:ext uri="{FF2B5EF4-FFF2-40B4-BE49-F238E27FC236}">
+                <a16:creationId xmlns:a16="http://schemas.microsoft.com/office/drawing/2014/main" id="{35CD3F28-62AB-49B7-87C2-64397CB43140}"/>
+              </a:ext>
+            </a:extLst>
+          </p:cNvPr>
+          <p:cNvPicPr>
+            <a:picLocks noChangeAspect="1"/>
+          </p:cNvPicPr>
+          <p:nvPr/>
+        </p:nvPicPr>
+        <p:blipFill rotWithShape="1">
+          <a:blip r:embed="rId2"/>
+          <a:srcRect l="5217" t="27429" r="29130" b="17858"/>
+          <a:stretch/>
+        </p:blipFill>
+        <p:spPr>
+          <a:xfrm>
+            <a:off x="29176" y="8690"/>
+            <a:ext cx="8004313" cy="3750365"/>
+          </a:xfrm>
+          <a:prstGeom prst="rect">
+            <a:avLst/>
+          </a:prstGeom>
+        </p:spPr>
+      </p:pic>
+      <p:sp>
+        <p:nvSpPr>
+          <p:cNvPr id="6" name="Rectangle 1">
+            <a:extLst>
+              <a:ext uri="{FF2B5EF4-FFF2-40B4-BE49-F238E27FC236}">
+                <a16:creationId xmlns:a16="http://schemas.microsoft.com/office/drawing/2014/main" id="{ACDCAF30-8260-43E5-A0EE-1C21DC756153}"/>
+              </a:ext>
+            </a:extLst>
+          </p:cNvPr>
+          <p:cNvSpPr>
+            <a:spLocks noChangeArrowheads="1"/>
+          </p:cNvSpPr>
+          <p:nvPr/>
+        </p:nvSpPr>
+        <p:spPr bwMode="auto">
+          <a:xfrm>
+            <a:off x="8033489" y="0"/>
+            <a:ext cx="4158511" cy="646331"/>
+          </a:xfrm>
+          <a:prstGeom prst="rect">
+            <a:avLst/>
+          </a:prstGeom>
+          <a:solidFill>
+            <a:srgbClr val="DCF0EF"/>
+          </a:solidFill>
+          <a:ln>
+            <a:noFill/>
+          </a:ln>
+          <a:effectLst/>
+          <a:extLst>
+            <a:ext uri="{91240B29-F687-4F45-9708-019B960494DF}">
+              <a14:hiddenLine xmlns:a14="http://schemas.microsoft.com/office/drawing/2010/main" w="9525">
+                <a:solidFill>
+                  <a:schemeClr val="tx1"/>
+                </a:solidFill>
+                <a:miter lim="800000"/>
+                <a:headEnd/>
+                <a:tailEnd/>
+              </a14:hiddenLine>
+            </a:ext>
+            <a:ext uri="{AF507438-7753-43E0-B8FC-AC1667EBCBE1}">
+              <a14:hiddenEffects xmlns:a14="http://schemas.microsoft.com/office/drawing/2010/main">
+                <a:effectLst>
+                  <a:outerShdw dist="35921" dir="2700000" algn="ctr" rotWithShape="0">
+                    <a:schemeClr val="bg2"/>
+                  </a:outerShdw>
+                </a:effectLst>
+              </a14:hiddenEffects>
+            </a:ext>
+          </a:extLst>
+        </p:spPr>
+        <p:txBody>
+          <a:bodyPr vert="horz" wrap="none" lIns="91440" tIns="45720" rIns="91440" bIns="45720" numCol="1" anchor="ctr" anchorCtr="0" compatLnSpc="1">
+            <a:prstTxWarp prst="textNoShape">
+              <a:avLst/>
+            </a:prstTxWarp>
+            <a:spAutoFit/>
+          </a:bodyPr>
+          <a:lstStyle>
+            <a:lvl1pPr eaLnBrk="0" fontAlgn="base" hangingPunct="0">
+              <a:spcBef>
+                <a:spcPct val="0"/>
+              </a:spcBef>
+              <a:spcAft>
+                <a:spcPct val="0"/>
+              </a:spcAft>
+              <a:defRPr>
+                <a:solidFill>
+                  <a:schemeClr val="tx1"/>
+                </a:solidFill>
+                <a:latin typeface="Arial" panose="020B0604020202020204" pitchFamily="34" charset="0"/>
+              </a:defRPr>
+            </a:lvl1pPr>
+            <a:lvl2pPr eaLnBrk="0" fontAlgn="base" hangingPunct="0">
+              <a:spcBef>
+                <a:spcPct val="0"/>
+              </a:spcBef>
+              <a:spcAft>
+                <a:spcPct val="0"/>
+              </a:spcAft>
+              <a:defRPr>
+                <a:solidFill>
+                  <a:schemeClr val="tx1"/>
+                </a:solidFill>
+                <a:latin typeface="Arial" panose="020B0604020202020204" pitchFamily="34" charset="0"/>
+              </a:defRPr>
+            </a:lvl2pPr>
+            <a:lvl3pPr eaLnBrk="0" fontAlgn="base" hangingPunct="0">
+              <a:spcBef>
+                <a:spcPct val="0"/>
+              </a:spcBef>
+              <a:spcAft>
+                <a:spcPct val="0"/>
+              </a:spcAft>
+              <a:defRPr>
+                <a:solidFill>
+                  <a:schemeClr val="tx1"/>
+                </a:solidFill>
+                <a:latin typeface="Arial" panose="020B0604020202020204" pitchFamily="34" charset="0"/>
+              </a:defRPr>
+            </a:lvl3pPr>
+            <a:lvl4pPr eaLnBrk="0" fontAlgn="base" hangingPunct="0">
+              <a:spcBef>
+                <a:spcPct val="0"/>
+              </a:spcBef>
+              <a:spcAft>
+                <a:spcPct val="0"/>
+              </a:spcAft>
+              <a:defRPr>
+                <a:solidFill>
+                  <a:schemeClr val="tx1"/>
+                </a:solidFill>
+                <a:latin typeface="Arial" panose="020B0604020202020204" pitchFamily="34" charset="0"/>
+              </a:defRPr>
+            </a:lvl4pPr>
+            <a:lvl5pPr eaLnBrk="0" fontAlgn="base" hangingPunct="0">
+              <a:spcBef>
+                <a:spcPct val="0"/>
+              </a:spcBef>
+              <a:spcAft>
+                <a:spcPct val="0"/>
+              </a:spcAft>
+              <a:defRPr>
+                <a:solidFill>
+                  <a:schemeClr val="tx1"/>
+                </a:solidFill>
+                <a:latin typeface="Arial" panose="020B0604020202020204" pitchFamily="34" charset="0"/>
+              </a:defRPr>
+            </a:lvl5pPr>
+            <a:lvl6pPr eaLnBrk="0" fontAlgn="base" hangingPunct="0">
+              <a:spcBef>
+                <a:spcPct val="0"/>
+              </a:spcBef>
+              <a:spcAft>
+                <a:spcPct val="0"/>
+              </a:spcAft>
+              <a:defRPr>
+                <a:solidFill>
+                  <a:schemeClr val="tx1"/>
+                </a:solidFill>
+                <a:latin typeface="Arial" panose="020B0604020202020204" pitchFamily="34" charset="0"/>
+              </a:defRPr>
+            </a:lvl6pPr>
+            <a:lvl7pPr eaLnBrk="0" fontAlgn="base" hangingPunct="0">
+              <a:spcBef>
+                <a:spcPct val="0"/>
+              </a:spcBef>
+              <a:spcAft>
+                <a:spcPct val="0"/>
+              </a:spcAft>
+              <a:defRPr>
+                <a:solidFill>
+                  <a:schemeClr val="tx1"/>
+                </a:solidFill>
+                <a:latin typeface="Arial" panose="020B0604020202020204" pitchFamily="34" charset="0"/>
+              </a:defRPr>
+            </a:lvl7pPr>
+            <a:lvl8pPr eaLnBrk="0" fontAlgn="base" hangingPunct="0">
+              <a:spcBef>
+                <a:spcPct val="0"/>
+              </a:spcBef>
+              <a:spcAft>
+                <a:spcPct val="0"/>
+              </a:spcAft>
+              <a:defRPr>
+                <a:solidFill>
+                  <a:schemeClr val="tx1"/>
+                </a:solidFill>
+                <a:latin typeface="Arial" panose="020B0604020202020204" pitchFamily="34" charset="0"/>
+              </a:defRPr>
+            </a:lvl8pPr>
+            <a:lvl9pPr eaLnBrk="0" fontAlgn="base" hangingPunct="0">
+              <a:spcBef>
+                <a:spcPct val="0"/>
+              </a:spcBef>
+              <a:spcAft>
+                <a:spcPct val="0"/>
+              </a:spcAft>
+              <a:defRPr>
+                <a:solidFill>
+                  <a:schemeClr val="tx1"/>
+                </a:solidFill>
+                <a:latin typeface="Arial" panose="020B0604020202020204" pitchFamily="34" charset="0"/>
+              </a:defRPr>
+            </a:lvl9pPr>
+          </a:lstStyle>
+          <a:p>
+            <a:pPr marL="0" marR="0" lvl="0" indent="0" algn="l" defTabSz="914400" rtl="0" eaLnBrk="0" fontAlgn="base" latinLnBrk="0" hangingPunct="0">
+              <a:lnSpc>
+                <a:spcPct val="100000"/>
+              </a:lnSpc>
+              <a:spcBef>
+                <a:spcPct val="0"/>
+              </a:spcBef>
+              <a:spcAft>
+                <a:spcPct val="0"/>
+              </a:spcAft>
+              <a:buClrTx/>
+              <a:buSzTx/>
+              <a:buFontTx/>
+              <a:buNone/>
+              <a:tabLst/>
+            </a:pPr>
+            <a:r>
+              <a:rPr kumimoji="0" lang="es-CO" altLang="es-CO" sz="3600" b="0" i="0" u="none" strike="noStrike" cap="none" normalizeH="0" baseline="0" dirty="0">
+                <a:ln>
+                  <a:noFill/>
+                </a:ln>
+                <a:solidFill>
+                  <a:srgbClr val="2C2C2C"/>
+                </a:solidFill>
+                <a:effectLst/>
+                <a:latin typeface="opensans-regular"/>
+              </a:rPr>
+              <a:t>clase </a:t>
+            </a:r>
+            <a:r>
+              <a:rPr kumimoji="0" lang="es-CO" altLang="es-CO" sz="3600" b="0" i="0" u="none" strike="noStrike" cap="none" normalizeH="0" baseline="0" dirty="0" err="1">
+                <a:ln>
+                  <a:noFill/>
+                </a:ln>
+                <a:solidFill>
+                  <a:srgbClr val="333333"/>
+                </a:solidFill>
+                <a:effectLst/>
+                <a:latin typeface="Arial Unicode MS"/>
+              </a:rPr>
+              <a:t>EstadoInicial</a:t>
+            </a:r>
+            <a:r>
+              <a:rPr kumimoji="0" lang="es-CO" altLang="es-CO" sz="3600" b="0" i="0" u="none" strike="noStrike" cap="none" normalizeH="0" baseline="0" dirty="0">
+                <a:ln>
+                  <a:noFill/>
+                </a:ln>
+                <a:solidFill>
+                  <a:srgbClr val="2C2C2C"/>
+                </a:solidFill>
+                <a:effectLst/>
+                <a:latin typeface="opensans-regular"/>
+              </a:rPr>
+              <a:t>. </a:t>
+            </a:r>
+            <a:r>
+              <a:rPr kumimoji="0" lang="es-CO" altLang="es-CO" sz="3200" b="0" i="0" u="none" strike="noStrike" cap="none" normalizeH="0" baseline="0" dirty="0">
+                <a:ln>
+                  <a:noFill/>
+                </a:ln>
+                <a:solidFill>
+                  <a:schemeClr val="tx1"/>
+                </a:solidFill>
+                <a:effectLst/>
+              </a:rPr>
+              <a:t> </a:t>
+            </a:r>
+            <a:endParaRPr kumimoji="0" lang="es-CO" altLang="es-CO" sz="4800" b="0" i="0" u="none" strike="noStrike" cap="none" normalizeH="0" baseline="0" dirty="0">
+              <a:ln>
+                <a:noFill/>
+              </a:ln>
+              <a:solidFill>
+                <a:schemeClr val="tx1"/>
+              </a:solidFill>
+              <a:effectLst/>
+              <a:latin typeface="Arial" panose="020B0604020202020204" pitchFamily="34" charset="0"/>
+            </a:endParaRPr>
+          </a:p>
+        </p:txBody>
+      </p:sp>
+      <p:sp>
+        <p:nvSpPr>
+          <p:cNvPr id="7" name="Rectangle 2">
+            <a:extLst>
+              <a:ext uri="{FF2B5EF4-FFF2-40B4-BE49-F238E27FC236}">
+                <a16:creationId xmlns:a16="http://schemas.microsoft.com/office/drawing/2014/main" id="{E79079EE-54E2-402A-822D-C55DDB3BF9F0}"/>
+              </a:ext>
+            </a:extLst>
+          </p:cNvPr>
+          <p:cNvSpPr>
+            <a:spLocks noChangeArrowheads="1"/>
+          </p:cNvSpPr>
+          <p:nvPr/>
+        </p:nvSpPr>
+        <p:spPr bwMode="auto">
+          <a:xfrm rot="10800000" flipV="1">
+            <a:off x="8004314" y="655021"/>
+            <a:ext cx="4158510" cy="3477875"/>
+          </a:xfrm>
+          <a:prstGeom prst="rect">
+            <a:avLst/>
+          </a:prstGeom>
+          <a:noFill/>
+          <a:ln>
+            <a:noFill/>
+          </a:ln>
+          <a:effectLst/>
+          <a:extLst>
+            <a:ext uri="{909E8E84-426E-40DD-AFC4-6F175D3DCCD1}">
+              <a14:hiddenFill xmlns:a14="http://schemas.microsoft.com/office/drawing/2010/main">
+                <a:solidFill>
+                  <a:schemeClr val="accent1"/>
+                </a:solidFill>
+              </a14:hiddenFill>
+            </a:ext>
+            <a:ext uri="{91240B29-F687-4F45-9708-019B960494DF}">
+              <a14:hiddenLine xmlns:a14="http://schemas.microsoft.com/office/drawing/2010/main" w="9525">
+                <a:solidFill>
+                  <a:schemeClr val="tx1"/>
+                </a:solidFill>
+                <a:miter lim="800000"/>
+                <a:headEnd/>
+                <a:tailEnd/>
+              </a14:hiddenLine>
+            </a:ext>
+            <a:ext uri="{AF507438-7753-43E0-B8FC-AC1667EBCBE1}">
+              <a14:hiddenEffects xmlns:a14="http://schemas.microsoft.com/office/drawing/2010/main">
+                <a:effectLst>
+                  <a:outerShdw dist="35921" dir="2700000" algn="ctr" rotWithShape="0">
+                    <a:schemeClr val="bg2"/>
+                  </a:outerShdw>
+                </a:effectLst>
+              </a14:hiddenEffects>
+            </a:ext>
+          </a:extLst>
+        </p:spPr>
+        <p:txBody>
+          <a:bodyPr vert="horz" wrap="square" lIns="91440" tIns="45720" rIns="91440" bIns="45720" numCol="1" anchor="ctr" anchorCtr="0" compatLnSpc="1">
+            <a:prstTxWarp prst="textNoShape">
+              <a:avLst/>
+            </a:prstTxWarp>
+            <a:spAutoFit/>
+          </a:bodyPr>
+          <a:lstStyle/>
+          <a:p>
+            <a:pPr marL="0" marR="0" lvl="0" indent="0" algn="l" defTabSz="914400" rtl="0" eaLnBrk="0" fontAlgn="base" latinLnBrk="0" hangingPunct="0">
+              <a:lnSpc>
+                <a:spcPct val="100000"/>
+              </a:lnSpc>
+              <a:spcBef>
+                <a:spcPct val="0"/>
+              </a:spcBef>
+              <a:spcAft>
+                <a:spcPct val="0"/>
+              </a:spcAft>
+              <a:buClrTx/>
+              <a:buSzTx/>
+              <a:buFontTx/>
+              <a:buNone/>
+              <a:tabLst/>
+            </a:pPr>
+            <a:endParaRPr kumimoji="0" lang="es-CO" altLang="es-CO" sz="2000" i="0" u="none" strike="noStrike" cap="none" normalizeH="0" baseline="0" dirty="0">
+              <a:ln>
+                <a:noFill/>
+              </a:ln>
+              <a:solidFill>
+                <a:schemeClr val="tx1"/>
+              </a:solidFill>
+              <a:effectLst/>
+              <a:latin typeface="Arial" panose="020B0604020202020204" pitchFamily="34" charset="0"/>
+            </a:endParaRPr>
+          </a:p>
+          <a:p>
+            <a:pPr marL="0" marR="0" lvl="0" indent="0" algn="l" defTabSz="914400" rtl="0" eaLnBrk="0" fontAlgn="base" latinLnBrk="0" hangingPunct="0">
+              <a:lnSpc>
+                <a:spcPct val="100000"/>
+              </a:lnSpc>
+              <a:spcBef>
+                <a:spcPct val="0"/>
+              </a:spcBef>
+              <a:spcAft>
+                <a:spcPct val="0"/>
+              </a:spcAft>
+              <a:buClrTx/>
+              <a:buSzTx/>
+              <a:buFontTx/>
+              <a:buChar char="•"/>
+              <a:tabLst/>
+            </a:pPr>
+            <a:r>
+              <a:rPr kumimoji="0" lang="es-CO" altLang="es-CO" sz="2000" i="0" u="none" strike="noStrike" cap="none" normalizeH="0" baseline="0" dirty="0">
+                <a:ln>
+                  <a:noFill/>
+                </a:ln>
+                <a:solidFill>
+                  <a:schemeClr val="tx1"/>
+                </a:solidFill>
+                <a:effectLst/>
+                <a:latin typeface="Arial" panose="020B0604020202020204" pitchFamily="34" charset="0"/>
+              </a:rPr>
+              <a:t>Inicialización (</a:t>
+            </a:r>
+            <a:r>
+              <a:rPr kumimoji="0" lang="es-CO" altLang="es-CO" sz="2000" i="0" u="none" strike="noStrike" cap="none" normalizeH="0" baseline="0" dirty="0">
+                <a:ln>
+                  <a:noFill/>
+                </a:ln>
+                <a:solidFill>
+                  <a:schemeClr val="tx1"/>
+                </a:solidFill>
+                <a:effectLst/>
+                <a:latin typeface="Arial Unicode MS"/>
+              </a:rPr>
+              <a:t>__</a:t>
+            </a:r>
+            <a:r>
+              <a:rPr kumimoji="0" lang="es-CO" altLang="es-CO" sz="2000" i="0" u="none" strike="noStrike" cap="none" normalizeH="0" baseline="0" dirty="0" err="1">
+                <a:ln>
+                  <a:noFill/>
+                </a:ln>
+                <a:solidFill>
+                  <a:schemeClr val="tx1"/>
+                </a:solidFill>
+                <a:effectLst/>
+                <a:latin typeface="Arial Unicode MS"/>
+              </a:rPr>
+              <a:t>init</a:t>
+            </a:r>
+            <a:r>
+              <a:rPr kumimoji="0" lang="es-CO" altLang="es-CO" sz="2000" i="0" u="none" strike="noStrike" cap="none" normalizeH="0" baseline="0" dirty="0">
+                <a:ln>
+                  <a:noFill/>
+                </a:ln>
+                <a:solidFill>
+                  <a:schemeClr val="tx1"/>
+                </a:solidFill>
+                <a:effectLst/>
+                <a:latin typeface="Arial Unicode MS"/>
+              </a:rPr>
+              <a:t>__</a:t>
+            </a:r>
+            <a:r>
+              <a:rPr kumimoji="0" lang="es-CO" altLang="es-CO" sz="2000" i="0" u="none" strike="noStrike" cap="none" normalizeH="0" baseline="0" dirty="0">
+                <a:ln>
+                  <a:noFill/>
+                </a:ln>
+                <a:solidFill>
+                  <a:schemeClr val="tx1"/>
+                </a:solidFill>
+                <a:effectLst/>
+              </a:rPr>
+              <a:t>):</a:t>
+            </a:r>
+            <a:endParaRPr kumimoji="0" lang="es-CO" altLang="es-CO" sz="2000" i="0" u="none" strike="noStrike" cap="none" normalizeH="0" baseline="0" dirty="0">
+              <a:ln>
+                <a:noFill/>
+              </a:ln>
+              <a:solidFill>
+                <a:schemeClr val="tx1"/>
+              </a:solidFill>
+              <a:effectLst/>
+              <a:latin typeface="Arial" panose="020B0604020202020204" pitchFamily="34" charset="0"/>
+            </a:endParaRPr>
+          </a:p>
+          <a:p>
+            <a:pPr marL="457200" marR="0" lvl="1" indent="0" algn="l" defTabSz="914400" rtl="0" eaLnBrk="0" fontAlgn="base" latinLnBrk="0" hangingPunct="0">
+              <a:lnSpc>
+                <a:spcPct val="100000"/>
+              </a:lnSpc>
+              <a:spcBef>
+                <a:spcPct val="0"/>
+              </a:spcBef>
+              <a:spcAft>
+                <a:spcPct val="0"/>
+              </a:spcAft>
+              <a:buClrTx/>
+              <a:buSzTx/>
+              <a:buFontTx/>
+              <a:buChar char="•"/>
+              <a:tabLst/>
+            </a:pPr>
+            <a:r>
+              <a:rPr kumimoji="0" lang="es-CO" altLang="es-CO" sz="2000" i="0" u="none" strike="noStrike" cap="none" normalizeH="0" baseline="0" dirty="0">
+                <a:ln>
+                  <a:noFill/>
+                </a:ln>
+                <a:solidFill>
+                  <a:schemeClr val="tx1"/>
+                </a:solidFill>
+                <a:effectLst/>
+                <a:latin typeface="Arial" panose="020B0604020202020204" pitchFamily="34" charset="0"/>
+              </a:rPr>
+              <a:t>Recibe la calculadora y un número inicial (mostrado en pantalla).</a:t>
+            </a:r>
+          </a:p>
+          <a:p>
+            <a:pPr marL="457200" marR="0" lvl="1" indent="0" algn="l" defTabSz="914400" rtl="0" eaLnBrk="0" fontAlgn="base" latinLnBrk="0" hangingPunct="0">
+              <a:lnSpc>
+                <a:spcPct val="100000"/>
+              </a:lnSpc>
+              <a:spcBef>
+                <a:spcPct val="0"/>
+              </a:spcBef>
+              <a:spcAft>
+                <a:spcPct val="0"/>
+              </a:spcAft>
+              <a:buClrTx/>
+              <a:buSzTx/>
+              <a:buFontTx/>
+              <a:buChar char="•"/>
+              <a:tabLst/>
+            </a:pPr>
+            <a:r>
+              <a:rPr kumimoji="0" lang="es-CO" altLang="es-CO" sz="2000" i="0" u="none" strike="noStrike" cap="none" normalizeH="0" baseline="0" dirty="0">
+                <a:ln>
+                  <a:noFill/>
+                </a:ln>
+                <a:solidFill>
+                  <a:schemeClr val="tx1"/>
+                </a:solidFill>
+                <a:effectLst/>
+                <a:latin typeface="Arial" panose="020B0604020202020204" pitchFamily="34" charset="0"/>
+              </a:rPr>
+              <a:t>Guarda el número en un atributo.</a:t>
+            </a:r>
+          </a:p>
+          <a:p>
+            <a:pPr marL="457200" marR="0" lvl="1" indent="0" algn="l" defTabSz="914400" rtl="0" eaLnBrk="0" fontAlgn="base" latinLnBrk="0" hangingPunct="0">
+              <a:lnSpc>
+                <a:spcPct val="100000"/>
+              </a:lnSpc>
+              <a:spcBef>
+                <a:spcPct val="0"/>
+              </a:spcBef>
+              <a:spcAft>
+                <a:spcPct val="0"/>
+              </a:spcAft>
+              <a:buClrTx/>
+              <a:buSzTx/>
+              <a:buFontTx/>
+              <a:buChar char="•"/>
+              <a:tabLst/>
+            </a:pPr>
+            <a:r>
+              <a:rPr kumimoji="0" lang="es-CO" altLang="es-CO" sz="2000" i="0" u="none" strike="noStrike" cap="none" normalizeH="0" baseline="0" dirty="0">
+                <a:ln>
+                  <a:noFill/>
+                </a:ln>
+                <a:solidFill>
+                  <a:schemeClr val="tx1"/>
+                </a:solidFill>
+                <a:effectLst/>
+                <a:latin typeface="Arial" panose="020B0604020202020204" pitchFamily="34" charset="0"/>
+              </a:rPr>
+              <a:t>Llama al constructor de la clase padre con </a:t>
+            </a:r>
+            <a:r>
+              <a:rPr kumimoji="0" lang="es-CO" altLang="es-CO" sz="2000" i="0" u="none" strike="noStrike" cap="none" normalizeH="0" baseline="0" dirty="0">
+                <a:ln>
+                  <a:noFill/>
+                </a:ln>
+                <a:solidFill>
+                  <a:schemeClr val="tx1"/>
+                </a:solidFill>
+                <a:effectLst/>
+                <a:latin typeface="Arial Unicode MS"/>
+              </a:rPr>
+              <a:t>super().__</a:t>
+            </a:r>
+            <a:r>
+              <a:rPr kumimoji="0" lang="es-CO" altLang="es-CO" sz="2000" i="0" u="none" strike="noStrike" cap="none" normalizeH="0" baseline="0" dirty="0" err="1">
+                <a:ln>
+                  <a:noFill/>
+                </a:ln>
+                <a:solidFill>
+                  <a:schemeClr val="tx1"/>
+                </a:solidFill>
+                <a:effectLst/>
+                <a:latin typeface="Arial Unicode MS"/>
+              </a:rPr>
+              <a:t>init</a:t>
+            </a:r>
+            <a:r>
+              <a:rPr kumimoji="0" lang="es-CO" altLang="es-CO" sz="2000" i="0" u="none" strike="noStrike" cap="none" normalizeH="0" baseline="0" dirty="0">
+                <a:ln>
+                  <a:noFill/>
+                </a:ln>
+                <a:solidFill>
+                  <a:schemeClr val="tx1"/>
+                </a:solidFill>
+                <a:effectLst/>
+                <a:latin typeface="Arial Unicode MS"/>
+              </a:rPr>
+              <a:t>__(calculadora)</a:t>
+            </a:r>
+            <a:r>
+              <a:rPr kumimoji="0" lang="es-CO" altLang="es-CO" sz="2000" i="0" u="none" strike="noStrike" cap="none" normalizeH="0" baseline="0" dirty="0">
+                <a:ln>
+                  <a:noFill/>
+                </a:ln>
+                <a:solidFill>
+                  <a:schemeClr val="tx1"/>
+                </a:solidFill>
+                <a:effectLst/>
+              </a:rPr>
+              <a:t>.</a:t>
+            </a:r>
+            <a:endParaRPr kumimoji="0" lang="es-CO" altLang="es-CO" sz="2000" i="0" u="none" strike="noStrike" cap="none" normalizeH="0" baseline="0" dirty="0">
+              <a:ln>
+                <a:noFill/>
+              </a:ln>
+              <a:solidFill>
+                <a:schemeClr val="tx1"/>
+              </a:solidFill>
+              <a:effectLst/>
+              <a:latin typeface="Arial" panose="020B0604020202020204" pitchFamily="34" charset="0"/>
+            </a:endParaRPr>
+          </a:p>
+          <a:p>
+            <a:pPr marL="0" marR="0" lvl="0" indent="0" algn="l" defTabSz="914400" rtl="0" eaLnBrk="0" fontAlgn="base" latinLnBrk="0" hangingPunct="0">
+              <a:lnSpc>
+                <a:spcPct val="100000"/>
+              </a:lnSpc>
+              <a:spcBef>
+                <a:spcPct val="0"/>
+              </a:spcBef>
+              <a:spcAft>
+                <a:spcPct val="0"/>
+              </a:spcAft>
+              <a:buClrTx/>
+              <a:buSzTx/>
+              <a:buFontTx/>
+              <a:buNone/>
+              <a:tabLst/>
+            </a:pPr>
+            <a:endParaRPr kumimoji="0" lang="es-CO" altLang="es-CO" sz="2000" i="0" u="none" strike="noStrike" cap="none" normalizeH="0" baseline="0" dirty="0">
+              <a:ln>
+                <a:noFill/>
+              </a:ln>
+              <a:solidFill>
+                <a:schemeClr val="tx1"/>
+              </a:solidFill>
+              <a:effectLst/>
+              <a:latin typeface="Arial" panose="020B0604020202020204" pitchFamily="34" charset="0"/>
+            </a:endParaRPr>
+          </a:p>
+        </p:txBody>
+      </p:sp>
+      <p:sp>
+        <p:nvSpPr>
+          <p:cNvPr id="9" name="CuadroTexto 8">
+            <a:extLst>
+              <a:ext uri="{FF2B5EF4-FFF2-40B4-BE49-F238E27FC236}">
+                <a16:creationId xmlns:a16="http://schemas.microsoft.com/office/drawing/2014/main" id="{B83A7E1E-EA89-4294-8655-E5B9F7369FDF}"/>
+              </a:ext>
+            </a:extLst>
+          </p:cNvPr>
+          <p:cNvSpPr txBox="1"/>
+          <p:nvPr/>
+        </p:nvSpPr>
+        <p:spPr>
+          <a:xfrm>
+            <a:off x="-1" y="3767745"/>
+            <a:ext cx="12064621" cy="3170099"/>
+          </a:xfrm>
+          <a:prstGeom prst="rect">
+            <a:avLst/>
+          </a:prstGeom>
+          <a:noFill/>
+        </p:spPr>
+        <p:txBody>
+          <a:bodyPr wrap="square">
+            <a:spAutoFit/>
+          </a:bodyPr>
+          <a:lstStyle/>
+          <a:p>
+            <a:pPr marL="0" marR="0" lvl="0" indent="0" algn="l" defTabSz="914400" rtl="0" eaLnBrk="0" fontAlgn="base" latinLnBrk="0" hangingPunct="0">
+              <a:lnSpc>
+                <a:spcPct val="100000"/>
+              </a:lnSpc>
+              <a:spcBef>
+                <a:spcPct val="0"/>
+              </a:spcBef>
+              <a:spcAft>
+                <a:spcPct val="0"/>
+              </a:spcAft>
+              <a:buClrTx/>
+              <a:buSzTx/>
+              <a:buFontTx/>
+              <a:buChar char="•"/>
+              <a:tabLst/>
+            </a:pPr>
+            <a:r>
+              <a:rPr kumimoji="0" lang="es-CO" altLang="es-CO" sz="2000" i="0" u="none" strike="noStrike" cap="none" normalizeH="0" baseline="0" dirty="0">
+                <a:ln>
+                  <a:noFill/>
+                </a:ln>
+                <a:solidFill>
+                  <a:schemeClr val="tx1"/>
+                </a:solidFill>
+                <a:effectLst/>
+                <a:latin typeface="Arial" panose="020B0604020202020204" pitchFamily="34" charset="0"/>
+              </a:rPr>
+              <a:t>Operaciones:</a:t>
+            </a:r>
+          </a:p>
+          <a:p>
+            <a:pPr marL="457200" marR="0" lvl="1" indent="0" algn="l" defTabSz="914400" rtl="0" eaLnBrk="0" fontAlgn="base" latinLnBrk="0" hangingPunct="0">
+              <a:lnSpc>
+                <a:spcPct val="100000"/>
+              </a:lnSpc>
+              <a:spcBef>
+                <a:spcPct val="0"/>
+              </a:spcBef>
+              <a:spcAft>
+                <a:spcPct val="0"/>
+              </a:spcAft>
+              <a:buClrTx/>
+              <a:buSzTx/>
+              <a:buFontTx/>
+              <a:buChar char="•"/>
+              <a:tabLst/>
+            </a:pPr>
+            <a:r>
+              <a:rPr kumimoji="0" lang="es-CO" altLang="es-CO" sz="2000" i="0" u="none" strike="noStrike" cap="none" normalizeH="0" baseline="0" dirty="0" err="1">
+                <a:ln>
+                  <a:noFill/>
+                </a:ln>
+                <a:solidFill>
+                  <a:schemeClr val="tx1"/>
+                </a:solidFill>
+                <a:effectLst/>
+                <a:latin typeface="Arial Unicode MS"/>
+              </a:rPr>
+              <a:t>valor_actual</a:t>
+            </a:r>
+            <a:r>
+              <a:rPr kumimoji="0" lang="es-CO" altLang="es-CO" sz="2000" i="0" u="none" strike="noStrike" cap="none" normalizeH="0" baseline="0" dirty="0">
+                <a:ln>
+                  <a:noFill/>
+                </a:ln>
+                <a:solidFill>
+                  <a:schemeClr val="tx1"/>
+                </a:solidFill>
+                <a:effectLst/>
+              </a:rPr>
+              <a:t> → devuelve el número almacenado.</a:t>
+            </a:r>
+            <a:endParaRPr kumimoji="0" lang="es-CO" altLang="es-CO" sz="2000" i="0" u="none" strike="noStrike" cap="none" normalizeH="0" baseline="0" dirty="0">
+              <a:ln>
+                <a:noFill/>
+              </a:ln>
+              <a:solidFill>
+                <a:schemeClr val="tx1"/>
+              </a:solidFill>
+              <a:effectLst/>
+              <a:latin typeface="Arial" panose="020B0604020202020204" pitchFamily="34" charset="0"/>
+            </a:endParaRPr>
+          </a:p>
+          <a:p>
+            <a:pPr marL="457200" marR="0" lvl="1" indent="0" algn="l" defTabSz="914400" rtl="0" eaLnBrk="0" fontAlgn="base" latinLnBrk="0" hangingPunct="0">
+              <a:lnSpc>
+                <a:spcPct val="100000"/>
+              </a:lnSpc>
+              <a:spcBef>
+                <a:spcPct val="0"/>
+              </a:spcBef>
+              <a:spcAft>
+                <a:spcPct val="0"/>
+              </a:spcAft>
+              <a:buClrTx/>
+              <a:buSzTx/>
+              <a:buFontTx/>
+              <a:buChar char="•"/>
+              <a:tabLst/>
+            </a:pPr>
+            <a:r>
+              <a:rPr kumimoji="0" lang="es-CO" altLang="es-CO" sz="2000" i="0" u="none" strike="noStrike" cap="none" normalizeH="0" baseline="0" dirty="0" err="1">
+                <a:ln>
+                  <a:noFill/>
+                </a:ln>
+                <a:solidFill>
+                  <a:schemeClr val="tx1"/>
+                </a:solidFill>
+                <a:effectLst/>
+                <a:latin typeface="Arial Unicode MS"/>
+              </a:rPr>
+              <a:t>introducir_digito</a:t>
+            </a:r>
+            <a:r>
+              <a:rPr kumimoji="0" lang="es-CO" altLang="es-CO" sz="2000" i="0" u="none" strike="noStrike" cap="none" normalizeH="0" baseline="0" dirty="0">
+                <a:ln>
+                  <a:noFill/>
+                </a:ln>
+                <a:solidFill>
+                  <a:schemeClr val="tx1"/>
+                </a:solidFill>
+                <a:effectLst/>
+              </a:rPr>
+              <a:t> → cambia al estado </a:t>
+            </a:r>
+            <a:r>
+              <a:rPr kumimoji="0" lang="es-CO" altLang="es-CO" sz="2000" i="0" u="none" strike="noStrike" cap="none" normalizeH="0" baseline="0" dirty="0" err="1">
+                <a:ln>
+                  <a:noFill/>
+                </a:ln>
+                <a:solidFill>
+                  <a:schemeClr val="tx1"/>
+                </a:solidFill>
+                <a:effectLst/>
+                <a:latin typeface="Arial Unicode MS"/>
+              </a:rPr>
+              <a:t>EstadoIntroducirPrimerOperando</a:t>
+            </a:r>
+            <a:r>
+              <a:rPr kumimoji="0" lang="es-CO" altLang="es-CO" sz="2000" i="0" u="none" strike="noStrike" cap="none" normalizeH="0" baseline="0" dirty="0">
+                <a:ln>
+                  <a:noFill/>
+                </a:ln>
+                <a:solidFill>
+                  <a:schemeClr val="tx1"/>
+                </a:solidFill>
+                <a:effectLst/>
+              </a:rPr>
+              <a:t> (según el diagrama).</a:t>
+            </a:r>
+            <a:endParaRPr kumimoji="0" lang="es-CO" altLang="es-CO" sz="2000" i="0" u="none" strike="noStrike" cap="none" normalizeH="0" baseline="0" dirty="0">
+              <a:ln>
+                <a:noFill/>
+              </a:ln>
+              <a:solidFill>
+                <a:schemeClr val="tx1"/>
+              </a:solidFill>
+              <a:effectLst/>
+              <a:latin typeface="Arial" panose="020B0604020202020204" pitchFamily="34" charset="0"/>
+            </a:endParaRPr>
+          </a:p>
+          <a:p>
+            <a:pPr marL="457200" marR="0" lvl="1" indent="0" algn="l" defTabSz="914400" rtl="0" eaLnBrk="0" fontAlgn="base" latinLnBrk="0" hangingPunct="0">
+              <a:lnSpc>
+                <a:spcPct val="100000"/>
+              </a:lnSpc>
+              <a:spcBef>
+                <a:spcPct val="0"/>
+              </a:spcBef>
+              <a:spcAft>
+                <a:spcPct val="0"/>
+              </a:spcAft>
+              <a:buClrTx/>
+              <a:buSzTx/>
+              <a:buFontTx/>
+              <a:buChar char="•"/>
+              <a:tabLst/>
+            </a:pPr>
+            <a:r>
+              <a:rPr kumimoji="0" lang="es-CO" altLang="es-CO" sz="2000" i="0" u="none" strike="noStrike" cap="none" normalizeH="0" baseline="0" dirty="0" err="1">
+                <a:ln>
+                  <a:noFill/>
+                </a:ln>
+                <a:solidFill>
+                  <a:schemeClr val="tx1"/>
+                </a:solidFill>
+                <a:effectLst/>
+                <a:latin typeface="Arial Unicode MS"/>
+              </a:rPr>
+              <a:t>introducir_operador</a:t>
+            </a:r>
+            <a:r>
+              <a:rPr kumimoji="0" lang="es-CO" altLang="es-CO" sz="2000" i="0" u="none" strike="noStrike" cap="none" normalizeH="0" baseline="0" dirty="0">
+                <a:ln>
+                  <a:noFill/>
+                </a:ln>
+                <a:solidFill>
+                  <a:schemeClr val="tx1"/>
+                </a:solidFill>
+                <a:effectLst/>
+              </a:rPr>
+              <a:t>:</a:t>
+            </a:r>
+            <a:endParaRPr kumimoji="0" lang="es-CO" altLang="es-CO" sz="2000" i="0" u="none" strike="noStrike" cap="none" normalizeH="0" baseline="0" dirty="0">
+              <a:ln>
+                <a:noFill/>
+              </a:ln>
+              <a:solidFill>
+                <a:schemeClr val="tx1"/>
+              </a:solidFill>
+              <a:effectLst/>
+              <a:latin typeface="Arial" panose="020B0604020202020204" pitchFamily="34" charset="0"/>
+            </a:endParaRPr>
+          </a:p>
+          <a:p>
+            <a:pPr marL="914400" marR="0" lvl="2" indent="0" algn="l" defTabSz="914400" rtl="0" eaLnBrk="0" fontAlgn="base" latinLnBrk="0" hangingPunct="0">
+              <a:lnSpc>
+                <a:spcPct val="100000"/>
+              </a:lnSpc>
+              <a:spcBef>
+                <a:spcPct val="0"/>
+              </a:spcBef>
+              <a:spcAft>
+                <a:spcPct val="0"/>
+              </a:spcAft>
+              <a:buClrTx/>
+              <a:buSzTx/>
+              <a:buFontTx/>
+              <a:buChar char="•"/>
+              <a:tabLst/>
+            </a:pPr>
+            <a:r>
+              <a:rPr kumimoji="0" lang="es-CO" altLang="es-CO" sz="2000" i="0" u="none" strike="noStrike" cap="none" normalizeH="0" baseline="0" dirty="0">
+                <a:ln>
+                  <a:noFill/>
+                </a:ln>
+                <a:solidFill>
+                  <a:schemeClr val="tx1"/>
+                </a:solidFill>
+                <a:effectLst/>
+                <a:latin typeface="Arial" panose="020B0604020202020204" pitchFamily="34" charset="0"/>
+              </a:rPr>
+              <a:t>Operador unario → se calcula directamente usando el diccionario de operadores unarios. El estado no cambia (permanece en </a:t>
+            </a:r>
+            <a:r>
+              <a:rPr kumimoji="0" lang="es-CO" altLang="es-CO" sz="2000" i="0" u="none" strike="noStrike" cap="none" normalizeH="0" baseline="0" dirty="0" err="1">
+                <a:ln>
+                  <a:noFill/>
+                </a:ln>
+                <a:solidFill>
+                  <a:schemeClr val="tx1"/>
+                </a:solidFill>
+                <a:effectLst/>
+                <a:latin typeface="Arial Unicode MS"/>
+              </a:rPr>
+              <a:t>EstadoInicial</a:t>
+            </a:r>
+            <a:r>
+              <a:rPr kumimoji="0" lang="es-CO" altLang="es-CO" sz="2000" i="0" u="none" strike="noStrike" cap="none" normalizeH="0" baseline="0" dirty="0">
+                <a:ln>
+                  <a:noFill/>
+                </a:ln>
+                <a:solidFill>
+                  <a:schemeClr val="tx1"/>
+                </a:solidFill>
+                <a:effectLst/>
+              </a:rPr>
+              <a:t>).</a:t>
+            </a:r>
+            <a:endParaRPr kumimoji="0" lang="es-CO" altLang="es-CO" sz="2000" i="0" u="none" strike="noStrike" cap="none" normalizeH="0" baseline="0" dirty="0">
+              <a:ln>
+                <a:noFill/>
+              </a:ln>
+              <a:solidFill>
+                <a:schemeClr val="tx1"/>
+              </a:solidFill>
+              <a:effectLst/>
+              <a:latin typeface="Arial" panose="020B0604020202020204" pitchFamily="34" charset="0"/>
+            </a:endParaRPr>
+          </a:p>
+          <a:p>
+            <a:pPr marL="914400" marR="0" lvl="2" indent="0" algn="l" defTabSz="914400" rtl="0" eaLnBrk="0" fontAlgn="base" latinLnBrk="0" hangingPunct="0">
+              <a:lnSpc>
+                <a:spcPct val="100000"/>
+              </a:lnSpc>
+              <a:spcBef>
+                <a:spcPct val="0"/>
+              </a:spcBef>
+              <a:spcAft>
+                <a:spcPct val="0"/>
+              </a:spcAft>
+              <a:buClrTx/>
+              <a:buSzTx/>
+              <a:buFontTx/>
+              <a:buChar char="•"/>
+              <a:tabLst/>
+            </a:pPr>
+            <a:r>
+              <a:rPr kumimoji="0" lang="es-CO" altLang="es-CO" sz="2000" i="0" u="none" strike="noStrike" cap="none" normalizeH="0" baseline="0" dirty="0">
+                <a:ln>
+                  <a:noFill/>
+                </a:ln>
+                <a:solidFill>
+                  <a:schemeClr val="tx1"/>
+                </a:solidFill>
+                <a:effectLst/>
+                <a:latin typeface="Arial" panose="020B0604020202020204" pitchFamily="34" charset="0"/>
+              </a:rPr>
+              <a:t>Operador binario → se cambia al estado </a:t>
+            </a:r>
+            <a:r>
+              <a:rPr kumimoji="0" lang="es-CO" altLang="es-CO" sz="2000" i="0" u="none" strike="noStrike" cap="none" normalizeH="0" baseline="0" dirty="0" err="1">
+                <a:ln>
+                  <a:noFill/>
+                </a:ln>
+                <a:solidFill>
+                  <a:schemeClr val="tx1"/>
+                </a:solidFill>
+                <a:effectLst/>
+                <a:latin typeface="Arial Unicode MS"/>
+              </a:rPr>
+              <a:t>EstadoResultadoParcial</a:t>
+            </a:r>
+            <a:r>
+              <a:rPr kumimoji="0" lang="es-CO" altLang="es-CO" sz="2000" i="0" u="none" strike="noStrike" cap="none" normalizeH="0" baseline="0" dirty="0">
+                <a:ln>
+                  <a:noFill/>
+                </a:ln>
+                <a:solidFill>
+                  <a:schemeClr val="tx1"/>
+                </a:solidFill>
+                <a:effectLst/>
+              </a:rPr>
+              <a:t>, guardando:</a:t>
+            </a:r>
+            <a:endParaRPr kumimoji="0" lang="es-CO" altLang="es-CO" sz="2000" i="0" u="none" strike="noStrike" cap="none" normalizeH="0" baseline="0" dirty="0">
+              <a:ln>
+                <a:noFill/>
+              </a:ln>
+              <a:solidFill>
+                <a:schemeClr val="tx1"/>
+              </a:solidFill>
+              <a:effectLst/>
+              <a:latin typeface="Arial" panose="020B0604020202020204" pitchFamily="34" charset="0"/>
+            </a:endParaRPr>
+          </a:p>
+          <a:p>
+            <a:pPr marL="1371600" marR="0" lvl="3" indent="0" algn="l" defTabSz="914400" rtl="0" eaLnBrk="0" fontAlgn="base" latinLnBrk="0" hangingPunct="0">
+              <a:lnSpc>
+                <a:spcPct val="100000"/>
+              </a:lnSpc>
+              <a:spcBef>
+                <a:spcPct val="0"/>
+              </a:spcBef>
+              <a:spcAft>
+                <a:spcPct val="0"/>
+              </a:spcAft>
+              <a:buClrTx/>
+              <a:buSzTx/>
+              <a:buFontTx/>
+              <a:buChar char="•"/>
+              <a:tabLst/>
+            </a:pPr>
+            <a:r>
+              <a:rPr kumimoji="0" lang="es-CO" altLang="es-CO" sz="2000" i="0" u="none" strike="noStrike" cap="none" normalizeH="0" baseline="0" dirty="0">
+                <a:ln>
+                  <a:noFill/>
+                </a:ln>
+                <a:solidFill>
+                  <a:schemeClr val="tx1"/>
+                </a:solidFill>
+                <a:effectLst/>
+                <a:latin typeface="Arial" panose="020B0604020202020204" pitchFamily="34" charset="0"/>
+              </a:rPr>
+              <a:t>primer operando,</a:t>
+            </a:r>
+          </a:p>
+          <a:p>
+            <a:pPr marL="1371600" marR="0" lvl="3" indent="0" algn="l" defTabSz="914400" rtl="0" eaLnBrk="0" fontAlgn="base" latinLnBrk="0" hangingPunct="0">
+              <a:lnSpc>
+                <a:spcPct val="100000"/>
+              </a:lnSpc>
+              <a:spcBef>
+                <a:spcPct val="0"/>
+              </a:spcBef>
+              <a:spcAft>
+                <a:spcPct val="0"/>
+              </a:spcAft>
+              <a:buClrTx/>
+              <a:buSzTx/>
+              <a:buFontTx/>
+              <a:buChar char="•"/>
+              <a:tabLst/>
+            </a:pPr>
+            <a:r>
+              <a:rPr kumimoji="0" lang="es-CO" altLang="es-CO" sz="2000" i="0" u="none" strike="noStrike" cap="none" normalizeH="0" baseline="0" dirty="0">
+                <a:ln>
+                  <a:noFill/>
+                </a:ln>
+                <a:solidFill>
+                  <a:schemeClr val="tx1"/>
+                </a:solidFill>
+                <a:effectLst/>
+                <a:latin typeface="Arial" panose="020B0604020202020204" pitchFamily="34" charset="0"/>
+              </a:rPr>
+              <a:t>número a mostrar,</a:t>
+            </a:r>
+          </a:p>
+          <a:p>
+            <a:pPr marL="1371600" marR="0" lvl="3" indent="0" algn="l" defTabSz="914400" rtl="0" eaLnBrk="0" fontAlgn="base" latinLnBrk="0" hangingPunct="0">
+              <a:lnSpc>
+                <a:spcPct val="100000"/>
+              </a:lnSpc>
+              <a:spcBef>
+                <a:spcPct val="0"/>
+              </a:spcBef>
+              <a:spcAft>
+                <a:spcPct val="0"/>
+              </a:spcAft>
+              <a:buClrTx/>
+              <a:buSzTx/>
+              <a:buFontTx/>
+              <a:buChar char="•"/>
+              <a:tabLst/>
+            </a:pPr>
+            <a:r>
+              <a:rPr kumimoji="0" lang="es-CO" altLang="es-CO" sz="2000" i="0" u="none" strike="noStrike" cap="none" normalizeH="0" baseline="0" dirty="0">
+                <a:ln>
+                  <a:noFill/>
+                </a:ln>
+                <a:solidFill>
+                  <a:schemeClr val="tx1"/>
+                </a:solidFill>
+                <a:effectLst/>
+                <a:latin typeface="Arial" panose="020B0604020202020204" pitchFamily="34" charset="0"/>
+              </a:rPr>
+              <a:t>operador.</a:t>
+            </a:r>
+          </a:p>
+        </p:txBody>
+      </p:sp>
+    </p:spTree>
+    <p:extLst>
+      <p:ext uri="{BB962C8B-B14F-4D97-AF65-F5344CB8AC3E}">
+        <p14:creationId xmlns:p14="http://schemas.microsoft.com/office/powerpoint/2010/main" val="1841294936"/>
+      </p:ext>
+    </p:extLst>
+  </p:cSld>
+  <p:clrMapOvr>
+    <a:masterClrMapping/>
+  </p:clrMapOvr>
+</p:sld>
+</file>
+
+<file path=ppt/slides/slide15.xml><?xml version="1.0" encoding="utf-8"?>
+<p:sld xmlns:a="http://schemas.openxmlformats.org/drawingml/2006/main" xmlns:r="http://schemas.openxmlformats.org/officeDocument/2006/relationships" xmlns:p="http://schemas.openxmlformats.org/presentationml/2006/main">
+  <p:cSld>
+    <p:spTree>
+      <p:nvGrpSpPr>
+        <p:cNvPr id="1" name=""/>
+        <p:cNvGrpSpPr/>
+        <p:nvPr/>
+      </p:nvGrpSpPr>
+      <p:grpSpPr>
+        <a:xfrm>
+          <a:off x="0" y="0"/>
+          <a:ext cx="0" cy="0"/>
+          <a:chOff x="0" y="0"/>
+          <a:chExt cx="0" cy="0"/>
+        </a:xfrm>
+      </p:grpSpPr>
+      <p:pic>
+        <p:nvPicPr>
+          <p:cNvPr id="5122" name="Picture 2" descr="Cómo hacer una calculadora en Python – Diagrama de Clases">
+            <a:extLst>
+              <a:ext uri="{FF2B5EF4-FFF2-40B4-BE49-F238E27FC236}">
+                <a16:creationId xmlns:a16="http://schemas.microsoft.com/office/drawing/2014/main" id="{538D7BB9-DE06-47A5-899D-55100EDEBDC8}"/>
+              </a:ext>
+            </a:extLst>
+          </p:cNvPr>
+          <p:cNvPicPr>
+            <a:picLocks noChangeAspect="1" noChangeArrowheads="1"/>
+          </p:cNvPicPr>
+          <p:nvPr/>
+        </p:nvPicPr>
+        <p:blipFill>
+          <a:blip r:embed="rId2">
+            <a:extLst>
+              <a:ext uri="{28A0092B-C50C-407E-A947-70E740481C1C}">
+                <a14:useLocalDpi xmlns:a14="http://schemas.microsoft.com/office/drawing/2010/main" val="0"/>
+              </a:ext>
+            </a:extLst>
+          </a:blip>
+          <a:srcRect/>
+          <a:stretch>
+            <a:fillRect/>
+          </a:stretch>
+        </p:blipFill>
+        <p:spPr bwMode="auto">
+          <a:xfrm>
+            <a:off x="652284" y="142890"/>
+            <a:ext cx="10887431" cy="6847174"/>
+          </a:xfrm>
+          <a:prstGeom prst="rect">
+            <a:avLst/>
+          </a:prstGeom>
+          <a:noFill/>
+          <a:extLst>
+            <a:ext uri="{909E8E84-426E-40DD-AFC4-6F175D3DCCD1}">
+              <a14:hiddenFill xmlns:a14="http://schemas.microsoft.com/office/drawing/2010/main">
+                <a:solidFill>
+                  <a:srgbClr val="FFFFFF"/>
+                </a:solidFill>
+              </a14:hiddenFill>
+            </a:ext>
+          </a:extLst>
+        </p:spPr>
+      </p:pic>
+      <p:sp>
+        <p:nvSpPr>
+          <p:cNvPr id="4" name="CuadroTexto 3">
+            <a:extLst>
+              <a:ext uri="{FF2B5EF4-FFF2-40B4-BE49-F238E27FC236}">
+                <a16:creationId xmlns:a16="http://schemas.microsoft.com/office/drawing/2014/main" id="{20C4A5F7-8CAB-4D1C-9EA6-531B40E931FA}"/>
+              </a:ext>
+            </a:extLst>
+          </p:cNvPr>
+          <p:cNvSpPr txBox="1"/>
+          <p:nvPr/>
+        </p:nvSpPr>
+        <p:spPr>
+          <a:xfrm>
+            <a:off x="1285461" y="199647"/>
+            <a:ext cx="2252870" cy="2215991"/>
+          </a:xfrm>
+          <a:prstGeom prst="rect">
+            <a:avLst/>
+          </a:prstGeom>
+          <a:noFill/>
+        </p:spPr>
+        <p:txBody>
+          <a:bodyPr wrap="square">
+            <a:spAutoFit/>
+          </a:bodyPr>
+          <a:lstStyle/>
+          <a:p>
+            <a:r>
+              <a:rPr lang="es-CO" sz="13800" dirty="0"/>
+              <a:t>✔️</a:t>
+            </a:r>
+          </a:p>
+        </p:txBody>
+      </p:sp>
+      <p:sp>
+        <p:nvSpPr>
+          <p:cNvPr id="5" name="CuadroTexto 4">
+            <a:extLst>
+              <a:ext uri="{FF2B5EF4-FFF2-40B4-BE49-F238E27FC236}">
+                <a16:creationId xmlns:a16="http://schemas.microsoft.com/office/drawing/2014/main" id="{6446A4DE-9EF4-4A22-9312-C1863E1AD0CA}"/>
+              </a:ext>
+            </a:extLst>
+          </p:cNvPr>
+          <p:cNvSpPr txBox="1"/>
+          <p:nvPr/>
+        </p:nvSpPr>
+        <p:spPr>
+          <a:xfrm>
+            <a:off x="6483394" y="0"/>
+            <a:ext cx="2252870" cy="2215991"/>
+          </a:xfrm>
+          <a:prstGeom prst="rect">
+            <a:avLst/>
+          </a:prstGeom>
+          <a:noFill/>
+        </p:spPr>
+        <p:txBody>
+          <a:bodyPr wrap="square">
+            <a:spAutoFit/>
+          </a:bodyPr>
+          <a:lstStyle/>
+          <a:p>
+            <a:r>
+              <a:rPr lang="es-CO" sz="13800" dirty="0"/>
+              <a:t>✔️</a:t>
+            </a:r>
+          </a:p>
+        </p:txBody>
+      </p:sp>
+      <p:sp>
+        <p:nvSpPr>
+          <p:cNvPr id="6" name="CuadroTexto 5">
+            <a:extLst>
+              <a:ext uri="{FF2B5EF4-FFF2-40B4-BE49-F238E27FC236}">
+                <a16:creationId xmlns:a16="http://schemas.microsoft.com/office/drawing/2014/main" id="{72F05DB0-C695-4A5D-94E3-73C65B4EB8DC}"/>
+              </a:ext>
+            </a:extLst>
+          </p:cNvPr>
+          <p:cNvSpPr txBox="1"/>
+          <p:nvPr/>
+        </p:nvSpPr>
+        <p:spPr>
+          <a:xfrm>
+            <a:off x="639033" y="2816087"/>
+            <a:ext cx="2252870" cy="2215991"/>
+          </a:xfrm>
+          <a:prstGeom prst="rect">
+            <a:avLst/>
+          </a:prstGeom>
+          <a:noFill/>
+        </p:spPr>
+        <p:txBody>
+          <a:bodyPr wrap="square">
+            <a:spAutoFit/>
+          </a:bodyPr>
+          <a:lstStyle/>
+          <a:p>
+            <a:r>
+              <a:rPr lang="es-CO" sz="13800" dirty="0"/>
+              <a:t>✔️</a:t>
+            </a:r>
+          </a:p>
+        </p:txBody>
+      </p:sp>
+      <p:sp>
+        <p:nvSpPr>
+          <p:cNvPr id="7" name="CuadroTexto 6">
+            <a:extLst>
+              <a:ext uri="{FF2B5EF4-FFF2-40B4-BE49-F238E27FC236}">
+                <a16:creationId xmlns:a16="http://schemas.microsoft.com/office/drawing/2014/main" id="{2B983C47-977D-419F-9004-FB53B1ACBB38}"/>
+              </a:ext>
+            </a:extLst>
+          </p:cNvPr>
+          <p:cNvSpPr txBox="1"/>
+          <p:nvPr/>
+        </p:nvSpPr>
+        <p:spPr>
+          <a:xfrm>
+            <a:off x="4230524" y="2816087"/>
+            <a:ext cx="2252870" cy="2215991"/>
+          </a:xfrm>
+          <a:prstGeom prst="rect">
+            <a:avLst/>
+          </a:prstGeom>
+          <a:noFill/>
+        </p:spPr>
+        <p:txBody>
+          <a:bodyPr wrap="square">
+            <a:spAutoFit/>
+          </a:bodyPr>
+          <a:lstStyle/>
+          <a:p>
+            <a:r>
+              <a:rPr lang="es-CO" sz="13800" dirty="0"/>
+              <a:t>✔️</a:t>
+            </a:r>
+          </a:p>
+        </p:txBody>
+      </p:sp>
+    </p:spTree>
+    <p:extLst>
+      <p:ext uri="{BB962C8B-B14F-4D97-AF65-F5344CB8AC3E}">
+        <p14:creationId xmlns:p14="http://schemas.microsoft.com/office/powerpoint/2010/main" val="3636648633"/>
+      </p:ext>
+    </p:extLst>
+  </p:cSld>
+  <p:clrMapOvr>
+    <a:masterClrMapping/>
+  </p:clrMapOvr>
+</p:sld>
+</file>
+
+<file path=ppt/slides/slide16.xml><?xml version="1.0" encoding="utf-8"?>
+<p:sld xmlns:a="http://schemas.openxmlformats.org/drawingml/2006/main" xmlns:r="http://schemas.openxmlformats.org/officeDocument/2006/relationships" xmlns:p="http://schemas.openxmlformats.org/presentationml/2006/main">
+  <p:cSld>
+    <p:spTree>
+      <p:nvGrpSpPr>
+        <p:cNvPr id="1" name=""/>
+        <p:cNvGrpSpPr/>
+        <p:nvPr/>
+      </p:nvGrpSpPr>
+      <p:grpSpPr>
+        <a:xfrm>
+          <a:off x="0" y="0"/>
+          <a:ext cx="0" cy="0"/>
+          <a:chOff x="0" y="0"/>
+          <a:chExt cx="0" cy="0"/>
+        </a:xfrm>
+      </p:grpSpPr>
+      <p:pic>
+        <p:nvPicPr>
+          <p:cNvPr id="7" name="Imagen 6">
+            <a:extLst>
+              <a:ext uri="{FF2B5EF4-FFF2-40B4-BE49-F238E27FC236}">
+                <a16:creationId xmlns:a16="http://schemas.microsoft.com/office/drawing/2014/main" id="{09E7A596-A30A-4ADB-A047-53C7E13BF053}"/>
+              </a:ext>
+            </a:extLst>
+          </p:cNvPr>
+          <p:cNvPicPr>
+            <a:picLocks noChangeAspect="1"/>
+          </p:cNvPicPr>
+          <p:nvPr/>
+        </p:nvPicPr>
+        <p:blipFill rotWithShape="1">
+          <a:blip r:embed="rId2"/>
+          <a:srcRect l="26956" t="29749" r="49745" b="19212"/>
+          <a:stretch/>
+        </p:blipFill>
+        <p:spPr>
+          <a:xfrm>
+            <a:off x="0" y="441344"/>
+            <a:ext cx="5168347" cy="6365723"/>
+          </a:xfrm>
+          <a:prstGeom prst="rect">
+            <a:avLst/>
+          </a:prstGeom>
+        </p:spPr>
+      </p:pic>
+      <p:sp>
+        <p:nvSpPr>
+          <p:cNvPr id="4" name="Rectangle 1">
+            <a:extLst>
+              <a:ext uri="{FF2B5EF4-FFF2-40B4-BE49-F238E27FC236}">
+                <a16:creationId xmlns:a16="http://schemas.microsoft.com/office/drawing/2014/main" id="{02E8BBC1-736C-4E01-AFBB-812BA019FC00}"/>
+              </a:ext>
+            </a:extLst>
+          </p:cNvPr>
+          <p:cNvSpPr>
+            <a:spLocks noChangeArrowheads="1"/>
+          </p:cNvSpPr>
+          <p:nvPr/>
+        </p:nvSpPr>
+        <p:spPr bwMode="auto">
+          <a:xfrm>
+            <a:off x="0" y="-33010"/>
+            <a:ext cx="5660524" cy="523220"/>
+          </a:xfrm>
+          <a:prstGeom prst="rect">
+            <a:avLst/>
+          </a:prstGeom>
+          <a:solidFill>
+            <a:srgbClr val="DCF0EF"/>
+          </a:solidFill>
+          <a:ln>
+            <a:noFill/>
+          </a:ln>
+          <a:effectLst/>
+          <a:extLst>
+            <a:ext uri="{91240B29-F687-4F45-9708-019B960494DF}">
+              <a14:hiddenLine xmlns:a14="http://schemas.microsoft.com/office/drawing/2010/main" w="9525">
+                <a:solidFill>
+                  <a:schemeClr val="tx1"/>
+                </a:solidFill>
+                <a:miter lim="800000"/>
+                <a:headEnd/>
+                <a:tailEnd/>
+              </a14:hiddenLine>
+            </a:ext>
+            <a:ext uri="{AF507438-7753-43E0-B8FC-AC1667EBCBE1}">
+              <a14:hiddenEffects xmlns:a14="http://schemas.microsoft.com/office/drawing/2010/main">
+                <a:effectLst>
+                  <a:outerShdw dist="35921" dir="2700000" algn="ctr" rotWithShape="0">
+                    <a:schemeClr val="bg2"/>
+                  </a:outerShdw>
+                </a:effectLst>
+              </a14:hiddenEffects>
+            </a:ext>
+          </a:extLst>
+        </p:spPr>
+        <p:txBody>
+          <a:bodyPr vert="horz" wrap="none" lIns="91440" tIns="45720" rIns="91440" bIns="45720" numCol="1" anchor="ctr" anchorCtr="0" compatLnSpc="1">
+            <a:prstTxWarp prst="textNoShape">
+              <a:avLst/>
+            </a:prstTxWarp>
+            <a:spAutoFit/>
+          </a:bodyPr>
+          <a:lstStyle>
+            <a:lvl1pPr eaLnBrk="0" fontAlgn="base" hangingPunct="0">
+              <a:spcBef>
+                <a:spcPct val="0"/>
+              </a:spcBef>
+              <a:spcAft>
+                <a:spcPct val="0"/>
+              </a:spcAft>
+              <a:defRPr>
+                <a:solidFill>
+                  <a:schemeClr val="tx1"/>
+                </a:solidFill>
+                <a:latin typeface="Arial" panose="020B0604020202020204" pitchFamily="34" charset="0"/>
+              </a:defRPr>
+            </a:lvl1pPr>
+            <a:lvl2pPr eaLnBrk="0" fontAlgn="base" hangingPunct="0">
+              <a:spcBef>
+                <a:spcPct val="0"/>
+              </a:spcBef>
+              <a:spcAft>
+                <a:spcPct val="0"/>
+              </a:spcAft>
+              <a:defRPr>
+                <a:solidFill>
+                  <a:schemeClr val="tx1"/>
+                </a:solidFill>
+                <a:latin typeface="Arial" panose="020B0604020202020204" pitchFamily="34" charset="0"/>
+              </a:defRPr>
+            </a:lvl2pPr>
+            <a:lvl3pPr eaLnBrk="0" fontAlgn="base" hangingPunct="0">
+              <a:spcBef>
+                <a:spcPct val="0"/>
+              </a:spcBef>
+              <a:spcAft>
+                <a:spcPct val="0"/>
+              </a:spcAft>
+              <a:defRPr>
+                <a:solidFill>
+                  <a:schemeClr val="tx1"/>
+                </a:solidFill>
+                <a:latin typeface="Arial" panose="020B0604020202020204" pitchFamily="34" charset="0"/>
+              </a:defRPr>
+            </a:lvl3pPr>
+            <a:lvl4pPr eaLnBrk="0" fontAlgn="base" hangingPunct="0">
+              <a:spcBef>
+                <a:spcPct val="0"/>
+              </a:spcBef>
+              <a:spcAft>
+                <a:spcPct val="0"/>
+              </a:spcAft>
+              <a:defRPr>
+                <a:solidFill>
+                  <a:schemeClr val="tx1"/>
+                </a:solidFill>
+                <a:latin typeface="Arial" panose="020B0604020202020204" pitchFamily="34" charset="0"/>
+              </a:defRPr>
+            </a:lvl4pPr>
+            <a:lvl5pPr eaLnBrk="0" fontAlgn="base" hangingPunct="0">
+              <a:spcBef>
+                <a:spcPct val="0"/>
+              </a:spcBef>
+              <a:spcAft>
+                <a:spcPct val="0"/>
+              </a:spcAft>
+              <a:defRPr>
+                <a:solidFill>
+                  <a:schemeClr val="tx1"/>
+                </a:solidFill>
+                <a:latin typeface="Arial" panose="020B0604020202020204" pitchFamily="34" charset="0"/>
+              </a:defRPr>
+            </a:lvl5pPr>
+            <a:lvl6pPr eaLnBrk="0" fontAlgn="base" hangingPunct="0">
+              <a:spcBef>
+                <a:spcPct val="0"/>
+              </a:spcBef>
+              <a:spcAft>
+                <a:spcPct val="0"/>
+              </a:spcAft>
+              <a:defRPr>
+                <a:solidFill>
+                  <a:schemeClr val="tx1"/>
+                </a:solidFill>
+                <a:latin typeface="Arial" panose="020B0604020202020204" pitchFamily="34" charset="0"/>
+              </a:defRPr>
+            </a:lvl6pPr>
+            <a:lvl7pPr eaLnBrk="0" fontAlgn="base" hangingPunct="0">
+              <a:spcBef>
+                <a:spcPct val="0"/>
+              </a:spcBef>
+              <a:spcAft>
+                <a:spcPct val="0"/>
+              </a:spcAft>
+              <a:defRPr>
+                <a:solidFill>
+                  <a:schemeClr val="tx1"/>
+                </a:solidFill>
+                <a:latin typeface="Arial" panose="020B0604020202020204" pitchFamily="34" charset="0"/>
+              </a:defRPr>
+            </a:lvl7pPr>
+            <a:lvl8pPr eaLnBrk="0" fontAlgn="base" hangingPunct="0">
+              <a:spcBef>
+                <a:spcPct val="0"/>
+              </a:spcBef>
+              <a:spcAft>
+                <a:spcPct val="0"/>
+              </a:spcAft>
+              <a:defRPr>
+                <a:solidFill>
+                  <a:schemeClr val="tx1"/>
+                </a:solidFill>
+                <a:latin typeface="Arial" panose="020B0604020202020204" pitchFamily="34" charset="0"/>
+              </a:defRPr>
+            </a:lvl8pPr>
+            <a:lvl9pPr eaLnBrk="0" fontAlgn="base" hangingPunct="0">
+              <a:spcBef>
+                <a:spcPct val="0"/>
+              </a:spcBef>
+              <a:spcAft>
+                <a:spcPct val="0"/>
+              </a:spcAft>
+              <a:defRPr>
+                <a:solidFill>
+                  <a:schemeClr val="tx1"/>
+                </a:solidFill>
+                <a:latin typeface="Arial" panose="020B0604020202020204" pitchFamily="34" charset="0"/>
+              </a:defRPr>
+            </a:lvl9pPr>
+          </a:lstStyle>
+          <a:p>
+            <a:pPr marL="0" marR="0" lvl="0" indent="0" algn="l" defTabSz="914400" rtl="0" eaLnBrk="0" fontAlgn="base" latinLnBrk="0" hangingPunct="0">
+              <a:lnSpc>
+                <a:spcPct val="100000"/>
+              </a:lnSpc>
+              <a:spcBef>
+                <a:spcPct val="0"/>
+              </a:spcBef>
+              <a:spcAft>
+                <a:spcPct val="0"/>
+              </a:spcAft>
+              <a:buClrTx/>
+              <a:buSzTx/>
+              <a:buFontTx/>
+              <a:buNone/>
+              <a:tabLst/>
+            </a:pPr>
+            <a:r>
+              <a:rPr kumimoji="0" lang="es-CO" altLang="es-CO" sz="2800" b="0" i="0" u="none" strike="noStrike" cap="none" normalizeH="0" baseline="0" dirty="0" err="1">
+                <a:ln>
+                  <a:noFill/>
+                </a:ln>
+                <a:solidFill>
+                  <a:srgbClr val="333333"/>
+                </a:solidFill>
+                <a:effectLst/>
+                <a:latin typeface="Arial Unicode MS"/>
+              </a:rPr>
+              <a:t>EstadoIntroducirPrimerOperando</a:t>
+            </a:r>
+            <a:r>
+              <a:rPr kumimoji="0" lang="es-CO" altLang="es-CO" sz="2800" b="0" i="0" u="none" strike="noStrike" cap="none" normalizeH="0" baseline="0" dirty="0">
+                <a:ln>
+                  <a:noFill/>
+                </a:ln>
+                <a:solidFill>
+                  <a:srgbClr val="2C2C2C"/>
+                </a:solidFill>
+                <a:effectLst/>
+                <a:latin typeface="opensans-regular"/>
+              </a:rPr>
+              <a:t>:</a:t>
+            </a:r>
+            <a:r>
+              <a:rPr kumimoji="0" lang="es-CO" altLang="es-CO" sz="2800" b="0" i="0" u="none" strike="noStrike" cap="none" normalizeH="0" baseline="0" dirty="0">
+                <a:ln>
+                  <a:noFill/>
+                </a:ln>
+                <a:solidFill>
+                  <a:schemeClr val="tx1"/>
+                </a:solidFill>
+                <a:effectLst/>
+              </a:rPr>
+              <a:t> </a:t>
+            </a:r>
+          </a:p>
+        </p:txBody>
+      </p:sp>
+      <p:sp>
+        <p:nvSpPr>
+          <p:cNvPr id="5" name="Rectangle 2">
+            <a:extLst>
+              <a:ext uri="{FF2B5EF4-FFF2-40B4-BE49-F238E27FC236}">
+                <a16:creationId xmlns:a16="http://schemas.microsoft.com/office/drawing/2014/main" id="{56BBD4A5-A63F-4787-8F85-043049A95693}"/>
+              </a:ext>
+            </a:extLst>
+          </p:cNvPr>
+          <p:cNvSpPr>
+            <a:spLocks noChangeArrowheads="1"/>
+          </p:cNvSpPr>
+          <p:nvPr/>
+        </p:nvSpPr>
+        <p:spPr bwMode="auto">
+          <a:xfrm>
+            <a:off x="5327375" y="-79653"/>
+            <a:ext cx="6864625" cy="7017306"/>
+          </a:xfrm>
+          <a:prstGeom prst="rect">
+            <a:avLst/>
+          </a:prstGeom>
+          <a:noFill/>
+          <a:ln>
+            <a:noFill/>
+          </a:ln>
+          <a:effectLst/>
+          <a:extLst>
+            <a:ext uri="{909E8E84-426E-40DD-AFC4-6F175D3DCCD1}">
+              <a14:hiddenFill xmlns:a14="http://schemas.microsoft.com/office/drawing/2010/main">
+                <a:solidFill>
+                  <a:schemeClr val="accent1"/>
+                </a:solidFill>
+              </a14:hiddenFill>
+            </a:ext>
+            <a:ext uri="{91240B29-F687-4F45-9708-019B960494DF}">
+              <a14:hiddenLine xmlns:a14="http://schemas.microsoft.com/office/drawing/2010/main" w="9525">
+                <a:solidFill>
+                  <a:schemeClr val="tx1"/>
+                </a:solidFill>
+                <a:miter lim="800000"/>
+                <a:headEnd/>
+                <a:tailEnd/>
+              </a14:hiddenLine>
+            </a:ext>
+            <a:ext uri="{AF507438-7753-43E0-B8FC-AC1667EBCBE1}">
+              <a14:hiddenEffects xmlns:a14="http://schemas.microsoft.com/office/drawing/2010/main">
+                <a:effectLst>
+                  <a:outerShdw dist="35921" dir="2700000" algn="ctr" rotWithShape="0">
+                    <a:schemeClr val="bg2"/>
+                  </a:outerShdw>
+                </a:effectLst>
+              </a14:hiddenEffects>
+            </a:ext>
+          </a:extLst>
+        </p:spPr>
+        <p:txBody>
+          <a:bodyPr vert="horz" wrap="square" lIns="91440" tIns="45720" rIns="91440" bIns="45720" numCol="1" anchor="ctr" anchorCtr="0" compatLnSpc="1">
+            <a:prstTxWarp prst="textNoShape">
+              <a:avLst/>
+            </a:prstTxWarp>
+            <a:spAutoFit/>
+          </a:bodyPr>
+          <a:lstStyle/>
+          <a:p>
+            <a:pPr marL="0" marR="0" lvl="0" indent="0" algn="l" defTabSz="914400" rtl="0" eaLnBrk="0" fontAlgn="base" latinLnBrk="0" hangingPunct="0">
+              <a:lnSpc>
+                <a:spcPct val="100000"/>
+              </a:lnSpc>
+              <a:spcBef>
+                <a:spcPct val="0"/>
+              </a:spcBef>
+              <a:spcAft>
+                <a:spcPct val="0"/>
+              </a:spcAft>
+              <a:buClrTx/>
+              <a:buSzTx/>
+              <a:buFontTx/>
+              <a:buNone/>
+              <a:tabLst/>
+            </a:pPr>
+            <a:endParaRPr kumimoji="0" lang="es-CO" altLang="es-CO" b="0" i="0" u="none" strike="noStrike" cap="none" normalizeH="0" baseline="0" dirty="0">
+              <a:ln>
+                <a:noFill/>
+              </a:ln>
+              <a:solidFill>
+                <a:schemeClr val="tx1"/>
+              </a:solidFill>
+              <a:effectLst/>
+              <a:latin typeface="Arial" panose="020B0604020202020204" pitchFamily="34" charset="0"/>
+              <a:cs typeface="Arial" panose="020B0604020202020204" pitchFamily="34" charset="0"/>
+            </a:endParaRPr>
+          </a:p>
+          <a:p>
+            <a:pPr marL="0" marR="0" lvl="0" indent="0" algn="l" defTabSz="914400" rtl="0" eaLnBrk="0" fontAlgn="base" latinLnBrk="0" hangingPunct="0">
+              <a:lnSpc>
+                <a:spcPct val="100000"/>
+              </a:lnSpc>
+              <a:spcBef>
+                <a:spcPct val="0"/>
+              </a:spcBef>
+              <a:spcAft>
+                <a:spcPct val="0"/>
+              </a:spcAft>
+              <a:buClrTx/>
+              <a:buSzTx/>
+              <a:buFontTx/>
+              <a:buChar char="•"/>
+              <a:tabLst/>
+            </a:pPr>
+            <a:r>
+              <a:rPr kumimoji="0" lang="es-CO" altLang="es-CO" b="1" i="0" u="none" strike="noStrike" cap="none" normalizeH="0" baseline="0" dirty="0">
+                <a:ln>
+                  <a:noFill/>
+                </a:ln>
+                <a:solidFill>
+                  <a:schemeClr val="tx1"/>
+                </a:solidFill>
+                <a:effectLst/>
+                <a:latin typeface="Arial" panose="020B0604020202020204" pitchFamily="34" charset="0"/>
+                <a:cs typeface="Arial" panose="020B0604020202020204" pitchFamily="34" charset="0"/>
+              </a:rPr>
+              <a:t>Inicialización (__</a:t>
+            </a:r>
+            <a:r>
+              <a:rPr kumimoji="0" lang="es-CO" altLang="es-CO" b="1" i="0" u="none" strike="noStrike" cap="none" normalizeH="0" baseline="0" dirty="0" err="1">
+                <a:ln>
+                  <a:noFill/>
+                </a:ln>
+                <a:solidFill>
+                  <a:schemeClr val="tx1"/>
+                </a:solidFill>
+                <a:effectLst/>
+                <a:latin typeface="Arial" panose="020B0604020202020204" pitchFamily="34" charset="0"/>
+                <a:cs typeface="Arial" panose="020B0604020202020204" pitchFamily="34" charset="0"/>
+              </a:rPr>
+              <a:t>init</a:t>
+            </a:r>
+            <a:r>
+              <a:rPr kumimoji="0" lang="es-CO" altLang="es-CO" b="1" i="0" u="none" strike="noStrike" cap="none" normalizeH="0" baseline="0" dirty="0">
+                <a:ln>
+                  <a:noFill/>
+                </a:ln>
+                <a:solidFill>
+                  <a:schemeClr val="tx1"/>
+                </a:solidFill>
+                <a:effectLst/>
+                <a:latin typeface="Arial" panose="020B0604020202020204" pitchFamily="34" charset="0"/>
+                <a:cs typeface="Arial" panose="020B0604020202020204" pitchFamily="34" charset="0"/>
+              </a:rPr>
+              <a:t>__):</a:t>
+            </a:r>
+            <a:endParaRPr kumimoji="0" lang="es-CO" altLang="es-CO" b="0" i="0" u="none" strike="noStrike" cap="none" normalizeH="0" baseline="0" dirty="0">
+              <a:ln>
+                <a:noFill/>
+              </a:ln>
+              <a:solidFill>
+                <a:schemeClr val="tx1"/>
+              </a:solidFill>
+              <a:effectLst/>
+              <a:latin typeface="Arial" panose="020B0604020202020204" pitchFamily="34" charset="0"/>
+              <a:cs typeface="Arial" panose="020B0604020202020204" pitchFamily="34" charset="0"/>
+            </a:endParaRPr>
+          </a:p>
+          <a:p>
+            <a:pPr marL="457200" marR="0" lvl="1" indent="0" algn="l" defTabSz="914400" rtl="0" eaLnBrk="0" fontAlgn="base" latinLnBrk="0" hangingPunct="0">
+              <a:lnSpc>
+                <a:spcPct val="100000"/>
+              </a:lnSpc>
+              <a:spcBef>
+                <a:spcPct val="0"/>
+              </a:spcBef>
+              <a:spcAft>
+                <a:spcPct val="0"/>
+              </a:spcAft>
+              <a:buClrTx/>
+              <a:buSzTx/>
+              <a:buFontTx/>
+              <a:buChar char="•"/>
+              <a:tabLst/>
+            </a:pPr>
+            <a:r>
+              <a:rPr kumimoji="0" lang="es-CO" altLang="es-CO" b="0" i="0" u="none" strike="noStrike" cap="none" normalizeH="0" baseline="0" dirty="0">
+                <a:ln>
+                  <a:noFill/>
+                </a:ln>
+                <a:solidFill>
+                  <a:schemeClr val="tx1"/>
+                </a:solidFill>
+                <a:effectLst/>
+                <a:latin typeface="Arial" panose="020B0604020202020204" pitchFamily="34" charset="0"/>
+                <a:cs typeface="Arial" panose="020B0604020202020204" pitchFamily="34" charset="0"/>
+              </a:rPr>
+              <a:t>Los dígitos introducidos por el usuario se almacenan en una </a:t>
+            </a:r>
+            <a:r>
+              <a:rPr kumimoji="0" lang="es-CO" altLang="es-CO" b="1" i="0" u="none" strike="noStrike" cap="none" normalizeH="0" baseline="0" dirty="0">
+                <a:ln>
+                  <a:noFill/>
+                </a:ln>
+                <a:solidFill>
+                  <a:schemeClr val="tx1"/>
+                </a:solidFill>
+                <a:effectLst/>
+                <a:latin typeface="Arial" panose="020B0604020202020204" pitchFamily="34" charset="0"/>
+                <a:cs typeface="Arial" panose="020B0604020202020204" pitchFamily="34" charset="0"/>
+              </a:rPr>
+              <a:t>lista de caracteres</a:t>
+            </a:r>
+            <a:r>
+              <a:rPr kumimoji="0" lang="es-CO" altLang="es-CO" b="0" i="0" u="none" strike="noStrike" cap="none" normalizeH="0" baseline="0" dirty="0">
+                <a:ln>
+                  <a:noFill/>
+                </a:ln>
+                <a:solidFill>
+                  <a:schemeClr val="tx1"/>
+                </a:solidFill>
+                <a:effectLst/>
+                <a:latin typeface="Arial" panose="020B0604020202020204" pitchFamily="34" charset="0"/>
+                <a:cs typeface="Arial" panose="020B0604020202020204" pitchFamily="34" charset="0"/>
+              </a:rPr>
+              <a:t> (ej. ['1', '2', '.', '3']).</a:t>
+            </a:r>
+          </a:p>
+          <a:p>
+            <a:pPr marL="457200" marR="0" lvl="1" indent="0" algn="l" defTabSz="914400" rtl="0" eaLnBrk="0" fontAlgn="base" latinLnBrk="0" hangingPunct="0">
+              <a:lnSpc>
+                <a:spcPct val="100000"/>
+              </a:lnSpc>
+              <a:spcBef>
+                <a:spcPct val="0"/>
+              </a:spcBef>
+              <a:spcAft>
+                <a:spcPct val="0"/>
+              </a:spcAft>
+              <a:buClrTx/>
+              <a:buSzTx/>
+              <a:buFontTx/>
+              <a:buChar char="•"/>
+              <a:tabLst/>
+            </a:pPr>
+            <a:r>
+              <a:rPr kumimoji="0" lang="es-CO" altLang="es-CO" b="0" i="0" u="none" strike="noStrike" cap="none" normalizeH="0" baseline="0" dirty="0">
+                <a:ln>
+                  <a:noFill/>
+                </a:ln>
+                <a:solidFill>
+                  <a:schemeClr val="tx1"/>
+                </a:solidFill>
+                <a:effectLst/>
+                <a:latin typeface="Arial" panose="020B0604020202020204" pitchFamily="34" charset="0"/>
+                <a:cs typeface="Arial" panose="020B0604020202020204" pitchFamily="34" charset="0"/>
+              </a:rPr>
+              <a:t>Esto facilita validaciones y la construcción del número completo.</a:t>
+            </a:r>
+          </a:p>
+          <a:p>
+            <a:pPr marL="457200" marR="0" lvl="1" indent="0" algn="l" defTabSz="914400" rtl="0" eaLnBrk="0" fontAlgn="base" latinLnBrk="0" hangingPunct="0">
+              <a:lnSpc>
+                <a:spcPct val="100000"/>
+              </a:lnSpc>
+              <a:spcBef>
+                <a:spcPct val="0"/>
+              </a:spcBef>
+              <a:spcAft>
+                <a:spcPct val="0"/>
+              </a:spcAft>
+              <a:buClrTx/>
+              <a:buSzTx/>
+              <a:buFontTx/>
+              <a:buChar char="•"/>
+              <a:tabLst/>
+            </a:pPr>
+            <a:r>
+              <a:rPr kumimoji="0" lang="es-CO" altLang="es-CO" b="0" i="0" u="none" strike="noStrike" cap="none" normalizeH="0" baseline="0" dirty="0">
+                <a:ln>
+                  <a:noFill/>
+                </a:ln>
+                <a:solidFill>
+                  <a:schemeClr val="tx1"/>
+                </a:solidFill>
+                <a:effectLst/>
+                <a:latin typeface="Arial" panose="020B0604020202020204" pitchFamily="34" charset="0"/>
+                <a:cs typeface="Arial" panose="020B0604020202020204" pitchFamily="34" charset="0"/>
+              </a:rPr>
+              <a:t>El método protegido _</a:t>
+            </a:r>
+            <a:r>
+              <a:rPr kumimoji="0" lang="es-CO" altLang="es-CO" b="0" i="0" u="none" strike="noStrike" cap="none" normalizeH="0" baseline="0" dirty="0" err="1">
+                <a:ln>
+                  <a:noFill/>
+                </a:ln>
+                <a:solidFill>
+                  <a:schemeClr val="tx1"/>
+                </a:solidFill>
+                <a:effectLst/>
+                <a:latin typeface="Arial" panose="020B0604020202020204" pitchFamily="34" charset="0"/>
+                <a:cs typeface="Arial" panose="020B0604020202020204" pitchFamily="34" charset="0"/>
+              </a:rPr>
+              <a:t>get_numero</a:t>
+            </a:r>
+            <a:r>
+              <a:rPr kumimoji="0" lang="es-CO" altLang="es-CO" b="0" i="0" u="none" strike="noStrike" cap="none" normalizeH="0" baseline="0" dirty="0">
+                <a:ln>
+                  <a:noFill/>
+                </a:ln>
+                <a:solidFill>
+                  <a:schemeClr val="tx1"/>
+                </a:solidFill>
+                <a:effectLst/>
+                <a:latin typeface="Arial" panose="020B0604020202020204" pitchFamily="34" charset="0"/>
+                <a:cs typeface="Arial" panose="020B0604020202020204" pitchFamily="34" charset="0"/>
+              </a:rPr>
+              <a:t>() convierte la lista de dígitos en un </a:t>
+            </a:r>
+            <a:r>
+              <a:rPr kumimoji="0" lang="es-CO" altLang="es-CO" b="1" i="0" u="none" strike="noStrike" cap="none" normalizeH="0" baseline="0" dirty="0">
+                <a:ln>
+                  <a:noFill/>
+                </a:ln>
+                <a:solidFill>
+                  <a:schemeClr val="tx1"/>
+                </a:solidFill>
+                <a:effectLst/>
+                <a:latin typeface="Arial" panose="020B0604020202020204" pitchFamily="34" charset="0"/>
+                <a:cs typeface="Arial" panose="020B0604020202020204" pitchFamily="34" charset="0"/>
+              </a:rPr>
+              <a:t>número real</a:t>
+            </a:r>
+            <a:r>
+              <a:rPr kumimoji="0" lang="es-CO" altLang="es-CO" b="0" i="0" u="none" strike="noStrike" cap="none" normalizeH="0" baseline="0" dirty="0">
+                <a:ln>
+                  <a:noFill/>
+                </a:ln>
+                <a:solidFill>
+                  <a:schemeClr val="tx1"/>
+                </a:solidFill>
+                <a:effectLst/>
+                <a:latin typeface="Arial" panose="020B0604020202020204" pitchFamily="34" charset="0"/>
+                <a:cs typeface="Arial" panose="020B0604020202020204" pitchFamily="34" charset="0"/>
+              </a:rPr>
+              <a:t> cuando se necesita.</a:t>
+            </a:r>
+          </a:p>
+          <a:p>
+            <a:pPr marL="0" marR="0" lvl="0" indent="0" algn="l" defTabSz="914400" rtl="0" eaLnBrk="0" fontAlgn="base" latinLnBrk="0" hangingPunct="0">
+              <a:lnSpc>
+                <a:spcPct val="100000"/>
+              </a:lnSpc>
+              <a:spcBef>
+                <a:spcPct val="0"/>
+              </a:spcBef>
+              <a:spcAft>
+                <a:spcPct val="0"/>
+              </a:spcAft>
+              <a:buClrTx/>
+              <a:buSzTx/>
+              <a:buFontTx/>
+              <a:buChar char="•"/>
+              <a:tabLst/>
+            </a:pPr>
+            <a:r>
+              <a:rPr kumimoji="0" lang="es-CO" altLang="es-CO" b="1" i="0" u="none" strike="noStrike" cap="none" normalizeH="0" baseline="0" dirty="0">
+                <a:ln>
+                  <a:noFill/>
+                </a:ln>
+                <a:solidFill>
+                  <a:schemeClr val="tx1"/>
+                </a:solidFill>
+                <a:effectLst/>
+                <a:latin typeface="Arial" panose="020B0604020202020204" pitchFamily="34" charset="0"/>
+                <a:cs typeface="Arial" panose="020B0604020202020204" pitchFamily="34" charset="0"/>
+              </a:rPr>
+              <a:t>Introducción de dígitos:</a:t>
+            </a:r>
+            <a:endParaRPr kumimoji="0" lang="es-CO" altLang="es-CO" b="0" i="0" u="none" strike="noStrike" cap="none" normalizeH="0" baseline="0" dirty="0">
+              <a:ln>
+                <a:noFill/>
+              </a:ln>
+              <a:solidFill>
+                <a:schemeClr val="tx1"/>
+              </a:solidFill>
+              <a:effectLst/>
+              <a:latin typeface="Arial" panose="020B0604020202020204" pitchFamily="34" charset="0"/>
+              <a:cs typeface="Arial" panose="020B0604020202020204" pitchFamily="34" charset="0"/>
+            </a:endParaRPr>
+          </a:p>
+          <a:p>
+            <a:pPr marL="457200" marR="0" lvl="1" indent="0" algn="l" defTabSz="914400" rtl="0" eaLnBrk="0" fontAlgn="base" latinLnBrk="0" hangingPunct="0">
+              <a:lnSpc>
+                <a:spcPct val="100000"/>
+              </a:lnSpc>
+              <a:spcBef>
+                <a:spcPct val="0"/>
+              </a:spcBef>
+              <a:spcAft>
+                <a:spcPct val="0"/>
+              </a:spcAft>
+              <a:buClrTx/>
+              <a:buSzTx/>
+              <a:buFontTx/>
+              <a:buChar char="•"/>
+              <a:tabLst/>
+            </a:pPr>
+            <a:r>
+              <a:rPr kumimoji="0" lang="es-CO" altLang="es-CO" b="0" i="0" u="none" strike="noStrike" cap="none" normalizeH="0" baseline="0" dirty="0">
+                <a:ln>
+                  <a:noFill/>
+                </a:ln>
+                <a:solidFill>
+                  <a:schemeClr val="tx1"/>
+                </a:solidFill>
+                <a:effectLst/>
+                <a:latin typeface="Arial" panose="020B0604020202020204" pitchFamily="34" charset="0"/>
+                <a:cs typeface="Arial" panose="020B0604020202020204" pitchFamily="34" charset="0"/>
+              </a:rPr>
+              <a:t>Se controla que solo pueda existir </a:t>
+            </a:r>
+            <a:r>
+              <a:rPr kumimoji="0" lang="es-CO" altLang="es-CO" b="1" i="0" u="none" strike="noStrike" cap="none" normalizeH="0" baseline="0" dirty="0">
+                <a:ln>
+                  <a:noFill/>
+                </a:ln>
+                <a:solidFill>
+                  <a:schemeClr val="tx1"/>
+                </a:solidFill>
+                <a:effectLst/>
+                <a:latin typeface="Arial" panose="020B0604020202020204" pitchFamily="34" charset="0"/>
+                <a:cs typeface="Arial" panose="020B0604020202020204" pitchFamily="34" charset="0"/>
+              </a:rPr>
+              <a:t>un punto decimal</a:t>
+            </a:r>
+            <a:r>
+              <a:rPr kumimoji="0" lang="es-CO" altLang="es-CO" b="0" i="0" u="none" strike="noStrike" cap="none" normalizeH="0" baseline="0" dirty="0">
+                <a:ln>
+                  <a:noFill/>
+                </a:ln>
+                <a:solidFill>
+                  <a:schemeClr val="tx1"/>
+                </a:solidFill>
+                <a:effectLst/>
+                <a:latin typeface="Arial" panose="020B0604020202020204" pitchFamily="34" charset="0"/>
+                <a:cs typeface="Arial" panose="020B0604020202020204" pitchFamily="34" charset="0"/>
+              </a:rPr>
+              <a:t>.</a:t>
+            </a:r>
+          </a:p>
+          <a:p>
+            <a:pPr marL="457200" marR="0" lvl="1" indent="0" algn="l" defTabSz="914400" rtl="0" eaLnBrk="0" fontAlgn="base" latinLnBrk="0" hangingPunct="0">
+              <a:lnSpc>
+                <a:spcPct val="100000"/>
+              </a:lnSpc>
+              <a:spcBef>
+                <a:spcPct val="0"/>
+              </a:spcBef>
+              <a:spcAft>
+                <a:spcPct val="0"/>
+              </a:spcAft>
+              <a:buClrTx/>
+              <a:buSzTx/>
+              <a:buFontTx/>
+              <a:buChar char="•"/>
+              <a:tabLst/>
+            </a:pPr>
+            <a:r>
+              <a:rPr kumimoji="0" lang="es-CO" altLang="es-CO" b="0" i="0" u="none" strike="noStrike" cap="none" normalizeH="0" baseline="0" dirty="0">
+                <a:ln>
+                  <a:noFill/>
+                </a:ln>
+                <a:solidFill>
+                  <a:schemeClr val="tx1"/>
+                </a:solidFill>
+                <a:effectLst/>
+                <a:latin typeface="Arial" panose="020B0604020202020204" pitchFamily="34" charset="0"/>
+                <a:cs typeface="Arial" panose="020B0604020202020204" pitchFamily="34" charset="0"/>
+              </a:rPr>
+              <a:t>Si hay un </a:t>
+            </a:r>
+            <a:r>
+              <a:rPr kumimoji="0" lang="es-CO" altLang="es-CO" b="1" i="0" u="none" strike="noStrike" cap="none" normalizeH="0" baseline="0" dirty="0">
+                <a:ln>
+                  <a:noFill/>
+                </a:ln>
+                <a:solidFill>
+                  <a:schemeClr val="tx1"/>
+                </a:solidFill>
+                <a:effectLst/>
+                <a:latin typeface="Arial" panose="020B0604020202020204" pitchFamily="34" charset="0"/>
+                <a:cs typeface="Arial" panose="020B0604020202020204" pitchFamily="34" charset="0"/>
+              </a:rPr>
+              <a:t>cero inicial</a:t>
+            </a:r>
+            <a:r>
+              <a:rPr kumimoji="0" lang="es-CO" altLang="es-CO" b="0" i="0" u="none" strike="noStrike" cap="none" normalizeH="0" baseline="0" dirty="0">
+                <a:ln>
+                  <a:noFill/>
+                </a:ln>
+                <a:solidFill>
+                  <a:schemeClr val="tx1"/>
+                </a:solidFill>
+                <a:effectLst/>
+                <a:latin typeface="Arial" panose="020B0604020202020204" pitchFamily="34" charset="0"/>
+                <a:cs typeface="Arial" panose="020B0604020202020204" pitchFamily="34" charset="0"/>
+              </a:rPr>
+              <a:t>, introducir un nuevo cero no lo duplica.</a:t>
+            </a:r>
+          </a:p>
+          <a:p>
+            <a:pPr marL="457200" marR="0" lvl="1" indent="0" algn="l" defTabSz="914400" rtl="0" eaLnBrk="0" fontAlgn="base" latinLnBrk="0" hangingPunct="0">
+              <a:lnSpc>
+                <a:spcPct val="100000"/>
+              </a:lnSpc>
+              <a:spcBef>
+                <a:spcPct val="0"/>
+              </a:spcBef>
+              <a:spcAft>
+                <a:spcPct val="0"/>
+              </a:spcAft>
+              <a:buClrTx/>
+              <a:buSzTx/>
+              <a:buFontTx/>
+              <a:buChar char="•"/>
+              <a:tabLst/>
+            </a:pPr>
+            <a:r>
+              <a:rPr kumimoji="0" lang="es-CO" altLang="es-CO" b="0" i="0" u="none" strike="noStrike" cap="none" normalizeH="0" baseline="0" dirty="0">
+                <a:ln>
+                  <a:noFill/>
+                </a:ln>
+                <a:solidFill>
+                  <a:schemeClr val="tx1"/>
+                </a:solidFill>
+                <a:effectLst/>
+                <a:latin typeface="Arial" panose="020B0604020202020204" pitchFamily="34" charset="0"/>
+                <a:cs typeface="Arial" panose="020B0604020202020204" pitchFamily="34" charset="0"/>
+              </a:rPr>
+              <a:t>Si se introduce un punto con un cero inicial, se transforma en "0." en lugar de reemplazarlo.</a:t>
+            </a:r>
+          </a:p>
+          <a:p>
+            <a:pPr marL="0" marR="0" lvl="0" indent="0" algn="l" defTabSz="914400" rtl="0" eaLnBrk="0" fontAlgn="base" latinLnBrk="0" hangingPunct="0">
+              <a:lnSpc>
+                <a:spcPct val="100000"/>
+              </a:lnSpc>
+              <a:spcBef>
+                <a:spcPct val="0"/>
+              </a:spcBef>
+              <a:spcAft>
+                <a:spcPct val="0"/>
+              </a:spcAft>
+              <a:buClrTx/>
+              <a:buSzTx/>
+              <a:buFontTx/>
+              <a:buChar char="•"/>
+              <a:tabLst/>
+            </a:pPr>
+            <a:r>
+              <a:rPr kumimoji="0" lang="es-CO" altLang="es-CO" b="1" i="0" u="none" strike="noStrike" cap="none" normalizeH="0" baseline="0" dirty="0">
+                <a:ln>
+                  <a:noFill/>
+                </a:ln>
+                <a:solidFill>
+                  <a:schemeClr val="tx1"/>
+                </a:solidFill>
+                <a:effectLst/>
+                <a:latin typeface="Arial" panose="020B0604020202020204" pitchFamily="34" charset="0"/>
+                <a:cs typeface="Arial" panose="020B0604020202020204" pitchFamily="34" charset="0"/>
+              </a:rPr>
+              <a:t>Introducción de operadores:</a:t>
+            </a:r>
+            <a:endParaRPr kumimoji="0" lang="es-CO" altLang="es-CO" b="0" i="0" u="none" strike="noStrike" cap="none" normalizeH="0" baseline="0" dirty="0">
+              <a:ln>
+                <a:noFill/>
+              </a:ln>
+              <a:solidFill>
+                <a:schemeClr val="tx1"/>
+              </a:solidFill>
+              <a:effectLst/>
+              <a:latin typeface="Arial" panose="020B0604020202020204" pitchFamily="34" charset="0"/>
+              <a:cs typeface="Arial" panose="020B0604020202020204" pitchFamily="34" charset="0"/>
+            </a:endParaRPr>
+          </a:p>
+          <a:p>
+            <a:pPr marL="457200" marR="0" lvl="1" indent="0" algn="l" defTabSz="914400" rtl="0" eaLnBrk="0" fontAlgn="base" latinLnBrk="0" hangingPunct="0">
+              <a:lnSpc>
+                <a:spcPct val="100000"/>
+              </a:lnSpc>
+              <a:spcBef>
+                <a:spcPct val="0"/>
+              </a:spcBef>
+              <a:spcAft>
+                <a:spcPct val="0"/>
+              </a:spcAft>
+              <a:buClrTx/>
+              <a:buSzTx/>
+              <a:buFontTx/>
+              <a:buChar char="•"/>
+              <a:tabLst/>
+            </a:pPr>
+            <a:r>
+              <a:rPr kumimoji="0" lang="es-CO" altLang="es-CO" b="1" i="0" u="none" strike="noStrike" cap="none" normalizeH="0" baseline="0" dirty="0">
+                <a:ln>
+                  <a:noFill/>
+                </a:ln>
+                <a:solidFill>
+                  <a:schemeClr val="tx1"/>
+                </a:solidFill>
+                <a:effectLst/>
+                <a:latin typeface="Arial" panose="020B0604020202020204" pitchFamily="34" charset="0"/>
+                <a:cs typeface="Arial" panose="020B0604020202020204" pitchFamily="34" charset="0"/>
+              </a:rPr>
+              <a:t>Operador unario:</a:t>
+            </a:r>
+            <a:endParaRPr kumimoji="0" lang="es-CO" altLang="es-CO" b="0" i="0" u="none" strike="noStrike" cap="none" normalizeH="0" baseline="0" dirty="0">
+              <a:ln>
+                <a:noFill/>
+              </a:ln>
+              <a:solidFill>
+                <a:schemeClr val="tx1"/>
+              </a:solidFill>
+              <a:effectLst/>
+              <a:latin typeface="Arial" panose="020B0604020202020204" pitchFamily="34" charset="0"/>
+              <a:cs typeface="Arial" panose="020B0604020202020204" pitchFamily="34" charset="0"/>
+            </a:endParaRPr>
+          </a:p>
+          <a:p>
+            <a:pPr marL="914400" marR="0" lvl="2" indent="0" algn="l" defTabSz="914400" rtl="0" eaLnBrk="0" fontAlgn="base" latinLnBrk="0" hangingPunct="0">
+              <a:lnSpc>
+                <a:spcPct val="100000"/>
+              </a:lnSpc>
+              <a:spcBef>
+                <a:spcPct val="0"/>
+              </a:spcBef>
+              <a:spcAft>
+                <a:spcPct val="0"/>
+              </a:spcAft>
+              <a:buClrTx/>
+              <a:buSzTx/>
+              <a:buFontTx/>
+              <a:buChar char="•"/>
+              <a:tabLst/>
+            </a:pPr>
+            <a:r>
+              <a:rPr kumimoji="0" lang="es-CO" altLang="es-CO" b="0" i="0" u="none" strike="noStrike" cap="none" normalizeH="0" baseline="0" dirty="0">
+                <a:ln>
+                  <a:noFill/>
+                </a:ln>
+                <a:solidFill>
+                  <a:schemeClr val="tx1"/>
+                </a:solidFill>
+                <a:effectLst/>
+                <a:latin typeface="Arial" panose="020B0604020202020204" pitchFamily="34" charset="0"/>
+                <a:cs typeface="Arial" panose="020B0604020202020204" pitchFamily="34" charset="0"/>
+              </a:rPr>
+              <a:t>Se construye el número a partir de la lista.</a:t>
+            </a:r>
+          </a:p>
+          <a:p>
+            <a:pPr marL="914400" marR="0" lvl="2" indent="0" algn="l" defTabSz="914400" rtl="0" eaLnBrk="0" fontAlgn="base" latinLnBrk="0" hangingPunct="0">
+              <a:lnSpc>
+                <a:spcPct val="100000"/>
+              </a:lnSpc>
+              <a:spcBef>
+                <a:spcPct val="0"/>
+              </a:spcBef>
+              <a:spcAft>
+                <a:spcPct val="0"/>
+              </a:spcAft>
+              <a:buClrTx/>
+              <a:buSzTx/>
+              <a:buFontTx/>
+              <a:buChar char="•"/>
+              <a:tabLst/>
+            </a:pPr>
+            <a:r>
+              <a:rPr kumimoji="0" lang="es-CO" altLang="es-CO" b="0" i="0" u="none" strike="noStrike" cap="none" normalizeH="0" baseline="0" dirty="0">
+                <a:ln>
+                  <a:noFill/>
+                </a:ln>
+                <a:solidFill>
+                  <a:schemeClr val="tx1"/>
+                </a:solidFill>
+                <a:effectLst/>
+                <a:latin typeface="Arial" panose="020B0604020202020204" pitchFamily="34" charset="0"/>
+                <a:cs typeface="Arial" panose="020B0604020202020204" pitchFamily="34" charset="0"/>
+              </a:rPr>
+              <a:t>Se aplica la operación unaria.</a:t>
+            </a:r>
+          </a:p>
+          <a:p>
+            <a:pPr marL="914400" marR="0" lvl="2" indent="0" algn="l" defTabSz="914400" rtl="0" eaLnBrk="0" fontAlgn="base" latinLnBrk="0" hangingPunct="0">
+              <a:lnSpc>
+                <a:spcPct val="100000"/>
+              </a:lnSpc>
+              <a:spcBef>
+                <a:spcPct val="0"/>
+              </a:spcBef>
+              <a:spcAft>
+                <a:spcPct val="0"/>
+              </a:spcAft>
+              <a:buClrTx/>
+              <a:buSzTx/>
+              <a:buFontTx/>
+              <a:buChar char="•"/>
+              <a:tabLst/>
+            </a:pPr>
+            <a:r>
+              <a:rPr kumimoji="0" lang="es-CO" altLang="es-CO" b="0" i="0" u="none" strike="noStrike" cap="none" normalizeH="0" baseline="0" dirty="0">
+                <a:ln>
+                  <a:noFill/>
+                </a:ln>
+                <a:solidFill>
+                  <a:schemeClr val="tx1"/>
+                </a:solidFill>
+                <a:effectLst/>
+                <a:latin typeface="Arial" panose="020B0604020202020204" pitchFamily="34" charset="0"/>
+                <a:cs typeface="Arial" panose="020B0604020202020204" pitchFamily="34" charset="0"/>
+              </a:rPr>
+              <a:t>Transición al </a:t>
+            </a:r>
+            <a:r>
+              <a:rPr kumimoji="0" lang="es-CO" altLang="es-CO" b="1" i="0" u="none" strike="noStrike" cap="none" normalizeH="0" baseline="0" dirty="0" err="1">
+                <a:ln>
+                  <a:noFill/>
+                </a:ln>
+                <a:solidFill>
+                  <a:schemeClr val="tx1"/>
+                </a:solidFill>
+                <a:effectLst/>
+                <a:latin typeface="Arial" panose="020B0604020202020204" pitchFamily="34" charset="0"/>
+                <a:cs typeface="Arial" panose="020B0604020202020204" pitchFamily="34" charset="0"/>
+              </a:rPr>
+              <a:t>EstadoInicial</a:t>
+            </a:r>
+            <a:r>
+              <a:rPr kumimoji="0" lang="es-CO" altLang="es-CO" b="0" i="0" u="none" strike="noStrike" cap="none" normalizeH="0" baseline="0" dirty="0">
+                <a:ln>
+                  <a:noFill/>
+                </a:ln>
+                <a:solidFill>
+                  <a:schemeClr val="tx1"/>
+                </a:solidFill>
+                <a:effectLst/>
+                <a:latin typeface="Arial" panose="020B0604020202020204" pitchFamily="34" charset="0"/>
+                <a:cs typeface="Arial" panose="020B0604020202020204" pitchFamily="34" charset="0"/>
+              </a:rPr>
+              <a:t>.</a:t>
+            </a:r>
+          </a:p>
+          <a:p>
+            <a:pPr marL="457200" marR="0" lvl="1" indent="0" algn="l" defTabSz="914400" rtl="0" eaLnBrk="0" fontAlgn="base" latinLnBrk="0" hangingPunct="0">
+              <a:lnSpc>
+                <a:spcPct val="100000"/>
+              </a:lnSpc>
+              <a:spcBef>
+                <a:spcPct val="0"/>
+              </a:spcBef>
+              <a:spcAft>
+                <a:spcPct val="0"/>
+              </a:spcAft>
+              <a:buClrTx/>
+              <a:buSzTx/>
+              <a:buFontTx/>
+              <a:buChar char="•"/>
+              <a:tabLst/>
+            </a:pPr>
+            <a:r>
+              <a:rPr kumimoji="0" lang="es-CO" altLang="es-CO" b="1" i="0" u="none" strike="noStrike" cap="none" normalizeH="0" baseline="0" dirty="0">
+                <a:ln>
+                  <a:noFill/>
+                </a:ln>
+                <a:solidFill>
+                  <a:schemeClr val="tx1"/>
+                </a:solidFill>
+                <a:effectLst/>
+                <a:latin typeface="Arial" panose="020B0604020202020204" pitchFamily="34" charset="0"/>
+                <a:cs typeface="Arial" panose="020B0604020202020204" pitchFamily="34" charset="0"/>
+              </a:rPr>
+              <a:t>Operador binario:</a:t>
+            </a:r>
+            <a:endParaRPr kumimoji="0" lang="es-CO" altLang="es-CO" b="0" i="0" u="none" strike="noStrike" cap="none" normalizeH="0" baseline="0" dirty="0">
+              <a:ln>
+                <a:noFill/>
+              </a:ln>
+              <a:solidFill>
+                <a:schemeClr val="tx1"/>
+              </a:solidFill>
+              <a:effectLst/>
+              <a:latin typeface="Arial" panose="020B0604020202020204" pitchFamily="34" charset="0"/>
+              <a:cs typeface="Arial" panose="020B0604020202020204" pitchFamily="34" charset="0"/>
+            </a:endParaRPr>
+          </a:p>
+          <a:p>
+            <a:pPr marL="914400" marR="0" lvl="2" indent="0" algn="l" defTabSz="914400" rtl="0" eaLnBrk="0" fontAlgn="base" latinLnBrk="0" hangingPunct="0">
+              <a:lnSpc>
+                <a:spcPct val="100000"/>
+              </a:lnSpc>
+              <a:spcBef>
+                <a:spcPct val="0"/>
+              </a:spcBef>
+              <a:spcAft>
+                <a:spcPct val="0"/>
+              </a:spcAft>
+              <a:buClrTx/>
+              <a:buSzTx/>
+              <a:buFontTx/>
+              <a:buChar char="•"/>
+              <a:tabLst/>
+            </a:pPr>
+            <a:r>
+              <a:rPr kumimoji="0" lang="es-CO" altLang="es-CO" b="0" i="0" u="none" strike="noStrike" cap="none" normalizeH="0" baseline="0" dirty="0">
+                <a:ln>
+                  <a:noFill/>
+                </a:ln>
+                <a:solidFill>
+                  <a:schemeClr val="tx1"/>
+                </a:solidFill>
+                <a:effectLst/>
+                <a:latin typeface="Arial" panose="020B0604020202020204" pitchFamily="34" charset="0"/>
+                <a:cs typeface="Arial" panose="020B0604020202020204" pitchFamily="34" charset="0"/>
+              </a:rPr>
+              <a:t>Se construye el número a partir de la lista.</a:t>
+            </a:r>
+          </a:p>
+          <a:p>
+            <a:pPr marL="914400" marR="0" lvl="2" indent="0" algn="l" defTabSz="914400" rtl="0" eaLnBrk="0" fontAlgn="base" latinLnBrk="0" hangingPunct="0">
+              <a:lnSpc>
+                <a:spcPct val="100000"/>
+              </a:lnSpc>
+              <a:spcBef>
+                <a:spcPct val="0"/>
+              </a:spcBef>
+              <a:spcAft>
+                <a:spcPct val="0"/>
+              </a:spcAft>
+              <a:buClrTx/>
+              <a:buSzTx/>
+              <a:buFontTx/>
+              <a:buChar char="•"/>
+              <a:tabLst/>
+            </a:pPr>
+            <a:r>
+              <a:rPr kumimoji="0" lang="es-CO" altLang="es-CO" b="0" i="0" u="none" strike="noStrike" cap="none" normalizeH="0" baseline="0" dirty="0">
+                <a:ln>
+                  <a:noFill/>
+                </a:ln>
+                <a:solidFill>
+                  <a:schemeClr val="tx1"/>
+                </a:solidFill>
+                <a:effectLst/>
+                <a:latin typeface="Arial" panose="020B0604020202020204" pitchFamily="34" charset="0"/>
+                <a:cs typeface="Arial" panose="020B0604020202020204" pitchFamily="34" charset="0"/>
+              </a:rPr>
+              <a:t>Se transita a </a:t>
+            </a:r>
+            <a:r>
+              <a:rPr kumimoji="0" lang="es-CO" altLang="es-CO" b="1" i="0" u="none" strike="noStrike" cap="none" normalizeH="0" baseline="0" dirty="0" err="1">
+                <a:ln>
+                  <a:noFill/>
+                </a:ln>
+                <a:solidFill>
+                  <a:schemeClr val="tx1"/>
+                </a:solidFill>
+                <a:effectLst/>
+                <a:latin typeface="Arial" panose="020B0604020202020204" pitchFamily="34" charset="0"/>
+                <a:cs typeface="Arial" panose="020B0604020202020204" pitchFamily="34" charset="0"/>
+              </a:rPr>
+              <a:t>EstadoResultadoParcial</a:t>
+            </a:r>
+            <a:r>
+              <a:rPr kumimoji="0" lang="es-CO" altLang="es-CO" b="0" i="0" u="none" strike="noStrike" cap="none" normalizeH="0" baseline="0" dirty="0">
+                <a:ln>
+                  <a:noFill/>
+                </a:ln>
+                <a:solidFill>
+                  <a:schemeClr val="tx1"/>
+                </a:solidFill>
+                <a:effectLst/>
+                <a:latin typeface="Arial" panose="020B0604020202020204" pitchFamily="34" charset="0"/>
+                <a:cs typeface="Arial" panose="020B0604020202020204" pitchFamily="34" charset="0"/>
+              </a:rPr>
+              <a:t>, guardando:</a:t>
+            </a:r>
+          </a:p>
+          <a:p>
+            <a:pPr marL="1371600" marR="0" lvl="3" indent="0" algn="l" defTabSz="914400" rtl="0" eaLnBrk="0" fontAlgn="base" latinLnBrk="0" hangingPunct="0">
+              <a:lnSpc>
+                <a:spcPct val="100000"/>
+              </a:lnSpc>
+              <a:spcBef>
+                <a:spcPct val="0"/>
+              </a:spcBef>
+              <a:spcAft>
+                <a:spcPct val="0"/>
+              </a:spcAft>
+              <a:buClrTx/>
+              <a:buSzTx/>
+              <a:buFontTx/>
+              <a:buChar char="•"/>
+              <a:tabLst/>
+            </a:pPr>
+            <a:r>
+              <a:rPr kumimoji="0" lang="es-CO" altLang="es-CO" b="0" i="0" u="none" strike="noStrike" cap="none" normalizeH="0" baseline="0" dirty="0">
+                <a:ln>
+                  <a:noFill/>
+                </a:ln>
+                <a:solidFill>
+                  <a:schemeClr val="tx1"/>
+                </a:solidFill>
+                <a:effectLst/>
+                <a:latin typeface="Arial" panose="020B0604020202020204" pitchFamily="34" charset="0"/>
+                <a:cs typeface="Arial" panose="020B0604020202020204" pitchFamily="34" charset="0"/>
+              </a:rPr>
+              <a:t>Primer operando.</a:t>
+            </a:r>
+          </a:p>
+          <a:p>
+            <a:pPr marL="1371600" marR="0" lvl="3" indent="0" algn="l" defTabSz="914400" rtl="0" eaLnBrk="0" fontAlgn="base" latinLnBrk="0" hangingPunct="0">
+              <a:lnSpc>
+                <a:spcPct val="100000"/>
+              </a:lnSpc>
+              <a:spcBef>
+                <a:spcPct val="0"/>
+              </a:spcBef>
+              <a:spcAft>
+                <a:spcPct val="0"/>
+              </a:spcAft>
+              <a:buClrTx/>
+              <a:buSzTx/>
+              <a:buFontTx/>
+              <a:buChar char="•"/>
+              <a:tabLst/>
+            </a:pPr>
+            <a:r>
+              <a:rPr kumimoji="0" lang="es-CO" altLang="es-CO" b="0" i="0" u="none" strike="noStrike" cap="none" normalizeH="0" baseline="0" dirty="0">
+                <a:ln>
+                  <a:noFill/>
+                </a:ln>
+                <a:solidFill>
+                  <a:schemeClr val="tx1"/>
+                </a:solidFill>
+                <a:effectLst/>
+                <a:latin typeface="Arial" panose="020B0604020202020204" pitchFamily="34" charset="0"/>
+                <a:cs typeface="Arial" panose="020B0604020202020204" pitchFamily="34" charset="0"/>
+              </a:rPr>
+              <a:t>Número en pantalla.</a:t>
+            </a:r>
+          </a:p>
+          <a:p>
+            <a:pPr marL="1371600" marR="0" lvl="3" indent="0" algn="l" defTabSz="914400" rtl="0" eaLnBrk="0" fontAlgn="base" latinLnBrk="0" hangingPunct="0">
+              <a:lnSpc>
+                <a:spcPct val="100000"/>
+              </a:lnSpc>
+              <a:spcBef>
+                <a:spcPct val="0"/>
+              </a:spcBef>
+              <a:spcAft>
+                <a:spcPct val="0"/>
+              </a:spcAft>
+              <a:buClrTx/>
+              <a:buSzTx/>
+              <a:buFontTx/>
+              <a:buChar char="•"/>
+              <a:tabLst/>
+            </a:pPr>
+            <a:r>
+              <a:rPr kumimoji="0" lang="es-CO" altLang="es-CO" b="0" i="0" u="none" strike="noStrike" cap="none" normalizeH="0" baseline="0" dirty="0">
+                <a:ln>
+                  <a:noFill/>
+                </a:ln>
+                <a:solidFill>
+                  <a:schemeClr val="tx1"/>
+                </a:solidFill>
+                <a:effectLst/>
+                <a:latin typeface="Arial" panose="020B0604020202020204" pitchFamily="34" charset="0"/>
+                <a:cs typeface="Arial" panose="020B0604020202020204" pitchFamily="34" charset="0"/>
+              </a:rPr>
+              <a:t>Operador.</a:t>
+            </a:r>
+          </a:p>
+        </p:txBody>
+      </p:sp>
+    </p:spTree>
+    <p:extLst>
+      <p:ext uri="{BB962C8B-B14F-4D97-AF65-F5344CB8AC3E}">
+        <p14:creationId xmlns:p14="http://schemas.microsoft.com/office/powerpoint/2010/main" val="3932856605"/>
+      </p:ext>
+    </p:extLst>
+  </p:cSld>
+  <p:clrMapOvr>
+    <a:masterClrMapping/>
+  </p:clrMapOvr>
+</p:sld>
+</file>
+
+<file path=ppt/slides/slide17.xml><?xml version="1.0" encoding="utf-8"?>
+<p:sld xmlns:a="http://schemas.openxmlformats.org/drawingml/2006/main" xmlns:r="http://schemas.openxmlformats.org/officeDocument/2006/relationships" xmlns:p="http://schemas.openxmlformats.org/presentationml/2006/main">
+  <p:cSld>
+    <p:spTree>
+      <p:nvGrpSpPr>
+        <p:cNvPr id="1" name=""/>
+        <p:cNvGrpSpPr/>
+        <p:nvPr/>
+      </p:nvGrpSpPr>
+      <p:grpSpPr>
+        <a:xfrm>
+          <a:off x="0" y="0"/>
+          <a:ext cx="0" cy="0"/>
+          <a:chOff x="0" y="0"/>
+          <a:chExt cx="0" cy="0"/>
+        </a:xfrm>
+      </p:grpSpPr>
+      <p:pic>
+        <p:nvPicPr>
+          <p:cNvPr id="5122" name="Picture 2" descr="Cómo hacer una calculadora en Python – Diagrama de Clases">
+            <a:extLst>
+              <a:ext uri="{FF2B5EF4-FFF2-40B4-BE49-F238E27FC236}">
+                <a16:creationId xmlns:a16="http://schemas.microsoft.com/office/drawing/2014/main" id="{538D7BB9-DE06-47A5-899D-55100EDEBDC8}"/>
+              </a:ext>
+            </a:extLst>
+          </p:cNvPr>
+          <p:cNvPicPr>
+            <a:picLocks noChangeAspect="1" noChangeArrowheads="1"/>
+          </p:cNvPicPr>
+          <p:nvPr/>
+        </p:nvPicPr>
+        <p:blipFill>
+          <a:blip r:embed="rId2">
+            <a:extLst>
+              <a:ext uri="{28A0092B-C50C-407E-A947-70E740481C1C}">
+                <a14:useLocalDpi xmlns:a14="http://schemas.microsoft.com/office/drawing/2010/main" val="0"/>
+              </a:ext>
+            </a:extLst>
+          </a:blip>
+          <a:srcRect/>
+          <a:stretch>
+            <a:fillRect/>
+          </a:stretch>
+        </p:blipFill>
+        <p:spPr bwMode="auto">
+          <a:xfrm>
+            <a:off x="652284" y="142890"/>
+            <a:ext cx="10887431" cy="6847174"/>
+          </a:xfrm>
+          <a:prstGeom prst="rect">
+            <a:avLst/>
+          </a:prstGeom>
+          <a:noFill/>
+          <a:extLst>
+            <a:ext uri="{909E8E84-426E-40DD-AFC4-6F175D3DCCD1}">
+              <a14:hiddenFill xmlns:a14="http://schemas.microsoft.com/office/drawing/2010/main">
+                <a:solidFill>
+                  <a:srgbClr val="FFFFFF"/>
+                </a:solidFill>
+              </a14:hiddenFill>
+            </a:ext>
+          </a:extLst>
+        </p:spPr>
+      </p:pic>
+      <p:sp>
+        <p:nvSpPr>
+          <p:cNvPr id="4" name="CuadroTexto 3">
+            <a:extLst>
+              <a:ext uri="{FF2B5EF4-FFF2-40B4-BE49-F238E27FC236}">
+                <a16:creationId xmlns:a16="http://schemas.microsoft.com/office/drawing/2014/main" id="{20C4A5F7-8CAB-4D1C-9EA6-531B40E931FA}"/>
+              </a:ext>
+            </a:extLst>
+          </p:cNvPr>
+          <p:cNvSpPr txBox="1"/>
+          <p:nvPr/>
+        </p:nvSpPr>
+        <p:spPr>
+          <a:xfrm>
+            <a:off x="1285461" y="199647"/>
+            <a:ext cx="2252870" cy="2215991"/>
+          </a:xfrm>
+          <a:prstGeom prst="rect">
+            <a:avLst/>
+          </a:prstGeom>
+          <a:noFill/>
+        </p:spPr>
+        <p:txBody>
+          <a:bodyPr wrap="square">
+            <a:spAutoFit/>
+          </a:bodyPr>
+          <a:lstStyle/>
+          <a:p>
+            <a:r>
+              <a:rPr lang="es-CO" sz="13800" dirty="0"/>
+              <a:t>✔️</a:t>
+            </a:r>
+          </a:p>
+        </p:txBody>
+      </p:sp>
+      <p:sp>
+        <p:nvSpPr>
+          <p:cNvPr id="5" name="CuadroTexto 4">
+            <a:extLst>
+              <a:ext uri="{FF2B5EF4-FFF2-40B4-BE49-F238E27FC236}">
+                <a16:creationId xmlns:a16="http://schemas.microsoft.com/office/drawing/2014/main" id="{6446A4DE-9EF4-4A22-9312-C1863E1AD0CA}"/>
+              </a:ext>
+            </a:extLst>
+          </p:cNvPr>
+          <p:cNvSpPr txBox="1"/>
+          <p:nvPr/>
+        </p:nvSpPr>
+        <p:spPr>
+          <a:xfrm>
+            <a:off x="6483394" y="0"/>
+            <a:ext cx="2252870" cy="2215991"/>
+          </a:xfrm>
+          <a:prstGeom prst="rect">
+            <a:avLst/>
+          </a:prstGeom>
+          <a:noFill/>
+        </p:spPr>
+        <p:txBody>
+          <a:bodyPr wrap="square">
+            <a:spAutoFit/>
+          </a:bodyPr>
+          <a:lstStyle/>
+          <a:p>
+            <a:r>
+              <a:rPr lang="es-CO" sz="13800" dirty="0"/>
+              <a:t>✔️</a:t>
+            </a:r>
+          </a:p>
+        </p:txBody>
+      </p:sp>
+      <p:sp>
+        <p:nvSpPr>
+          <p:cNvPr id="6" name="CuadroTexto 5">
+            <a:extLst>
+              <a:ext uri="{FF2B5EF4-FFF2-40B4-BE49-F238E27FC236}">
+                <a16:creationId xmlns:a16="http://schemas.microsoft.com/office/drawing/2014/main" id="{72F05DB0-C695-4A5D-94E3-73C65B4EB8DC}"/>
+              </a:ext>
+            </a:extLst>
+          </p:cNvPr>
+          <p:cNvSpPr txBox="1"/>
+          <p:nvPr/>
+        </p:nvSpPr>
+        <p:spPr>
+          <a:xfrm>
+            <a:off x="639033" y="2816087"/>
+            <a:ext cx="2252870" cy="2215991"/>
+          </a:xfrm>
+          <a:prstGeom prst="rect">
+            <a:avLst/>
+          </a:prstGeom>
+          <a:noFill/>
+        </p:spPr>
+        <p:txBody>
+          <a:bodyPr wrap="square">
+            <a:spAutoFit/>
+          </a:bodyPr>
+          <a:lstStyle/>
+          <a:p>
+            <a:r>
+              <a:rPr lang="es-CO" sz="13800" dirty="0"/>
+              <a:t>✔️</a:t>
+            </a:r>
+          </a:p>
+        </p:txBody>
+      </p:sp>
+      <p:sp>
+        <p:nvSpPr>
+          <p:cNvPr id="7" name="CuadroTexto 6">
+            <a:extLst>
+              <a:ext uri="{FF2B5EF4-FFF2-40B4-BE49-F238E27FC236}">
+                <a16:creationId xmlns:a16="http://schemas.microsoft.com/office/drawing/2014/main" id="{2B983C47-977D-419F-9004-FB53B1ACBB38}"/>
+              </a:ext>
+            </a:extLst>
+          </p:cNvPr>
+          <p:cNvSpPr txBox="1"/>
+          <p:nvPr/>
+        </p:nvSpPr>
+        <p:spPr>
+          <a:xfrm>
+            <a:off x="4230524" y="2816087"/>
+            <a:ext cx="2252870" cy="2215991"/>
+          </a:xfrm>
+          <a:prstGeom prst="rect">
+            <a:avLst/>
+          </a:prstGeom>
+          <a:noFill/>
+        </p:spPr>
+        <p:txBody>
+          <a:bodyPr wrap="square">
+            <a:spAutoFit/>
+          </a:bodyPr>
+          <a:lstStyle/>
+          <a:p>
+            <a:r>
+              <a:rPr lang="es-CO" sz="13800" dirty="0"/>
+              <a:t>✔️</a:t>
+            </a:r>
+          </a:p>
+        </p:txBody>
+      </p:sp>
+      <p:sp>
+        <p:nvSpPr>
+          <p:cNvPr id="8" name="CuadroTexto 7">
+            <a:extLst>
+              <a:ext uri="{FF2B5EF4-FFF2-40B4-BE49-F238E27FC236}">
+                <a16:creationId xmlns:a16="http://schemas.microsoft.com/office/drawing/2014/main" id="{DD8DA572-07D6-41AF-80D9-E705196A5263}"/>
+              </a:ext>
+            </a:extLst>
+          </p:cNvPr>
+          <p:cNvSpPr txBox="1"/>
+          <p:nvPr/>
+        </p:nvSpPr>
+        <p:spPr>
+          <a:xfrm>
+            <a:off x="8067028" y="4721522"/>
+            <a:ext cx="2252870" cy="2215991"/>
+          </a:xfrm>
+          <a:prstGeom prst="rect">
+            <a:avLst/>
+          </a:prstGeom>
+          <a:noFill/>
+        </p:spPr>
+        <p:txBody>
+          <a:bodyPr wrap="square">
+            <a:spAutoFit/>
+          </a:bodyPr>
+          <a:lstStyle/>
+          <a:p>
+            <a:r>
+              <a:rPr lang="es-CO" sz="13800" dirty="0"/>
+              <a:t>✔️</a:t>
+            </a:r>
+          </a:p>
+        </p:txBody>
+      </p:sp>
+    </p:spTree>
+    <p:extLst>
+      <p:ext uri="{BB962C8B-B14F-4D97-AF65-F5344CB8AC3E}">
+        <p14:creationId xmlns:p14="http://schemas.microsoft.com/office/powerpoint/2010/main" val="2838332834"/>
+      </p:ext>
+    </p:extLst>
+  </p:cSld>
+  <p:clrMapOvr>
+    <a:masterClrMapping/>
+  </p:clrMapOvr>
+</p:sld>
+</file>
+
+<file path=ppt/slides/slide18.xml><?xml version="1.0" encoding="utf-8"?>
+<p:sld xmlns:a="http://schemas.openxmlformats.org/drawingml/2006/main" xmlns:r="http://schemas.openxmlformats.org/officeDocument/2006/relationships" xmlns:p="http://schemas.openxmlformats.org/presentationml/2006/main">
+  <p:cSld>
+    <p:spTree>
+      <p:nvGrpSpPr>
+        <p:cNvPr id="1" name=""/>
+        <p:cNvGrpSpPr/>
+        <p:nvPr/>
+      </p:nvGrpSpPr>
+      <p:grpSpPr>
+        <a:xfrm>
+          <a:off x="0" y="0"/>
+          <a:ext cx="0" cy="0"/>
+          <a:chOff x="0" y="0"/>
+          <a:chExt cx="0" cy="0"/>
+        </a:xfrm>
+      </p:grpSpPr>
+      <p:sp>
+        <p:nvSpPr>
+          <p:cNvPr id="5" name="CuadroTexto 4">
+            <a:extLst>
+              <a:ext uri="{FF2B5EF4-FFF2-40B4-BE49-F238E27FC236}">
+                <a16:creationId xmlns:a16="http://schemas.microsoft.com/office/drawing/2014/main" id="{A6C8BB3C-FB52-431E-8464-27EFAC61D865}"/>
+              </a:ext>
+            </a:extLst>
+          </p:cNvPr>
+          <p:cNvSpPr txBox="1"/>
+          <p:nvPr/>
+        </p:nvSpPr>
+        <p:spPr>
+          <a:xfrm>
+            <a:off x="0" y="0"/>
+            <a:ext cx="6096000" cy="584775"/>
+          </a:xfrm>
+          <a:prstGeom prst="rect">
+            <a:avLst/>
+          </a:prstGeom>
+          <a:noFill/>
+        </p:spPr>
+        <p:txBody>
+          <a:bodyPr wrap="square">
+            <a:spAutoFit/>
+          </a:bodyPr>
+          <a:lstStyle/>
+          <a:p>
+            <a:r>
+              <a:rPr lang="es-CO" sz="3200" dirty="0">
+                <a:solidFill>
+                  <a:srgbClr val="FF0000"/>
+                </a:solidFill>
+                <a:latin typeface="Arial" panose="020B0604020202020204" pitchFamily="34" charset="0"/>
+                <a:cs typeface="Arial" panose="020B0604020202020204" pitchFamily="34" charset="0"/>
+              </a:rPr>
+              <a:t>E</a:t>
+            </a:r>
+            <a:r>
+              <a:rPr lang="es-CO" sz="3200" b="0" i="0" dirty="0">
+                <a:solidFill>
+                  <a:srgbClr val="FF0000"/>
+                </a:solidFill>
+                <a:effectLst/>
+                <a:latin typeface="Arial" panose="020B0604020202020204" pitchFamily="34" charset="0"/>
+                <a:cs typeface="Arial" panose="020B0604020202020204" pitchFamily="34" charset="0"/>
+              </a:rPr>
+              <a:t>stado de Resultado </a:t>
+            </a:r>
+            <a:r>
+              <a:rPr lang="es-CO" sz="3200" dirty="0">
+                <a:solidFill>
+                  <a:srgbClr val="FF0000"/>
+                </a:solidFill>
+                <a:latin typeface="Arial" panose="020B0604020202020204" pitchFamily="34" charset="0"/>
+                <a:cs typeface="Arial" panose="020B0604020202020204" pitchFamily="34" charset="0"/>
+              </a:rPr>
+              <a:t>P</a:t>
+            </a:r>
+            <a:r>
+              <a:rPr lang="es-CO" sz="3200" b="0" i="0" dirty="0">
+                <a:solidFill>
+                  <a:srgbClr val="FF0000"/>
+                </a:solidFill>
+                <a:effectLst/>
+                <a:latin typeface="Arial" panose="020B0604020202020204" pitchFamily="34" charset="0"/>
+                <a:cs typeface="Arial" panose="020B0604020202020204" pitchFamily="34" charset="0"/>
+              </a:rPr>
+              <a:t>arcial</a:t>
+            </a:r>
+            <a:endParaRPr lang="es-CO" sz="3200" dirty="0">
+              <a:solidFill>
+                <a:srgbClr val="FF0000"/>
+              </a:solidFill>
+              <a:latin typeface="Arial" panose="020B0604020202020204" pitchFamily="34" charset="0"/>
+              <a:cs typeface="Arial" panose="020B0604020202020204" pitchFamily="34" charset="0"/>
+            </a:endParaRPr>
+          </a:p>
+        </p:txBody>
+      </p:sp>
+      <p:sp>
+        <p:nvSpPr>
+          <p:cNvPr id="6" name="Rectangle 1">
+            <a:extLst>
+              <a:ext uri="{FF2B5EF4-FFF2-40B4-BE49-F238E27FC236}">
+                <a16:creationId xmlns:a16="http://schemas.microsoft.com/office/drawing/2014/main" id="{7DADA482-68AB-45A2-B1AE-65ED20B4ECA9}"/>
+              </a:ext>
+            </a:extLst>
+          </p:cNvPr>
+          <p:cNvSpPr>
+            <a:spLocks noChangeArrowheads="1"/>
+          </p:cNvSpPr>
+          <p:nvPr/>
+        </p:nvSpPr>
+        <p:spPr bwMode="auto">
+          <a:xfrm rot="10800000" flipV="1">
+            <a:off x="0" y="708008"/>
+            <a:ext cx="5287617" cy="2123658"/>
+          </a:xfrm>
+          <a:prstGeom prst="rect">
+            <a:avLst/>
+          </a:prstGeom>
+          <a:noFill/>
+          <a:ln>
+            <a:noFill/>
+          </a:ln>
+          <a:effectLst/>
+          <a:extLst>
+            <a:ext uri="{909E8E84-426E-40DD-AFC4-6F175D3DCCD1}">
+              <a14:hiddenFill xmlns:a14="http://schemas.microsoft.com/office/drawing/2010/main">
+                <a:solidFill>
+                  <a:schemeClr val="accent1"/>
+                </a:solidFill>
+              </a14:hiddenFill>
+            </a:ext>
+            <a:ext uri="{91240B29-F687-4F45-9708-019B960494DF}">
+              <a14:hiddenLine xmlns:a14="http://schemas.microsoft.com/office/drawing/2010/main" w="9525">
+                <a:solidFill>
+                  <a:schemeClr val="tx1"/>
+                </a:solidFill>
+                <a:miter lim="800000"/>
+                <a:headEnd/>
+                <a:tailEnd/>
+              </a14:hiddenLine>
+            </a:ext>
+            <a:ext uri="{AF507438-7753-43E0-B8FC-AC1667EBCBE1}">
+              <a14:hiddenEffects xmlns:a14="http://schemas.microsoft.com/office/drawing/2010/main">
+                <a:effectLst>
+                  <a:outerShdw dist="35921" dir="2700000" algn="ctr" rotWithShape="0">
+                    <a:schemeClr val="bg2"/>
+                  </a:outerShdw>
+                </a:effectLst>
+              </a14:hiddenEffects>
+            </a:ext>
+          </a:extLst>
+        </p:spPr>
+        <p:txBody>
+          <a:bodyPr vert="horz" wrap="square" lIns="91440" tIns="45720" rIns="91440" bIns="45720" numCol="1" anchor="ctr" anchorCtr="0" compatLnSpc="1">
+            <a:prstTxWarp prst="textNoShape">
+              <a:avLst/>
+            </a:prstTxWarp>
+            <a:spAutoFit/>
+          </a:bodyPr>
+          <a:lstStyle/>
+          <a:p>
+            <a:pPr marL="0" marR="0" lvl="0" indent="0" algn="l" defTabSz="914400" rtl="0" eaLnBrk="0" fontAlgn="base" latinLnBrk="0" hangingPunct="0">
+              <a:lnSpc>
+                <a:spcPct val="100000"/>
+              </a:lnSpc>
+              <a:spcBef>
+                <a:spcPct val="0"/>
+              </a:spcBef>
+              <a:spcAft>
+                <a:spcPct val="0"/>
+              </a:spcAft>
+              <a:buClrTx/>
+              <a:buSzTx/>
+              <a:tabLst/>
+            </a:pPr>
+            <a:r>
+              <a:rPr kumimoji="0" lang="es-CO" altLang="es-CO" sz="2200" i="0" u="none" strike="noStrike" cap="none" normalizeH="0" baseline="0" dirty="0">
+                <a:ln>
+                  <a:noFill/>
+                </a:ln>
+                <a:solidFill>
+                  <a:schemeClr val="tx1"/>
+                </a:solidFill>
+                <a:effectLst/>
+                <a:latin typeface="Arial" panose="020B0604020202020204" pitchFamily="34" charset="0"/>
+                <a:cs typeface="Arial" panose="020B0604020202020204" pitchFamily="34" charset="0"/>
+              </a:rPr>
+              <a:t>Contexto:</a:t>
+            </a:r>
+          </a:p>
+          <a:p>
+            <a:pPr marL="0" marR="0" lvl="0" indent="0" algn="l" defTabSz="914400" rtl="0" eaLnBrk="0" fontAlgn="base" latinLnBrk="0" hangingPunct="0">
+              <a:lnSpc>
+                <a:spcPct val="100000"/>
+              </a:lnSpc>
+              <a:spcBef>
+                <a:spcPct val="0"/>
+              </a:spcBef>
+              <a:spcAft>
+                <a:spcPct val="0"/>
+              </a:spcAft>
+              <a:buClrTx/>
+              <a:buSzTx/>
+              <a:buFontTx/>
+              <a:buChar char="•"/>
+              <a:tabLst/>
+            </a:pPr>
+            <a:r>
+              <a:rPr kumimoji="0" lang="es-CO" altLang="es-CO" sz="2200" i="0" u="none" strike="noStrike" cap="none" normalizeH="0" baseline="0" dirty="0">
+                <a:ln>
+                  <a:noFill/>
+                </a:ln>
+                <a:solidFill>
+                  <a:schemeClr val="tx1"/>
+                </a:solidFill>
+                <a:effectLst/>
+                <a:latin typeface="Arial" panose="020B0604020202020204" pitchFamily="34" charset="0"/>
+                <a:cs typeface="Arial" panose="020B0604020202020204" pitchFamily="34" charset="0"/>
+              </a:rPr>
+              <a:t>Representa el momento en el que se ha introducido un primer operando y un operador binario, pero aún no hay segundo operando.</a:t>
+            </a:r>
+          </a:p>
+          <a:p>
+            <a:pPr marL="0" marR="0" lvl="0" indent="0" algn="l" defTabSz="914400" rtl="0" eaLnBrk="0" fontAlgn="base" latinLnBrk="0" hangingPunct="0">
+              <a:lnSpc>
+                <a:spcPct val="100000"/>
+              </a:lnSpc>
+              <a:spcBef>
+                <a:spcPct val="0"/>
+              </a:spcBef>
+              <a:spcAft>
+                <a:spcPct val="0"/>
+              </a:spcAft>
+              <a:buClrTx/>
+              <a:buSzTx/>
+              <a:buFontTx/>
+              <a:buNone/>
+              <a:tabLst/>
+            </a:pPr>
+            <a:endParaRPr kumimoji="0" lang="es-CO" altLang="es-CO" sz="2200" i="0" u="none" strike="noStrike" cap="none" normalizeH="0" baseline="0" dirty="0">
+              <a:ln>
+                <a:noFill/>
+              </a:ln>
+              <a:solidFill>
+                <a:schemeClr val="tx1"/>
+              </a:solidFill>
+              <a:effectLst/>
+              <a:latin typeface="Arial" panose="020B0604020202020204" pitchFamily="34" charset="0"/>
+              <a:cs typeface="Arial" panose="020B0604020202020204" pitchFamily="34" charset="0"/>
+            </a:endParaRPr>
+          </a:p>
+        </p:txBody>
+      </p:sp>
+      <p:pic>
+        <p:nvPicPr>
+          <p:cNvPr id="8" name="Imagen 7">
+            <a:extLst>
+              <a:ext uri="{FF2B5EF4-FFF2-40B4-BE49-F238E27FC236}">
+                <a16:creationId xmlns:a16="http://schemas.microsoft.com/office/drawing/2014/main" id="{FBD6F4CA-ACBE-42DD-8204-1A76A3560201}"/>
+              </a:ext>
+            </a:extLst>
+          </p:cNvPr>
+          <p:cNvPicPr>
+            <a:picLocks noChangeAspect="1"/>
+          </p:cNvPicPr>
+          <p:nvPr/>
+        </p:nvPicPr>
+        <p:blipFill rotWithShape="1">
+          <a:blip r:embed="rId2"/>
+          <a:srcRect l="9239" t="30715" r="41848" b="5292"/>
+          <a:stretch/>
+        </p:blipFill>
+        <p:spPr>
+          <a:xfrm>
+            <a:off x="5287617" y="-1"/>
+            <a:ext cx="6904383" cy="5078559"/>
+          </a:xfrm>
+          <a:prstGeom prst="rect">
+            <a:avLst/>
+          </a:prstGeom>
+        </p:spPr>
+      </p:pic>
+      <p:sp>
+        <p:nvSpPr>
+          <p:cNvPr id="10" name="CuadroTexto 9">
+            <a:extLst>
+              <a:ext uri="{FF2B5EF4-FFF2-40B4-BE49-F238E27FC236}">
+                <a16:creationId xmlns:a16="http://schemas.microsoft.com/office/drawing/2014/main" id="{F386CA1C-BD8A-49D2-8AB8-943B66BAE0C1}"/>
+              </a:ext>
+            </a:extLst>
+          </p:cNvPr>
+          <p:cNvSpPr txBox="1"/>
+          <p:nvPr/>
+        </p:nvSpPr>
+        <p:spPr>
+          <a:xfrm>
+            <a:off x="0" y="2433262"/>
+            <a:ext cx="11688417" cy="4493538"/>
+          </a:xfrm>
+          <a:prstGeom prst="rect">
+            <a:avLst/>
+          </a:prstGeom>
+          <a:noFill/>
+        </p:spPr>
+        <p:txBody>
+          <a:bodyPr wrap="square">
+            <a:spAutoFit/>
+          </a:bodyPr>
+          <a:lstStyle/>
+          <a:p>
+            <a:pPr marL="0" marR="0" lvl="0" indent="0" algn="l" defTabSz="914400" rtl="0" eaLnBrk="0" fontAlgn="base" latinLnBrk="0" hangingPunct="0">
+              <a:lnSpc>
+                <a:spcPct val="100000"/>
+              </a:lnSpc>
+              <a:spcBef>
+                <a:spcPct val="0"/>
+              </a:spcBef>
+              <a:spcAft>
+                <a:spcPct val="0"/>
+              </a:spcAft>
+              <a:buClrTx/>
+              <a:buSzTx/>
+              <a:buFontTx/>
+              <a:buChar char="•"/>
+              <a:tabLst/>
+            </a:pPr>
+            <a:r>
+              <a:rPr kumimoji="0" lang="es-CO" altLang="es-CO" sz="2200" i="0" u="none" strike="noStrike" cap="none" normalizeH="0" baseline="0" dirty="0">
+                <a:ln>
+                  <a:noFill/>
+                </a:ln>
+                <a:solidFill>
+                  <a:schemeClr val="tx1"/>
+                </a:solidFill>
+                <a:effectLst/>
+                <a:latin typeface="Arial" panose="020B0604020202020204" pitchFamily="34" charset="0"/>
+                <a:cs typeface="Arial" panose="020B0604020202020204" pitchFamily="34" charset="0"/>
+              </a:rPr>
+              <a:t>Operaciones destacadas:</a:t>
+            </a:r>
+          </a:p>
+          <a:p>
+            <a:pPr marL="0" marR="0" lvl="0" indent="0" algn="l" defTabSz="914400" rtl="0" eaLnBrk="0" fontAlgn="base" latinLnBrk="0" hangingPunct="0">
+              <a:lnSpc>
+                <a:spcPct val="100000"/>
+              </a:lnSpc>
+              <a:spcBef>
+                <a:spcPct val="0"/>
+              </a:spcBef>
+              <a:spcAft>
+                <a:spcPct val="0"/>
+              </a:spcAft>
+              <a:buClrTx/>
+              <a:buSzTx/>
+              <a:buFontTx/>
+              <a:buChar char="•"/>
+              <a:tabLst/>
+            </a:pPr>
+            <a:r>
+              <a:rPr kumimoji="0" lang="es-CO" altLang="es-CO" sz="2200" i="0" u="none" strike="noStrike" cap="none" normalizeH="0" baseline="0" dirty="0">
+                <a:ln>
+                  <a:noFill/>
+                </a:ln>
+                <a:solidFill>
+                  <a:schemeClr val="tx1"/>
+                </a:solidFill>
+                <a:effectLst/>
+                <a:latin typeface="Arial" panose="020B0604020202020204" pitchFamily="34" charset="0"/>
+                <a:cs typeface="Arial" panose="020B0604020202020204" pitchFamily="34" charset="0"/>
+              </a:rPr>
+              <a:t>calcular:</a:t>
+            </a:r>
+          </a:p>
+          <a:p>
+            <a:pPr marL="457200" marR="0" lvl="1" indent="0" algn="l" defTabSz="914400" rtl="0" eaLnBrk="0" fontAlgn="base" latinLnBrk="0" hangingPunct="0">
+              <a:lnSpc>
+                <a:spcPct val="100000"/>
+              </a:lnSpc>
+              <a:spcBef>
+                <a:spcPct val="0"/>
+              </a:spcBef>
+              <a:spcAft>
+                <a:spcPct val="0"/>
+              </a:spcAft>
+              <a:buClrTx/>
+              <a:buSzTx/>
+              <a:buFontTx/>
+              <a:buChar char="•"/>
+              <a:tabLst/>
+            </a:pPr>
+            <a:r>
+              <a:rPr kumimoji="0" lang="es-CO" altLang="es-CO" sz="2200" i="0" u="none" strike="noStrike" cap="none" normalizeH="0" baseline="0" dirty="0">
+                <a:ln>
+                  <a:noFill/>
+                </a:ln>
+                <a:solidFill>
+                  <a:schemeClr val="tx1"/>
+                </a:solidFill>
+                <a:effectLst/>
+                <a:latin typeface="Arial" panose="020B0604020202020204" pitchFamily="34" charset="0"/>
+                <a:cs typeface="Arial" panose="020B0604020202020204" pitchFamily="34" charset="0"/>
+              </a:rPr>
+              <a:t>Realiza la operación binaria usando:</a:t>
+            </a:r>
+          </a:p>
+          <a:p>
+            <a:pPr marL="914400" marR="0" lvl="2" indent="0" algn="l" defTabSz="914400" rtl="0" eaLnBrk="0" fontAlgn="base" latinLnBrk="0" hangingPunct="0">
+              <a:lnSpc>
+                <a:spcPct val="100000"/>
+              </a:lnSpc>
+              <a:spcBef>
+                <a:spcPct val="0"/>
+              </a:spcBef>
+              <a:spcAft>
+                <a:spcPct val="0"/>
+              </a:spcAft>
+              <a:buClrTx/>
+              <a:buSzTx/>
+              <a:buFontTx/>
+              <a:buChar char="•"/>
+              <a:tabLst/>
+            </a:pPr>
+            <a:r>
+              <a:rPr kumimoji="0" lang="es-CO" altLang="es-CO" sz="2200" i="0" u="none" strike="noStrike" cap="none" normalizeH="0" baseline="0" dirty="0">
+                <a:ln>
+                  <a:noFill/>
+                </a:ln>
+                <a:solidFill>
+                  <a:schemeClr val="tx1"/>
+                </a:solidFill>
+                <a:effectLst/>
+                <a:latin typeface="Arial" panose="020B0604020202020204" pitchFamily="34" charset="0"/>
+                <a:cs typeface="Arial" panose="020B0604020202020204" pitchFamily="34" charset="0"/>
+              </a:rPr>
+              <a:t>El primer operando.</a:t>
+            </a:r>
+          </a:p>
+          <a:p>
+            <a:pPr marL="914400" marR="0" lvl="2" indent="0" algn="l" defTabSz="914400" rtl="0" eaLnBrk="0" fontAlgn="base" latinLnBrk="0" hangingPunct="0">
+              <a:lnSpc>
+                <a:spcPct val="100000"/>
+              </a:lnSpc>
+              <a:spcBef>
+                <a:spcPct val="0"/>
+              </a:spcBef>
+              <a:spcAft>
+                <a:spcPct val="0"/>
+              </a:spcAft>
+              <a:buClrTx/>
+              <a:buSzTx/>
+              <a:buFontTx/>
+              <a:buChar char="•"/>
+              <a:tabLst/>
+            </a:pPr>
+            <a:r>
+              <a:rPr kumimoji="0" lang="es-CO" altLang="es-CO" sz="2200" i="0" u="none" strike="noStrike" cap="none" normalizeH="0" baseline="0" dirty="0">
+                <a:ln>
+                  <a:noFill/>
+                </a:ln>
+                <a:solidFill>
+                  <a:schemeClr val="tx1"/>
+                </a:solidFill>
+                <a:effectLst/>
+                <a:latin typeface="Arial" panose="020B0604020202020204" pitchFamily="34" charset="0"/>
+                <a:cs typeface="Arial" panose="020B0604020202020204" pitchFamily="34" charset="0"/>
+              </a:rPr>
+              <a:t>El número actualmente </a:t>
+            </a:r>
+          </a:p>
+          <a:p>
+            <a:pPr marL="914400" marR="0" lvl="2" indent="0" algn="l" defTabSz="914400" rtl="0" eaLnBrk="0" fontAlgn="base" latinLnBrk="0" hangingPunct="0">
+              <a:lnSpc>
+                <a:spcPct val="100000"/>
+              </a:lnSpc>
+              <a:spcBef>
+                <a:spcPct val="0"/>
+              </a:spcBef>
+              <a:spcAft>
+                <a:spcPct val="0"/>
+              </a:spcAft>
+              <a:buClrTx/>
+              <a:buSzTx/>
+              <a:tabLst/>
+            </a:pPr>
+            <a:r>
+              <a:rPr kumimoji="0" lang="es-CO" altLang="es-CO" sz="2200" i="0" u="none" strike="noStrike" cap="none" normalizeH="0" baseline="0" dirty="0">
+                <a:ln>
+                  <a:noFill/>
+                </a:ln>
+                <a:solidFill>
+                  <a:schemeClr val="tx1"/>
+                </a:solidFill>
+                <a:effectLst/>
+                <a:latin typeface="Arial" panose="020B0604020202020204" pitchFamily="34" charset="0"/>
+                <a:cs typeface="Arial" panose="020B0604020202020204" pitchFamily="34" charset="0"/>
+              </a:rPr>
+              <a:t>mostrado en pantalla.</a:t>
+            </a:r>
+          </a:p>
+          <a:p>
+            <a:pPr marL="457200" marR="0" lvl="1" indent="0" algn="l" defTabSz="914400" rtl="0" eaLnBrk="0" fontAlgn="base" latinLnBrk="0" hangingPunct="0">
+              <a:lnSpc>
+                <a:spcPct val="100000"/>
+              </a:lnSpc>
+              <a:spcBef>
+                <a:spcPct val="0"/>
+              </a:spcBef>
+              <a:spcAft>
+                <a:spcPct val="0"/>
+              </a:spcAft>
+              <a:buClrTx/>
+              <a:buSzTx/>
+              <a:buFontTx/>
+              <a:buChar char="•"/>
+              <a:tabLst/>
+            </a:pPr>
+            <a:r>
+              <a:rPr kumimoji="0" lang="es-CO" altLang="es-CO" sz="2200" i="0" u="none" strike="noStrike" cap="none" normalizeH="0" baseline="0" dirty="0">
+                <a:ln>
+                  <a:noFill/>
+                </a:ln>
+                <a:solidFill>
+                  <a:schemeClr val="tx1"/>
+                </a:solidFill>
+                <a:effectLst/>
+                <a:latin typeface="Arial" panose="020B0604020202020204" pitchFamily="34" charset="0"/>
+                <a:cs typeface="Arial" panose="020B0604020202020204" pitchFamily="34" charset="0"/>
+              </a:rPr>
+              <a:t>Devuelve el resultado.</a:t>
+            </a:r>
+          </a:p>
+          <a:p>
+            <a:pPr marL="457200" marR="0" lvl="1" indent="0" algn="l" defTabSz="914400" rtl="0" eaLnBrk="0" fontAlgn="base" latinLnBrk="0" hangingPunct="0">
+              <a:lnSpc>
+                <a:spcPct val="100000"/>
+              </a:lnSpc>
+              <a:spcBef>
+                <a:spcPct val="0"/>
+              </a:spcBef>
+              <a:spcAft>
+                <a:spcPct val="0"/>
+              </a:spcAft>
+              <a:buClrTx/>
+              <a:buSzTx/>
+              <a:buFontTx/>
+              <a:buChar char="•"/>
+              <a:tabLst/>
+            </a:pPr>
+            <a:r>
+              <a:rPr kumimoji="0" lang="es-CO" altLang="es-CO" sz="2200" i="0" u="none" strike="noStrike" cap="none" normalizeH="0" baseline="0" dirty="0">
+                <a:ln>
+                  <a:noFill/>
+                </a:ln>
+                <a:solidFill>
+                  <a:schemeClr val="tx1"/>
+                </a:solidFill>
+                <a:effectLst/>
+                <a:latin typeface="Arial" panose="020B0604020202020204" pitchFamily="34" charset="0"/>
+                <a:cs typeface="Arial" panose="020B0604020202020204" pitchFamily="34" charset="0"/>
+              </a:rPr>
+              <a:t>Transita hacia el </a:t>
+            </a:r>
+            <a:r>
+              <a:rPr kumimoji="0" lang="es-CO" altLang="es-CO" sz="2200" i="0" u="none" strike="noStrike" cap="none" normalizeH="0" baseline="0" dirty="0" err="1">
+                <a:ln>
+                  <a:noFill/>
+                </a:ln>
+                <a:solidFill>
+                  <a:schemeClr val="tx1"/>
+                </a:solidFill>
+                <a:effectLst/>
+                <a:latin typeface="Arial" panose="020B0604020202020204" pitchFamily="34" charset="0"/>
+                <a:cs typeface="Arial" panose="020B0604020202020204" pitchFamily="34" charset="0"/>
+              </a:rPr>
+              <a:t>EstadoInicial</a:t>
+            </a:r>
+            <a:r>
+              <a:rPr kumimoji="0" lang="es-CO" altLang="es-CO" sz="2200" i="0" u="none" strike="noStrike" cap="none" normalizeH="0" baseline="0" dirty="0">
+                <a:ln>
+                  <a:noFill/>
+                </a:ln>
+                <a:solidFill>
+                  <a:schemeClr val="tx1"/>
+                </a:solidFill>
+                <a:effectLst/>
+                <a:latin typeface="Arial" panose="020B0604020202020204" pitchFamily="34" charset="0"/>
+                <a:cs typeface="Arial" panose="020B0604020202020204" pitchFamily="34" charset="0"/>
+              </a:rPr>
+              <a:t>, </a:t>
+            </a:r>
+          </a:p>
+          <a:p>
+            <a:pPr marL="457200" marR="0" lvl="1" indent="0" algn="l" defTabSz="914400" rtl="0" eaLnBrk="0" fontAlgn="base" latinLnBrk="0" hangingPunct="0">
+              <a:lnSpc>
+                <a:spcPct val="100000"/>
+              </a:lnSpc>
+              <a:spcBef>
+                <a:spcPct val="0"/>
+              </a:spcBef>
+              <a:spcAft>
+                <a:spcPct val="0"/>
+              </a:spcAft>
+              <a:buClrTx/>
+              <a:buSzTx/>
+              <a:tabLst/>
+            </a:pPr>
+            <a:r>
+              <a:rPr kumimoji="0" lang="es-CO" altLang="es-CO" sz="2200" i="0" u="none" strike="noStrike" cap="none" normalizeH="0" baseline="0" dirty="0">
+                <a:ln>
+                  <a:noFill/>
+                </a:ln>
+                <a:solidFill>
+                  <a:schemeClr val="tx1"/>
+                </a:solidFill>
+                <a:effectLst/>
+                <a:latin typeface="Arial" panose="020B0604020202020204" pitchFamily="34" charset="0"/>
+                <a:cs typeface="Arial" panose="020B0604020202020204" pitchFamily="34" charset="0"/>
+              </a:rPr>
+              <a:t>mostrando el resultado como nuevo valor.</a:t>
+            </a:r>
+          </a:p>
+          <a:p>
+            <a:pPr marL="0" marR="0" lvl="0" indent="0" algn="l" defTabSz="914400" rtl="0" eaLnBrk="0" fontAlgn="base" latinLnBrk="0" hangingPunct="0">
+              <a:lnSpc>
+                <a:spcPct val="100000"/>
+              </a:lnSpc>
+              <a:spcBef>
+                <a:spcPct val="0"/>
+              </a:spcBef>
+              <a:spcAft>
+                <a:spcPct val="0"/>
+              </a:spcAft>
+              <a:buClrTx/>
+              <a:buSzTx/>
+              <a:buFontTx/>
+              <a:buChar char="•"/>
+              <a:tabLst/>
+            </a:pPr>
+            <a:r>
+              <a:rPr kumimoji="0" lang="es-CO" altLang="es-CO" sz="2200" i="0" u="none" strike="noStrike" cap="none" normalizeH="0" baseline="0" dirty="0">
+                <a:ln>
+                  <a:noFill/>
+                </a:ln>
+                <a:solidFill>
+                  <a:schemeClr val="tx1"/>
+                </a:solidFill>
+                <a:effectLst/>
+                <a:latin typeface="Arial" panose="020B0604020202020204" pitchFamily="34" charset="0"/>
+                <a:cs typeface="Arial" panose="020B0604020202020204" pitchFamily="34" charset="0"/>
+              </a:rPr>
+              <a:t>Otros aspectos:</a:t>
+            </a:r>
+          </a:p>
+          <a:p>
+            <a:pPr marL="0" marR="0" lvl="0" indent="0" algn="l" defTabSz="914400" rtl="0" eaLnBrk="0" fontAlgn="base" latinLnBrk="0" hangingPunct="0">
+              <a:lnSpc>
+                <a:spcPct val="100000"/>
+              </a:lnSpc>
+              <a:spcBef>
+                <a:spcPct val="0"/>
+              </a:spcBef>
+              <a:spcAft>
+                <a:spcPct val="0"/>
+              </a:spcAft>
+              <a:buClrTx/>
+              <a:buSzTx/>
+              <a:buFontTx/>
+              <a:buChar char="•"/>
+              <a:tabLst/>
+            </a:pPr>
+            <a:r>
+              <a:rPr kumimoji="0" lang="es-CO" altLang="es-CO" sz="2200" i="0" u="none" strike="noStrike" cap="none" normalizeH="0" baseline="0" dirty="0">
+                <a:ln>
+                  <a:noFill/>
+                </a:ln>
+                <a:solidFill>
+                  <a:schemeClr val="tx1"/>
+                </a:solidFill>
+                <a:effectLst/>
+                <a:latin typeface="Arial" panose="020B0604020202020204" pitchFamily="34" charset="0"/>
+                <a:cs typeface="Arial" panose="020B0604020202020204" pitchFamily="34" charset="0"/>
+              </a:rPr>
+              <a:t>La lógica es similar a los estados previos.</a:t>
+            </a:r>
+          </a:p>
+          <a:p>
+            <a:pPr marL="0" marR="0" lvl="0" indent="0" algn="l" defTabSz="914400" rtl="0" eaLnBrk="0" fontAlgn="base" latinLnBrk="0" hangingPunct="0">
+              <a:lnSpc>
+                <a:spcPct val="100000"/>
+              </a:lnSpc>
+              <a:spcBef>
+                <a:spcPct val="0"/>
+              </a:spcBef>
+              <a:spcAft>
+                <a:spcPct val="0"/>
+              </a:spcAft>
+              <a:buClrTx/>
+              <a:buSzTx/>
+              <a:buFontTx/>
+              <a:buChar char="•"/>
+              <a:tabLst/>
+            </a:pPr>
+            <a:r>
+              <a:rPr kumimoji="0" lang="es-CO" altLang="es-CO" sz="2200" i="0" u="none" strike="noStrike" cap="none" normalizeH="0" baseline="0" dirty="0">
+                <a:ln>
+                  <a:noFill/>
+                </a:ln>
+                <a:solidFill>
+                  <a:schemeClr val="tx1"/>
+                </a:solidFill>
+                <a:effectLst/>
+                <a:latin typeface="Arial" panose="020B0604020202020204" pitchFamily="34" charset="0"/>
+                <a:cs typeface="Arial" panose="020B0604020202020204" pitchFamily="34" charset="0"/>
+              </a:rPr>
+              <a:t>La diferencia clave es que aquí la calculadora ya tiene información previa (primer operando + operador) y decide qué hacer si se presiona = antes de introducir un segundo número.</a:t>
+            </a:r>
+          </a:p>
+        </p:txBody>
+      </p:sp>
+    </p:spTree>
+    <p:extLst>
+      <p:ext uri="{BB962C8B-B14F-4D97-AF65-F5344CB8AC3E}">
+        <p14:creationId xmlns:p14="http://schemas.microsoft.com/office/powerpoint/2010/main" val="4185708998"/>
+      </p:ext>
+    </p:extLst>
+  </p:cSld>
+  <p:clrMapOvr>
+    <a:masterClrMapping/>
+  </p:clrMapOvr>
+</p:sld>
+</file>
+
+<file path=ppt/slides/slide19.xml><?xml version="1.0" encoding="utf-8"?>
+<p:sld xmlns:a="http://schemas.openxmlformats.org/drawingml/2006/main" xmlns:r="http://schemas.openxmlformats.org/officeDocument/2006/relationships" xmlns:p="http://schemas.openxmlformats.org/presentationml/2006/main">
+  <p:cSld>
+    <p:spTree>
+      <p:nvGrpSpPr>
+        <p:cNvPr id="1" name=""/>
+        <p:cNvGrpSpPr/>
+        <p:nvPr/>
+      </p:nvGrpSpPr>
+      <p:grpSpPr>
+        <a:xfrm>
+          <a:off x="0" y="0"/>
+          <a:ext cx="0" cy="0"/>
+          <a:chOff x="0" y="0"/>
+          <a:chExt cx="0" cy="0"/>
+        </a:xfrm>
+      </p:grpSpPr>
+      <p:pic>
+        <p:nvPicPr>
+          <p:cNvPr id="5122" name="Picture 2" descr="Cómo hacer una calculadora en Python – Diagrama de Clases">
+            <a:extLst>
+              <a:ext uri="{FF2B5EF4-FFF2-40B4-BE49-F238E27FC236}">
+                <a16:creationId xmlns:a16="http://schemas.microsoft.com/office/drawing/2014/main" id="{538D7BB9-DE06-47A5-899D-55100EDEBDC8}"/>
+              </a:ext>
+            </a:extLst>
+          </p:cNvPr>
+          <p:cNvPicPr>
+            <a:picLocks noChangeAspect="1" noChangeArrowheads="1"/>
+          </p:cNvPicPr>
+          <p:nvPr/>
+        </p:nvPicPr>
+        <p:blipFill>
+          <a:blip r:embed="rId2">
+            <a:extLst>
+              <a:ext uri="{28A0092B-C50C-407E-A947-70E740481C1C}">
+                <a14:useLocalDpi xmlns:a14="http://schemas.microsoft.com/office/drawing/2010/main" val="0"/>
+              </a:ext>
+            </a:extLst>
+          </a:blip>
+          <a:srcRect/>
+          <a:stretch>
+            <a:fillRect/>
+          </a:stretch>
+        </p:blipFill>
+        <p:spPr bwMode="auto">
+          <a:xfrm>
+            <a:off x="652284" y="142890"/>
+            <a:ext cx="10887431" cy="6847174"/>
+          </a:xfrm>
+          <a:prstGeom prst="rect">
+            <a:avLst/>
+          </a:prstGeom>
+          <a:noFill/>
+          <a:extLst>
+            <a:ext uri="{909E8E84-426E-40DD-AFC4-6F175D3DCCD1}">
+              <a14:hiddenFill xmlns:a14="http://schemas.microsoft.com/office/drawing/2010/main">
+                <a:solidFill>
+                  <a:srgbClr val="FFFFFF"/>
+                </a:solidFill>
+              </a14:hiddenFill>
+            </a:ext>
+          </a:extLst>
+        </p:spPr>
+      </p:pic>
+      <p:sp>
+        <p:nvSpPr>
+          <p:cNvPr id="4" name="CuadroTexto 3">
+            <a:extLst>
+              <a:ext uri="{FF2B5EF4-FFF2-40B4-BE49-F238E27FC236}">
+                <a16:creationId xmlns:a16="http://schemas.microsoft.com/office/drawing/2014/main" id="{20C4A5F7-8CAB-4D1C-9EA6-531B40E931FA}"/>
+              </a:ext>
+            </a:extLst>
+          </p:cNvPr>
+          <p:cNvSpPr txBox="1"/>
+          <p:nvPr/>
+        </p:nvSpPr>
+        <p:spPr>
+          <a:xfrm>
+            <a:off x="1285461" y="199647"/>
+            <a:ext cx="2252870" cy="2215991"/>
+          </a:xfrm>
+          <a:prstGeom prst="rect">
+            <a:avLst/>
+          </a:prstGeom>
+          <a:noFill/>
+        </p:spPr>
+        <p:txBody>
+          <a:bodyPr wrap="square">
+            <a:spAutoFit/>
+          </a:bodyPr>
+          <a:lstStyle/>
+          <a:p>
+            <a:r>
+              <a:rPr lang="es-CO" sz="13800" dirty="0"/>
+              <a:t>✔️</a:t>
+            </a:r>
+          </a:p>
+        </p:txBody>
+      </p:sp>
+      <p:sp>
+        <p:nvSpPr>
+          <p:cNvPr id="5" name="CuadroTexto 4">
+            <a:extLst>
+              <a:ext uri="{FF2B5EF4-FFF2-40B4-BE49-F238E27FC236}">
+                <a16:creationId xmlns:a16="http://schemas.microsoft.com/office/drawing/2014/main" id="{6446A4DE-9EF4-4A22-9312-C1863E1AD0CA}"/>
+              </a:ext>
+            </a:extLst>
+          </p:cNvPr>
+          <p:cNvSpPr txBox="1"/>
+          <p:nvPr/>
+        </p:nvSpPr>
+        <p:spPr>
+          <a:xfrm>
+            <a:off x="6483394" y="0"/>
+            <a:ext cx="2252870" cy="2215991"/>
+          </a:xfrm>
+          <a:prstGeom prst="rect">
+            <a:avLst/>
+          </a:prstGeom>
+          <a:noFill/>
+        </p:spPr>
+        <p:txBody>
+          <a:bodyPr wrap="square">
+            <a:spAutoFit/>
+          </a:bodyPr>
+          <a:lstStyle/>
+          <a:p>
+            <a:r>
+              <a:rPr lang="es-CO" sz="13800" dirty="0"/>
+              <a:t>✔️</a:t>
+            </a:r>
+          </a:p>
+        </p:txBody>
+      </p:sp>
+      <p:sp>
+        <p:nvSpPr>
+          <p:cNvPr id="6" name="CuadroTexto 5">
+            <a:extLst>
+              <a:ext uri="{FF2B5EF4-FFF2-40B4-BE49-F238E27FC236}">
+                <a16:creationId xmlns:a16="http://schemas.microsoft.com/office/drawing/2014/main" id="{72F05DB0-C695-4A5D-94E3-73C65B4EB8DC}"/>
+              </a:ext>
+            </a:extLst>
+          </p:cNvPr>
+          <p:cNvSpPr txBox="1"/>
+          <p:nvPr/>
+        </p:nvSpPr>
+        <p:spPr>
+          <a:xfrm>
+            <a:off x="639033" y="2816087"/>
+            <a:ext cx="2252870" cy="2215991"/>
+          </a:xfrm>
+          <a:prstGeom prst="rect">
+            <a:avLst/>
+          </a:prstGeom>
+          <a:noFill/>
+        </p:spPr>
+        <p:txBody>
+          <a:bodyPr wrap="square">
+            <a:spAutoFit/>
+          </a:bodyPr>
+          <a:lstStyle/>
+          <a:p>
+            <a:r>
+              <a:rPr lang="es-CO" sz="13800" dirty="0"/>
+              <a:t>✔️</a:t>
+            </a:r>
+          </a:p>
+        </p:txBody>
+      </p:sp>
+      <p:sp>
+        <p:nvSpPr>
+          <p:cNvPr id="7" name="CuadroTexto 6">
+            <a:extLst>
+              <a:ext uri="{FF2B5EF4-FFF2-40B4-BE49-F238E27FC236}">
+                <a16:creationId xmlns:a16="http://schemas.microsoft.com/office/drawing/2014/main" id="{2B983C47-977D-419F-9004-FB53B1ACBB38}"/>
+              </a:ext>
+            </a:extLst>
+          </p:cNvPr>
+          <p:cNvSpPr txBox="1"/>
+          <p:nvPr/>
+        </p:nvSpPr>
+        <p:spPr>
+          <a:xfrm>
+            <a:off x="4230524" y="2816087"/>
+            <a:ext cx="2252870" cy="2215991"/>
+          </a:xfrm>
+          <a:prstGeom prst="rect">
+            <a:avLst/>
+          </a:prstGeom>
+          <a:noFill/>
+        </p:spPr>
+        <p:txBody>
+          <a:bodyPr wrap="square">
+            <a:spAutoFit/>
+          </a:bodyPr>
+          <a:lstStyle/>
+          <a:p>
+            <a:r>
+              <a:rPr lang="es-CO" sz="13800" dirty="0"/>
+              <a:t>✔️</a:t>
+            </a:r>
+          </a:p>
+        </p:txBody>
+      </p:sp>
+      <p:sp>
+        <p:nvSpPr>
+          <p:cNvPr id="8" name="CuadroTexto 7">
+            <a:extLst>
+              <a:ext uri="{FF2B5EF4-FFF2-40B4-BE49-F238E27FC236}">
+                <a16:creationId xmlns:a16="http://schemas.microsoft.com/office/drawing/2014/main" id="{DD8DA572-07D6-41AF-80D9-E705196A5263}"/>
+              </a:ext>
+            </a:extLst>
+          </p:cNvPr>
+          <p:cNvSpPr txBox="1"/>
+          <p:nvPr/>
+        </p:nvSpPr>
+        <p:spPr>
+          <a:xfrm>
+            <a:off x="8067028" y="4721522"/>
+            <a:ext cx="2252870" cy="2215991"/>
+          </a:xfrm>
+          <a:prstGeom prst="rect">
+            <a:avLst/>
+          </a:prstGeom>
+          <a:noFill/>
+        </p:spPr>
+        <p:txBody>
+          <a:bodyPr wrap="square">
+            <a:spAutoFit/>
+          </a:bodyPr>
+          <a:lstStyle/>
+          <a:p>
+            <a:r>
+              <a:rPr lang="es-CO" sz="13800" dirty="0"/>
+              <a:t>✔️</a:t>
+            </a:r>
+          </a:p>
+        </p:txBody>
+      </p:sp>
+      <p:sp>
+        <p:nvSpPr>
+          <p:cNvPr id="9" name="CuadroTexto 8">
+            <a:extLst>
+              <a:ext uri="{FF2B5EF4-FFF2-40B4-BE49-F238E27FC236}">
+                <a16:creationId xmlns:a16="http://schemas.microsoft.com/office/drawing/2014/main" id="{5CB581D3-9AEB-4A7F-9A67-22C7D349E158}"/>
+              </a:ext>
+            </a:extLst>
+          </p:cNvPr>
+          <p:cNvSpPr txBox="1"/>
+          <p:nvPr/>
+        </p:nvSpPr>
+        <p:spPr>
+          <a:xfrm>
+            <a:off x="3843129" y="5032078"/>
+            <a:ext cx="2252870" cy="2215991"/>
+          </a:xfrm>
+          <a:prstGeom prst="rect">
+            <a:avLst/>
+          </a:prstGeom>
+          <a:noFill/>
+        </p:spPr>
+        <p:txBody>
+          <a:bodyPr wrap="square">
+            <a:spAutoFit/>
+          </a:bodyPr>
+          <a:lstStyle/>
+          <a:p>
+            <a:r>
+              <a:rPr lang="es-CO" sz="13800" dirty="0"/>
+              <a:t>✔️</a:t>
+            </a:r>
+          </a:p>
+        </p:txBody>
+      </p:sp>
+    </p:spTree>
+    <p:extLst>
+      <p:ext uri="{BB962C8B-B14F-4D97-AF65-F5344CB8AC3E}">
+        <p14:creationId xmlns:p14="http://schemas.microsoft.com/office/powerpoint/2010/main" val="371707394"/>
+      </p:ext>
+    </p:extLst>
+  </p:cSld>
+  <p:clrMapOvr>
+    <a:masterClrMapping/>
+  </p:clrMapOvr>
+</p:sld>
+</file>
+
 <file path=ppt/slides/slide2.xml><?xml version="1.0" encoding="utf-8"?>
 <p:sld xmlns:a="http://schemas.openxmlformats.org/drawingml/2006/main" xmlns:r="http://schemas.openxmlformats.org/officeDocument/2006/relationships" xmlns:p="http://schemas.openxmlformats.org/presentationml/2006/main">
   <p:cSld>
@@ -3747,6 +9654,2894 @@
     <p:extLst>
       <p:ext uri="{BB962C8B-B14F-4D97-AF65-F5344CB8AC3E}">
         <p14:creationId xmlns:p14="http://schemas.microsoft.com/office/powerpoint/2010/main" val="1818324417"/>
+      </p:ext>
+    </p:extLst>
+  </p:cSld>
+  <p:clrMapOvr>
+    <a:masterClrMapping/>
+  </p:clrMapOvr>
+</p:sld>
+</file>
+
+<file path=ppt/slides/slide20.xml><?xml version="1.0" encoding="utf-8"?>
+<p:sld xmlns:a="http://schemas.openxmlformats.org/drawingml/2006/main" xmlns:r="http://schemas.openxmlformats.org/officeDocument/2006/relationships" xmlns:p="http://schemas.openxmlformats.org/presentationml/2006/main">
+  <p:cSld>
+    <p:spTree>
+      <p:nvGrpSpPr>
+        <p:cNvPr id="1" name=""/>
+        <p:cNvGrpSpPr/>
+        <p:nvPr/>
+      </p:nvGrpSpPr>
+      <p:grpSpPr>
+        <a:xfrm>
+          <a:off x="0" y="0"/>
+          <a:ext cx="0" cy="0"/>
+          <a:chOff x="0" y="0"/>
+          <a:chExt cx="0" cy="0"/>
+        </a:xfrm>
+      </p:grpSpPr>
+      <p:sp>
+        <p:nvSpPr>
+          <p:cNvPr id="4" name="Rectangle 1">
+            <a:extLst>
+              <a:ext uri="{FF2B5EF4-FFF2-40B4-BE49-F238E27FC236}">
+                <a16:creationId xmlns:a16="http://schemas.microsoft.com/office/drawing/2014/main" id="{28EC110C-B027-4DD1-8D03-76AA01F646D7}"/>
+              </a:ext>
+            </a:extLst>
+          </p:cNvPr>
+          <p:cNvSpPr>
+            <a:spLocks noChangeArrowheads="1"/>
+          </p:cNvSpPr>
+          <p:nvPr/>
+        </p:nvSpPr>
+        <p:spPr bwMode="auto">
+          <a:xfrm>
+            <a:off x="0" y="2474"/>
+            <a:ext cx="7598555" cy="584775"/>
+          </a:xfrm>
+          <a:prstGeom prst="rect">
+            <a:avLst/>
+          </a:prstGeom>
+          <a:solidFill>
+            <a:srgbClr val="DCF0EF"/>
+          </a:solidFill>
+          <a:ln>
+            <a:noFill/>
+          </a:ln>
+          <a:effectLst/>
+          <a:extLst>
+            <a:ext uri="{91240B29-F687-4F45-9708-019B960494DF}">
+              <a14:hiddenLine xmlns:a14="http://schemas.microsoft.com/office/drawing/2010/main" w="9525">
+                <a:solidFill>
+                  <a:schemeClr val="tx1"/>
+                </a:solidFill>
+                <a:miter lim="800000"/>
+                <a:headEnd/>
+                <a:tailEnd/>
+              </a14:hiddenLine>
+            </a:ext>
+            <a:ext uri="{AF507438-7753-43E0-B8FC-AC1667EBCBE1}">
+              <a14:hiddenEffects xmlns:a14="http://schemas.microsoft.com/office/drawing/2010/main">
+                <a:effectLst>
+                  <a:outerShdw dist="35921" dir="2700000" algn="ctr" rotWithShape="0">
+                    <a:schemeClr val="bg2"/>
+                  </a:outerShdw>
+                </a:effectLst>
+              </a14:hiddenEffects>
+            </a:ext>
+          </a:extLst>
+        </p:spPr>
+        <p:txBody>
+          <a:bodyPr vert="horz" wrap="none" lIns="91440" tIns="45720" rIns="91440" bIns="45720" numCol="1" anchor="ctr" anchorCtr="0" compatLnSpc="1">
+            <a:prstTxWarp prst="textNoShape">
+              <a:avLst/>
+            </a:prstTxWarp>
+            <a:spAutoFit/>
+          </a:bodyPr>
+          <a:lstStyle>
+            <a:lvl1pPr eaLnBrk="0" fontAlgn="base" hangingPunct="0">
+              <a:spcBef>
+                <a:spcPct val="0"/>
+              </a:spcBef>
+              <a:spcAft>
+                <a:spcPct val="0"/>
+              </a:spcAft>
+              <a:defRPr>
+                <a:solidFill>
+                  <a:schemeClr val="tx1"/>
+                </a:solidFill>
+                <a:latin typeface="Arial" panose="020B0604020202020204" pitchFamily="34" charset="0"/>
+              </a:defRPr>
+            </a:lvl1pPr>
+            <a:lvl2pPr eaLnBrk="0" fontAlgn="base" hangingPunct="0">
+              <a:spcBef>
+                <a:spcPct val="0"/>
+              </a:spcBef>
+              <a:spcAft>
+                <a:spcPct val="0"/>
+              </a:spcAft>
+              <a:defRPr>
+                <a:solidFill>
+                  <a:schemeClr val="tx1"/>
+                </a:solidFill>
+                <a:latin typeface="Arial" panose="020B0604020202020204" pitchFamily="34" charset="0"/>
+              </a:defRPr>
+            </a:lvl2pPr>
+            <a:lvl3pPr eaLnBrk="0" fontAlgn="base" hangingPunct="0">
+              <a:spcBef>
+                <a:spcPct val="0"/>
+              </a:spcBef>
+              <a:spcAft>
+                <a:spcPct val="0"/>
+              </a:spcAft>
+              <a:defRPr>
+                <a:solidFill>
+                  <a:schemeClr val="tx1"/>
+                </a:solidFill>
+                <a:latin typeface="Arial" panose="020B0604020202020204" pitchFamily="34" charset="0"/>
+              </a:defRPr>
+            </a:lvl3pPr>
+            <a:lvl4pPr eaLnBrk="0" fontAlgn="base" hangingPunct="0">
+              <a:spcBef>
+                <a:spcPct val="0"/>
+              </a:spcBef>
+              <a:spcAft>
+                <a:spcPct val="0"/>
+              </a:spcAft>
+              <a:defRPr>
+                <a:solidFill>
+                  <a:schemeClr val="tx1"/>
+                </a:solidFill>
+                <a:latin typeface="Arial" panose="020B0604020202020204" pitchFamily="34" charset="0"/>
+              </a:defRPr>
+            </a:lvl4pPr>
+            <a:lvl5pPr eaLnBrk="0" fontAlgn="base" hangingPunct="0">
+              <a:spcBef>
+                <a:spcPct val="0"/>
+              </a:spcBef>
+              <a:spcAft>
+                <a:spcPct val="0"/>
+              </a:spcAft>
+              <a:defRPr>
+                <a:solidFill>
+                  <a:schemeClr val="tx1"/>
+                </a:solidFill>
+                <a:latin typeface="Arial" panose="020B0604020202020204" pitchFamily="34" charset="0"/>
+              </a:defRPr>
+            </a:lvl5pPr>
+            <a:lvl6pPr eaLnBrk="0" fontAlgn="base" hangingPunct="0">
+              <a:spcBef>
+                <a:spcPct val="0"/>
+              </a:spcBef>
+              <a:spcAft>
+                <a:spcPct val="0"/>
+              </a:spcAft>
+              <a:defRPr>
+                <a:solidFill>
+                  <a:schemeClr val="tx1"/>
+                </a:solidFill>
+                <a:latin typeface="Arial" panose="020B0604020202020204" pitchFamily="34" charset="0"/>
+              </a:defRPr>
+            </a:lvl6pPr>
+            <a:lvl7pPr eaLnBrk="0" fontAlgn="base" hangingPunct="0">
+              <a:spcBef>
+                <a:spcPct val="0"/>
+              </a:spcBef>
+              <a:spcAft>
+                <a:spcPct val="0"/>
+              </a:spcAft>
+              <a:defRPr>
+                <a:solidFill>
+                  <a:schemeClr val="tx1"/>
+                </a:solidFill>
+                <a:latin typeface="Arial" panose="020B0604020202020204" pitchFamily="34" charset="0"/>
+              </a:defRPr>
+            </a:lvl7pPr>
+            <a:lvl8pPr eaLnBrk="0" fontAlgn="base" hangingPunct="0">
+              <a:spcBef>
+                <a:spcPct val="0"/>
+              </a:spcBef>
+              <a:spcAft>
+                <a:spcPct val="0"/>
+              </a:spcAft>
+              <a:defRPr>
+                <a:solidFill>
+                  <a:schemeClr val="tx1"/>
+                </a:solidFill>
+                <a:latin typeface="Arial" panose="020B0604020202020204" pitchFamily="34" charset="0"/>
+              </a:defRPr>
+            </a:lvl8pPr>
+            <a:lvl9pPr eaLnBrk="0" fontAlgn="base" hangingPunct="0">
+              <a:spcBef>
+                <a:spcPct val="0"/>
+              </a:spcBef>
+              <a:spcAft>
+                <a:spcPct val="0"/>
+              </a:spcAft>
+              <a:defRPr>
+                <a:solidFill>
+                  <a:schemeClr val="tx1"/>
+                </a:solidFill>
+                <a:latin typeface="Arial" panose="020B0604020202020204" pitchFamily="34" charset="0"/>
+              </a:defRPr>
+            </a:lvl9pPr>
+          </a:lstStyle>
+          <a:p>
+            <a:pPr marL="0" marR="0" lvl="0" indent="0" algn="l" defTabSz="914400" rtl="0" eaLnBrk="0" fontAlgn="base" latinLnBrk="0" hangingPunct="0">
+              <a:lnSpc>
+                <a:spcPct val="100000"/>
+              </a:lnSpc>
+              <a:spcBef>
+                <a:spcPct val="0"/>
+              </a:spcBef>
+              <a:spcAft>
+                <a:spcPct val="0"/>
+              </a:spcAft>
+              <a:buClrTx/>
+              <a:buSzTx/>
+              <a:buFontTx/>
+              <a:buNone/>
+              <a:tabLst/>
+            </a:pPr>
+            <a:r>
+              <a:rPr kumimoji="0" lang="es-CO" altLang="es-CO" sz="3200" b="0" i="0" u="none" strike="noStrike" cap="none" normalizeH="0" baseline="0" dirty="0" err="1">
+                <a:ln>
+                  <a:noFill/>
+                </a:ln>
+                <a:solidFill>
+                  <a:srgbClr val="333333"/>
+                </a:solidFill>
+                <a:effectLst/>
+                <a:latin typeface="Arial Unicode MS"/>
+              </a:rPr>
+              <a:t>EstadoIntroduciendoSegundoOperando</a:t>
+            </a:r>
+            <a:r>
+              <a:rPr kumimoji="0" lang="es-CO" altLang="es-CO" sz="3200" b="0" i="0" u="none" strike="noStrike" cap="none" normalizeH="0" baseline="0" dirty="0">
+                <a:ln>
+                  <a:noFill/>
+                </a:ln>
+                <a:solidFill>
+                  <a:srgbClr val="2C2C2C"/>
+                </a:solidFill>
+                <a:effectLst/>
+                <a:latin typeface="opensans-regular"/>
+              </a:rPr>
+              <a:t>:</a:t>
+            </a:r>
+            <a:r>
+              <a:rPr kumimoji="0" lang="es-CO" altLang="es-CO" sz="2800" b="0" i="0" u="none" strike="noStrike" cap="none" normalizeH="0" baseline="0" dirty="0">
+                <a:ln>
+                  <a:noFill/>
+                </a:ln>
+                <a:solidFill>
+                  <a:schemeClr val="tx1"/>
+                </a:solidFill>
+                <a:effectLst/>
+              </a:rPr>
+              <a:t> </a:t>
+            </a:r>
+            <a:endParaRPr kumimoji="0" lang="es-CO" altLang="es-CO" sz="4400" b="0" i="0" u="none" strike="noStrike" cap="none" normalizeH="0" baseline="0" dirty="0">
+              <a:ln>
+                <a:noFill/>
+              </a:ln>
+              <a:solidFill>
+                <a:schemeClr val="tx1"/>
+              </a:solidFill>
+              <a:effectLst/>
+              <a:latin typeface="Arial" panose="020B0604020202020204" pitchFamily="34" charset="0"/>
+            </a:endParaRPr>
+          </a:p>
+        </p:txBody>
+      </p:sp>
+      <p:sp>
+        <p:nvSpPr>
+          <p:cNvPr id="5" name="Rectangle 2">
+            <a:extLst>
+              <a:ext uri="{FF2B5EF4-FFF2-40B4-BE49-F238E27FC236}">
+                <a16:creationId xmlns:a16="http://schemas.microsoft.com/office/drawing/2014/main" id="{F29F4358-009E-45F2-93E2-EBDA114037A8}"/>
+              </a:ext>
+            </a:extLst>
+          </p:cNvPr>
+          <p:cNvSpPr>
+            <a:spLocks noChangeArrowheads="1"/>
+          </p:cNvSpPr>
+          <p:nvPr/>
+        </p:nvSpPr>
+        <p:spPr bwMode="auto">
+          <a:xfrm>
+            <a:off x="53012" y="1498426"/>
+            <a:ext cx="3949145" cy="5078313"/>
+          </a:xfrm>
+          <a:prstGeom prst="rect">
+            <a:avLst/>
+          </a:prstGeom>
+          <a:noFill/>
+          <a:ln>
+            <a:noFill/>
+          </a:ln>
+          <a:effectLst/>
+          <a:extLst>
+            <a:ext uri="{909E8E84-426E-40DD-AFC4-6F175D3DCCD1}">
+              <a14:hiddenFill xmlns:a14="http://schemas.microsoft.com/office/drawing/2010/main">
+                <a:solidFill>
+                  <a:schemeClr val="accent1"/>
+                </a:solidFill>
+              </a14:hiddenFill>
+            </a:ext>
+            <a:ext uri="{91240B29-F687-4F45-9708-019B960494DF}">
+              <a14:hiddenLine xmlns:a14="http://schemas.microsoft.com/office/drawing/2010/main" w="9525">
+                <a:solidFill>
+                  <a:schemeClr val="tx1"/>
+                </a:solidFill>
+                <a:miter lim="800000"/>
+                <a:headEnd/>
+                <a:tailEnd/>
+              </a14:hiddenLine>
+            </a:ext>
+            <a:ext uri="{AF507438-7753-43E0-B8FC-AC1667EBCBE1}">
+              <a14:hiddenEffects xmlns:a14="http://schemas.microsoft.com/office/drawing/2010/main">
+                <a:effectLst>
+                  <a:outerShdw dist="35921" dir="2700000" algn="ctr" rotWithShape="0">
+                    <a:schemeClr val="bg2"/>
+                  </a:outerShdw>
+                </a:effectLst>
+              </a14:hiddenEffects>
+            </a:ext>
+          </a:extLst>
+        </p:spPr>
+        <p:txBody>
+          <a:bodyPr vert="horz" wrap="square" lIns="91440" tIns="45720" rIns="91440" bIns="45720" numCol="1" anchor="ctr" anchorCtr="0" compatLnSpc="1">
+            <a:prstTxWarp prst="textNoShape">
+              <a:avLst/>
+            </a:prstTxWarp>
+            <a:spAutoFit/>
+          </a:bodyPr>
+          <a:lstStyle/>
+          <a:p>
+            <a:pPr marL="0" marR="0" lvl="0" indent="0" algn="l" defTabSz="914400" rtl="0" eaLnBrk="0" fontAlgn="base" latinLnBrk="0" hangingPunct="0">
+              <a:lnSpc>
+                <a:spcPct val="100000"/>
+              </a:lnSpc>
+              <a:spcBef>
+                <a:spcPct val="0"/>
+              </a:spcBef>
+              <a:spcAft>
+                <a:spcPct val="0"/>
+              </a:spcAft>
+              <a:buClrTx/>
+              <a:buSzTx/>
+              <a:buFontTx/>
+              <a:buChar char="•"/>
+              <a:tabLst/>
+            </a:pPr>
+            <a:r>
+              <a:rPr kumimoji="0" lang="es-CO" altLang="es-CO" b="1" i="0" u="none" strike="noStrike" cap="none" normalizeH="0" baseline="0" dirty="0">
+                <a:ln>
+                  <a:noFill/>
+                </a:ln>
+                <a:solidFill>
+                  <a:schemeClr val="tx1"/>
+                </a:solidFill>
+                <a:effectLst/>
+                <a:latin typeface="Arial" panose="020B0604020202020204" pitchFamily="34" charset="0"/>
+              </a:rPr>
+              <a:t>Comportamiento:</a:t>
+            </a:r>
+            <a:endParaRPr kumimoji="0" lang="es-CO" altLang="es-CO" b="0" i="0" u="none" strike="noStrike" cap="none" normalizeH="0" baseline="0" dirty="0">
+              <a:ln>
+                <a:noFill/>
+              </a:ln>
+              <a:solidFill>
+                <a:schemeClr val="tx1"/>
+              </a:solidFill>
+              <a:effectLst/>
+              <a:latin typeface="Arial" panose="020B0604020202020204" pitchFamily="34" charset="0"/>
+            </a:endParaRPr>
+          </a:p>
+          <a:p>
+            <a:pPr marL="0" marR="0" lvl="0" indent="0" algn="l" defTabSz="914400" rtl="0" eaLnBrk="0" fontAlgn="base" latinLnBrk="0" hangingPunct="0">
+              <a:lnSpc>
+                <a:spcPct val="100000"/>
+              </a:lnSpc>
+              <a:spcBef>
+                <a:spcPct val="0"/>
+              </a:spcBef>
+              <a:spcAft>
+                <a:spcPct val="0"/>
+              </a:spcAft>
+              <a:buClrTx/>
+              <a:buSzTx/>
+              <a:buFontTx/>
+              <a:buChar char="•"/>
+              <a:tabLst/>
+            </a:pPr>
+            <a:r>
+              <a:rPr kumimoji="0" lang="es-CO" altLang="es-CO" b="0" i="0" u="none" strike="noStrike" cap="none" normalizeH="0" baseline="0" dirty="0" err="1">
+                <a:ln>
+                  <a:noFill/>
+                </a:ln>
+                <a:solidFill>
+                  <a:schemeClr val="tx1"/>
+                </a:solidFill>
+                <a:effectLst/>
+                <a:latin typeface="Arial Unicode MS"/>
+              </a:rPr>
+              <a:t>introducir_operador</a:t>
+            </a:r>
+            <a:r>
+              <a:rPr kumimoji="0" lang="es-CO" altLang="es-CO" b="0" i="0" u="none" strike="noStrike" cap="none" normalizeH="0" baseline="0" dirty="0">
+                <a:ln>
+                  <a:noFill/>
+                </a:ln>
+                <a:solidFill>
+                  <a:schemeClr val="tx1"/>
+                </a:solidFill>
+                <a:effectLst/>
+              </a:rPr>
+              <a:t>:</a:t>
+            </a:r>
+            <a:endParaRPr kumimoji="0" lang="es-CO" altLang="es-CO" b="0" i="0" u="none" strike="noStrike" cap="none" normalizeH="0" baseline="0" dirty="0">
+              <a:ln>
+                <a:noFill/>
+              </a:ln>
+              <a:solidFill>
+                <a:schemeClr val="tx1"/>
+              </a:solidFill>
+              <a:effectLst/>
+              <a:latin typeface="Arial" panose="020B0604020202020204" pitchFamily="34" charset="0"/>
+            </a:endParaRPr>
+          </a:p>
+          <a:p>
+            <a:pPr marL="457200" marR="0" lvl="1" indent="0" algn="l" defTabSz="914400" rtl="0" eaLnBrk="0" fontAlgn="base" latinLnBrk="0" hangingPunct="0">
+              <a:lnSpc>
+                <a:spcPct val="100000"/>
+              </a:lnSpc>
+              <a:spcBef>
+                <a:spcPct val="0"/>
+              </a:spcBef>
+              <a:spcAft>
+                <a:spcPct val="0"/>
+              </a:spcAft>
+              <a:buClrTx/>
+              <a:buSzTx/>
+              <a:buFontTx/>
+              <a:buChar char="•"/>
+              <a:tabLst/>
+            </a:pPr>
+            <a:r>
+              <a:rPr kumimoji="0" lang="es-CO" altLang="es-CO" b="0" i="0" u="none" strike="noStrike" cap="none" normalizeH="0" baseline="0" dirty="0">
+                <a:ln>
+                  <a:noFill/>
+                </a:ln>
+                <a:solidFill>
+                  <a:schemeClr val="tx1"/>
+                </a:solidFill>
+                <a:effectLst/>
+                <a:latin typeface="Arial" panose="020B0604020202020204" pitchFamily="34" charset="0"/>
+              </a:rPr>
+              <a:t>Permite encadenar operaciones (usando el número ya introducido como nuevo operando).</a:t>
+            </a:r>
+          </a:p>
+          <a:p>
+            <a:pPr marL="457200" marR="0" lvl="1" indent="0" algn="l" defTabSz="914400" rtl="0" eaLnBrk="0" fontAlgn="base" latinLnBrk="0" hangingPunct="0">
+              <a:lnSpc>
+                <a:spcPct val="100000"/>
+              </a:lnSpc>
+              <a:spcBef>
+                <a:spcPct val="0"/>
+              </a:spcBef>
+              <a:spcAft>
+                <a:spcPct val="0"/>
+              </a:spcAft>
+              <a:buClrTx/>
+              <a:buSzTx/>
+              <a:buFontTx/>
+              <a:buChar char="•"/>
+              <a:tabLst/>
+            </a:pPr>
+            <a:r>
+              <a:rPr kumimoji="0" lang="es-CO" altLang="es-CO" b="0" i="0" u="none" strike="noStrike" cap="none" normalizeH="0" baseline="0" dirty="0">
+                <a:ln>
+                  <a:noFill/>
+                </a:ln>
+                <a:solidFill>
+                  <a:schemeClr val="tx1"/>
+                </a:solidFill>
+                <a:effectLst/>
+                <a:latin typeface="Arial" panose="020B0604020202020204" pitchFamily="34" charset="0"/>
+              </a:rPr>
+              <a:t>Puede transitar a </a:t>
+            </a:r>
+            <a:r>
+              <a:rPr kumimoji="0" lang="es-CO" altLang="es-CO" b="0" i="0" u="none" strike="noStrike" cap="none" normalizeH="0" baseline="0" dirty="0" err="1">
+                <a:ln>
+                  <a:noFill/>
+                </a:ln>
+                <a:solidFill>
+                  <a:schemeClr val="tx1"/>
+                </a:solidFill>
+                <a:effectLst/>
+                <a:latin typeface="Arial Unicode MS"/>
+              </a:rPr>
+              <a:t>EstadoResultadoParcial</a:t>
+            </a:r>
+            <a:r>
+              <a:rPr kumimoji="0" lang="es-CO" altLang="es-CO" b="0" i="0" u="none" strike="noStrike" cap="none" normalizeH="0" baseline="0" dirty="0">
+                <a:ln>
+                  <a:noFill/>
+                </a:ln>
+                <a:solidFill>
+                  <a:schemeClr val="tx1"/>
+                </a:solidFill>
+                <a:effectLst/>
+              </a:rPr>
+              <a:t>.</a:t>
+            </a:r>
+            <a:endParaRPr kumimoji="0" lang="es-CO" altLang="es-CO" b="0" i="0" u="none" strike="noStrike" cap="none" normalizeH="0" baseline="0" dirty="0">
+              <a:ln>
+                <a:noFill/>
+              </a:ln>
+              <a:solidFill>
+                <a:schemeClr val="tx1"/>
+              </a:solidFill>
+              <a:effectLst/>
+              <a:latin typeface="Arial" panose="020B0604020202020204" pitchFamily="34" charset="0"/>
+            </a:endParaRPr>
+          </a:p>
+          <a:p>
+            <a:pPr marL="0" marR="0" lvl="0" indent="0" algn="l" defTabSz="914400" rtl="0" eaLnBrk="0" fontAlgn="base" latinLnBrk="0" hangingPunct="0">
+              <a:lnSpc>
+                <a:spcPct val="100000"/>
+              </a:lnSpc>
+              <a:spcBef>
+                <a:spcPct val="0"/>
+              </a:spcBef>
+              <a:spcAft>
+                <a:spcPct val="0"/>
+              </a:spcAft>
+              <a:buClrTx/>
+              <a:buSzTx/>
+              <a:buFontTx/>
+              <a:buChar char="•"/>
+              <a:tabLst/>
+            </a:pPr>
+            <a:r>
+              <a:rPr kumimoji="0" lang="es-CO" altLang="es-CO" b="0" i="0" u="none" strike="noStrike" cap="none" normalizeH="0" baseline="0" dirty="0">
+                <a:ln>
+                  <a:noFill/>
+                </a:ln>
+                <a:solidFill>
+                  <a:schemeClr val="tx1"/>
+                </a:solidFill>
+                <a:effectLst/>
+                <a:latin typeface="Arial Unicode MS"/>
+              </a:rPr>
+              <a:t>calcular</a:t>
+            </a:r>
+            <a:r>
+              <a:rPr kumimoji="0" lang="es-CO" altLang="es-CO" b="0" i="0" u="none" strike="noStrike" cap="none" normalizeH="0" baseline="0" dirty="0">
+                <a:ln>
+                  <a:noFill/>
+                </a:ln>
+                <a:solidFill>
+                  <a:schemeClr val="tx1"/>
+                </a:solidFill>
+                <a:effectLst/>
+              </a:rPr>
+              <a:t>:</a:t>
+            </a:r>
+            <a:endParaRPr kumimoji="0" lang="es-CO" altLang="es-CO" b="0" i="0" u="none" strike="noStrike" cap="none" normalizeH="0" baseline="0" dirty="0">
+              <a:ln>
+                <a:noFill/>
+              </a:ln>
+              <a:solidFill>
+                <a:schemeClr val="tx1"/>
+              </a:solidFill>
+              <a:effectLst/>
+              <a:latin typeface="Arial" panose="020B0604020202020204" pitchFamily="34" charset="0"/>
+            </a:endParaRPr>
+          </a:p>
+          <a:p>
+            <a:pPr marL="457200" marR="0" lvl="1" indent="0" algn="l" defTabSz="914400" rtl="0" eaLnBrk="0" fontAlgn="base" latinLnBrk="0" hangingPunct="0">
+              <a:lnSpc>
+                <a:spcPct val="100000"/>
+              </a:lnSpc>
+              <a:spcBef>
+                <a:spcPct val="0"/>
+              </a:spcBef>
+              <a:spcAft>
+                <a:spcPct val="0"/>
+              </a:spcAft>
+              <a:buClrTx/>
+              <a:buSzTx/>
+              <a:buFontTx/>
+              <a:buChar char="•"/>
+              <a:tabLst/>
+            </a:pPr>
+            <a:r>
+              <a:rPr kumimoji="0" lang="es-CO" altLang="es-CO" b="0" i="0" u="none" strike="noStrike" cap="none" normalizeH="0" baseline="0" dirty="0">
+                <a:ln>
+                  <a:noFill/>
+                </a:ln>
+                <a:solidFill>
+                  <a:schemeClr val="tx1"/>
+                </a:solidFill>
+                <a:effectLst/>
+                <a:latin typeface="Arial" panose="020B0604020202020204" pitchFamily="34" charset="0"/>
+              </a:rPr>
+              <a:t>Ejecuta la operación binaria con:</a:t>
+            </a:r>
+          </a:p>
+          <a:p>
+            <a:pPr marL="914400" marR="0" lvl="2" indent="0" algn="l" defTabSz="914400" rtl="0" eaLnBrk="0" fontAlgn="base" latinLnBrk="0" hangingPunct="0">
+              <a:lnSpc>
+                <a:spcPct val="100000"/>
+              </a:lnSpc>
+              <a:spcBef>
+                <a:spcPct val="0"/>
+              </a:spcBef>
+              <a:spcAft>
+                <a:spcPct val="0"/>
+              </a:spcAft>
+              <a:buClrTx/>
+              <a:buSzTx/>
+              <a:buFontTx/>
+              <a:buChar char="•"/>
+              <a:tabLst/>
+            </a:pPr>
+            <a:r>
+              <a:rPr kumimoji="0" lang="es-CO" altLang="es-CO" b="0" i="0" u="none" strike="noStrike" cap="none" normalizeH="0" baseline="0" dirty="0">
+                <a:ln>
+                  <a:noFill/>
+                </a:ln>
+                <a:solidFill>
+                  <a:schemeClr val="tx1"/>
+                </a:solidFill>
+                <a:effectLst/>
+                <a:latin typeface="Arial" panose="020B0604020202020204" pitchFamily="34" charset="0"/>
+              </a:rPr>
+              <a:t>Primer operando.</a:t>
+            </a:r>
+          </a:p>
+          <a:p>
+            <a:pPr marL="914400" marR="0" lvl="2" indent="0" algn="l" defTabSz="914400" rtl="0" eaLnBrk="0" fontAlgn="base" latinLnBrk="0" hangingPunct="0">
+              <a:lnSpc>
+                <a:spcPct val="100000"/>
+              </a:lnSpc>
+              <a:spcBef>
+                <a:spcPct val="0"/>
+              </a:spcBef>
+              <a:spcAft>
+                <a:spcPct val="0"/>
+              </a:spcAft>
+              <a:buClrTx/>
+              <a:buSzTx/>
+              <a:buFontTx/>
+              <a:buChar char="•"/>
+              <a:tabLst/>
+            </a:pPr>
+            <a:r>
+              <a:rPr kumimoji="0" lang="es-CO" altLang="es-CO" b="0" i="0" u="none" strike="noStrike" cap="none" normalizeH="0" baseline="0" dirty="0">
+                <a:ln>
+                  <a:noFill/>
+                </a:ln>
+                <a:solidFill>
+                  <a:schemeClr val="tx1"/>
+                </a:solidFill>
+                <a:effectLst/>
+                <a:latin typeface="Arial" panose="020B0604020202020204" pitchFamily="34" charset="0"/>
+              </a:rPr>
+              <a:t>Segundo operando (obtenido de la lista de dígitos).</a:t>
+            </a:r>
+          </a:p>
+          <a:p>
+            <a:pPr marL="457200" marR="0" lvl="1" indent="0" algn="l" defTabSz="914400" rtl="0" eaLnBrk="0" fontAlgn="base" latinLnBrk="0" hangingPunct="0">
+              <a:lnSpc>
+                <a:spcPct val="100000"/>
+              </a:lnSpc>
+              <a:spcBef>
+                <a:spcPct val="0"/>
+              </a:spcBef>
+              <a:spcAft>
+                <a:spcPct val="0"/>
+              </a:spcAft>
+              <a:buClrTx/>
+              <a:buSzTx/>
+              <a:buFontTx/>
+              <a:buChar char="•"/>
+              <a:tabLst/>
+            </a:pPr>
+            <a:r>
+              <a:rPr kumimoji="0" lang="es-CO" altLang="es-CO" b="0" i="0" u="none" strike="noStrike" cap="none" normalizeH="0" baseline="0" dirty="0">
+                <a:ln>
+                  <a:noFill/>
+                </a:ln>
+                <a:solidFill>
+                  <a:schemeClr val="tx1"/>
+                </a:solidFill>
+                <a:effectLst/>
+                <a:latin typeface="Arial" panose="020B0604020202020204" pitchFamily="34" charset="0"/>
+              </a:rPr>
+              <a:t>Devuelve el resultado y transita a </a:t>
+            </a:r>
+            <a:r>
+              <a:rPr kumimoji="0" lang="es-CO" altLang="es-CO" b="0" i="0" u="none" strike="noStrike" cap="none" normalizeH="0" baseline="0" dirty="0" err="1">
+                <a:ln>
+                  <a:noFill/>
+                </a:ln>
+                <a:solidFill>
+                  <a:schemeClr val="tx1"/>
+                </a:solidFill>
+                <a:effectLst/>
+                <a:latin typeface="Arial Unicode MS"/>
+              </a:rPr>
+              <a:t>EstadoInicial</a:t>
+            </a:r>
+            <a:r>
+              <a:rPr kumimoji="0" lang="es-CO" altLang="es-CO" b="0" i="0" u="none" strike="noStrike" cap="none" normalizeH="0" baseline="0" dirty="0">
+                <a:ln>
+                  <a:noFill/>
+                </a:ln>
+                <a:solidFill>
+                  <a:schemeClr val="tx1"/>
+                </a:solidFill>
+                <a:effectLst/>
+              </a:rPr>
+              <a:t>.</a:t>
+            </a:r>
+            <a:endParaRPr kumimoji="0" lang="es-CO" altLang="es-CO" b="0" i="0" u="none" strike="noStrike" cap="none" normalizeH="0" baseline="0" dirty="0">
+              <a:ln>
+                <a:noFill/>
+              </a:ln>
+              <a:solidFill>
+                <a:schemeClr val="tx1"/>
+              </a:solidFill>
+              <a:effectLst/>
+              <a:latin typeface="Arial" panose="020B0604020202020204" pitchFamily="34" charset="0"/>
+            </a:endParaRPr>
+          </a:p>
+          <a:p>
+            <a:pPr marL="0" marR="0" lvl="0" indent="0" algn="l" defTabSz="914400" rtl="0" eaLnBrk="0" fontAlgn="base" latinLnBrk="0" hangingPunct="0">
+              <a:lnSpc>
+                <a:spcPct val="100000"/>
+              </a:lnSpc>
+              <a:spcBef>
+                <a:spcPct val="0"/>
+              </a:spcBef>
+              <a:spcAft>
+                <a:spcPct val="0"/>
+              </a:spcAft>
+              <a:buClrTx/>
+              <a:buSzTx/>
+              <a:buFontTx/>
+              <a:buNone/>
+              <a:tabLst/>
+            </a:pPr>
+            <a:endParaRPr kumimoji="0" lang="es-CO" altLang="es-CO" b="0" i="0" u="none" strike="noStrike" cap="none" normalizeH="0" baseline="0" dirty="0">
+              <a:ln>
+                <a:noFill/>
+              </a:ln>
+              <a:solidFill>
+                <a:schemeClr val="tx1"/>
+              </a:solidFill>
+              <a:effectLst/>
+              <a:latin typeface="Arial" panose="020B0604020202020204" pitchFamily="34" charset="0"/>
+            </a:endParaRPr>
+          </a:p>
+        </p:txBody>
+      </p:sp>
+      <p:pic>
+        <p:nvPicPr>
+          <p:cNvPr id="7" name="Imagen 6">
+            <a:extLst>
+              <a:ext uri="{FF2B5EF4-FFF2-40B4-BE49-F238E27FC236}">
+                <a16:creationId xmlns:a16="http://schemas.microsoft.com/office/drawing/2014/main" id="{066FB8B2-F221-4915-B931-01C3992681FB}"/>
+              </a:ext>
+            </a:extLst>
+          </p:cNvPr>
+          <p:cNvPicPr>
+            <a:picLocks noChangeAspect="1"/>
+          </p:cNvPicPr>
+          <p:nvPr/>
+        </p:nvPicPr>
+        <p:blipFill rotWithShape="1">
+          <a:blip r:embed="rId2"/>
+          <a:srcRect l="11304" t="29362" r="40888" b="18052"/>
+          <a:stretch/>
+        </p:blipFill>
+        <p:spPr>
+          <a:xfrm>
+            <a:off x="4002157" y="1741645"/>
+            <a:ext cx="8136831" cy="5031996"/>
+          </a:xfrm>
+          <a:prstGeom prst="rect">
+            <a:avLst/>
+          </a:prstGeom>
+        </p:spPr>
+      </p:pic>
+      <p:sp>
+        <p:nvSpPr>
+          <p:cNvPr id="9" name="CuadroTexto 8">
+            <a:extLst>
+              <a:ext uri="{FF2B5EF4-FFF2-40B4-BE49-F238E27FC236}">
+                <a16:creationId xmlns:a16="http://schemas.microsoft.com/office/drawing/2014/main" id="{A2B87041-94EA-4BBC-8E5F-1A2641FA1288}"/>
+              </a:ext>
+            </a:extLst>
+          </p:cNvPr>
+          <p:cNvSpPr txBox="1"/>
+          <p:nvPr/>
+        </p:nvSpPr>
+        <p:spPr>
+          <a:xfrm>
+            <a:off x="7598555" y="-12681"/>
+            <a:ext cx="4818732" cy="1754326"/>
+          </a:xfrm>
+          <a:prstGeom prst="rect">
+            <a:avLst/>
+          </a:prstGeom>
+          <a:noFill/>
+        </p:spPr>
+        <p:txBody>
+          <a:bodyPr wrap="square">
+            <a:spAutoFit/>
+          </a:bodyPr>
+          <a:lstStyle/>
+          <a:p>
+            <a:pPr marL="0" marR="0" lvl="0" indent="0" algn="l" defTabSz="914400" rtl="0" eaLnBrk="0" fontAlgn="base" latinLnBrk="0" hangingPunct="0">
+              <a:lnSpc>
+                <a:spcPct val="100000"/>
+              </a:lnSpc>
+              <a:spcBef>
+                <a:spcPct val="0"/>
+              </a:spcBef>
+              <a:spcAft>
+                <a:spcPct val="0"/>
+              </a:spcAft>
+              <a:buClrTx/>
+              <a:buSzTx/>
+              <a:buFontTx/>
+              <a:buChar char="•"/>
+              <a:tabLst/>
+            </a:pPr>
+            <a:r>
+              <a:rPr kumimoji="0" lang="es-CO" altLang="es-CO" b="1" i="0" u="none" strike="noStrike" cap="none" normalizeH="0" baseline="0" dirty="0">
+                <a:ln>
+                  <a:noFill/>
+                </a:ln>
+                <a:solidFill>
+                  <a:schemeClr val="tx1"/>
+                </a:solidFill>
+                <a:effectLst/>
+                <a:latin typeface="Arial" panose="020B0604020202020204" pitchFamily="34" charset="0"/>
+              </a:rPr>
+              <a:t>Diferencias principales:</a:t>
+            </a:r>
+            <a:endParaRPr kumimoji="0" lang="es-CO" altLang="es-CO" b="0" i="0" u="none" strike="noStrike" cap="none" normalizeH="0" baseline="0" dirty="0">
+              <a:ln>
+                <a:noFill/>
+              </a:ln>
+              <a:solidFill>
+                <a:schemeClr val="tx1"/>
+              </a:solidFill>
+              <a:effectLst/>
+              <a:latin typeface="Arial" panose="020B0604020202020204" pitchFamily="34" charset="0"/>
+            </a:endParaRPr>
+          </a:p>
+          <a:p>
+            <a:pPr marL="0" marR="0" lvl="0" indent="0" algn="l" defTabSz="914400" rtl="0" eaLnBrk="0" fontAlgn="base" latinLnBrk="0" hangingPunct="0">
+              <a:lnSpc>
+                <a:spcPct val="100000"/>
+              </a:lnSpc>
+              <a:spcBef>
+                <a:spcPct val="0"/>
+              </a:spcBef>
+              <a:spcAft>
+                <a:spcPct val="0"/>
+              </a:spcAft>
+              <a:buClrTx/>
+              <a:buSzTx/>
+              <a:buFontTx/>
+              <a:buChar char="•"/>
+              <a:tabLst/>
+            </a:pPr>
+            <a:r>
+              <a:rPr kumimoji="0" lang="es-CO" altLang="es-CO" b="0" i="0" u="none" strike="noStrike" cap="none" normalizeH="0" baseline="0" dirty="0">
+                <a:ln>
+                  <a:noFill/>
+                </a:ln>
+                <a:solidFill>
+                  <a:schemeClr val="tx1"/>
+                </a:solidFill>
+                <a:effectLst/>
+                <a:latin typeface="Arial" panose="020B0604020202020204" pitchFamily="34" charset="0"/>
+              </a:rPr>
+              <a:t>Solo redefine:</a:t>
+            </a:r>
+          </a:p>
+          <a:p>
+            <a:pPr marL="457200" marR="0" lvl="1" indent="0" algn="l" defTabSz="914400" rtl="0" eaLnBrk="0" fontAlgn="base" latinLnBrk="0" hangingPunct="0">
+              <a:lnSpc>
+                <a:spcPct val="100000"/>
+              </a:lnSpc>
+              <a:spcBef>
+                <a:spcPct val="0"/>
+              </a:spcBef>
+              <a:spcAft>
+                <a:spcPct val="0"/>
+              </a:spcAft>
+              <a:buClrTx/>
+              <a:buSzTx/>
+              <a:buFontTx/>
+              <a:buChar char="•"/>
+              <a:tabLst/>
+            </a:pPr>
+            <a:r>
+              <a:rPr kumimoji="0" lang="es-CO" altLang="es-CO" b="0" i="0" u="none" strike="noStrike" cap="none" normalizeH="0" baseline="0" dirty="0" err="1">
+                <a:ln>
+                  <a:noFill/>
+                </a:ln>
+                <a:solidFill>
+                  <a:schemeClr val="tx1"/>
+                </a:solidFill>
+                <a:effectLst/>
+                <a:latin typeface="Arial Unicode MS"/>
+              </a:rPr>
+              <a:t>introducir_operador</a:t>
+            </a:r>
+            <a:endParaRPr kumimoji="0" lang="es-CO" altLang="es-CO" b="0" i="0" u="none" strike="noStrike" cap="none" normalizeH="0" baseline="0" dirty="0">
+              <a:ln>
+                <a:noFill/>
+              </a:ln>
+              <a:solidFill>
+                <a:schemeClr val="tx1"/>
+              </a:solidFill>
+              <a:effectLst/>
+            </a:endParaRPr>
+          </a:p>
+          <a:p>
+            <a:pPr marL="457200" marR="0" lvl="1" indent="0" algn="l" defTabSz="914400" rtl="0" eaLnBrk="0" fontAlgn="base" latinLnBrk="0" hangingPunct="0">
+              <a:lnSpc>
+                <a:spcPct val="100000"/>
+              </a:lnSpc>
+              <a:spcBef>
+                <a:spcPct val="0"/>
+              </a:spcBef>
+              <a:spcAft>
+                <a:spcPct val="0"/>
+              </a:spcAft>
+              <a:buClrTx/>
+              <a:buSzTx/>
+              <a:buFontTx/>
+              <a:buChar char="•"/>
+              <a:tabLst/>
+            </a:pPr>
+            <a:r>
+              <a:rPr kumimoji="0" lang="es-CO" altLang="es-CO" b="0" i="0" u="none" strike="noStrike" cap="none" normalizeH="0" baseline="0" dirty="0">
+                <a:ln>
+                  <a:noFill/>
+                </a:ln>
+                <a:solidFill>
+                  <a:schemeClr val="tx1"/>
+                </a:solidFill>
+                <a:effectLst/>
+                <a:latin typeface="Arial Unicode MS"/>
+              </a:rPr>
+              <a:t>calcular</a:t>
+            </a:r>
+            <a:endParaRPr kumimoji="0" lang="es-CO" altLang="es-CO" b="0" i="0" u="none" strike="noStrike" cap="none" normalizeH="0" baseline="0" dirty="0">
+              <a:ln>
+                <a:noFill/>
+              </a:ln>
+              <a:solidFill>
+                <a:schemeClr val="tx1"/>
+              </a:solidFill>
+              <a:effectLst/>
+            </a:endParaRPr>
+          </a:p>
+          <a:p>
+            <a:pPr marL="0" marR="0" lvl="0" indent="0" algn="l" defTabSz="914400" rtl="0" eaLnBrk="0" fontAlgn="base" latinLnBrk="0" hangingPunct="0">
+              <a:lnSpc>
+                <a:spcPct val="100000"/>
+              </a:lnSpc>
+              <a:spcBef>
+                <a:spcPct val="0"/>
+              </a:spcBef>
+              <a:spcAft>
+                <a:spcPct val="0"/>
+              </a:spcAft>
+              <a:buClrTx/>
+              <a:buSzTx/>
+              <a:buFontTx/>
+              <a:buChar char="•"/>
+              <a:tabLst/>
+            </a:pPr>
+            <a:r>
+              <a:rPr kumimoji="0" lang="es-CO" altLang="es-CO" b="0" i="0" u="none" strike="noStrike" cap="none" normalizeH="0" baseline="0" dirty="0">
+                <a:ln>
+                  <a:noFill/>
+                </a:ln>
+                <a:solidFill>
+                  <a:schemeClr val="tx1"/>
+                </a:solidFill>
+                <a:effectLst/>
+                <a:latin typeface="Arial" panose="020B0604020202020204" pitchFamily="34" charset="0"/>
+              </a:rPr>
+              <a:t>Todo lo relacionado con la </a:t>
+            </a:r>
+            <a:r>
+              <a:rPr kumimoji="0" lang="es-CO" altLang="es-CO" b="1" i="0" u="none" strike="noStrike" cap="none" normalizeH="0" baseline="0" dirty="0">
+                <a:ln>
+                  <a:noFill/>
+                </a:ln>
+                <a:solidFill>
+                  <a:schemeClr val="tx1"/>
+                </a:solidFill>
+                <a:effectLst/>
+                <a:latin typeface="Arial" panose="020B0604020202020204" pitchFamily="34" charset="0"/>
+              </a:rPr>
+              <a:t>entrada de dígitos</a:t>
+            </a:r>
+            <a:r>
+              <a:rPr kumimoji="0" lang="es-CO" altLang="es-CO" b="0" i="0" u="none" strike="noStrike" cap="none" normalizeH="0" baseline="0" dirty="0">
+                <a:ln>
+                  <a:noFill/>
+                </a:ln>
+                <a:solidFill>
+                  <a:schemeClr val="tx1"/>
+                </a:solidFill>
+                <a:effectLst/>
+                <a:latin typeface="Arial" panose="020B0604020202020204" pitchFamily="34" charset="0"/>
+              </a:rPr>
+              <a:t> se reutiliza de la clase padre.</a:t>
+            </a:r>
+          </a:p>
+        </p:txBody>
+      </p:sp>
+      <p:sp>
+        <p:nvSpPr>
+          <p:cNvPr id="11" name="CuadroTexto 10">
+            <a:extLst>
+              <a:ext uri="{FF2B5EF4-FFF2-40B4-BE49-F238E27FC236}">
+                <a16:creationId xmlns:a16="http://schemas.microsoft.com/office/drawing/2014/main" id="{78CDD9E6-14FE-4CE9-B76C-25CE958771E2}"/>
+              </a:ext>
+            </a:extLst>
+          </p:cNvPr>
+          <p:cNvSpPr txBox="1"/>
+          <p:nvPr/>
+        </p:nvSpPr>
+        <p:spPr>
+          <a:xfrm>
+            <a:off x="53012" y="571860"/>
+            <a:ext cx="6288156" cy="923330"/>
+          </a:xfrm>
+          <a:prstGeom prst="rect">
+            <a:avLst/>
+          </a:prstGeom>
+          <a:noFill/>
+        </p:spPr>
+        <p:txBody>
+          <a:bodyPr wrap="square">
+            <a:spAutoFit/>
+          </a:bodyPr>
+          <a:lstStyle/>
+          <a:p>
+            <a:pPr marL="0" marR="0" lvl="0" indent="0" algn="l" defTabSz="914400" rtl="0" eaLnBrk="0" fontAlgn="base" latinLnBrk="0" hangingPunct="0">
+              <a:lnSpc>
+                <a:spcPct val="100000"/>
+              </a:lnSpc>
+              <a:spcBef>
+                <a:spcPct val="0"/>
+              </a:spcBef>
+              <a:spcAft>
+                <a:spcPct val="0"/>
+              </a:spcAft>
+              <a:buClrTx/>
+              <a:buSzTx/>
+              <a:buFontTx/>
+              <a:buChar char="•"/>
+              <a:tabLst/>
+            </a:pPr>
+            <a:r>
+              <a:rPr kumimoji="0" lang="es-CO" altLang="es-CO" b="1" i="0" u="none" strike="noStrike" cap="none" normalizeH="0" baseline="0" dirty="0">
+                <a:ln>
+                  <a:noFill/>
+                </a:ln>
+                <a:solidFill>
+                  <a:schemeClr val="tx1"/>
+                </a:solidFill>
+                <a:effectLst/>
+                <a:latin typeface="Arial" panose="020B0604020202020204" pitchFamily="34" charset="0"/>
+              </a:rPr>
+              <a:t>Herencia:</a:t>
+            </a:r>
+            <a:endParaRPr kumimoji="0" lang="es-CO" altLang="es-CO" b="0" i="0" u="none" strike="noStrike" cap="none" normalizeH="0" baseline="0" dirty="0">
+              <a:ln>
+                <a:noFill/>
+              </a:ln>
+              <a:solidFill>
+                <a:schemeClr val="tx1"/>
+              </a:solidFill>
+              <a:effectLst/>
+              <a:latin typeface="Arial" panose="020B0604020202020204" pitchFamily="34" charset="0"/>
+            </a:endParaRPr>
+          </a:p>
+          <a:p>
+            <a:pPr marL="0" marR="0" lvl="0" indent="0" algn="l" defTabSz="914400" rtl="0" eaLnBrk="0" fontAlgn="base" latinLnBrk="0" hangingPunct="0">
+              <a:lnSpc>
+                <a:spcPct val="100000"/>
+              </a:lnSpc>
+              <a:spcBef>
+                <a:spcPct val="0"/>
+              </a:spcBef>
+              <a:spcAft>
+                <a:spcPct val="0"/>
+              </a:spcAft>
+              <a:buClrTx/>
+              <a:buSzTx/>
+              <a:buFontTx/>
+              <a:buChar char="•"/>
+              <a:tabLst/>
+            </a:pPr>
+            <a:r>
+              <a:rPr kumimoji="0" lang="es-CO" altLang="es-CO" b="0" i="0" u="none" strike="noStrike" cap="none" normalizeH="0" baseline="0" dirty="0">
+                <a:ln>
+                  <a:noFill/>
+                </a:ln>
+                <a:solidFill>
+                  <a:schemeClr val="tx1"/>
+                </a:solidFill>
+                <a:effectLst/>
+                <a:latin typeface="Arial" panose="020B0604020202020204" pitchFamily="34" charset="0"/>
+              </a:rPr>
+              <a:t>Extiende de </a:t>
+            </a:r>
+            <a:r>
+              <a:rPr kumimoji="0" lang="es-CO" altLang="es-CO" b="0" i="0" u="none" strike="noStrike" cap="none" normalizeH="0" baseline="0" dirty="0" err="1">
+                <a:ln>
+                  <a:noFill/>
+                </a:ln>
+                <a:solidFill>
+                  <a:schemeClr val="tx1"/>
+                </a:solidFill>
+                <a:effectLst/>
+                <a:latin typeface="Arial Unicode MS"/>
+              </a:rPr>
+              <a:t>EstadoIntroducirPrimerOperando</a:t>
+            </a:r>
+            <a:r>
+              <a:rPr kumimoji="0" lang="es-CO" altLang="es-CO" b="0" i="0" u="none" strike="noStrike" cap="none" normalizeH="0" baseline="0" dirty="0">
+                <a:ln>
+                  <a:noFill/>
+                </a:ln>
+                <a:solidFill>
+                  <a:schemeClr val="tx1"/>
+                </a:solidFill>
+                <a:effectLst/>
+              </a:rPr>
+              <a:t>.</a:t>
+            </a:r>
+            <a:endParaRPr kumimoji="0" lang="es-CO" altLang="es-CO" b="0" i="0" u="none" strike="noStrike" cap="none" normalizeH="0" baseline="0" dirty="0">
+              <a:ln>
+                <a:noFill/>
+              </a:ln>
+              <a:solidFill>
+                <a:schemeClr val="tx1"/>
+              </a:solidFill>
+              <a:effectLst/>
+              <a:latin typeface="Arial" panose="020B0604020202020204" pitchFamily="34" charset="0"/>
+            </a:endParaRPr>
+          </a:p>
+          <a:p>
+            <a:pPr marL="0" marR="0" lvl="0" indent="0" algn="l" defTabSz="914400" rtl="0" eaLnBrk="0" fontAlgn="base" latinLnBrk="0" hangingPunct="0">
+              <a:lnSpc>
+                <a:spcPct val="100000"/>
+              </a:lnSpc>
+              <a:spcBef>
+                <a:spcPct val="0"/>
+              </a:spcBef>
+              <a:spcAft>
+                <a:spcPct val="0"/>
+              </a:spcAft>
+              <a:buClrTx/>
+              <a:buSzTx/>
+              <a:buFontTx/>
+              <a:buChar char="•"/>
+              <a:tabLst/>
+            </a:pPr>
+            <a:r>
+              <a:rPr kumimoji="0" lang="es-CO" altLang="es-CO" b="0" i="0" u="none" strike="noStrike" cap="none" normalizeH="0" baseline="0" dirty="0">
+                <a:ln>
+                  <a:noFill/>
+                </a:ln>
+                <a:solidFill>
+                  <a:schemeClr val="tx1"/>
+                </a:solidFill>
+                <a:effectLst/>
+                <a:latin typeface="Arial" panose="020B0604020202020204" pitchFamily="34" charset="0"/>
+              </a:rPr>
+              <a:t>Comparte la lógica de gestión de dígitos y atributos.</a:t>
+            </a:r>
+          </a:p>
+        </p:txBody>
+      </p:sp>
+    </p:spTree>
+    <p:extLst>
+      <p:ext uri="{BB962C8B-B14F-4D97-AF65-F5344CB8AC3E}">
+        <p14:creationId xmlns:p14="http://schemas.microsoft.com/office/powerpoint/2010/main" val="3106872315"/>
+      </p:ext>
+    </p:extLst>
+  </p:cSld>
+  <p:clrMapOvr>
+    <a:masterClrMapping/>
+  </p:clrMapOvr>
+</p:sld>
+</file>
+
+<file path=ppt/slides/slide21.xml><?xml version="1.0" encoding="utf-8"?>
+<p:sld xmlns:a="http://schemas.openxmlformats.org/drawingml/2006/main" xmlns:r="http://schemas.openxmlformats.org/officeDocument/2006/relationships" xmlns:p="http://schemas.openxmlformats.org/presentationml/2006/main">
+  <p:cSld>
+    <p:spTree>
+      <p:nvGrpSpPr>
+        <p:cNvPr id="1" name=""/>
+        <p:cNvGrpSpPr/>
+        <p:nvPr/>
+      </p:nvGrpSpPr>
+      <p:grpSpPr>
+        <a:xfrm>
+          <a:off x="0" y="0"/>
+          <a:ext cx="0" cy="0"/>
+          <a:chOff x="0" y="0"/>
+          <a:chExt cx="0" cy="0"/>
+        </a:xfrm>
+      </p:grpSpPr>
+      <p:pic>
+        <p:nvPicPr>
+          <p:cNvPr id="5122" name="Picture 2" descr="Cómo hacer una calculadora en Python – Diagrama de Clases">
+            <a:extLst>
+              <a:ext uri="{FF2B5EF4-FFF2-40B4-BE49-F238E27FC236}">
+                <a16:creationId xmlns:a16="http://schemas.microsoft.com/office/drawing/2014/main" id="{538D7BB9-DE06-47A5-899D-55100EDEBDC8}"/>
+              </a:ext>
+            </a:extLst>
+          </p:cNvPr>
+          <p:cNvPicPr>
+            <a:picLocks noChangeAspect="1" noChangeArrowheads="1"/>
+          </p:cNvPicPr>
+          <p:nvPr/>
+        </p:nvPicPr>
+        <p:blipFill>
+          <a:blip r:embed="rId2">
+            <a:extLst>
+              <a:ext uri="{28A0092B-C50C-407E-A947-70E740481C1C}">
+                <a14:useLocalDpi xmlns:a14="http://schemas.microsoft.com/office/drawing/2010/main" val="0"/>
+              </a:ext>
+            </a:extLst>
+          </a:blip>
+          <a:srcRect/>
+          <a:stretch>
+            <a:fillRect/>
+          </a:stretch>
+        </p:blipFill>
+        <p:spPr bwMode="auto">
+          <a:xfrm>
+            <a:off x="652284" y="142890"/>
+            <a:ext cx="10887431" cy="6847174"/>
+          </a:xfrm>
+          <a:prstGeom prst="rect">
+            <a:avLst/>
+          </a:prstGeom>
+          <a:noFill/>
+          <a:extLst>
+            <a:ext uri="{909E8E84-426E-40DD-AFC4-6F175D3DCCD1}">
+              <a14:hiddenFill xmlns:a14="http://schemas.microsoft.com/office/drawing/2010/main">
+                <a:solidFill>
+                  <a:srgbClr val="FFFFFF"/>
+                </a:solidFill>
+              </a14:hiddenFill>
+            </a:ext>
+          </a:extLst>
+        </p:spPr>
+      </p:pic>
+      <p:sp>
+        <p:nvSpPr>
+          <p:cNvPr id="4" name="CuadroTexto 3">
+            <a:extLst>
+              <a:ext uri="{FF2B5EF4-FFF2-40B4-BE49-F238E27FC236}">
+                <a16:creationId xmlns:a16="http://schemas.microsoft.com/office/drawing/2014/main" id="{20C4A5F7-8CAB-4D1C-9EA6-531B40E931FA}"/>
+              </a:ext>
+            </a:extLst>
+          </p:cNvPr>
+          <p:cNvSpPr txBox="1"/>
+          <p:nvPr/>
+        </p:nvSpPr>
+        <p:spPr>
+          <a:xfrm>
+            <a:off x="1285461" y="199647"/>
+            <a:ext cx="2252870" cy="2215991"/>
+          </a:xfrm>
+          <a:prstGeom prst="rect">
+            <a:avLst/>
+          </a:prstGeom>
+          <a:noFill/>
+        </p:spPr>
+        <p:txBody>
+          <a:bodyPr wrap="square">
+            <a:spAutoFit/>
+          </a:bodyPr>
+          <a:lstStyle/>
+          <a:p>
+            <a:r>
+              <a:rPr lang="es-CO" sz="13800" dirty="0"/>
+              <a:t>✔️</a:t>
+            </a:r>
+          </a:p>
+        </p:txBody>
+      </p:sp>
+      <p:sp>
+        <p:nvSpPr>
+          <p:cNvPr id="5" name="CuadroTexto 4">
+            <a:extLst>
+              <a:ext uri="{FF2B5EF4-FFF2-40B4-BE49-F238E27FC236}">
+                <a16:creationId xmlns:a16="http://schemas.microsoft.com/office/drawing/2014/main" id="{6446A4DE-9EF4-4A22-9312-C1863E1AD0CA}"/>
+              </a:ext>
+            </a:extLst>
+          </p:cNvPr>
+          <p:cNvSpPr txBox="1"/>
+          <p:nvPr/>
+        </p:nvSpPr>
+        <p:spPr>
+          <a:xfrm>
+            <a:off x="6483394" y="0"/>
+            <a:ext cx="2252870" cy="2215991"/>
+          </a:xfrm>
+          <a:prstGeom prst="rect">
+            <a:avLst/>
+          </a:prstGeom>
+          <a:noFill/>
+        </p:spPr>
+        <p:txBody>
+          <a:bodyPr wrap="square">
+            <a:spAutoFit/>
+          </a:bodyPr>
+          <a:lstStyle/>
+          <a:p>
+            <a:r>
+              <a:rPr lang="es-CO" sz="13800" dirty="0"/>
+              <a:t>✔️</a:t>
+            </a:r>
+          </a:p>
+        </p:txBody>
+      </p:sp>
+      <p:sp>
+        <p:nvSpPr>
+          <p:cNvPr id="6" name="CuadroTexto 5">
+            <a:extLst>
+              <a:ext uri="{FF2B5EF4-FFF2-40B4-BE49-F238E27FC236}">
+                <a16:creationId xmlns:a16="http://schemas.microsoft.com/office/drawing/2014/main" id="{72F05DB0-C695-4A5D-94E3-73C65B4EB8DC}"/>
+              </a:ext>
+            </a:extLst>
+          </p:cNvPr>
+          <p:cNvSpPr txBox="1"/>
+          <p:nvPr/>
+        </p:nvSpPr>
+        <p:spPr>
+          <a:xfrm>
+            <a:off x="639033" y="2816087"/>
+            <a:ext cx="2252870" cy="2215991"/>
+          </a:xfrm>
+          <a:prstGeom prst="rect">
+            <a:avLst/>
+          </a:prstGeom>
+          <a:noFill/>
+        </p:spPr>
+        <p:txBody>
+          <a:bodyPr wrap="square">
+            <a:spAutoFit/>
+          </a:bodyPr>
+          <a:lstStyle/>
+          <a:p>
+            <a:r>
+              <a:rPr lang="es-CO" sz="13800" dirty="0"/>
+              <a:t>✔️</a:t>
+            </a:r>
+          </a:p>
+        </p:txBody>
+      </p:sp>
+      <p:sp>
+        <p:nvSpPr>
+          <p:cNvPr id="7" name="CuadroTexto 6">
+            <a:extLst>
+              <a:ext uri="{FF2B5EF4-FFF2-40B4-BE49-F238E27FC236}">
+                <a16:creationId xmlns:a16="http://schemas.microsoft.com/office/drawing/2014/main" id="{2B983C47-977D-419F-9004-FB53B1ACBB38}"/>
+              </a:ext>
+            </a:extLst>
+          </p:cNvPr>
+          <p:cNvSpPr txBox="1"/>
+          <p:nvPr/>
+        </p:nvSpPr>
+        <p:spPr>
+          <a:xfrm>
+            <a:off x="4230524" y="2816087"/>
+            <a:ext cx="2252870" cy="2215991"/>
+          </a:xfrm>
+          <a:prstGeom prst="rect">
+            <a:avLst/>
+          </a:prstGeom>
+          <a:noFill/>
+        </p:spPr>
+        <p:txBody>
+          <a:bodyPr wrap="square">
+            <a:spAutoFit/>
+          </a:bodyPr>
+          <a:lstStyle/>
+          <a:p>
+            <a:r>
+              <a:rPr lang="es-CO" sz="13800" dirty="0"/>
+              <a:t>✔️</a:t>
+            </a:r>
+          </a:p>
+        </p:txBody>
+      </p:sp>
+      <p:sp>
+        <p:nvSpPr>
+          <p:cNvPr id="8" name="CuadroTexto 7">
+            <a:extLst>
+              <a:ext uri="{FF2B5EF4-FFF2-40B4-BE49-F238E27FC236}">
+                <a16:creationId xmlns:a16="http://schemas.microsoft.com/office/drawing/2014/main" id="{DD8DA572-07D6-41AF-80D9-E705196A5263}"/>
+              </a:ext>
+            </a:extLst>
+          </p:cNvPr>
+          <p:cNvSpPr txBox="1"/>
+          <p:nvPr/>
+        </p:nvSpPr>
+        <p:spPr>
+          <a:xfrm>
+            <a:off x="8067028" y="4721522"/>
+            <a:ext cx="2252870" cy="2215991"/>
+          </a:xfrm>
+          <a:prstGeom prst="rect">
+            <a:avLst/>
+          </a:prstGeom>
+          <a:noFill/>
+        </p:spPr>
+        <p:txBody>
+          <a:bodyPr wrap="square">
+            <a:spAutoFit/>
+          </a:bodyPr>
+          <a:lstStyle/>
+          <a:p>
+            <a:r>
+              <a:rPr lang="es-CO" sz="13800" dirty="0"/>
+              <a:t>✔️</a:t>
+            </a:r>
+          </a:p>
+        </p:txBody>
+      </p:sp>
+      <p:sp>
+        <p:nvSpPr>
+          <p:cNvPr id="9" name="CuadroTexto 8">
+            <a:extLst>
+              <a:ext uri="{FF2B5EF4-FFF2-40B4-BE49-F238E27FC236}">
+                <a16:creationId xmlns:a16="http://schemas.microsoft.com/office/drawing/2014/main" id="{5CB581D3-9AEB-4A7F-9A67-22C7D349E158}"/>
+              </a:ext>
+            </a:extLst>
+          </p:cNvPr>
+          <p:cNvSpPr txBox="1"/>
+          <p:nvPr/>
+        </p:nvSpPr>
+        <p:spPr>
+          <a:xfrm>
+            <a:off x="3843129" y="5032078"/>
+            <a:ext cx="2252870" cy="2215991"/>
+          </a:xfrm>
+          <a:prstGeom prst="rect">
+            <a:avLst/>
+          </a:prstGeom>
+          <a:noFill/>
+        </p:spPr>
+        <p:txBody>
+          <a:bodyPr wrap="square">
+            <a:spAutoFit/>
+          </a:bodyPr>
+          <a:lstStyle/>
+          <a:p>
+            <a:r>
+              <a:rPr lang="es-CO" sz="13800" dirty="0"/>
+              <a:t>✔️</a:t>
+            </a:r>
+          </a:p>
+        </p:txBody>
+      </p:sp>
+      <p:sp>
+        <p:nvSpPr>
+          <p:cNvPr id="10" name="CuadroTexto 9">
+            <a:extLst>
+              <a:ext uri="{FF2B5EF4-FFF2-40B4-BE49-F238E27FC236}">
+                <a16:creationId xmlns:a16="http://schemas.microsoft.com/office/drawing/2014/main" id="{967FBD88-7917-4726-9FE3-5905A3E44338}"/>
+              </a:ext>
+            </a:extLst>
+          </p:cNvPr>
+          <p:cNvSpPr txBox="1"/>
+          <p:nvPr/>
+        </p:nvSpPr>
+        <p:spPr>
+          <a:xfrm>
+            <a:off x="8454423" y="2505531"/>
+            <a:ext cx="2252870" cy="2215991"/>
+          </a:xfrm>
+          <a:prstGeom prst="rect">
+            <a:avLst/>
+          </a:prstGeom>
+          <a:noFill/>
+        </p:spPr>
+        <p:txBody>
+          <a:bodyPr wrap="square">
+            <a:spAutoFit/>
+          </a:bodyPr>
+          <a:lstStyle/>
+          <a:p>
+            <a:r>
+              <a:rPr lang="es-CO" sz="13800" dirty="0"/>
+              <a:t>✔️</a:t>
+            </a:r>
+          </a:p>
+        </p:txBody>
+      </p:sp>
+    </p:spTree>
+    <p:extLst>
+      <p:ext uri="{BB962C8B-B14F-4D97-AF65-F5344CB8AC3E}">
+        <p14:creationId xmlns:p14="http://schemas.microsoft.com/office/powerpoint/2010/main" val="4015719041"/>
+      </p:ext>
+    </p:extLst>
+  </p:cSld>
+  <p:clrMapOvr>
+    <a:masterClrMapping/>
+  </p:clrMapOvr>
+</p:sld>
+</file>
+
+<file path=ppt/slides/slide22.xml><?xml version="1.0" encoding="utf-8"?>
+<p:sld xmlns:a="http://schemas.openxmlformats.org/drawingml/2006/main" xmlns:r="http://schemas.openxmlformats.org/officeDocument/2006/relationships" xmlns:p="http://schemas.openxmlformats.org/presentationml/2006/main">
+  <p:cSld>
+    <p:spTree>
+      <p:nvGrpSpPr>
+        <p:cNvPr id="1" name=""/>
+        <p:cNvGrpSpPr/>
+        <p:nvPr/>
+      </p:nvGrpSpPr>
+      <p:grpSpPr>
+        <a:xfrm>
+          <a:off x="0" y="0"/>
+          <a:ext cx="0" cy="0"/>
+          <a:chOff x="0" y="0"/>
+          <a:chExt cx="0" cy="0"/>
+        </a:xfrm>
+      </p:grpSpPr>
+      <p:sp>
+        <p:nvSpPr>
+          <p:cNvPr id="5" name="CuadroTexto 4">
+            <a:extLst>
+              <a:ext uri="{FF2B5EF4-FFF2-40B4-BE49-F238E27FC236}">
+                <a16:creationId xmlns:a16="http://schemas.microsoft.com/office/drawing/2014/main" id="{620C5D31-C34D-4BA3-B307-CD60C0D47B42}"/>
+              </a:ext>
+            </a:extLst>
+          </p:cNvPr>
+          <p:cNvSpPr txBox="1"/>
+          <p:nvPr/>
+        </p:nvSpPr>
+        <p:spPr>
+          <a:xfrm>
+            <a:off x="-26503" y="0"/>
+            <a:ext cx="4253946" cy="830997"/>
+          </a:xfrm>
+          <a:prstGeom prst="rect">
+            <a:avLst/>
+          </a:prstGeom>
+          <a:noFill/>
+        </p:spPr>
+        <p:txBody>
+          <a:bodyPr wrap="square">
+            <a:spAutoFit/>
+          </a:bodyPr>
+          <a:lstStyle/>
+          <a:p>
+            <a:r>
+              <a:rPr lang="es-CO" sz="4800" dirty="0">
+                <a:solidFill>
+                  <a:srgbClr val="FF0000"/>
+                </a:solidFill>
+                <a:latin typeface="opensans-regular"/>
+              </a:rPr>
+              <a:t>E</a:t>
+            </a:r>
+            <a:r>
+              <a:rPr lang="es-CO" sz="4800" b="0" i="0" dirty="0">
+                <a:solidFill>
+                  <a:srgbClr val="FF0000"/>
+                </a:solidFill>
+                <a:effectLst/>
+                <a:latin typeface="opensans-regular"/>
+              </a:rPr>
+              <a:t>stado de Error:</a:t>
+            </a:r>
+            <a:endParaRPr lang="es-CO" sz="4800" dirty="0">
+              <a:solidFill>
+                <a:srgbClr val="FF0000"/>
+              </a:solidFill>
+            </a:endParaRPr>
+          </a:p>
+        </p:txBody>
+      </p:sp>
+      <p:sp>
+        <p:nvSpPr>
+          <p:cNvPr id="6" name="Rectangle 1">
+            <a:extLst>
+              <a:ext uri="{FF2B5EF4-FFF2-40B4-BE49-F238E27FC236}">
+                <a16:creationId xmlns:a16="http://schemas.microsoft.com/office/drawing/2014/main" id="{E63CB810-BDCA-487A-AC73-52D51137AA0F}"/>
+              </a:ext>
+            </a:extLst>
+          </p:cNvPr>
+          <p:cNvSpPr>
+            <a:spLocks noChangeArrowheads="1"/>
+          </p:cNvSpPr>
+          <p:nvPr/>
+        </p:nvSpPr>
+        <p:spPr bwMode="auto">
+          <a:xfrm>
+            <a:off x="245165" y="830997"/>
+            <a:ext cx="4750905" cy="3693319"/>
+          </a:xfrm>
+          <a:prstGeom prst="rect">
+            <a:avLst/>
+          </a:prstGeom>
+          <a:noFill/>
+          <a:ln>
+            <a:noFill/>
+          </a:ln>
+          <a:effectLst/>
+          <a:extLst>
+            <a:ext uri="{909E8E84-426E-40DD-AFC4-6F175D3DCCD1}">
+              <a14:hiddenFill xmlns:a14="http://schemas.microsoft.com/office/drawing/2010/main">
+                <a:solidFill>
+                  <a:schemeClr val="accent1"/>
+                </a:solidFill>
+              </a14:hiddenFill>
+            </a:ext>
+            <a:ext uri="{91240B29-F687-4F45-9708-019B960494DF}">
+              <a14:hiddenLine xmlns:a14="http://schemas.microsoft.com/office/drawing/2010/main" w="9525">
+                <a:solidFill>
+                  <a:schemeClr val="tx1"/>
+                </a:solidFill>
+                <a:miter lim="800000"/>
+                <a:headEnd/>
+                <a:tailEnd/>
+              </a14:hiddenLine>
+            </a:ext>
+            <a:ext uri="{AF507438-7753-43E0-B8FC-AC1667EBCBE1}">
+              <a14:hiddenEffects xmlns:a14="http://schemas.microsoft.com/office/drawing/2010/main">
+                <a:effectLst>
+                  <a:outerShdw dist="35921" dir="2700000" algn="ctr" rotWithShape="0">
+                    <a:schemeClr val="bg2"/>
+                  </a:outerShdw>
+                </a:effectLst>
+              </a14:hiddenEffects>
+            </a:ext>
+          </a:extLst>
+        </p:spPr>
+        <p:txBody>
+          <a:bodyPr vert="horz" wrap="square" lIns="91440" tIns="45720" rIns="91440" bIns="45720" numCol="1" anchor="ctr" anchorCtr="0" compatLnSpc="1">
+            <a:prstTxWarp prst="textNoShape">
+              <a:avLst/>
+            </a:prstTxWarp>
+            <a:spAutoFit/>
+          </a:bodyPr>
+          <a:lstStyle/>
+          <a:p>
+            <a:pPr marL="0" marR="0" lvl="0" indent="0" algn="l" defTabSz="914400" rtl="0" eaLnBrk="0" fontAlgn="base" latinLnBrk="0" hangingPunct="0">
+              <a:lnSpc>
+                <a:spcPct val="100000"/>
+              </a:lnSpc>
+              <a:spcBef>
+                <a:spcPct val="0"/>
+              </a:spcBef>
+              <a:spcAft>
+                <a:spcPct val="0"/>
+              </a:spcAft>
+              <a:buClrTx/>
+              <a:buSzTx/>
+              <a:buFontTx/>
+              <a:buNone/>
+              <a:tabLst/>
+            </a:pPr>
+            <a:endParaRPr kumimoji="0" lang="es-CO" altLang="es-CO" b="0" i="0" u="none" strike="noStrike" cap="none" normalizeH="0" baseline="0" dirty="0">
+              <a:ln>
+                <a:noFill/>
+              </a:ln>
+              <a:solidFill>
+                <a:schemeClr val="tx1"/>
+              </a:solidFill>
+              <a:effectLst/>
+              <a:latin typeface="Arial" panose="020B0604020202020204" pitchFamily="34" charset="0"/>
+              <a:cs typeface="Arial" panose="020B0604020202020204" pitchFamily="34" charset="0"/>
+            </a:endParaRPr>
+          </a:p>
+          <a:p>
+            <a:pPr marL="0" marR="0" lvl="0" indent="0" algn="l" defTabSz="914400" rtl="0" eaLnBrk="0" fontAlgn="base" latinLnBrk="0" hangingPunct="0">
+              <a:lnSpc>
+                <a:spcPct val="100000"/>
+              </a:lnSpc>
+              <a:spcBef>
+                <a:spcPct val="0"/>
+              </a:spcBef>
+              <a:spcAft>
+                <a:spcPct val="0"/>
+              </a:spcAft>
+              <a:buClrTx/>
+              <a:buSzTx/>
+              <a:buFontTx/>
+              <a:buChar char="•"/>
+              <a:tabLst/>
+            </a:pPr>
+            <a:r>
+              <a:rPr kumimoji="0" lang="es-CO" altLang="es-CO" b="1" i="0" u="none" strike="noStrike" cap="none" normalizeH="0" baseline="0" dirty="0">
+                <a:ln>
+                  <a:noFill/>
+                </a:ln>
+                <a:solidFill>
+                  <a:schemeClr val="tx1"/>
+                </a:solidFill>
+                <a:effectLst/>
+                <a:latin typeface="Arial" panose="020B0604020202020204" pitchFamily="34" charset="0"/>
+                <a:cs typeface="Arial" panose="020B0604020202020204" pitchFamily="34" charset="0"/>
+              </a:rPr>
+              <a:t>La más sencilla de todas</a:t>
+            </a:r>
+            <a:r>
+              <a:rPr kumimoji="0" lang="es-CO" altLang="es-CO" b="0" i="0" u="none" strike="noStrike" cap="none" normalizeH="0" baseline="0" dirty="0">
+                <a:ln>
+                  <a:noFill/>
+                </a:ln>
+                <a:solidFill>
+                  <a:schemeClr val="tx1"/>
+                </a:solidFill>
+                <a:effectLst/>
+                <a:latin typeface="Arial" panose="020B0604020202020204" pitchFamily="34" charset="0"/>
+                <a:cs typeface="Arial" panose="020B0604020202020204" pitchFamily="34" charset="0"/>
+              </a:rPr>
+              <a:t>:</a:t>
+            </a:r>
+          </a:p>
+          <a:p>
+            <a:pPr marL="457200" marR="0" lvl="1" indent="0" algn="l" defTabSz="914400" rtl="0" eaLnBrk="0" fontAlgn="base" latinLnBrk="0" hangingPunct="0">
+              <a:lnSpc>
+                <a:spcPct val="100000"/>
+              </a:lnSpc>
+              <a:spcBef>
+                <a:spcPct val="0"/>
+              </a:spcBef>
+              <a:spcAft>
+                <a:spcPct val="0"/>
+              </a:spcAft>
+              <a:buClrTx/>
+              <a:buSzTx/>
+              <a:buFontTx/>
+              <a:buChar char="•"/>
+              <a:tabLst/>
+            </a:pPr>
+            <a:r>
+              <a:rPr kumimoji="0" lang="es-CO" altLang="es-CO" b="0" i="0" u="none" strike="noStrike" cap="none" normalizeH="0" baseline="0" dirty="0">
+                <a:ln>
+                  <a:noFill/>
+                </a:ln>
+                <a:solidFill>
+                  <a:schemeClr val="tx1"/>
+                </a:solidFill>
+                <a:effectLst/>
+                <a:latin typeface="Arial" panose="020B0604020202020204" pitchFamily="34" charset="0"/>
+                <a:cs typeface="Arial" panose="020B0604020202020204" pitchFamily="34" charset="0"/>
+              </a:rPr>
+              <a:t>No redefine los métodos de la clase padre → hereda los comportamientos por defecto (no hacer nada).</a:t>
+            </a:r>
+          </a:p>
+          <a:p>
+            <a:pPr marL="457200" marR="0" lvl="1" indent="0" algn="l" defTabSz="914400" rtl="0" eaLnBrk="0" fontAlgn="base" latinLnBrk="0" hangingPunct="0">
+              <a:lnSpc>
+                <a:spcPct val="100000"/>
+              </a:lnSpc>
+              <a:spcBef>
+                <a:spcPct val="0"/>
+              </a:spcBef>
+              <a:spcAft>
+                <a:spcPct val="0"/>
+              </a:spcAft>
+              <a:buClrTx/>
+              <a:buSzTx/>
+              <a:buFontTx/>
+              <a:buChar char="•"/>
+              <a:tabLst/>
+            </a:pPr>
+            <a:r>
+              <a:rPr kumimoji="0" lang="es-CO" altLang="es-CO" b="0" i="0" u="none" strike="noStrike" cap="none" normalizeH="0" baseline="0" dirty="0">
+                <a:ln>
+                  <a:noFill/>
+                </a:ln>
+                <a:solidFill>
+                  <a:schemeClr val="tx1"/>
+                </a:solidFill>
+                <a:effectLst/>
+                <a:latin typeface="Arial" panose="020B0604020202020204" pitchFamily="34" charset="0"/>
+                <a:cs typeface="Arial" panose="020B0604020202020204" pitchFamily="34" charset="0"/>
+              </a:rPr>
+              <a:t>Esto es intencional: en estado de error la calculadora </a:t>
+            </a:r>
+            <a:r>
+              <a:rPr kumimoji="0" lang="es-CO" altLang="es-CO" b="1" i="0" u="none" strike="noStrike" cap="none" normalizeH="0" baseline="0" dirty="0">
+                <a:ln>
+                  <a:noFill/>
+                </a:ln>
+                <a:solidFill>
+                  <a:schemeClr val="tx1"/>
+                </a:solidFill>
+                <a:effectLst/>
+                <a:latin typeface="Arial" panose="020B0604020202020204" pitchFamily="34" charset="0"/>
+                <a:cs typeface="Arial" panose="020B0604020202020204" pitchFamily="34" charset="0"/>
+              </a:rPr>
+              <a:t>no debe responder</a:t>
+            </a:r>
+            <a:r>
+              <a:rPr kumimoji="0" lang="es-CO" altLang="es-CO" b="0" i="0" u="none" strike="noStrike" cap="none" normalizeH="0" baseline="0" dirty="0">
+                <a:ln>
+                  <a:noFill/>
+                </a:ln>
+                <a:solidFill>
+                  <a:schemeClr val="tx1"/>
+                </a:solidFill>
+                <a:effectLst/>
+                <a:latin typeface="Arial" panose="020B0604020202020204" pitchFamily="34" charset="0"/>
+                <a:cs typeface="Arial" panose="020B0604020202020204" pitchFamily="34" charset="0"/>
+              </a:rPr>
+              <a:t> a nuevas entradas.</a:t>
+            </a:r>
+          </a:p>
+          <a:p>
+            <a:pPr marL="0" marR="0" lvl="0" indent="0" algn="l" defTabSz="914400" rtl="0" eaLnBrk="0" fontAlgn="base" latinLnBrk="0" hangingPunct="0">
+              <a:lnSpc>
+                <a:spcPct val="100000"/>
+              </a:lnSpc>
+              <a:spcBef>
+                <a:spcPct val="0"/>
+              </a:spcBef>
+              <a:spcAft>
+                <a:spcPct val="0"/>
+              </a:spcAft>
+              <a:buClrTx/>
+              <a:buSzTx/>
+              <a:buFontTx/>
+              <a:buChar char="•"/>
+              <a:tabLst/>
+            </a:pPr>
+            <a:r>
+              <a:rPr kumimoji="0" lang="es-CO" altLang="es-CO" b="1" i="0" u="none" strike="noStrike" cap="none" normalizeH="0" baseline="0" dirty="0">
+                <a:ln>
+                  <a:noFill/>
+                </a:ln>
+                <a:solidFill>
+                  <a:schemeClr val="tx1"/>
+                </a:solidFill>
+                <a:effectLst/>
+                <a:latin typeface="Arial" panose="020B0604020202020204" pitchFamily="34" charset="0"/>
+                <a:cs typeface="Arial" panose="020B0604020202020204" pitchFamily="34" charset="0"/>
+              </a:rPr>
+              <a:t>Obligación:</a:t>
+            </a:r>
+            <a:endParaRPr kumimoji="0" lang="es-CO" altLang="es-CO" b="0" i="0" u="none" strike="noStrike" cap="none" normalizeH="0" baseline="0" dirty="0">
+              <a:ln>
+                <a:noFill/>
+              </a:ln>
+              <a:solidFill>
+                <a:schemeClr val="tx1"/>
+              </a:solidFill>
+              <a:effectLst/>
+              <a:latin typeface="Arial" panose="020B0604020202020204" pitchFamily="34" charset="0"/>
+              <a:cs typeface="Arial" panose="020B0604020202020204" pitchFamily="34" charset="0"/>
+            </a:endParaRPr>
+          </a:p>
+          <a:p>
+            <a:pPr marL="457200" marR="0" lvl="1" indent="0" algn="l" defTabSz="914400" rtl="0" eaLnBrk="0" fontAlgn="base" latinLnBrk="0" hangingPunct="0">
+              <a:lnSpc>
+                <a:spcPct val="100000"/>
+              </a:lnSpc>
+              <a:spcBef>
+                <a:spcPct val="0"/>
+              </a:spcBef>
+              <a:spcAft>
+                <a:spcPct val="0"/>
+              </a:spcAft>
+              <a:buClrTx/>
+              <a:buSzTx/>
+              <a:buFontTx/>
+              <a:buChar char="•"/>
+              <a:tabLst/>
+            </a:pPr>
+            <a:r>
+              <a:rPr kumimoji="0" lang="es-CO" altLang="es-CO" b="0" i="0" u="none" strike="noStrike" cap="none" normalizeH="0" baseline="0" dirty="0">
+                <a:ln>
+                  <a:noFill/>
+                </a:ln>
+                <a:solidFill>
+                  <a:schemeClr val="tx1"/>
+                </a:solidFill>
+                <a:effectLst/>
+                <a:latin typeface="Arial" panose="020B0604020202020204" pitchFamily="34" charset="0"/>
+                <a:cs typeface="Arial" panose="020B0604020202020204" pitchFamily="34" charset="0"/>
+              </a:rPr>
+              <a:t>Implementar el método </a:t>
+            </a:r>
+            <a:r>
+              <a:rPr kumimoji="0" lang="es-CO" altLang="es-CO" b="0" i="0" u="none" strike="noStrike" cap="none" normalizeH="0" baseline="0" dirty="0" err="1">
+                <a:ln>
+                  <a:noFill/>
+                </a:ln>
+                <a:solidFill>
+                  <a:schemeClr val="tx1"/>
+                </a:solidFill>
+                <a:effectLst/>
+                <a:latin typeface="Arial" panose="020B0604020202020204" pitchFamily="34" charset="0"/>
+                <a:cs typeface="Arial" panose="020B0604020202020204" pitchFamily="34" charset="0"/>
+              </a:rPr>
+              <a:t>valor_actual</a:t>
+            </a:r>
+            <a:r>
+              <a:rPr kumimoji="0" lang="es-CO" altLang="es-CO" b="0" i="0" u="none" strike="noStrike" cap="none" normalizeH="0" baseline="0" dirty="0">
+                <a:ln>
+                  <a:noFill/>
+                </a:ln>
+                <a:solidFill>
+                  <a:schemeClr val="tx1"/>
+                </a:solidFill>
+                <a:effectLst/>
+                <a:latin typeface="Arial" panose="020B0604020202020204" pitchFamily="34" charset="0"/>
+                <a:cs typeface="Arial" panose="020B0604020202020204" pitchFamily="34" charset="0"/>
+              </a:rPr>
+              <a:t>.</a:t>
+            </a:r>
+          </a:p>
+          <a:p>
+            <a:pPr marL="457200" marR="0" lvl="1" indent="0" algn="l" defTabSz="914400" rtl="0" eaLnBrk="0" fontAlgn="base" latinLnBrk="0" hangingPunct="0">
+              <a:lnSpc>
+                <a:spcPct val="100000"/>
+              </a:lnSpc>
+              <a:spcBef>
+                <a:spcPct val="0"/>
+              </a:spcBef>
+              <a:spcAft>
+                <a:spcPct val="0"/>
+              </a:spcAft>
+              <a:buClrTx/>
+              <a:buSzTx/>
+              <a:buFontTx/>
+              <a:buChar char="•"/>
+              <a:tabLst/>
+            </a:pPr>
+            <a:r>
+              <a:rPr kumimoji="0" lang="es-CO" altLang="es-CO" b="0" i="0" u="none" strike="noStrike" cap="none" normalizeH="0" baseline="0" dirty="0">
+                <a:ln>
+                  <a:noFill/>
+                </a:ln>
+                <a:solidFill>
+                  <a:schemeClr val="tx1"/>
+                </a:solidFill>
+                <a:effectLst/>
+                <a:latin typeface="Arial" panose="020B0604020202020204" pitchFamily="34" charset="0"/>
+                <a:cs typeface="Arial" panose="020B0604020202020204" pitchFamily="34" charset="0"/>
+              </a:rPr>
+              <a:t>Devuelve un </a:t>
+            </a:r>
+            <a:r>
+              <a:rPr kumimoji="0" lang="es-CO" altLang="es-CO" b="1" i="0" u="none" strike="noStrike" cap="none" normalizeH="0" baseline="0" dirty="0">
+                <a:ln>
+                  <a:noFill/>
+                </a:ln>
+                <a:solidFill>
+                  <a:schemeClr val="tx1"/>
+                </a:solidFill>
+                <a:effectLst/>
+                <a:latin typeface="Arial" panose="020B0604020202020204" pitchFamily="34" charset="0"/>
+                <a:cs typeface="Arial" panose="020B0604020202020204" pitchFamily="34" charset="0"/>
+              </a:rPr>
+              <a:t>mensaje de error</a:t>
+            </a:r>
+            <a:r>
+              <a:rPr kumimoji="0" lang="es-CO" altLang="es-CO" b="0" i="0" u="none" strike="noStrike" cap="none" normalizeH="0" baseline="0" dirty="0">
+                <a:ln>
+                  <a:noFill/>
+                </a:ln>
+                <a:solidFill>
+                  <a:schemeClr val="tx1"/>
+                </a:solidFill>
+                <a:effectLst/>
+                <a:latin typeface="Arial" panose="020B0604020202020204" pitchFamily="34" charset="0"/>
+                <a:cs typeface="Arial" panose="020B0604020202020204" pitchFamily="34" charset="0"/>
+              </a:rPr>
+              <a:t> para mostrar en pantalla (ej. "ERROR").</a:t>
+            </a:r>
+          </a:p>
+          <a:p>
+            <a:pPr marL="0" marR="0" lvl="0" indent="0" algn="l" defTabSz="914400" rtl="0" eaLnBrk="0" fontAlgn="base" latinLnBrk="0" hangingPunct="0">
+              <a:lnSpc>
+                <a:spcPct val="100000"/>
+              </a:lnSpc>
+              <a:spcBef>
+                <a:spcPct val="0"/>
+              </a:spcBef>
+              <a:spcAft>
+                <a:spcPct val="0"/>
+              </a:spcAft>
+              <a:buClrTx/>
+              <a:buSzTx/>
+              <a:buFontTx/>
+              <a:buNone/>
+              <a:tabLst/>
+            </a:pPr>
+            <a:endParaRPr kumimoji="0" lang="es-CO" altLang="es-CO" b="0" i="0" u="none" strike="noStrike" cap="none" normalizeH="0" baseline="0" dirty="0">
+              <a:ln>
+                <a:noFill/>
+              </a:ln>
+              <a:solidFill>
+                <a:schemeClr val="tx1"/>
+              </a:solidFill>
+              <a:effectLst/>
+              <a:latin typeface="Arial" panose="020B0604020202020204" pitchFamily="34" charset="0"/>
+              <a:cs typeface="Arial" panose="020B0604020202020204" pitchFamily="34" charset="0"/>
+            </a:endParaRPr>
+          </a:p>
+        </p:txBody>
+      </p:sp>
+      <p:pic>
+        <p:nvPicPr>
+          <p:cNvPr id="8" name="Imagen 7">
+            <a:extLst>
+              <a:ext uri="{FF2B5EF4-FFF2-40B4-BE49-F238E27FC236}">
+                <a16:creationId xmlns:a16="http://schemas.microsoft.com/office/drawing/2014/main" id="{BC4D4552-A2B7-4E42-B121-B60D3F1492C9}"/>
+              </a:ext>
+            </a:extLst>
+          </p:cNvPr>
+          <p:cNvPicPr>
+            <a:picLocks noChangeAspect="1"/>
+          </p:cNvPicPr>
+          <p:nvPr/>
+        </p:nvPicPr>
+        <p:blipFill rotWithShape="1">
+          <a:blip r:embed="rId2"/>
+          <a:srcRect l="11522" t="36708" r="67717" b="42992"/>
+          <a:stretch/>
+        </p:blipFill>
+        <p:spPr>
+          <a:xfrm>
+            <a:off x="5267738" y="384312"/>
+            <a:ext cx="5711686" cy="3139933"/>
+          </a:xfrm>
+          <a:prstGeom prst="rect">
+            <a:avLst/>
+          </a:prstGeom>
+        </p:spPr>
+      </p:pic>
+      <p:sp>
+        <p:nvSpPr>
+          <p:cNvPr id="9" name="Rectangle 2">
+            <a:extLst>
+              <a:ext uri="{FF2B5EF4-FFF2-40B4-BE49-F238E27FC236}">
+                <a16:creationId xmlns:a16="http://schemas.microsoft.com/office/drawing/2014/main" id="{1F111666-22DD-4CEE-A9B6-F9E67FB71F89}"/>
+              </a:ext>
+            </a:extLst>
+          </p:cNvPr>
+          <p:cNvSpPr>
+            <a:spLocks noChangeArrowheads="1"/>
+          </p:cNvSpPr>
+          <p:nvPr/>
+        </p:nvSpPr>
+        <p:spPr bwMode="auto">
+          <a:xfrm>
+            <a:off x="2587491" y="4808040"/>
+            <a:ext cx="6838118" cy="1631216"/>
+          </a:xfrm>
+          <a:prstGeom prst="rect">
+            <a:avLst/>
+          </a:prstGeom>
+          <a:noFill/>
+          <a:ln>
+            <a:noFill/>
+          </a:ln>
+          <a:effectLst/>
+          <a:extLst>
+            <a:ext uri="{909E8E84-426E-40DD-AFC4-6F175D3DCCD1}">
+              <a14:hiddenFill xmlns:a14="http://schemas.microsoft.com/office/drawing/2010/main">
+                <a:solidFill>
+                  <a:schemeClr val="accent1"/>
+                </a:solidFill>
+              </a14:hiddenFill>
+            </a:ext>
+            <a:ext uri="{91240B29-F687-4F45-9708-019B960494DF}">
+              <a14:hiddenLine xmlns:a14="http://schemas.microsoft.com/office/drawing/2010/main" w="9525">
+                <a:solidFill>
+                  <a:schemeClr val="tx1"/>
+                </a:solidFill>
+                <a:miter lim="800000"/>
+                <a:headEnd/>
+                <a:tailEnd/>
+              </a14:hiddenLine>
+            </a:ext>
+            <a:ext uri="{AF507438-7753-43E0-B8FC-AC1667EBCBE1}">
+              <a14:hiddenEffects xmlns:a14="http://schemas.microsoft.com/office/drawing/2010/main">
+                <a:effectLst>
+                  <a:outerShdw dist="35921" dir="2700000" algn="ctr" rotWithShape="0">
+                    <a:schemeClr val="bg2"/>
+                  </a:outerShdw>
+                </a:effectLst>
+              </a14:hiddenEffects>
+            </a:ext>
+          </a:extLst>
+        </p:spPr>
+        <p:txBody>
+          <a:bodyPr vert="horz" wrap="square" lIns="91440" tIns="45720" rIns="91440" bIns="45720" numCol="1" anchor="ctr" anchorCtr="0" compatLnSpc="1">
+            <a:prstTxWarp prst="textNoShape">
+              <a:avLst/>
+            </a:prstTxWarp>
+            <a:spAutoFit/>
+          </a:bodyPr>
+          <a:lstStyle/>
+          <a:p>
+            <a:pPr marL="0" marR="0" lvl="0" indent="0" algn="l" defTabSz="914400" rtl="0" eaLnBrk="0" fontAlgn="base" latinLnBrk="0" hangingPunct="0">
+              <a:lnSpc>
+                <a:spcPct val="100000"/>
+              </a:lnSpc>
+              <a:spcBef>
+                <a:spcPct val="0"/>
+              </a:spcBef>
+              <a:spcAft>
+                <a:spcPct val="0"/>
+              </a:spcAft>
+              <a:buClrTx/>
+              <a:buSzTx/>
+              <a:tabLst/>
+            </a:pPr>
+            <a:r>
+              <a:rPr kumimoji="0" lang="es-CO" altLang="es-CO" sz="2000" b="1" i="0" u="none" strike="noStrike" cap="none" normalizeH="0" baseline="0" dirty="0">
+                <a:ln>
+                  <a:noFill/>
+                </a:ln>
+                <a:solidFill>
+                  <a:schemeClr val="tx1"/>
+                </a:solidFill>
+                <a:effectLst/>
+                <a:latin typeface="Arial" panose="020B0604020202020204" pitchFamily="34" charset="0"/>
+              </a:rPr>
+              <a:t>Ventajas del patrón Estado:</a:t>
+            </a:r>
+            <a:endParaRPr kumimoji="0" lang="es-CO" altLang="es-CO" sz="2000" b="0" i="0" u="none" strike="noStrike" cap="none" normalizeH="0" baseline="0" dirty="0">
+              <a:ln>
+                <a:noFill/>
+              </a:ln>
+              <a:solidFill>
+                <a:schemeClr val="tx1"/>
+              </a:solidFill>
+              <a:effectLst/>
+              <a:latin typeface="Arial" panose="020B0604020202020204" pitchFamily="34" charset="0"/>
+            </a:endParaRPr>
+          </a:p>
+          <a:p>
+            <a:pPr marL="0" marR="0" lvl="0" indent="0" algn="l" defTabSz="914400" rtl="0" eaLnBrk="0" fontAlgn="base" latinLnBrk="0" hangingPunct="0">
+              <a:lnSpc>
+                <a:spcPct val="100000"/>
+              </a:lnSpc>
+              <a:spcBef>
+                <a:spcPct val="0"/>
+              </a:spcBef>
+              <a:spcAft>
+                <a:spcPct val="0"/>
+              </a:spcAft>
+              <a:buClrTx/>
+              <a:buSzTx/>
+              <a:buFontTx/>
+              <a:buChar char="•"/>
+              <a:tabLst/>
+            </a:pPr>
+            <a:r>
+              <a:rPr kumimoji="0" lang="es-CO" altLang="es-CO" sz="2000" b="0" i="0" u="none" strike="noStrike" cap="none" normalizeH="0" baseline="0" dirty="0">
+                <a:ln>
+                  <a:noFill/>
+                </a:ln>
+                <a:solidFill>
+                  <a:schemeClr val="tx1"/>
+                </a:solidFill>
+                <a:effectLst/>
+                <a:latin typeface="Arial" panose="020B0604020202020204" pitchFamily="34" charset="0"/>
+              </a:rPr>
+              <a:t>Permite </a:t>
+            </a:r>
+            <a:r>
+              <a:rPr kumimoji="0" lang="es-CO" altLang="es-CO" sz="2000" b="1" i="0" u="none" strike="noStrike" cap="none" normalizeH="0" baseline="0" dirty="0">
+                <a:ln>
+                  <a:noFill/>
+                </a:ln>
+                <a:solidFill>
+                  <a:schemeClr val="tx1"/>
+                </a:solidFill>
+                <a:effectLst/>
+                <a:latin typeface="Arial" panose="020B0604020202020204" pitchFamily="34" charset="0"/>
+              </a:rPr>
+              <a:t>repartir responsabilidades</a:t>
+            </a:r>
+            <a:r>
+              <a:rPr kumimoji="0" lang="es-CO" altLang="es-CO" sz="2000" b="0" i="0" u="none" strike="noStrike" cap="none" normalizeH="0" baseline="0" dirty="0">
+                <a:ln>
+                  <a:noFill/>
+                </a:ln>
+                <a:solidFill>
+                  <a:schemeClr val="tx1"/>
+                </a:solidFill>
+                <a:effectLst/>
+                <a:latin typeface="Arial" panose="020B0604020202020204" pitchFamily="34" charset="0"/>
+              </a:rPr>
+              <a:t> entre varias clases.</a:t>
+            </a:r>
+          </a:p>
+          <a:p>
+            <a:pPr marL="0" marR="0" lvl="0" indent="0" algn="l" defTabSz="914400" rtl="0" eaLnBrk="0" fontAlgn="base" latinLnBrk="0" hangingPunct="0">
+              <a:lnSpc>
+                <a:spcPct val="100000"/>
+              </a:lnSpc>
+              <a:spcBef>
+                <a:spcPct val="0"/>
+              </a:spcBef>
+              <a:spcAft>
+                <a:spcPct val="0"/>
+              </a:spcAft>
+              <a:buClrTx/>
+              <a:buSzTx/>
+              <a:buFontTx/>
+              <a:buChar char="•"/>
+              <a:tabLst/>
+            </a:pPr>
+            <a:r>
+              <a:rPr kumimoji="0" lang="es-CO" altLang="es-CO" sz="2000" b="0" i="0" u="none" strike="noStrike" cap="none" normalizeH="0" baseline="0" dirty="0">
+                <a:ln>
+                  <a:noFill/>
+                </a:ln>
+                <a:solidFill>
+                  <a:schemeClr val="tx1"/>
+                </a:solidFill>
+                <a:effectLst/>
+                <a:latin typeface="Arial" panose="020B0604020202020204" pitchFamily="34" charset="0"/>
+              </a:rPr>
+              <a:t>Evita un código lleno de </a:t>
+            </a:r>
+            <a:r>
+              <a:rPr kumimoji="0" lang="es-CO" altLang="es-CO" sz="2000" b="1" i="0" u="none" strike="noStrike" cap="none" normalizeH="0" baseline="0" dirty="0">
+                <a:ln>
+                  <a:noFill/>
+                </a:ln>
+                <a:solidFill>
+                  <a:schemeClr val="tx1"/>
+                </a:solidFill>
+                <a:effectLst/>
+                <a:latin typeface="Arial" panose="020B0604020202020204" pitchFamily="34" charset="0"/>
+              </a:rPr>
+              <a:t>condicionales anidados</a:t>
+            </a:r>
+            <a:r>
+              <a:rPr kumimoji="0" lang="es-CO" altLang="es-CO" sz="2000" b="0" i="0" u="none" strike="noStrike" cap="none" normalizeH="0" baseline="0" dirty="0">
+                <a:ln>
+                  <a:noFill/>
+                </a:ln>
+                <a:solidFill>
+                  <a:schemeClr val="tx1"/>
+                </a:solidFill>
+                <a:effectLst/>
+                <a:latin typeface="Arial" panose="020B0604020202020204" pitchFamily="34" charset="0"/>
+              </a:rPr>
+              <a:t>.</a:t>
+            </a:r>
+          </a:p>
+          <a:p>
+            <a:pPr marL="0" marR="0" lvl="0" indent="0" algn="l" defTabSz="914400" rtl="0" eaLnBrk="0" fontAlgn="base" latinLnBrk="0" hangingPunct="0">
+              <a:lnSpc>
+                <a:spcPct val="100000"/>
+              </a:lnSpc>
+              <a:spcBef>
+                <a:spcPct val="0"/>
+              </a:spcBef>
+              <a:spcAft>
+                <a:spcPct val="0"/>
+              </a:spcAft>
+              <a:buClrTx/>
+              <a:buSzTx/>
+              <a:buFontTx/>
+              <a:buChar char="•"/>
+              <a:tabLst/>
+            </a:pPr>
+            <a:r>
+              <a:rPr kumimoji="0" lang="es-CO" altLang="es-CO" sz="2000" b="0" i="0" u="none" strike="noStrike" cap="none" normalizeH="0" baseline="0" dirty="0">
+                <a:ln>
+                  <a:noFill/>
+                </a:ln>
+                <a:solidFill>
+                  <a:schemeClr val="tx1"/>
+                </a:solidFill>
+                <a:effectLst/>
+                <a:latin typeface="Arial" panose="020B0604020202020204" pitchFamily="34" charset="0"/>
+              </a:rPr>
+              <a:t>Diseño </a:t>
+            </a:r>
+            <a:r>
+              <a:rPr kumimoji="0" lang="es-CO" altLang="es-CO" sz="2000" b="1" i="0" u="none" strike="noStrike" cap="none" normalizeH="0" baseline="0" dirty="0">
+                <a:ln>
+                  <a:noFill/>
+                </a:ln>
+                <a:solidFill>
+                  <a:schemeClr val="tx1"/>
+                </a:solidFill>
+                <a:effectLst/>
+                <a:latin typeface="Arial" panose="020B0604020202020204" pitchFamily="34" charset="0"/>
+              </a:rPr>
+              <a:t>modular, extensible y mantenible</a:t>
+            </a:r>
+            <a:r>
+              <a:rPr kumimoji="0" lang="es-CO" altLang="es-CO" sz="2000" b="0" i="0" u="none" strike="noStrike" cap="none" normalizeH="0" baseline="0" dirty="0">
+                <a:ln>
+                  <a:noFill/>
+                </a:ln>
+                <a:solidFill>
+                  <a:schemeClr val="tx1"/>
+                </a:solidFill>
+                <a:effectLst/>
+                <a:latin typeface="Arial" panose="020B0604020202020204" pitchFamily="34" charset="0"/>
+              </a:rPr>
+              <a:t>.</a:t>
+            </a:r>
+          </a:p>
+          <a:p>
+            <a:pPr marL="0" marR="0" lvl="0" indent="0" algn="l" defTabSz="914400" rtl="0" eaLnBrk="0" fontAlgn="base" latinLnBrk="0" hangingPunct="0">
+              <a:lnSpc>
+                <a:spcPct val="100000"/>
+              </a:lnSpc>
+              <a:spcBef>
+                <a:spcPct val="0"/>
+              </a:spcBef>
+              <a:spcAft>
+                <a:spcPct val="0"/>
+              </a:spcAft>
+              <a:buClrTx/>
+              <a:buSzTx/>
+              <a:buFontTx/>
+              <a:buNone/>
+              <a:tabLst/>
+            </a:pPr>
+            <a:endParaRPr kumimoji="0" lang="es-CO" altLang="es-CO" sz="2000" b="0" i="0" u="none" strike="noStrike" cap="none" normalizeH="0" baseline="0" dirty="0">
+              <a:ln>
+                <a:noFill/>
+              </a:ln>
+              <a:solidFill>
+                <a:schemeClr val="tx1"/>
+              </a:solidFill>
+              <a:effectLst/>
+              <a:latin typeface="Arial" panose="020B0604020202020204" pitchFamily="34" charset="0"/>
+            </a:endParaRPr>
+          </a:p>
+        </p:txBody>
+      </p:sp>
+    </p:spTree>
+    <p:extLst>
+      <p:ext uri="{BB962C8B-B14F-4D97-AF65-F5344CB8AC3E}">
+        <p14:creationId xmlns:p14="http://schemas.microsoft.com/office/powerpoint/2010/main" val="3029626834"/>
+      </p:ext>
+    </p:extLst>
+  </p:cSld>
+  <p:clrMapOvr>
+    <a:masterClrMapping/>
+  </p:clrMapOvr>
+</p:sld>
+</file>
+
+<file path=ppt/slides/slide23.xml><?xml version="1.0" encoding="utf-8"?>
+<p:sld xmlns:a="http://schemas.openxmlformats.org/drawingml/2006/main" xmlns:r="http://schemas.openxmlformats.org/officeDocument/2006/relationships" xmlns:p="http://schemas.openxmlformats.org/presentationml/2006/main">
+  <p:cSld>
+    <p:spTree>
+      <p:nvGrpSpPr>
+        <p:cNvPr id="1" name=""/>
+        <p:cNvGrpSpPr/>
+        <p:nvPr/>
+      </p:nvGrpSpPr>
+      <p:grpSpPr>
+        <a:xfrm>
+          <a:off x="0" y="0"/>
+          <a:ext cx="0" cy="0"/>
+          <a:chOff x="0" y="0"/>
+          <a:chExt cx="0" cy="0"/>
+        </a:xfrm>
+      </p:grpSpPr>
+      <p:sp>
+        <p:nvSpPr>
+          <p:cNvPr id="2" name="Título 1">
+            <a:extLst>
+              <a:ext uri="{FF2B5EF4-FFF2-40B4-BE49-F238E27FC236}">
+                <a16:creationId xmlns:a16="http://schemas.microsoft.com/office/drawing/2014/main" id="{6C5ADC3F-6AE2-4D9C-BBFD-1EE96BE2FBDE}"/>
+              </a:ext>
+            </a:extLst>
+          </p:cNvPr>
+          <p:cNvSpPr>
+            <a:spLocks noGrp="1"/>
+          </p:cNvSpPr>
+          <p:nvPr>
+            <p:ph type="title"/>
+          </p:nvPr>
+        </p:nvSpPr>
+        <p:spPr>
+          <a:xfrm>
+            <a:off x="0" y="307776"/>
+            <a:ext cx="12191999" cy="955329"/>
+          </a:xfrm>
+        </p:spPr>
+        <p:txBody>
+          <a:bodyPr>
+            <a:noAutofit/>
+          </a:bodyPr>
+          <a:lstStyle/>
+          <a:p>
+            <a:pPr algn="ctr"/>
+            <a:r>
+              <a:rPr lang="es-ES" sz="5000" b="1" dirty="0">
+                <a:solidFill>
+                  <a:srgbClr val="FF0000"/>
+                </a:solidFill>
+              </a:rPr>
+              <a:t>Test de la Calculadora &lt;-&gt; En terminal de Python</a:t>
+            </a:r>
+            <a:endParaRPr lang="es-CO" sz="5000" b="1" dirty="0">
+              <a:solidFill>
+                <a:srgbClr val="FF0000"/>
+              </a:solidFill>
+            </a:endParaRPr>
+          </a:p>
+        </p:txBody>
+      </p:sp>
+      <p:sp>
+        <p:nvSpPr>
+          <p:cNvPr id="5" name="CuadroTexto 4">
+            <a:extLst>
+              <a:ext uri="{FF2B5EF4-FFF2-40B4-BE49-F238E27FC236}">
+                <a16:creationId xmlns:a16="http://schemas.microsoft.com/office/drawing/2014/main" id="{7317FC17-54B1-410E-A380-9630EE671ABD}"/>
+              </a:ext>
+            </a:extLst>
+          </p:cNvPr>
+          <p:cNvSpPr txBox="1"/>
+          <p:nvPr/>
+        </p:nvSpPr>
+        <p:spPr>
+          <a:xfrm>
+            <a:off x="823292" y="1435383"/>
+            <a:ext cx="4161180" cy="5324535"/>
+          </a:xfrm>
+          <a:prstGeom prst="rect">
+            <a:avLst/>
+          </a:prstGeom>
+          <a:noFill/>
+        </p:spPr>
+        <p:txBody>
+          <a:bodyPr wrap="square">
+            <a:spAutoFit/>
+          </a:bodyPr>
+          <a:lstStyle/>
+          <a:p>
+            <a:r>
+              <a:rPr lang="es-CO" sz="2000" dirty="0" err="1"/>
+              <a:t>from</a:t>
+            </a:r>
+            <a:r>
+              <a:rPr lang="es-CO" sz="2000" dirty="0"/>
+              <a:t> calculadora </a:t>
+            </a:r>
+            <a:r>
+              <a:rPr lang="es-CO" sz="2000" dirty="0" err="1"/>
+              <a:t>import</a:t>
+            </a:r>
+            <a:r>
+              <a:rPr lang="es-CO" sz="2000" dirty="0"/>
+              <a:t> Calculadora</a:t>
+            </a:r>
+          </a:p>
+          <a:p>
+            <a:br>
+              <a:rPr lang="es-CO" sz="2000" dirty="0"/>
+            </a:br>
+            <a:r>
+              <a:rPr lang="es-CO" sz="2000" dirty="0"/>
+              <a:t># Creamos una calculadora</a:t>
+            </a:r>
+          </a:p>
+          <a:p>
+            <a:r>
+              <a:rPr lang="es-CO" sz="2000" dirty="0"/>
+              <a:t>c = Calculadora()</a:t>
+            </a:r>
+          </a:p>
+          <a:p>
+            <a:endParaRPr lang="es-CO" sz="2000" dirty="0"/>
+          </a:p>
+          <a:p>
+            <a:r>
+              <a:rPr lang="es-CO" sz="2000" dirty="0" err="1">
+                <a:solidFill>
+                  <a:srgbClr val="FF0000"/>
+                </a:solidFill>
+              </a:rPr>
+              <a:t>print</a:t>
+            </a:r>
+            <a:r>
+              <a:rPr lang="es-CO" sz="2000" dirty="0">
+                <a:solidFill>
+                  <a:srgbClr val="FF0000"/>
+                </a:solidFill>
+              </a:rPr>
+              <a:t>("=== TEST 1: -34 + √4 ===")</a:t>
+            </a:r>
+          </a:p>
+          <a:p>
+            <a:r>
+              <a:rPr lang="es-CO" sz="2000" dirty="0" err="1"/>
+              <a:t>c.introducir_digito</a:t>
+            </a:r>
+            <a:r>
+              <a:rPr lang="es-CO" sz="2000" dirty="0"/>
+              <a:t>("-")</a:t>
+            </a:r>
+          </a:p>
+          <a:p>
+            <a:r>
+              <a:rPr lang="es-CO" sz="2000" dirty="0" err="1"/>
+              <a:t>c.introducir_digito</a:t>
+            </a:r>
+            <a:r>
+              <a:rPr lang="es-CO" sz="2000" dirty="0"/>
+              <a:t>("3")</a:t>
+            </a:r>
+          </a:p>
+          <a:p>
+            <a:r>
+              <a:rPr lang="es-CO" sz="2000" dirty="0" err="1"/>
+              <a:t>c.introducir_digito</a:t>
+            </a:r>
+            <a:r>
+              <a:rPr lang="es-CO" sz="2000" dirty="0"/>
+              <a:t>("4")</a:t>
+            </a:r>
+          </a:p>
+          <a:p>
+            <a:r>
+              <a:rPr lang="es-CO" sz="2000" dirty="0" err="1"/>
+              <a:t>print</a:t>
+            </a:r>
+            <a:r>
+              <a:rPr lang="es-CO" sz="2000" dirty="0"/>
+              <a:t>("Pantalla:", </a:t>
+            </a:r>
+            <a:r>
+              <a:rPr lang="es-CO" sz="2000" dirty="0" err="1"/>
+              <a:t>c.mostrar</a:t>
+            </a:r>
+            <a:r>
+              <a:rPr lang="es-CO" sz="2000" dirty="0"/>
+              <a:t>())   # -34</a:t>
+            </a:r>
+          </a:p>
+          <a:p>
+            <a:endParaRPr lang="es-CO" sz="2000" dirty="0"/>
+          </a:p>
+          <a:p>
+            <a:r>
+              <a:rPr lang="es-CO" sz="2000" dirty="0" err="1"/>
+              <a:t>c.introducir_operador</a:t>
+            </a:r>
+            <a:r>
+              <a:rPr lang="es-CO" sz="2000" dirty="0"/>
+              <a:t>("+")</a:t>
+            </a:r>
+          </a:p>
+          <a:p>
+            <a:r>
+              <a:rPr lang="es-CO" sz="2000" dirty="0" err="1"/>
+              <a:t>print</a:t>
+            </a:r>
+            <a:r>
+              <a:rPr lang="es-CO" sz="2000" dirty="0"/>
+              <a:t>("Pantalla:", </a:t>
+            </a:r>
+            <a:r>
+              <a:rPr lang="es-CO" sz="2000" dirty="0" err="1"/>
+              <a:t>c.mostrar</a:t>
+            </a:r>
+            <a:r>
+              <a:rPr lang="es-CO" sz="2000" dirty="0"/>
+              <a:t>())   # -34</a:t>
+            </a:r>
+          </a:p>
+          <a:p>
+            <a:endParaRPr lang="es-CO" sz="2000" dirty="0"/>
+          </a:p>
+          <a:p>
+            <a:r>
+              <a:rPr lang="es-CO" sz="2000" dirty="0" err="1"/>
+              <a:t>c.introducir_operador</a:t>
+            </a:r>
+            <a:r>
+              <a:rPr lang="es-CO" sz="2000" dirty="0"/>
+              <a:t>("√")</a:t>
+            </a:r>
+          </a:p>
+          <a:p>
+            <a:r>
+              <a:rPr lang="es-CO" sz="2000" dirty="0" err="1"/>
+              <a:t>c.introducir_digito</a:t>
+            </a:r>
+            <a:r>
+              <a:rPr lang="es-CO" sz="2000" dirty="0"/>
+              <a:t>("4")</a:t>
+            </a:r>
+          </a:p>
+          <a:p>
+            <a:r>
+              <a:rPr lang="es-CO" sz="2000" dirty="0" err="1"/>
+              <a:t>print</a:t>
+            </a:r>
+            <a:r>
+              <a:rPr lang="es-CO" sz="2000" dirty="0"/>
+              <a:t>("Pantalla:", </a:t>
+            </a:r>
+            <a:r>
+              <a:rPr lang="es-CO" sz="2000" dirty="0" err="1"/>
+              <a:t>c.mostrar</a:t>
+            </a:r>
+            <a:r>
+              <a:rPr lang="es-CO" sz="2000" dirty="0"/>
+              <a:t>())   # 2.0</a:t>
+            </a:r>
+          </a:p>
+        </p:txBody>
+      </p:sp>
+      <p:sp>
+        <p:nvSpPr>
+          <p:cNvPr id="7" name="CuadroTexto 6">
+            <a:extLst>
+              <a:ext uri="{FF2B5EF4-FFF2-40B4-BE49-F238E27FC236}">
+                <a16:creationId xmlns:a16="http://schemas.microsoft.com/office/drawing/2014/main" id="{FC1DF215-E069-4855-AD10-0AEE50347E26}"/>
+              </a:ext>
+            </a:extLst>
+          </p:cNvPr>
+          <p:cNvSpPr txBox="1"/>
+          <p:nvPr/>
+        </p:nvSpPr>
+        <p:spPr>
+          <a:xfrm>
+            <a:off x="5595729" y="1419994"/>
+            <a:ext cx="6129130" cy="5355312"/>
+          </a:xfrm>
+          <a:prstGeom prst="rect">
+            <a:avLst/>
+          </a:prstGeom>
+          <a:noFill/>
+        </p:spPr>
+        <p:txBody>
+          <a:bodyPr wrap="square">
+            <a:spAutoFit/>
+          </a:bodyPr>
+          <a:lstStyle/>
+          <a:p>
+            <a:r>
+              <a:rPr lang="es-CO" sz="1800" dirty="0" err="1"/>
+              <a:t>c.calcular</a:t>
+            </a:r>
+            <a:r>
+              <a:rPr lang="es-CO" sz="1800" dirty="0"/>
+              <a:t>()</a:t>
+            </a:r>
+          </a:p>
+          <a:p>
+            <a:r>
+              <a:rPr lang="es-CO" sz="1800" dirty="0" err="1"/>
+              <a:t>print</a:t>
+            </a:r>
+            <a:r>
+              <a:rPr lang="es-CO" sz="1800" dirty="0"/>
+              <a:t>("Resultado final:", </a:t>
+            </a:r>
+            <a:r>
+              <a:rPr lang="es-CO" sz="1800" dirty="0" err="1"/>
+              <a:t>c.mostrar</a:t>
+            </a:r>
+            <a:r>
+              <a:rPr lang="es-CO" sz="1800" dirty="0"/>
+              <a:t>())</a:t>
+            </a:r>
+          </a:p>
+          <a:p>
+            <a:endParaRPr lang="es-CO" dirty="0"/>
+          </a:p>
+          <a:p>
+            <a:r>
+              <a:rPr lang="es-CO" dirty="0" err="1">
+                <a:solidFill>
+                  <a:srgbClr val="FF0000"/>
+                </a:solidFill>
+              </a:rPr>
+              <a:t>print</a:t>
+            </a:r>
+            <a:r>
+              <a:rPr lang="es-CO" dirty="0">
+                <a:solidFill>
+                  <a:srgbClr val="FF0000"/>
+                </a:solidFill>
+              </a:rPr>
+              <a:t>("\n=== TEST 2: 5 + 7 ===")</a:t>
+            </a:r>
+          </a:p>
+          <a:p>
+            <a:r>
+              <a:rPr lang="es-CO" dirty="0"/>
+              <a:t>c = Calculadora()</a:t>
+            </a:r>
+          </a:p>
+          <a:p>
+            <a:r>
+              <a:rPr lang="es-CO" dirty="0" err="1"/>
+              <a:t>c.introducir_digito</a:t>
+            </a:r>
+            <a:r>
+              <a:rPr lang="es-CO" dirty="0"/>
+              <a:t>("5")</a:t>
+            </a:r>
+          </a:p>
+          <a:p>
+            <a:r>
+              <a:rPr lang="es-CO" dirty="0" err="1"/>
+              <a:t>c.introducir_operador</a:t>
+            </a:r>
+            <a:r>
+              <a:rPr lang="es-CO" dirty="0"/>
+              <a:t>("+")</a:t>
+            </a:r>
+          </a:p>
+          <a:p>
+            <a:r>
+              <a:rPr lang="es-CO" dirty="0" err="1"/>
+              <a:t>c.introducir_digito</a:t>
+            </a:r>
+            <a:r>
+              <a:rPr lang="es-CO" dirty="0"/>
+              <a:t>("7")</a:t>
+            </a:r>
+          </a:p>
+          <a:p>
+            <a:r>
+              <a:rPr lang="es-CO" dirty="0" err="1"/>
+              <a:t>c.calcular</a:t>
+            </a:r>
+            <a:r>
+              <a:rPr lang="es-CO" dirty="0"/>
+              <a:t>()</a:t>
+            </a:r>
+          </a:p>
+          <a:p>
+            <a:r>
+              <a:rPr lang="es-CO" dirty="0" err="1"/>
+              <a:t>print</a:t>
+            </a:r>
+            <a:r>
+              <a:rPr lang="es-CO" dirty="0"/>
+              <a:t>("Resultado final:", </a:t>
+            </a:r>
+            <a:r>
+              <a:rPr lang="es-CO" dirty="0" err="1"/>
+              <a:t>c.mostrar</a:t>
+            </a:r>
+            <a:r>
+              <a:rPr lang="es-CO" dirty="0"/>
+              <a:t>())   # 12.0 </a:t>
+            </a:r>
+          </a:p>
+          <a:p>
+            <a:endParaRPr lang="es-CO" dirty="0"/>
+          </a:p>
+          <a:p>
+            <a:endParaRPr lang="es-CO" dirty="0"/>
+          </a:p>
+          <a:p>
+            <a:r>
+              <a:rPr lang="es-CO" dirty="0" err="1">
+                <a:solidFill>
+                  <a:srgbClr val="FF0000"/>
+                </a:solidFill>
+              </a:rPr>
+              <a:t>print</a:t>
+            </a:r>
+            <a:r>
+              <a:rPr lang="es-CO" dirty="0">
+                <a:solidFill>
+                  <a:srgbClr val="FF0000"/>
+                </a:solidFill>
+              </a:rPr>
+              <a:t>("\n=== TEST 3: 8 / 0 ===")</a:t>
+            </a:r>
+          </a:p>
+          <a:p>
+            <a:r>
+              <a:rPr lang="es-CO" dirty="0"/>
+              <a:t>c = Calculadora()</a:t>
+            </a:r>
+          </a:p>
+          <a:p>
+            <a:r>
+              <a:rPr lang="es-CO" dirty="0" err="1"/>
+              <a:t>c.introducir_digito</a:t>
+            </a:r>
+            <a:r>
+              <a:rPr lang="es-CO" dirty="0"/>
+              <a:t>("8")</a:t>
+            </a:r>
+          </a:p>
+          <a:p>
+            <a:r>
+              <a:rPr lang="es-CO" dirty="0" err="1"/>
+              <a:t>c.introducir_operador</a:t>
+            </a:r>
+            <a:r>
+              <a:rPr lang="es-CO" dirty="0"/>
+              <a:t>("/")</a:t>
+            </a:r>
+          </a:p>
+          <a:p>
+            <a:r>
+              <a:rPr lang="es-CO" dirty="0" err="1"/>
+              <a:t>c.introducir_digito</a:t>
+            </a:r>
+            <a:r>
+              <a:rPr lang="es-CO" dirty="0"/>
+              <a:t>("0")</a:t>
+            </a:r>
+          </a:p>
+          <a:p>
+            <a:r>
+              <a:rPr lang="es-CO" dirty="0" err="1"/>
+              <a:t>c.calcular</a:t>
+            </a:r>
+            <a:r>
+              <a:rPr lang="es-CO" dirty="0"/>
+              <a:t>()</a:t>
+            </a:r>
+          </a:p>
+          <a:p>
+            <a:r>
+              <a:rPr lang="es-CO" dirty="0" err="1"/>
+              <a:t>print</a:t>
+            </a:r>
+            <a:r>
+              <a:rPr lang="es-CO" dirty="0"/>
+              <a:t>("Resultado final:", </a:t>
+            </a:r>
+            <a:r>
+              <a:rPr lang="es-CO" dirty="0" err="1"/>
+              <a:t>c.mostrar</a:t>
+            </a:r>
+            <a:r>
+              <a:rPr lang="es-CO" dirty="0"/>
+              <a:t>()) </a:t>
+            </a:r>
+          </a:p>
+        </p:txBody>
+      </p:sp>
+    </p:spTree>
+    <p:extLst>
+      <p:ext uri="{BB962C8B-B14F-4D97-AF65-F5344CB8AC3E}">
+        <p14:creationId xmlns:p14="http://schemas.microsoft.com/office/powerpoint/2010/main" val="3630643063"/>
       </p:ext>
     </p:extLst>
   </p:cSld>
@@ -4835,6 +13630,1008 @@
     <p:extLst>
       <p:ext uri="{BB962C8B-B14F-4D97-AF65-F5344CB8AC3E}">
         <p14:creationId xmlns:p14="http://schemas.microsoft.com/office/powerpoint/2010/main" val="3274371876"/>
+      </p:ext>
+    </p:extLst>
+  </p:cSld>
+  <p:clrMapOvr>
+    <a:masterClrMapping/>
+  </p:clrMapOvr>
+</p:sld>
+</file>
+
+<file path=ppt/slides/slide8.xml><?xml version="1.0" encoding="utf-8"?>
+<p:sld xmlns:a="http://schemas.openxmlformats.org/drawingml/2006/main" xmlns:r="http://schemas.openxmlformats.org/officeDocument/2006/relationships" xmlns:p="http://schemas.openxmlformats.org/presentationml/2006/main">
+  <p:cSld>
+    <p:spTree>
+      <p:nvGrpSpPr>
+        <p:cNvPr id="1" name=""/>
+        <p:cNvGrpSpPr/>
+        <p:nvPr/>
+      </p:nvGrpSpPr>
+      <p:grpSpPr>
+        <a:xfrm>
+          <a:off x="0" y="0"/>
+          <a:ext cx="0" cy="0"/>
+          <a:chOff x="0" y="0"/>
+          <a:chExt cx="0" cy="0"/>
+        </a:xfrm>
+      </p:grpSpPr>
+      <p:pic>
+        <p:nvPicPr>
+          <p:cNvPr id="5" name="Imagen 4">
+            <a:extLst>
+              <a:ext uri="{FF2B5EF4-FFF2-40B4-BE49-F238E27FC236}">
+                <a16:creationId xmlns:a16="http://schemas.microsoft.com/office/drawing/2014/main" id="{E5583896-727C-4F8A-8A00-A4AFD26DBF29}"/>
+              </a:ext>
+            </a:extLst>
+          </p:cNvPr>
+          <p:cNvPicPr>
+            <a:picLocks noChangeAspect="1"/>
+          </p:cNvPicPr>
+          <p:nvPr/>
+        </p:nvPicPr>
+        <p:blipFill rotWithShape="1">
+          <a:blip r:embed="rId2"/>
+          <a:srcRect l="4783" t="29168" r="71086" b="8385"/>
+          <a:stretch/>
+        </p:blipFill>
+        <p:spPr>
+          <a:xfrm>
+            <a:off x="155719" y="799549"/>
+            <a:ext cx="3922642" cy="5707268"/>
+          </a:xfrm>
+          <a:prstGeom prst="rect">
+            <a:avLst/>
+          </a:prstGeom>
+        </p:spPr>
+      </p:pic>
+      <p:sp>
+        <p:nvSpPr>
+          <p:cNvPr id="6" name="Rectangle 1">
+            <a:extLst>
+              <a:ext uri="{FF2B5EF4-FFF2-40B4-BE49-F238E27FC236}">
+                <a16:creationId xmlns:a16="http://schemas.microsoft.com/office/drawing/2014/main" id="{F79812E5-B3A3-4AF7-928B-70ED320DE7C5}"/>
+              </a:ext>
+            </a:extLst>
+          </p:cNvPr>
+          <p:cNvSpPr>
+            <a:spLocks noChangeArrowheads="1"/>
+          </p:cNvSpPr>
+          <p:nvPr/>
+        </p:nvSpPr>
+        <p:spPr bwMode="auto">
+          <a:xfrm>
+            <a:off x="0" y="-6506"/>
+            <a:ext cx="4356649" cy="523220"/>
+          </a:xfrm>
+          <a:prstGeom prst="rect">
+            <a:avLst/>
+          </a:prstGeom>
+          <a:solidFill>
+            <a:srgbClr val="DCF0EF"/>
+          </a:solidFill>
+          <a:ln>
+            <a:noFill/>
+          </a:ln>
+          <a:effectLst/>
+          <a:extLst>
+            <a:ext uri="{91240B29-F687-4F45-9708-019B960494DF}">
+              <a14:hiddenLine xmlns:a14="http://schemas.microsoft.com/office/drawing/2010/main" w="9525">
+                <a:solidFill>
+                  <a:schemeClr val="tx1"/>
+                </a:solidFill>
+                <a:miter lim="800000"/>
+                <a:headEnd/>
+                <a:tailEnd/>
+              </a14:hiddenLine>
+            </a:ext>
+            <a:ext uri="{AF507438-7753-43E0-B8FC-AC1667EBCBE1}">
+              <a14:hiddenEffects xmlns:a14="http://schemas.microsoft.com/office/drawing/2010/main">
+                <a:effectLst>
+                  <a:outerShdw dist="35921" dir="2700000" algn="ctr" rotWithShape="0">
+                    <a:schemeClr val="bg2"/>
+                  </a:outerShdw>
+                </a:effectLst>
+              </a14:hiddenEffects>
+            </a:ext>
+          </a:extLst>
+        </p:spPr>
+        <p:txBody>
+          <a:bodyPr vert="horz" wrap="square" lIns="91440" tIns="45720" rIns="91440" bIns="45720" numCol="1" anchor="ctr" anchorCtr="0" compatLnSpc="1">
+            <a:prstTxWarp prst="textNoShape">
+              <a:avLst/>
+            </a:prstTxWarp>
+            <a:spAutoFit/>
+          </a:bodyPr>
+          <a:lstStyle>
+            <a:lvl1pPr eaLnBrk="0" fontAlgn="base" hangingPunct="0">
+              <a:spcBef>
+                <a:spcPct val="0"/>
+              </a:spcBef>
+              <a:spcAft>
+                <a:spcPct val="0"/>
+              </a:spcAft>
+              <a:defRPr>
+                <a:solidFill>
+                  <a:schemeClr val="tx1"/>
+                </a:solidFill>
+                <a:latin typeface="Arial" panose="020B0604020202020204" pitchFamily="34" charset="0"/>
+              </a:defRPr>
+            </a:lvl1pPr>
+            <a:lvl2pPr eaLnBrk="0" fontAlgn="base" hangingPunct="0">
+              <a:spcBef>
+                <a:spcPct val="0"/>
+              </a:spcBef>
+              <a:spcAft>
+                <a:spcPct val="0"/>
+              </a:spcAft>
+              <a:defRPr>
+                <a:solidFill>
+                  <a:schemeClr val="tx1"/>
+                </a:solidFill>
+                <a:latin typeface="Arial" panose="020B0604020202020204" pitchFamily="34" charset="0"/>
+              </a:defRPr>
+            </a:lvl2pPr>
+            <a:lvl3pPr eaLnBrk="0" fontAlgn="base" hangingPunct="0">
+              <a:spcBef>
+                <a:spcPct val="0"/>
+              </a:spcBef>
+              <a:spcAft>
+                <a:spcPct val="0"/>
+              </a:spcAft>
+              <a:defRPr>
+                <a:solidFill>
+                  <a:schemeClr val="tx1"/>
+                </a:solidFill>
+                <a:latin typeface="Arial" panose="020B0604020202020204" pitchFamily="34" charset="0"/>
+              </a:defRPr>
+            </a:lvl3pPr>
+            <a:lvl4pPr eaLnBrk="0" fontAlgn="base" hangingPunct="0">
+              <a:spcBef>
+                <a:spcPct val="0"/>
+              </a:spcBef>
+              <a:spcAft>
+                <a:spcPct val="0"/>
+              </a:spcAft>
+              <a:defRPr>
+                <a:solidFill>
+                  <a:schemeClr val="tx1"/>
+                </a:solidFill>
+                <a:latin typeface="Arial" panose="020B0604020202020204" pitchFamily="34" charset="0"/>
+              </a:defRPr>
+            </a:lvl4pPr>
+            <a:lvl5pPr eaLnBrk="0" fontAlgn="base" hangingPunct="0">
+              <a:spcBef>
+                <a:spcPct val="0"/>
+              </a:spcBef>
+              <a:spcAft>
+                <a:spcPct val="0"/>
+              </a:spcAft>
+              <a:defRPr>
+                <a:solidFill>
+                  <a:schemeClr val="tx1"/>
+                </a:solidFill>
+                <a:latin typeface="Arial" panose="020B0604020202020204" pitchFamily="34" charset="0"/>
+              </a:defRPr>
+            </a:lvl5pPr>
+            <a:lvl6pPr eaLnBrk="0" fontAlgn="base" hangingPunct="0">
+              <a:spcBef>
+                <a:spcPct val="0"/>
+              </a:spcBef>
+              <a:spcAft>
+                <a:spcPct val="0"/>
+              </a:spcAft>
+              <a:defRPr>
+                <a:solidFill>
+                  <a:schemeClr val="tx1"/>
+                </a:solidFill>
+                <a:latin typeface="Arial" panose="020B0604020202020204" pitchFamily="34" charset="0"/>
+              </a:defRPr>
+            </a:lvl6pPr>
+            <a:lvl7pPr eaLnBrk="0" fontAlgn="base" hangingPunct="0">
+              <a:spcBef>
+                <a:spcPct val="0"/>
+              </a:spcBef>
+              <a:spcAft>
+                <a:spcPct val="0"/>
+              </a:spcAft>
+              <a:defRPr>
+                <a:solidFill>
+                  <a:schemeClr val="tx1"/>
+                </a:solidFill>
+                <a:latin typeface="Arial" panose="020B0604020202020204" pitchFamily="34" charset="0"/>
+              </a:defRPr>
+            </a:lvl7pPr>
+            <a:lvl8pPr eaLnBrk="0" fontAlgn="base" hangingPunct="0">
+              <a:spcBef>
+                <a:spcPct val="0"/>
+              </a:spcBef>
+              <a:spcAft>
+                <a:spcPct val="0"/>
+              </a:spcAft>
+              <a:defRPr>
+                <a:solidFill>
+                  <a:schemeClr val="tx1"/>
+                </a:solidFill>
+                <a:latin typeface="Arial" panose="020B0604020202020204" pitchFamily="34" charset="0"/>
+              </a:defRPr>
+            </a:lvl8pPr>
+            <a:lvl9pPr eaLnBrk="0" fontAlgn="base" hangingPunct="0">
+              <a:spcBef>
+                <a:spcPct val="0"/>
+              </a:spcBef>
+              <a:spcAft>
+                <a:spcPct val="0"/>
+              </a:spcAft>
+              <a:defRPr>
+                <a:solidFill>
+                  <a:schemeClr val="tx1"/>
+                </a:solidFill>
+                <a:latin typeface="Arial" panose="020B0604020202020204" pitchFamily="34" charset="0"/>
+              </a:defRPr>
+            </a:lvl9pPr>
+          </a:lstStyle>
+          <a:p>
+            <a:pPr marL="0" marR="0" lvl="0" indent="0" algn="l" defTabSz="914400" rtl="0" eaLnBrk="0" fontAlgn="base" latinLnBrk="0" hangingPunct="0">
+              <a:lnSpc>
+                <a:spcPct val="100000"/>
+              </a:lnSpc>
+              <a:spcBef>
+                <a:spcPct val="0"/>
+              </a:spcBef>
+              <a:spcAft>
+                <a:spcPct val="0"/>
+              </a:spcAft>
+              <a:buClrTx/>
+              <a:buSzTx/>
+              <a:buFontTx/>
+              <a:buNone/>
+              <a:tabLst/>
+            </a:pPr>
+            <a:r>
+              <a:rPr kumimoji="0" lang="es-CO" altLang="es-CO" sz="2800" b="1" i="0" u="none" strike="noStrike" cap="none" normalizeH="0" baseline="0" dirty="0">
+                <a:ln>
+                  <a:noFill/>
+                </a:ln>
+                <a:solidFill>
+                  <a:srgbClr val="333333"/>
+                </a:solidFill>
+                <a:effectLst/>
+                <a:cs typeface="Arial" panose="020B0604020202020204" pitchFamily="34" charset="0"/>
+              </a:rPr>
+              <a:t>calculadora</a:t>
+            </a:r>
+            <a:r>
+              <a:rPr kumimoji="0" lang="es-CO" altLang="es-CO" sz="2800" b="1" i="0" u="none" strike="noStrike" cap="none" normalizeH="0" baseline="0" dirty="0">
+                <a:ln>
+                  <a:noFill/>
+                </a:ln>
+                <a:solidFill>
+                  <a:srgbClr val="333333"/>
+                </a:solidFill>
+                <a:effectLst/>
+                <a:latin typeface="Arial Unicode MS"/>
+              </a:rPr>
+              <a:t>_modelo.py</a:t>
+            </a:r>
+            <a:r>
+              <a:rPr kumimoji="0" lang="es-CO" altLang="es-CO" sz="2800" b="1" i="0" u="none" strike="noStrike" cap="none" normalizeH="0" baseline="0" dirty="0">
+                <a:ln>
+                  <a:noFill/>
+                </a:ln>
+                <a:solidFill>
+                  <a:srgbClr val="2C2C2C"/>
+                </a:solidFill>
+                <a:effectLst/>
+                <a:latin typeface="opensans-regular"/>
+              </a:rPr>
+              <a:t>.</a:t>
+            </a:r>
+            <a:r>
+              <a:rPr kumimoji="0" lang="es-CO" altLang="es-CO" sz="2800" b="1" i="0" u="none" strike="noStrike" cap="none" normalizeH="0" baseline="0" dirty="0">
+                <a:ln>
+                  <a:noFill/>
+                </a:ln>
+                <a:solidFill>
+                  <a:schemeClr val="tx1"/>
+                </a:solidFill>
+                <a:effectLst/>
+              </a:rPr>
+              <a:t> </a:t>
+            </a:r>
+          </a:p>
+        </p:txBody>
+      </p:sp>
+      <p:sp>
+        <p:nvSpPr>
+          <p:cNvPr id="7" name="Rectangle 2">
+            <a:extLst>
+              <a:ext uri="{FF2B5EF4-FFF2-40B4-BE49-F238E27FC236}">
+                <a16:creationId xmlns:a16="http://schemas.microsoft.com/office/drawing/2014/main" id="{A2477304-DDDA-42F1-B177-BEE60385A5AA}"/>
+              </a:ext>
+            </a:extLst>
+          </p:cNvPr>
+          <p:cNvSpPr>
+            <a:spLocks noChangeArrowheads="1"/>
+          </p:cNvSpPr>
+          <p:nvPr/>
+        </p:nvSpPr>
+        <p:spPr bwMode="auto">
+          <a:xfrm>
+            <a:off x="4356649" y="63552"/>
+            <a:ext cx="7513983" cy="6863417"/>
+          </a:xfrm>
+          <a:prstGeom prst="rect">
+            <a:avLst/>
+          </a:prstGeom>
+          <a:noFill/>
+          <a:ln>
+            <a:noFill/>
+          </a:ln>
+          <a:effectLst/>
+          <a:extLst>
+            <a:ext uri="{909E8E84-426E-40DD-AFC4-6F175D3DCCD1}">
+              <a14:hiddenFill xmlns:a14="http://schemas.microsoft.com/office/drawing/2010/main">
+                <a:solidFill>
+                  <a:schemeClr val="accent1"/>
+                </a:solidFill>
+              </a14:hiddenFill>
+            </a:ext>
+            <a:ext uri="{91240B29-F687-4F45-9708-019B960494DF}">
+              <a14:hiddenLine xmlns:a14="http://schemas.microsoft.com/office/drawing/2010/main" w="9525">
+                <a:solidFill>
+                  <a:schemeClr val="tx1"/>
+                </a:solidFill>
+                <a:miter lim="800000"/>
+                <a:headEnd/>
+                <a:tailEnd/>
+              </a14:hiddenLine>
+            </a:ext>
+            <a:ext uri="{AF507438-7753-43E0-B8FC-AC1667EBCBE1}">
+              <a14:hiddenEffects xmlns:a14="http://schemas.microsoft.com/office/drawing/2010/main">
+                <a:effectLst>
+                  <a:outerShdw dist="35921" dir="2700000" algn="ctr" rotWithShape="0">
+                    <a:schemeClr val="bg2"/>
+                  </a:outerShdw>
+                </a:effectLst>
+              </a14:hiddenEffects>
+            </a:ext>
+          </a:extLst>
+        </p:spPr>
+        <p:txBody>
+          <a:bodyPr vert="horz" wrap="square" lIns="91440" tIns="45720" rIns="91440" bIns="45720" numCol="1" anchor="ctr" anchorCtr="0" compatLnSpc="1">
+            <a:prstTxWarp prst="textNoShape">
+              <a:avLst/>
+            </a:prstTxWarp>
+            <a:spAutoFit/>
+          </a:bodyPr>
+          <a:lstStyle/>
+          <a:p>
+            <a:r>
+              <a:rPr lang="es-ES" sz="2000" b="1" dirty="0">
+                <a:latin typeface="Arial" panose="020B0604020202020204" pitchFamily="34" charset="0"/>
+                <a:cs typeface="Arial" panose="020B0604020202020204" pitchFamily="34" charset="0"/>
+              </a:rPr>
+              <a:t>Clase abstracta de la calculadora</a:t>
+            </a:r>
+          </a:p>
+          <a:p>
+            <a:r>
+              <a:rPr lang="es-ES" sz="2000" dirty="0">
+                <a:latin typeface="Arial" panose="020B0604020202020204" pitchFamily="34" charset="0"/>
+                <a:cs typeface="Arial" panose="020B0604020202020204" pitchFamily="34" charset="0"/>
+              </a:rPr>
+              <a:t>Se define una </a:t>
+            </a:r>
+            <a:r>
+              <a:rPr lang="es-ES" sz="2000" b="1" dirty="0">
+                <a:latin typeface="Arial" panose="020B0604020202020204" pitchFamily="34" charset="0"/>
+                <a:cs typeface="Arial" panose="020B0604020202020204" pitchFamily="34" charset="0"/>
+              </a:rPr>
+              <a:t>clase abstracta</a:t>
+            </a:r>
+            <a:r>
+              <a:rPr lang="es-ES" sz="2000" dirty="0">
+                <a:latin typeface="Arial" panose="020B0604020202020204" pitchFamily="34" charset="0"/>
+                <a:cs typeface="Arial" panose="020B0604020202020204" pitchFamily="34" charset="0"/>
+              </a:rPr>
+              <a:t> que establece el </a:t>
+            </a:r>
+            <a:r>
+              <a:rPr lang="es-ES" sz="2000" b="1" dirty="0">
+                <a:latin typeface="Arial" panose="020B0604020202020204" pitchFamily="34" charset="0"/>
+                <a:cs typeface="Arial" panose="020B0604020202020204" pitchFamily="34" charset="0"/>
+              </a:rPr>
+              <a:t>contrato</a:t>
+            </a:r>
+            <a:r>
+              <a:rPr lang="es-ES" sz="2000" dirty="0">
+                <a:latin typeface="Arial" panose="020B0604020202020204" pitchFamily="34" charset="0"/>
+                <a:cs typeface="Arial" panose="020B0604020202020204" pitchFamily="34" charset="0"/>
+              </a:rPr>
+              <a:t> de qué operaciones deben implementarse (binarias y unarias).</a:t>
+            </a:r>
+          </a:p>
+          <a:p>
+            <a:pPr>
+              <a:buFont typeface="Arial" panose="020B0604020202020204" pitchFamily="34" charset="0"/>
+              <a:buChar char="•"/>
+            </a:pPr>
+            <a:endParaRPr lang="es-ES" sz="2000" dirty="0">
+              <a:latin typeface="Arial" panose="020B0604020202020204" pitchFamily="34" charset="0"/>
+              <a:cs typeface="Arial" panose="020B0604020202020204" pitchFamily="34" charset="0"/>
+            </a:endParaRPr>
+          </a:p>
+          <a:p>
+            <a:r>
+              <a:rPr lang="es-ES" sz="2000" dirty="0">
+                <a:latin typeface="Arial" panose="020B0604020202020204" pitchFamily="34" charset="0"/>
+                <a:cs typeface="Arial" panose="020B0604020202020204" pitchFamily="34" charset="0"/>
+              </a:rPr>
+              <a:t>Las subclases concretas se encargan de usar los diccionarios de operadores para ejecutar la lógica matemática.</a:t>
+            </a:r>
+          </a:p>
+          <a:p>
+            <a:br>
+              <a:rPr lang="es-ES" sz="2000" dirty="0">
+                <a:latin typeface="Arial" panose="020B0604020202020204" pitchFamily="34" charset="0"/>
+                <a:cs typeface="Arial" panose="020B0604020202020204" pitchFamily="34" charset="0"/>
+              </a:rPr>
+            </a:br>
+            <a:r>
+              <a:rPr lang="es-ES" sz="2000" dirty="0">
+                <a:latin typeface="Arial" panose="020B0604020202020204" pitchFamily="34" charset="0"/>
+                <a:cs typeface="Arial" panose="020B0604020202020204" pitchFamily="34" charset="0"/>
+              </a:rPr>
+              <a:t>Esto garantiza un diseño </a:t>
+            </a:r>
+            <a:r>
+              <a:rPr lang="es-ES" sz="2000" b="1" dirty="0">
+                <a:latin typeface="Arial" panose="020B0604020202020204" pitchFamily="34" charset="0"/>
+                <a:cs typeface="Arial" panose="020B0604020202020204" pitchFamily="34" charset="0"/>
+              </a:rPr>
+              <a:t>modular, extensible y mantenible</a:t>
+            </a:r>
+            <a:r>
+              <a:rPr lang="es-ES" sz="2000" dirty="0">
+                <a:latin typeface="Arial" panose="020B0604020202020204" pitchFamily="34" charset="0"/>
+                <a:cs typeface="Arial" panose="020B0604020202020204" pitchFamily="34" charset="0"/>
+              </a:rPr>
+              <a:t>.</a:t>
+            </a:r>
+          </a:p>
+          <a:p>
+            <a:pPr marL="0" marR="0" lvl="0" indent="0" algn="l" defTabSz="914400" rtl="0" eaLnBrk="0" fontAlgn="base" latinLnBrk="0" hangingPunct="0">
+              <a:lnSpc>
+                <a:spcPct val="100000"/>
+              </a:lnSpc>
+              <a:spcBef>
+                <a:spcPct val="0"/>
+              </a:spcBef>
+              <a:spcAft>
+                <a:spcPct val="0"/>
+              </a:spcAft>
+              <a:buClrTx/>
+              <a:buSzTx/>
+              <a:buFontTx/>
+              <a:buNone/>
+              <a:tabLst/>
+            </a:pPr>
+            <a:endParaRPr kumimoji="0" lang="es-CO" altLang="es-CO" sz="2000" b="1" i="0" u="none" strike="noStrike" cap="none" normalizeH="0" baseline="0" dirty="0">
+              <a:ln>
+                <a:noFill/>
+              </a:ln>
+              <a:solidFill>
+                <a:schemeClr val="tx1"/>
+              </a:solidFill>
+              <a:effectLst/>
+              <a:latin typeface="Arial" panose="020B0604020202020204" pitchFamily="34" charset="0"/>
+              <a:cs typeface="Arial" panose="020B0604020202020204" pitchFamily="34" charset="0"/>
+            </a:endParaRPr>
+          </a:p>
+          <a:p>
+            <a:pPr marL="0" marR="0" lvl="0" indent="0" algn="l" defTabSz="914400" rtl="0" eaLnBrk="0" fontAlgn="base" latinLnBrk="0" hangingPunct="0">
+              <a:lnSpc>
+                <a:spcPct val="100000"/>
+              </a:lnSpc>
+              <a:spcBef>
+                <a:spcPct val="0"/>
+              </a:spcBef>
+              <a:spcAft>
+                <a:spcPct val="0"/>
+              </a:spcAft>
+              <a:buClrTx/>
+              <a:buSzTx/>
+              <a:buFontTx/>
+              <a:buNone/>
+              <a:tabLst/>
+            </a:pPr>
+            <a:r>
+              <a:rPr kumimoji="0" lang="es-CO" altLang="es-CO" sz="2000" b="1" i="0" u="none" strike="noStrike" cap="none" normalizeH="0" baseline="0" dirty="0">
+                <a:ln>
+                  <a:noFill/>
+                </a:ln>
+                <a:solidFill>
+                  <a:schemeClr val="tx1"/>
+                </a:solidFill>
+                <a:effectLst/>
+                <a:latin typeface="Arial" panose="020B0604020202020204" pitchFamily="34" charset="0"/>
+                <a:cs typeface="Arial" panose="020B0604020202020204" pitchFamily="34" charset="0"/>
+              </a:rPr>
+              <a:t>Definición de operaciones matemáticas en la calculadora</a:t>
+            </a:r>
+          </a:p>
+          <a:p>
+            <a:pPr marL="0" marR="0" lvl="0" indent="0" algn="l" defTabSz="914400" rtl="0" eaLnBrk="0" fontAlgn="base" latinLnBrk="0" hangingPunct="0">
+              <a:lnSpc>
+                <a:spcPct val="100000"/>
+              </a:lnSpc>
+              <a:spcBef>
+                <a:spcPct val="0"/>
+              </a:spcBef>
+              <a:spcAft>
+                <a:spcPct val="0"/>
+              </a:spcAft>
+              <a:buClrTx/>
+              <a:buSzTx/>
+              <a:tabLst/>
+            </a:pPr>
+            <a:r>
+              <a:rPr kumimoji="0" lang="es-CO" altLang="es-CO" sz="2000" b="0" i="0" u="none" strike="noStrike" cap="none" normalizeH="0" baseline="0" dirty="0">
+                <a:ln>
+                  <a:noFill/>
+                </a:ln>
+                <a:solidFill>
+                  <a:schemeClr val="tx1"/>
+                </a:solidFill>
+                <a:effectLst/>
+                <a:latin typeface="Arial" panose="020B0604020202020204" pitchFamily="34" charset="0"/>
+                <a:cs typeface="Arial" panose="020B0604020202020204" pitchFamily="34" charset="0"/>
+              </a:rPr>
+              <a:t>Antes de crear las clases de la calculadora, definimos las </a:t>
+            </a:r>
+            <a:r>
+              <a:rPr kumimoji="0" lang="es-CO" altLang="es-CO" sz="2000" b="1" i="0" u="none" strike="noStrike" cap="none" normalizeH="0" baseline="0" dirty="0">
+                <a:ln>
+                  <a:noFill/>
+                </a:ln>
+                <a:solidFill>
+                  <a:schemeClr val="tx1"/>
+                </a:solidFill>
+                <a:effectLst/>
+                <a:latin typeface="Arial" panose="020B0604020202020204" pitchFamily="34" charset="0"/>
+                <a:cs typeface="Arial" panose="020B0604020202020204" pitchFamily="34" charset="0"/>
+              </a:rPr>
+              <a:t>funciones matemáticas básicas</a:t>
+            </a:r>
+            <a:r>
+              <a:rPr kumimoji="0" lang="es-CO" altLang="es-CO" sz="2000" b="0" i="0" u="none" strike="noStrike" cap="none" normalizeH="0" baseline="0" dirty="0">
+                <a:ln>
+                  <a:noFill/>
+                </a:ln>
+                <a:solidFill>
+                  <a:schemeClr val="tx1"/>
+                </a:solidFill>
+                <a:effectLst/>
+                <a:latin typeface="Arial" panose="020B0604020202020204" pitchFamily="34" charset="0"/>
+                <a:cs typeface="Arial" panose="020B0604020202020204" pitchFamily="34" charset="0"/>
+              </a:rPr>
+              <a:t> (suma, resta, multiplicación, división y raíz cuadrada).</a:t>
+            </a:r>
+          </a:p>
+          <a:p>
+            <a:pPr marL="0" marR="0" lvl="0" indent="0" algn="l" defTabSz="914400" rtl="0" eaLnBrk="0" fontAlgn="base" latinLnBrk="0" hangingPunct="0">
+              <a:lnSpc>
+                <a:spcPct val="100000"/>
+              </a:lnSpc>
+              <a:spcBef>
+                <a:spcPct val="0"/>
+              </a:spcBef>
+              <a:spcAft>
+                <a:spcPct val="0"/>
+              </a:spcAft>
+              <a:buClrTx/>
+              <a:buSzTx/>
+              <a:tabLst/>
+            </a:pPr>
+            <a:r>
+              <a:rPr kumimoji="0" lang="es-CO" altLang="es-CO" sz="2000" b="0" i="0" u="none" strike="noStrike" cap="none" normalizeH="0" baseline="0" dirty="0">
+                <a:ln>
+                  <a:noFill/>
+                </a:ln>
+                <a:solidFill>
+                  <a:schemeClr val="tx1"/>
+                </a:solidFill>
+                <a:effectLst/>
+                <a:latin typeface="Arial" panose="020B0604020202020204" pitchFamily="34" charset="0"/>
+                <a:cs typeface="Arial" panose="020B0604020202020204" pitchFamily="34" charset="0"/>
+              </a:rPr>
+              <a:t>Estas funciones se organizan en </a:t>
+            </a:r>
+            <a:r>
+              <a:rPr kumimoji="0" lang="es-CO" altLang="es-CO" sz="2000" b="1" i="0" u="none" strike="noStrike" cap="none" normalizeH="0" baseline="0" dirty="0">
+                <a:ln>
+                  <a:noFill/>
+                </a:ln>
+                <a:solidFill>
+                  <a:schemeClr val="tx1"/>
+                </a:solidFill>
+                <a:effectLst/>
+                <a:latin typeface="Arial" panose="020B0604020202020204" pitchFamily="34" charset="0"/>
+                <a:cs typeface="Arial" panose="020B0604020202020204" pitchFamily="34" charset="0"/>
+              </a:rPr>
+              <a:t>dos diccionarios</a:t>
+            </a:r>
+            <a:r>
+              <a:rPr kumimoji="0" lang="es-CO" altLang="es-CO" sz="2000" b="0" i="0" u="none" strike="noStrike" cap="none" normalizeH="0" baseline="0" dirty="0">
+                <a:ln>
+                  <a:noFill/>
+                </a:ln>
+                <a:solidFill>
+                  <a:schemeClr val="tx1"/>
+                </a:solidFill>
+                <a:effectLst/>
+                <a:latin typeface="Arial" panose="020B0604020202020204" pitchFamily="34" charset="0"/>
+                <a:cs typeface="Arial" panose="020B0604020202020204" pitchFamily="34" charset="0"/>
+              </a:rPr>
+              <a:t>:</a:t>
+            </a:r>
+          </a:p>
+          <a:p>
+            <a:pPr marL="457200" marR="0" lvl="1" indent="0" algn="l" defTabSz="914400" rtl="0" eaLnBrk="0" fontAlgn="base" latinLnBrk="0" hangingPunct="0">
+              <a:lnSpc>
+                <a:spcPct val="100000"/>
+              </a:lnSpc>
+              <a:spcBef>
+                <a:spcPct val="0"/>
+              </a:spcBef>
+              <a:spcAft>
+                <a:spcPct val="0"/>
+              </a:spcAft>
+              <a:buClrTx/>
+              <a:buSzTx/>
+              <a:buFontTx/>
+              <a:buChar char="•"/>
+              <a:tabLst/>
+            </a:pPr>
+            <a:r>
+              <a:rPr kumimoji="0" lang="es-CO" altLang="es-CO" sz="2000" b="1" i="0" u="none" strike="noStrike" cap="none" normalizeH="0" baseline="0" dirty="0">
+                <a:ln>
+                  <a:noFill/>
+                </a:ln>
+                <a:solidFill>
+                  <a:schemeClr val="tx1"/>
+                </a:solidFill>
+                <a:effectLst/>
+                <a:latin typeface="Arial" panose="020B0604020202020204" pitchFamily="34" charset="0"/>
+                <a:cs typeface="Arial" panose="020B0604020202020204" pitchFamily="34" charset="0"/>
+              </a:rPr>
+              <a:t>Operadores binarios</a:t>
+            </a:r>
+            <a:r>
+              <a:rPr kumimoji="0" lang="es-CO" altLang="es-CO" sz="2000" b="0" i="0" u="none" strike="noStrike" cap="none" normalizeH="0" baseline="0" dirty="0">
+                <a:ln>
+                  <a:noFill/>
+                </a:ln>
+                <a:solidFill>
+                  <a:schemeClr val="tx1"/>
+                </a:solidFill>
+                <a:effectLst/>
+                <a:latin typeface="Arial" panose="020B0604020202020204" pitchFamily="34" charset="0"/>
+                <a:cs typeface="Arial" panose="020B0604020202020204" pitchFamily="34" charset="0"/>
+              </a:rPr>
+              <a:t>: funciones que requieren </a:t>
+            </a:r>
+            <a:r>
+              <a:rPr kumimoji="0" lang="es-CO" altLang="es-CO" sz="2000" i="0" u="none" strike="noStrike" cap="none" normalizeH="0" baseline="0" dirty="0">
+                <a:ln>
+                  <a:noFill/>
+                </a:ln>
+                <a:solidFill>
+                  <a:schemeClr val="tx1"/>
+                </a:solidFill>
+                <a:effectLst/>
+                <a:latin typeface="Arial" panose="020B0604020202020204" pitchFamily="34" charset="0"/>
+                <a:cs typeface="Arial" panose="020B0604020202020204" pitchFamily="34" charset="0"/>
+              </a:rPr>
+              <a:t>dos operandos </a:t>
+            </a:r>
+            <a:r>
+              <a:rPr kumimoji="0" lang="es-CO" altLang="es-CO" sz="2000" b="0" i="0" u="none" strike="noStrike" cap="none" normalizeH="0" baseline="0" dirty="0">
+                <a:ln>
+                  <a:noFill/>
+                </a:ln>
+                <a:solidFill>
+                  <a:schemeClr val="tx1"/>
+                </a:solidFill>
+                <a:effectLst/>
+                <a:latin typeface="Arial" panose="020B0604020202020204" pitchFamily="34" charset="0"/>
+                <a:cs typeface="Arial" panose="020B0604020202020204" pitchFamily="34" charset="0"/>
+              </a:rPr>
+              <a:t>(ej. a + b).</a:t>
+            </a:r>
+          </a:p>
+          <a:p>
+            <a:pPr marL="457200" marR="0" lvl="1" indent="0" algn="l" defTabSz="914400" rtl="0" eaLnBrk="0" fontAlgn="base" latinLnBrk="0" hangingPunct="0">
+              <a:lnSpc>
+                <a:spcPct val="100000"/>
+              </a:lnSpc>
+              <a:spcBef>
+                <a:spcPct val="0"/>
+              </a:spcBef>
+              <a:spcAft>
+                <a:spcPct val="0"/>
+              </a:spcAft>
+              <a:buClrTx/>
+              <a:buSzTx/>
+              <a:buFontTx/>
+              <a:buChar char="•"/>
+              <a:tabLst/>
+            </a:pPr>
+            <a:r>
+              <a:rPr kumimoji="0" lang="es-CO" altLang="es-CO" sz="2000" b="1" i="0" u="none" strike="noStrike" cap="none" normalizeH="0" baseline="0" dirty="0">
+                <a:ln>
+                  <a:noFill/>
+                </a:ln>
+                <a:solidFill>
+                  <a:schemeClr val="tx1"/>
+                </a:solidFill>
+                <a:effectLst/>
+                <a:latin typeface="Arial" panose="020B0604020202020204" pitchFamily="34" charset="0"/>
+                <a:cs typeface="Arial" panose="020B0604020202020204" pitchFamily="34" charset="0"/>
+              </a:rPr>
+              <a:t>Operadores unarios</a:t>
+            </a:r>
+            <a:r>
+              <a:rPr kumimoji="0" lang="es-CO" altLang="es-CO" sz="2000" b="0" i="0" u="none" strike="noStrike" cap="none" normalizeH="0" baseline="0" dirty="0">
+                <a:ln>
+                  <a:noFill/>
+                </a:ln>
+                <a:solidFill>
+                  <a:schemeClr val="tx1"/>
+                </a:solidFill>
+                <a:effectLst/>
+                <a:latin typeface="Arial" panose="020B0604020202020204" pitchFamily="34" charset="0"/>
+                <a:cs typeface="Arial" panose="020B0604020202020204" pitchFamily="34" charset="0"/>
+              </a:rPr>
+              <a:t>: funciones que requieren </a:t>
+            </a:r>
+            <a:r>
+              <a:rPr kumimoji="0" lang="es-CO" altLang="es-CO" sz="2000" b="1" i="0" u="none" strike="noStrike" cap="none" normalizeH="0" baseline="0" dirty="0">
+                <a:ln>
+                  <a:noFill/>
+                </a:ln>
+                <a:solidFill>
+                  <a:schemeClr val="tx1"/>
+                </a:solidFill>
+                <a:effectLst/>
+                <a:latin typeface="Arial" panose="020B0604020202020204" pitchFamily="34" charset="0"/>
+                <a:cs typeface="Arial" panose="020B0604020202020204" pitchFamily="34" charset="0"/>
+              </a:rPr>
+              <a:t>un solo operando</a:t>
+            </a:r>
+            <a:r>
+              <a:rPr kumimoji="0" lang="es-CO" altLang="es-CO" sz="2000" b="0" i="0" u="none" strike="noStrike" cap="none" normalizeH="0" baseline="0" dirty="0">
+                <a:ln>
+                  <a:noFill/>
+                </a:ln>
+                <a:solidFill>
+                  <a:schemeClr val="tx1"/>
+                </a:solidFill>
+                <a:effectLst/>
+                <a:latin typeface="Arial" panose="020B0604020202020204" pitchFamily="34" charset="0"/>
+                <a:cs typeface="Arial" panose="020B0604020202020204" pitchFamily="34" charset="0"/>
+              </a:rPr>
+              <a:t> (ej. √a).</a:t>
+            </a:r>
+          </a:p>
+          <a:p>
+            <a:pPr marL="0" marR="0" lvl="0" indent="0" algn="l" defTabSz="914400" rtl="0" eaLnBrk="0" fontAlgn="base" latinLnBrk="0" hangingPunct="0">
+              <a:lnSpc>
+                <a:spcPct val="100000"/>
+              </a:lnSpc>
+              <a:spcBef>
+                <a:spcPct val="0"/>
+              </a:spcBef>
+              <a:spcAft>
+                <a:spcPct val="0"/>
+              </a:spcAft>
+              <a:buClrTx/>
+              <a:buSzTx/>
+              <a:buFontTx/>
+              <a:buChar char="•"/>
+              <a:tabLst/>
+            </a:pPr>
+            <a:r>
+              <a:rPr kumimoji="0" lang="es-CO" altLang="es-CO" sz="2000" b="0" i="0" u="none" strike="noStrike" cap="none" normalizeH="0" baseline="0" dirty="0">
+                <a:ln>
+                  <a:noFill/>
+                </a:ln>
+                <a:solidFill>
+                  <a:schemeClr val="tx1"/>
+                </a:solidFill>
+                <a:effectLst/>
+                <a:latin typeface="Arial" panose="020B0604020202020204" pitchFamily="34" charset="0"/>
+                <a:cs typeface="Arial" panose="020B0604020202020204" pitchFamily="34" charset="0"/>
+              </a:rPr>
+              <a:t>Asociar un </a:t>
+            </a:r>
+            <a:r>
+              <a:rPr kumimoji="0" lang="es-CO" altLang="es-CO" sz="2000" b="1" i="0" u="none" strike="noStrike" cap="none" normalizeH="0" baseline="0" dirty="0">
+                <a:ln>
+                  <a:noFill/>
+                </a:ln>
+                <a:solidFill>
+                  <a:schemeClr val="tx1"/>
+                </a:solidFill>
+                <a:effectLst/>
+                <a:latin typeface="Arial" panose="020B0604020202020204" pitchFamily="34" charset="0"/>
+                <a:cs typeface="Arial" panose="020B0604020202020204" pitchFamily="34" charset="0"/>
+              </a:rPr>
+              <a:t>símbolo</a:t>
+            </a:r>
+            <a:r>
+              <a:rPr kumimoji="0" lang="es-CO" altLang="es-CO" sz="2000" b="0" i="0" u="none" strike="noStrike" cap="none" normalizeH="0" baseline="0" dirty="0">
+                <a:ln>
+                  <a:noFill/>
+                </a:ln>
+                <a:solidFill>
+                  <a:schemeClr val="tx1"/>
+                </a:solidFill>
+                <a:effectLst/>
+                <a:latin typeface="Arial" panose="020B0604020202020204" pitchFamily="34" charset="0"/>
+                <a:cs typeface="Arial" panose="020B0604020202020204" pitchFamily="34" charset="0"/>
+              </a:rPr>
+              <a:t> (+, -, √) a una función permite invocarla de manera sencilla y flexible en la implementación de la calculadora.</a:t>
+            </a:r>
+          </a:p>
+          <a:p>
+            <a:pPr marL="0" marR="0" lvl="0" indent="0" algn="l" defTabSz="914400" rtl="0" eaLnBrk="0" fontAlgn="base" latinLnBrk="0" hangingPunct="0">
+              <a:lnSpc>
+                <a:spcPct val="100000"/>
+              </a:lnSpc>
+              <a:spcBef>
+                <a:spcPct val="0"/>
+              </a:spcBef>
+              <a:spcAft>
+                <a:spcPct val="0"/>
+              </a:spcAft>
+              <a:buClrTx/>
+              <a:buSzTx/>
+              <a:buFontTx/>
+              <a:buNone/>
+              <a:tabLst/>
+            </a:pPr>
+            <a:endParaRPr kumimoji="0" lang="es-CO" altLang="es-CO" sz="2000" b="0" i="0" u="none" strike="noStrike" cap="none" normalizeH="0" baseline="0" dirty="0">
+              <a:ln>
+                <a:noFill/>
+              </a:ln>
+              <a:solidFill>
+                <a:schemeClr val="tx1"/>
+              </a:solidFill>
+              <a:effectLst/>
+              <a:latin typeface="Arial" panose="020B0604020202020204" pitchFamily="34" charset="0"/>
+              <a:cs typeface="Arial" panose="020B0604020202020204" pitchFamily="34" charset="0"/>
+            </a:endParaRPr>
+          </a:p>
+        </p:txBody>
+      </p:sp>
+    </p:spTree>
+    <p:extLst>
+      <p:ext uri="{BB962C8B-B14F-4D97-AF65-F5344CB8AC3E}">
+        <p14:creationId xmlns:p14="http://schemas.microsoft.com/office/powerpoint/2010/main" val="3526029113"/>
+      </p:ext>
+    </p:extLst>
+  </p:cSld>
+  <p:clrMapOvr>
+    <a:masterClrMapping/>
+  </p:clrMapOvr>
+</p:sld>
+</file>
+
+<file path=ppt/slides/slide9.xml><?xml version="1.0" encoding="utf-8"?>
+<p:sld xmlns:a="http://schemas.openxmlformats.org/drawingml/2006/main" xmlns:r="http://schemas.openxmlformats.org/officeDocument/2006/relationships" xmlns:p="http://schemas.openxmlformats.org/presentationml/2006/main">
+  <p:cSld>
+    <p:spTree>
+      <p:nvGrpSpPr>
+        <p:cNvPr id="1" name=""/>
+        <p:cNvGrpSpPr/>
+        <p:nvPr/>
+      </p:nvGrpSpPr>
+      <p:grpSpPr>
+        <a:xfrm>
+          <a:off x="0" y="0"/>
+          <a:ext cx="0" cy="0"/>
+          <a:chOff x="0" y="0"/>
+          <a:chExt cx="0" cy="0"/>
+        </a:xfrm>
+      </p:grpSpPr>
+      <p:pic>
+        <p:nvPicPr>
+          <p:cNvPr id="5122" name="Picture 2" descr="Cómo hacer una calculadora en Python – Diagrama de Clases">
+            <a:extLst>
+              <a:ext uri="{FF2B5EF4-FFF2-40B4-BE49-F238E27FC236}">
+                <a16:creationId xmlns:a16="http://schemas.microsoft.com/office/drawing/2014/main" id="{538D7BB9-DE06-47A5-899D-55100EDEBDC8}"/>
+              </a:ext>
+            </a:extLst>
+          </p:cNvPr>
+          <p:cNvPicPr>
+            <a:picLocks noChangeAspect="1" noChangeArrowheads="1"/>
+          </p:cNvPicPr>
+          <p:nvPr/>
+        </p:nvPicPr>
+        <p:blipFill>
+          <a:blip r:embed="rId2">
+            <a:extLst>
+              <a:ext uri="{28A0092B-C50C-407E-A947-70E740481C1C}">
+                <a14:useLocalDpi xmlns:a14="http://schemas.microsoft.com/office/drawing/2010/main" val="0"/>
+              </a:ext>
+            </a:extLst>
+          </a:blip>
+          <a:srcRect/>
+          <a:stretch>
+            <a:fillRect/>
+          </a:stretch>
+        </p:blipFill>
+        <p:spPr bwMode="auto">
+          <a:xfrm>
+            <a:off x="793897" y="0"/>
+            <a:ext cx="10887431" cy="6847174"/>
+          </a:xfrm>
+          <a:prstGeom prst="rect">
+            <a:avLst/>
+          </a:prstGeom>
+          <a:noFill/>
+          <a:extLst>
+            <a:ext uri="{909E8E84-426E-40DD-AFC4-6F175D3DCCD1}">
+              <a14:hiddenFill xmlns:a14="http://schemas.microsoft.com/office/drawing/2010/main">
+                <a:solidFill>
+                  <a:srgbClr val="FFFFFF"/>
+                </a:solidFill>
+              </a14:hiddenFill>
+            </a:ext>
+          </a:extLst>
+        </p:spPr>
+      </p:pic>
+      <p:sp>
+        <p:nvSpPr>
+          <p:cNvPr id="4" name="CuadroTexto 3">
+            <a:extLst>
+              <a:ext uri="{FF2B5EF4-FFF2-40B4-BE49-F238E27FC236}">
+                <a16:creationId xmlns:a16="http://schemas.microsoft.com/office/drawing/2014/main" id="{20C4A5F7-8CAB-4D1C-9EA6-531B40E931FA}"/>
+              </a:ext>
+            </a:extLst>
+          </p:cNvPr>
+          <p:cNvSpPr txBox="1"/>
+          <p:nvPr/>
+        </p:nvSpPr>
+        <p:spPr>
+          <a:xfrm>
+            <a:off x="1285461" y="199647"/>
+            <a:ext cx="2252870" cy="2215991"/>
+          </a:xfrm>
+          <a:prstGeom prst="rect">
+            <a:avLst/>
+          </a:prstGeom>
+          <a:noFill/>
+        </p:spPr>
+        <p:txBody>
+          <a:bodyPr wrap="square">
+            <a:spAutoFit/>
+          </a:bodyPr>
+          <a:lstStyle/>
+          <a:p>
+            <a:r>
+              <a:rPr lang="es-CO" sz="13800" dirty="0"/>
+              <a:t>✔️</a:t>
+            </a:r>
+          </a:p>
+        </p:txBody>
+      </p:sp>
+    </p:spTree>
+    <p:extLst>
+      <p:ext uri="{BB962C8B-B14F-4D97-AF65-F5344CB8AC3E}">
+        <p14:creationId xmlns:p14="http://schemas.microsoft.com/office/powerpoint/2010/main" val="3603392075"/>
       </p:ext>
     </p:extLst>
   </p:cSld>
